--- a/docs/DSR-II2026_JL_slides.pptx
+++ b/docs/DSR-II2026_JL_slides.pptx
@@ -7,10 +7,10 @@
     <p:sldMasterId id="2147483661" r:id="rId3"/>
   </p:sldMasterIdLst>
   <p:notesMasterIdLst>
-    <p:notesMasterId r:id="rId48"/>
+    <p:notesMasterId r:id="rId52"/>
   </p:notesMasterIdLst>
   <p:handoutMasterIdLst>
-    <p:handoutMasterId r:id="rId49"/>
+    <p:handoutMasterId r:id="rId53"/>
   </p:handoutMasterIdLst>
   <p:sldIdLst>
     <p:sldId id="803" r:id="rId4"/>
@@ -44,22 +44,26 @@
     <p:sldId id="1393" r:id="rId32"/>
     <p:sldId id="1394" r:id="rId33"/>
     <p:sldId id="1395" r:id="rId34"/>
-    <p:sldId id="1376" r:id="rId35"/>
-    <p:sldId id="1379" r:id="rId36"/>
-    <p:sldId id="1377" r:id="rId37"/>
-    <p:sldId id="1380" r:id="rId38"/>
-    <p:sldId id="1397" r:id="rId39"/>
-    <p:sldId id="1378" r:id="rId40"/>
-    <p:sldId id="1357" r:id="rId41"/>
-    <p:sldId id="1327" r:id="rId42"/>
-    <p:sldId id="1329" r:id="rId43"/>
-    <p:sldId id="1328" r:id="rId44"/>
-    <p:sldId id="1396" r:id="rId45"/>
-    <p:sldId id="1383" r:id="rId46"/>
-    <p:sldId id="1067" r:id="rId47"/>
+    <p:sldId id="1398" r:id="rId35"/>
+    <p:sldId id="1399" r:id="rId36"/>
+    <p:sldId id="1400" r:id="rId37"/>
+    <p:sldId id="1401" r:id="rId38"/>
+    <p:sldId id="1376" r:id="rId39"/>
+    <p:sldId id="1379" r:id="rId40"/>
+    <p:sldId id="1377" r:id="rId41"/>
+    <p:sldId id="1380" r:id="rId42"/>
+    <p:sldId id="1397" r:id="rId43"/>
+    <p:sldId id="1378" r:id="rId44"/>
+    <p:sldId id="1357" r:id="rId45"/>
+    <p:sldId id="1327" r:id="rId46"/>
+    <p:sldId id="1329" r:id="rId47"/>
+    <p:sldId id="1328" r:id="rId48"/>
+    <p:sldId id="1396" r:id="rId49"/>
+    <p:sldId id="1383" r:id="rId50"/>
+    <p:sldId id="1067" r:id="rId51"/>
   </p:sldIdLst>
   <p:sldSz cx="12192000" cy="6858000"/>
-  <p:notesSz cx="6811963" cy="9942513"/>
+  <p:notesSz cx="6669088" cy="9926638"/>
   <p:defaultTextStyle>
     <a:defPPr>
       <a:defRPr lang="pt-PT"/>
@@ -193,7 +197,7 @@
             <a:srgbClr val="A4A3A4"/>
           </p15:clr>
         </p15:guide>
-        <p15:guide id="2" pos="5337" userDrawn="1">
+        <p15:guide id="2" pos="6970" userDrawn="1">
           <p15:clr>
             <a:srgbClr val="A4A3A4"/>
           </p15:clr>
@@ -202,12 +206,12 @@
     </p:ext>
     <p:ext uri="{2D200454-40CA-4A62-9FC3-DE9A4176ACB9}">
       <p15:notesGuideLst xmlns:p15="http://schemas.microsoft.com/office/powerpoint/2012/main">
-        <p15:guide id="1" orient="horz" pos="3132">
+        <p15:guide id="1" orient="horz" pos="3127" userDrawn="1">
           <p15:clr>
             <a:srgbClr val="A4A3A4"/>
           </p15:clr>
         </p15:guide>
-        <p15:guide id="2" pos="2146">
+        <p15:guide id="2" pos="2101" userDrawn="1">
           <p15:clr>
             <a:srgbClr val="A4A3A4"/>
           </p15:clr>
@@ -255,8 +259,8 @@
         </p:nvSpPr>
         <p:spPr bwMode="auto">
           <a:xfrm>
-            <a:off x="0" y="0"/>
-            <a:ext cx="2951851" cy="497760"/>
+            <a:off x="1" y="0"/>
+            <a:ext cx="2889938" cy="496965"/>
           </a:xfrm>
           <a:prstGeom prst="rect">
             <a:avLst/>
@@ -271,7 +275,7 @@
           <a:effectLst/>
         </p:spPr>
         <p:txBody>
-          <a:bodyPr vert="horz" wrap="square" lIns="91111" tIns="45555" rIns="91111" bIns="45555" numCol="1" anchor="t" anchorCtr="0" compatLnSpc="1">
+          <a:bodyPr vert="horz" wrap="square" lIns="90245" tIns="45122" rIns="90245" bIns="45122" numCol="1" anchor="t" anchorCtr="0" compatLnSpc="1">
             <a:prstTxWarp prst="textNoShape">
               <a:avLst/>
             </a:prstTxWarp>
@@ -309,8 +313,8 @@
         </p:nvSpPr>
         <p:spPr bwMode="auto">
           <a:xfrm>
-            <a:off x="3858536" y="0"/>
-            <a:ext cx="2951851" cy="497760"/>
+            <a:off x="3777607" y="0"/>
+            <a:ext cx="2889938" cy="496965"/>
           </a:xfrm>
           <a:prstGeom prst="rect">
             <a:avLst/>
@@ -325,7 +329,7 @@
           <a:effectLst/>
         </p:spPr>
         <p:txBody>
-          <a:bodyPr vert="horz" wrap="square" lIns="91111" tIns="45555" rIns="91111" bIns="45555" numCol="1" anchor="t" anchorCtr="0" compatLnSpc="1">
+          <a:bodyPr vert="horz" wrap="square" lIns="90245" tIns="45122" rIns="90245" bIns="45122" numCol="1" anchor="t" anchorCtr="0" compatLnSpc="1">
             <a:prstTxWarp prst="textNoShape">
               <a:avLst/>
             </a:prstTxWarp>
@@ -363,8 +367,8 @@
         </p:nvSpPr>
         <p:spPr bwMode="auto">
           <a:xfrm>
-            <a:off x="0" y="9443169"/>
-            <a:ext cx="2951851" cy="497760"/>
+            <a:off x="1" y="9428091"/>
+            <a:ext cx="2889938" cy="496965"/>
           </a:xfrm>
           <a:prstGeom prst="rect">
             <a:avLst/>
@@ -379,7 +383,7 @@
           <a:effectLst/>
         </p:spPr>
         <p:txBody>
-          <a:bodyPr vert="horz" wrap="square" lIns="91111" tIns="45555" rIns="91111" bIns="45555" numCol="1" anchor="b" anchorCtr="0" compatLnSpc="1">
+          <a:bodyPr vert="horz" wrap="square" lIns="90245" tIns="45122" rIns="90245" bIns="45122" numCol="1" anchor="b" anchorCtr="0" compatLnSpc="1">
             <a:prstTxWarp prst="textNoShape">
               <a:avLst/>
             </a:prstTxWarp>
@@ -417,8 +421,8 @@
         </p:nvSpPr>
         <p:spPr bwMode="auto">
           <a:xfrm>
-            <a:off x="3858536" y="9443169"/>
-            <a:ext cx="2951851" cy="497760"/>
+            <a:off x="3777607" y="9428091"/>
+            <a:ext cx="2889938" cy="496965"/>
           </a:xfrm>
           <a:prstGeom prst="rect">
             <a:avLst/>
@@ -433,7 +437,7 @@
           <a:effectLst/>
         </p:spPr>
         <p:txBody>
-          <a:bodyPr vert="horz" wrap="square" lIns="91111" tIns="45555" rIns="91111" bIns="45555" numCol="1" anchor="b" anchorCtr="0" compatLnSpc="1">
+          <a:bodyPr vert="horz" wrap="square" lIns="90245" tIns="45122" rIns="90245" bIns="45122" numCol="1" anchor="b" anchorCtr="0" compatLnSpc="1">
             <a:prstTxWarp prst="textNoShape">
               <a:avLst/>
             </a:prstTxWarp>
@@ -514,8 +518,8 @@
         </p:nvSpPr>
         <p:spPr bwMode="auto">
           <a:xfrm>
-            <a:off x="0" y="0"/>
-            <a:ext cx="2951851" cy="497760"/>
+            <a:off x="1" y="0"/>
+            <a:ext cx="2889938" cy="496965"/>
           </a:xfrm>
           <a:prstGeom prst="rect">
             <a:avLst/>
@@ -530,7 +534,7 @@
           <a:effectLst/>
         </p:spPr>
         <p:txBody>
-          <a:bodyPr vert="horz" wrap="square" lIns="91111" tIns="45555" rIns="91111" bIns="45555" numCol="1" anchor="t" anchorCtr="0" compatLnSpc="1">
+          <a:bodyPr vert="horz" wrap="square" lIns="90245" tIns="45122" rIns="90245" bIns="45122" numCol="1" anchor="t" anchorCtr="0" compatLnSpc="1">
             <a:prstTxWarp prst="textNoShape">
               <a:avLst/>
             </a:prstTxWarp>
@@ -568,8 +572,8 @@
         </p:nvSpPr>
         <p:spPr bwMode="auto">
           <a:xfrm>
-            <a:off x="3858536" y="0"/>
-            <a:ext cx="2951851" cy="497760"/>
+            <a:off x="3777607" y="0"/>
+            <a:ext cx="2889938" cy="496965"/>
           </a:xfrm>
           <a:prstGeom prst="rect">
             <a:avLst/>
@@ -584,7 +588,7 @@
           <a:effectLst/>
         </p:spPr>
         <p:txBody>
-          <a:bodyPr vert="horz" wrap="square" lIns="91111" tIns="45555" rIns="91111" bIns="45555" numCol="1" anchor="t" anchorCtr="0" compatLnSpc="1">
+          <a:bodyPr vert="horz" wrap="square" lIns="90245" tIns="45122" rIns="90245" bIns="45122" numCol="1" anchor="t" anchorCtr="0" compatLnSpc="1">
             <a:prstTxWarp prst="textNoShape">
               <a:avLst/>
             </a:prstTxWarp>
@@ -622,8 +626,8 @@
         </p:nvSpPr>
         <p:spPr bwMode="auto">
           <a:xfrm>
-            <a:off x="92075" y="744538"/>
-            <a:ext cx="6627813" cy="3729037"/>
+            <a:off x="25400" y="742950"/>
+            <a:ext cx="6618288" cy="3724275"/>
           </a:xfrm>
           <a:prstGeom prst="rect">
             <a:avLst/>
@@ -651,8 +655,8 @@
         </p:nvSpPr>
         <p:spPr bwMode="auto">
           <a:xfrm>
-            <a:off x="681197" y="4722377"/>
-            <a:ext cx="5449570" cy="4475081"/>
+            <a:off x="666909" y="4714837"/>
+            <a:ext cx="5335270" cy="4467936"/>
           </a:xfrm>
           <a:prstGeom prst="rect">
             <a:avLst/>
@@ -667,7 +671,7 @@
           <a:effectLst/>
         </p:spPr>
         <p:txBody>
-          <a:bodyPr vert="horz" wrap="square" lIns="91111" tIns="45555" rIns="91111" bIns="45555" numCol="1" anchor="t" anchorCtr="0" compatLnSpc="1">
+          <a:bodyPr vert="horz" wrap="square" lIns="90245" tIns="45122" rIns="90245" bIns="45122" numCol="1" anchor="t" anchorCtr="0" compatLnSpc="1">
             <a:prstTxWarp prst="textNoShape">
               <a:avLst/>
             </a:prstTxWarp>
@@ -722,8 +726,8 @@
         </p:nvSpPr>
         <p:spPr bwMode="auto">
           <a:xfrm>
-            <a:off x="0" y="9443169"/>
-            <a:ext cx="2951851" cy="497760"/>
+            <a:off x="1" y="9428091"/>
+            <a:ext cx="2889938" cy="496965"/>
           </a:xfrm>
           <a:prstGeom prst="rect">
             <a:avLst/>
@@ -738,7 +742,7 @@
           <a:effectLst/>
         </p:spPr>
         <p:txBody>
-          <a:bodyPr vert="horz" wrap="square" lIns="91111" tIns="45555" rIns="91111" bIns="45555" numCol="1" anchor="b" anchorCtr="0" compatLnSpc="1">
+          <a:bodyPr vert="horz" wrap="square" lIns="90245" tIns="45122" rIns="90245" bIns="45122" numCol="1" anchor="b" anchorCtr="0" compatLnSpc="1">
             <a:prstTxWarp prst="textNoShape">
               <a:avLst/>
             </a:prstTxWarp>
@@ -776,8 +780,8 @@
         </p:nvSpPr>
         <p:spPr bwMode="auto">
           <a:xfrm>
-            <a:off x="3858536" y="9443169"/>
-            <a:ext cx="2951851" cy="497760"/>
+            <a:off x="3777607" y="9428091"/>
+            <a:ext cx="2889938" cy="496965"/>
           </a:xfrm>
           <a:prstGeom prst="rect">
             <a:avLst/>
@@ -792,7 +796,7 @@
           <a:effectLst/>
         </p:spPr>
         <p:txBody>
-          <a:bodyPr vert="horz" wrap="square" lIns="91111" tIns="45555" rIns="91111" bIns="45555" numCol="1" anchor="b" anchorCtr="0" compatLnSpc="1">
+          <a:bodyPr vert="horz" wrap="square" lIns="90245" tIns="45122" rIns="90245" bIns="45122" numCol="1" anchor="b" anchorCtr="0" compatLnSpc="1">
             <a:prstTxWarp prst="textNoShape">
               <a:avLst/>
             </a:prstTxWarp>
@@ -1013,8 +1017,8 @@
         </p:nvSpPr>
         <p:spPr>
           <a:xfrm>
-            <a:off x="92075" y="744538"/>
-            <a:ext cx="6627813" cy="3729037"/>
+            <a:off x="25400" y="742950"/>
+            <a:ext cx="6618288" cy="3724275"/>
           </a:xfrm>
           <a:ln/>
         </p:spPr>
@@ -1105,8 +1109,8 @@
         </p:nvSpPr>
         <p:spPr>
           <a:xfrm>
-            <a:off x="92075" y="744538"/>
-            <a:ext cx="6627813" cy="3729037"/>
+            <a:off x="25400" y="742950"/>
+            <a:ext cx="6618288" cy="3724275"/>
           </a:xfrm>
           <a:ln/>
         </p:spPr>
@@ -1266,8 +1270,8 @@
         </p:nvSpPr>
         <p:spPr>
           <a:xfrm>
-            <a:off x="92075" y="744538"/>
-            <a:ext cx="6627813" cy="3729037"/>
+            <a:off x="25400" y="742950"/>
+            <a:ext cx="6618288" cy="3724275"/>
           </a:xfrm>
         </p:spPr>
       </p:sp>
@@ -1361,8 +1365,8 @@
         </p:nvSpPr>
         <p:spPr>
           <a:xfrm>
-            <a:off x="92075" y="744538"/>
-            <a:ext cx="6627813" cy="3729037"/>
+            <a:off x="25400" y="742950"/>
+            <a:ext cx="6618288" cy="3724275"/>
           </a:xfrm>
         </p:spPr>
       </p:sp>
@@ -1456,8 +1460,8 @@
         </p:nvSpPr>
         <p:spPr>
           <a:xfrm>
-            <a:off x="92075" y="744538"/>
-            <a:ext cx="6627813" cy="3729037"/>
+            <a:off x="25400" y="742950"/>
+            <a:ext cx="6618288" cy="3724275"/>
           </a:xfrm>
         </p:spPr>
       </p:sp>
@@ -1551,8 +1555,8 @@
         </p:nvSpPr>
         <p:spPr>
           <a:xfrm>
-            <a:off x="92075" y="744538"/>
-            <a:ext cx="6627813" cy="3729037"/>
+            <a:off x="25400" y="742950"/>
+            <a:ext cx="6618288" cy="3724275"/>
           </a:xfrm>
         </p:spPr>
       </p:sp>
@@ -1618,6 +1622,244 @@
 </file>
 
 <file path=ppt/notesSlides/notesSlide16.xml><?xml version="1.0" encoding="utf-8"?>
+<p:notes xmlns:a="http://schemas.openxmlformats.org/drawingml/2006/main" xmlns:r="http://schemas.openxmlformats.org/officeDocument/2006/relationships" xmlns:p="http://schemas.openxmlformats.org/presentationml/2006/main">
+  <p:cSld>
+    <p:spTree>
+      <p:nvGrpSpPr>
+        <p:cNvPr id="1" name="">
+          <a:extLst>
+            <a:ext uri="{FF2B5EF4-FFF2-40B4-BE49-F238E27FC236}">
+              <a16:creationId xmlns:a16="http://schemas.microsoft.com/office/drawing/2014/main" id="{8CCD2EC3-C4BB-6881-5507-E42B6B136F42}"/>
+            </a:ext>
+          </a:extLst>
+        </p:cNvPr>
+        <p:cNvGrpSpPr/>
+        <p:nvPr/>
+      </p:nvGrpSpPr>
+      <p:grpSpPr>
+        <a:xfrm>
+          <a:off x="0" y="0"/>
+          <a:ext cx="0" cy="0"/>
+          <a:chOff x="0" y="0"/>
+          <a:chExt cx="0" cy="0"/>
+        </a:xfrm>
+      </p:grpSpPr>
+      <p:sp>
+        <p:nvSpPr>
+          <p:cNvPr id="2" name="Slide Image Placeholder 1">
+            <a:extLst>
+              <a:ext uri="{FF2B5EF4-FFF2-40B4-BE49-F238E27FC236}">
+                <a16:creationId xmlns:a16="http://schemas.microsoft.com/office/drawing/2014/main" id="{1978663B-3325-6106-CACC-985D4EFC684B}"/>
+              </a:ext>
+            </a:extLst>
+          </p:cNvPr>
+          <p:cNvSpPr>
+            <a:spLocks noGrp="1" noRot="1" noChangeAspect="1"/>
+          </p:cNvSpPr>
+          <p:nvPr>
+            <p:ph type="sldImg"/>
+          </p:nvPr>
+        </p:nvSpPr>
+        <p:spPr>
+          <a:xfrm>
+            <a:off x="25400" y="742950"/>
+            <a:ext cx="6618288" cy="3724275"/>
+          </a:xfrm>
+        </p:spPr>
+      </p:sp>
+      <p:sp>
+        <p:nvSpPr>
+          <p:cNvPr id="3" name="Notes Placeholder 2">
+            <a:extLst>
+              <a:ext uri="{FF2B5EF4-FFF2-40B4-BE49-F238E27FC236}">
+                <a16:creationId xmlns:a16="http://schemas.microsoft.com/office/drawing/2014/main" id="{5DDE0070-8B3B-D76E-4A3A-2BEFF328142E}"/>
+              </a:ext>
+            </a:extLst>
+          </p:cNvPr>
+          <p:cNvSpPr>
+            <a:spLocks noGrp="1"/>
+          </p:cNvSpPr>
+          <p:nvPr>
+            <p:ph type="body" idx="1"/>
+          </p:nvPr>
+        </p:nvSpPr>
+        <p:spPr/>
+        <p:txBody>
+          <a:bodyPr/>
+          <a:lstStyle/>
+          <a:p>
+            <a:endParaRPr lang="pt-PT" dirty="0"/>
+          </a:p>
+        </p:txBody>
+      </p:sp>
+      <p:sp>
+        <p:nvSpPr>
+          <p:cNvPr id="4" name="Slide Number Placeholder 3">
+            <a:extLst>
+              <a:ext uri="{FF2B5EF4-FFF2-40B4-BE49-F238E27FC236}">
+                <a16:creationId xmlns:a16="http://schemas.microsoft.com/office/drawing/2014/main" id="{E6C78710-CCCE-0E12-419C-DAC1CE9E063A}"/>
+              </a:ext>
+            </a:extLst>
+          </p:cNvPr>
+          <p:cNvSpPr>
+            <a:spLocks noGrp="1"/>
+          </p:cNvSpPr>
+          <p:nvPr>
+            <p:ph type="sldNum" sz="quarter" idx="5"/>
+          </p:nvPr>
+        </p:nvSpPr>
+        <p:spPr/>
+        <p:txBody>
+          <a:bodyPr/>
+          <a:lstStyle/>
+          <a:p>
+            <a:pPr>
+              <a:defRPr/>
+            </a:pPr>
+            <a:fld id="{5705EB50-1723-4F02-82E6-3547F8722922}" type="slidenum">
+              <a:rPr lang="pt-PT" smtClean="0"/>
+              <a:pPr>
+                <a:defRPr/>
+              </a:pPr>
+              <a:t>32</a:t>
+            </a:fld>
+            <a:endParaRPr lang="pt-PT"/>
+          </a:p>
+        </p:txBody>
+      </p:sp>
+    </p:spTree>
+    <p:extLst>
+      <p:ext uri="{BB962C8B-B14F-4D97-AF65-F5344CB8AC3E}">
+        <p14:creationId xmlns:p14="http://schemas.microsoft.com/office/powerpoint/2010/main" val="3058715435"/>
+      </p:ext>
+    </p:extLst>
+  </p:cSld>
+  <p:clrMapOvr>
+    <a:masterClrMapping/>
+  </p:clrMapOvr>
+</p:notes>
+</file>
+
+<file path=ppt/notesSlides/notesSlide17.xml><?xml version="1.0" encoding="utf-8"?>
+<p:notes xmlns:a="http://schemas.openxmlformats.org/drawingml/2006/main" xmlns:r="http://schemas.openxmlformats.org/officeDocument/2006/relationships" xmlns:p="http://schemas.openxmlformats.org/presentationml/2006/main">
+  <p:cSld>
+    <p:spTree>
+      <p:nvGrpSpPr>
+        <p:cNvPr id="1" name="">
+          <a:extLst>
+            <a:ext uri="{FF2B5EF4-FFF2-40B4-BE49-F238E27FC236}">
+              <a16:creationId xmlns:a16="http://schemas.microsoft.com/office/drawing/2014/main" id="{85E3FECE-412F-3B5F-FFD8-13E949BF0DFA}"/>
+            </a:ext>
+          </a:extLst>
+        </p:cNvPr>
+        <p:cNvGrpSpPr/>
+        <p:nvPr/>
+      </p:nvGrpSpPr>
+      <p:grpSpPr>
+        <a:xfrm>
+          <a:off x="0" y="0"/>
+          <a:ext cx="0" cy="0"/>
+          <a:chOff x="0" y="0"/>
+          <a:chExt cx="0" cy="0"/>
+        </a:xfrm>
+      </p:grpSpPr>
+      <p:sp>
+        <p:nvSpPr>
+          <p:cNvPr id="2" name="Slide Image Placeholder 1">
+            <a:extLst>
+              <a:ext uri="{FF2B5EF4-FFF2-40B4-BE49-F238E27FC236}">
+                <a16:creationId xmlns:a16="http://schemas.microsoft.com/office/drawing/2014/main" id="{6F4AFC8E-C1DB-4081-3E60-298F67705BF2}"/>
+              </a:ext>
+            </a:extLst>
+          </p:cNvPr>
+          <p:cNvSpPr>
+            <a:spLocks noGrp="1" noRot="1" noChangeAspect="1"/>
+          </p:cNvSpPr>
+          <p:nvPr>
+            <p:ph type="sldImg"/>
+          </p:nvPr>
+        </p:nvSpPr>
+        <p:spPr>
+          <a:xfrm>
+            <a:off x="25400" y="742950"/>
+            <a:ext cx="6618288" cy="3724275"/>
+          </a:xfrm>
+        </p:spPr>
+      </p:sp>
+      <p:sp>
+        <p:nvSpPr>
+          <p:cNvPr id="3" name="Notes Placeholder 2">
+            <a:extLst>
+              <a:ext uri="{FF2B5EF4-FFF2-40B4-BE49-F238E27FC236}">
+                <a16:creationId xmlns:a16="http://schemas.microsoft.com/office/drawing/2014/main" id="{C9E89A6E-0204-8BE2-C807-33474B9EAAF4}"/>
+              </a:ext>
+            </a:extLst>
+          </p:cNvPr>
+          <p:cNvSpPr>
+            <a:spLocks noGrp="1"/>
+          </p:cNvSpPr>
+          <p:nvPr>
+            <p:ph type="body" idx="1"/>
+          </p:nvPr>
+        </p:nvSpPr>
+        <p:spPr/>
+        <p:txBody>
+          <a:bodyPr/>
+          <a:lstStyle/>
+          <a:p>
+            <a:endParaRPr lang="pt-PT" dirty="0"/>
+          </a:p>
+        </p:txBody>
+      </p:sp>
+      <p:sp>
+        <p:nvSpPr>
+          <p:cNvPr id="4" name="Slide Number Placeholder 3">
+            <a:extLst>
+              <a:ext uri="{FF2B5EF4-FFF2-40B4-BE49-F238E27FC236}">
+                <a16:creationId xmlns:a16="http://schemas.microsoft.com/office/drawing/2014/main" id="{9DA43B54-FE54-3046-3423-85E0CB5D7296}"/>
+              </a:ext>
+            </a:extLst>
+          </p:cNvPr>
+          <p:cNvSpPr>
+            <a:spLocks noGrp="1"/>
+          </p:cNvSpPr>
+          <p:nvPr>
+            <p:ph type="sldNum" sz="quarter" idx="5"/>
+          </p:nvPr>
+        </p:nvSpPr>
+        <p:spPr/>
+        <p:txBody>
+          <a:bodyPr/>
+          <a:lstStyle/>
+          <a:p>
+            <a:pPr>
+              <a:defRPr/>
+            </a:pPr>
+            <a:fld id="{5705EB50-1723-4F02-82E6-3547F8722922}" type="slidenum">
+              <a:rPr lang="pt-PT" smtClean="0"/>
+              <a:pPr>
+                <a:defRPr/>
+              </a:pPr>
+              <a:t>34</a:t>
+            </a:fld>
+            <a:endParaRPr lang="pt-PT"/>
+          </a:p>
+        </p:txBody>
+      </p:sp>
+    </p:spTree>
+    <p:extLst>
+      <p:ext uri="{BB962C8B-B14F-4D97-AF65-F5344CB8AC3E}">
+        <p14:creationId xmlns:p14="http://schemas.microsoft.com/office/powerpoint/2010/main" val="409680402"/>
+      </p:ext>
+    </p:extLst>
+  </p:cSld>
+  <p:clrMapOvr>
+    <a:masterClrMapping/>
+  </p:clrMapOvr>
+</p:notes>
+</file>
+
+<file path=ppt/notesSlides/notesSlide18.xml><?xml version="1.0" encoding="utf-8"?>
 <p:notes xmlns:a="http://schemas.openxmlformats.org/drawingml/2006/main" xmlns:r="http://schemas.openxmlformats.org/officeDocument/2006/relationships" xmlns:p="http://schemas.openxmlformats.org/presentationml/2006/main">
   <p:cSld>
     <p:spTree>
@@ -1646,8 +1888,8 @@
         </p:nvSpPr>
         <p:spPr>
           <a:xfrm>
-            <a:off x="92075" y="744538"/>
-            <a:ext cx="6627813" cy="3729037"/>
+            <a:off x="25400" y="742950"/>
+            <a:ext cx="6618288" cy="3724275"/>
           </a:xfrm>
         </p:spPr>
       </p:sp>
@@ -1693,7 +1935,7 @@
               <a:pPr>
                 <a:defRPr/>
               </a:pPr>
-              <a:t>34</a:t>
+              <a:t>38</a:t>
             </a:fld>
             <a:endParaRPr lang="pt-PT"/>
           </a:p>
@@ -1712,7 +1954,7 @@
 </p:notes>
 </file>
 
-<file path=ppt/notesSlides/notesSlide17.xml><?xml version="1.0" encoding="utf-8"?>
+<file path=ppt/notesSlides/notesSlide19.xml><?xml version="1.0" encoding="utf-8"?>
 <p:notes xmlns:a="http://schemas.openxmlformats.org/drawingml/2006/main" xmlns:r="http://schemas.openxmlformats.org/officeDocument/2006/relationships" xmlns:p="http://schemas.openxmlformats.org/presentationml/2006/main">
   <p:cSld>
     <p:spTree>
@@ -1753,8 +1995,8 @@
         </p:nvSpPr>
         <p:spPr>
           <a:xfrm>
-            <a:off x="92075" y="744538"/>
-            <a:ext cx="6627813" cy="3729037"/>
+            <a:off x="25400" y="742950"/>
+            <a:ext cx="6618288" cy="3724275"/>
           </a:xfrm>
         </p:spPr>
       </p:sp>
@@ -1812,7 +2054,7 @@
               <a:pPr>
                 <a:defRPr/>
               </a:pPr>
-              <a:t>35</a:t>
+              <a:t>39</a:t>
             </a:fld>
             <a:endParaRPr lang="pt-PT"/>
           </a:p>
@@ -1822,101 +2064,6 @@
     <p:extLst>
       <p:ext uri="{BB962C8B-B14F-4D97-AF65-F5344CB8AC3E}">
         <p14:creationId xmlns:p14="http://schemas.microsoft.com/office/powerpoint/2010/main" val="3220657529"/>
-      </p:ext>
-    </p:extLst>
-  </p:cSld>
-  <p:clrMapOvr>
-    <a:masterClrMapping/>
-  </p:clrMapOvr>
-</p:notes>
-</file>
-
-<file path=ppt/notesSlides/notesSlide18.xml><?xml version="1.0" encoding="utf-8"?>
-<p:notes xmlns:a="http://schemas.openxmlformats.org/drawingml/2006/main" xmlns:r="http://schemas.openxmlformats.org/officeDocument/2006/relationships" xmlns:p="http://schemas.openxmlformats.org/presentationml/2006/main">
-  <p:cSld>
-    <p:spTree>
-      <p:nvGrpSpPr>
-        <p:cNvPr id="1" name=""/>
-        <p:cNvGrpSpPr/>
-        <p:nvPr/>
-      </p:nvGrpSpPr>
-      <p:grpSpPr>
-        <a:xfrm>
-          <a:off x="0" y="0"/>
-          <a:ext cx="0" cy="0"/>
-          <a:chOff x="0" y="0"/>
-          <a:chExt cx="0" cy="0"/>
-        </a:xfrm>
-      </p:grpSpPr>
-      <p:sp>
-        <p:nvSpPr>
-          <p:cNvPr id="2" name="Slide Image Placeholder 1"/>
-          <p:cNvSpPr>
-            <a:spLocks noGrp="1" noRot="1" noChangeAspect="1"/>
-          </p:cNvSpPr>
-          <p:nvPr>
-            <p:ph type="sldImg"/>
-          </p:nvPr>
-        </p:nvSpPr>
-        <p:spPr>
-          <a:xfrm>
-            <a:off x="92075" y="744538"/>
-            <a:ext cx="6627813" cy="3729037"/>
-          </a:xfrm>
-        </p:spPr>
-      </p:sp>
-      <p:sp>
-        <p:nvSpPr>
-          <p:cNvPr id="3" name="Notes Placeholder 2"/>
-          <p:cNvSpPr>
-            <a:spLocks noGrp="1"/>
-          </p:cNvSpPr>
-          <p:nvPr>
-            <p:ph type="body" idx="1"/>
-          </p:nvPr>
-        </p:nvSpPr>
-        <p:spPr/>
-        <p:txBody>
-          <a:bodyPr/>
-          <a:lstStyle/>
-          <a:p>
-            <a:endParaRPr lang="pt-PT" dirty="0"/>
-          </a:p>
-        </p:txBody>
-      </p:sp>
-      <p:sp>
-        <p:nvSpPr>
-          <p:cNvPr id="4" name="Slide Number Placeholder 3"/>
-          <p:cNvSpPr>
-            <a:spLocks noGrp="1"/>
-          </p:cNvSpPr>
-          <p:nvPr>
-            <p:ph type="sldNum" sz="quarter" idx="5"/>
-          </p:nvPr>
-        </p:nvSpPr>
-        <p:spPr/>
-        <p:txBody>
-          <a:bodyPr/>
-          <a:lstStyle/>
-          <a:p>
-            <a:pPr>
-              <a:defRPr/>
-            </a:pPr>
-            <a:fld id="{5705EB50-1723-4F02-82E6-3547F8722922}" type="slidenum">
-              <a:rPr lang="pt-PT" smtClean="0"/>
-              <a:pPr>
-                <a:defRPr/>
-              </a:pPr>
-              <a:t>36</a:t>
-            </a:fld>
-            <a:endParaRPr lang="pt-PT"/>
-          </a:p>
-        </p:txBody>
-      </p:sp>
-    </p:spTree>
-    <p:extLst>
-      <p:ext uri="{BB962C8B-B14F-4D97-AF65-F5344CB8AC3E}">
-        <p14:creationId xmlns:p14="http://schemas.microsoft.com/office/powerpoint/2010/main" val="4074295571"/>
       </p:ext>
     </p:extLst>
   </p:cSld>
@@ -1981,8 +2128,8 @@
         </p:nvSpPr>
         <p:spPr>
           <a:xfrm>
-            <a:off x="92075" y="744538"/>
-            <a:ext cx="6627813" cy="3729037"/>
+            <a:off x="25400" y="742950"/>
+            <a:ext cx="6618288" cy="3724275"/>
           </a:xfrm>
           <a:ln/>
         </p:spPr>
@@ -2014,6 +2161,101 @@
     <p:extLst>
       <p:ext uri="{BB962C8B-B14F-4D97-AF65-F5344CB8AC3E}">
         <p14:creationId xmlns:p14="http://schemas.microsoft.com/office/powerpoint/2010/main" val="2237080381"/>
+      </p:ext>
+    </p:extLst>
+  </p:cSld>
+  <p:clrMapOvr>
+    <a:masterClrMapping/>
+  </p:clrMapOvr>
+</p:notes>
+</file>
+
+<file path=ppt/notesSlides/notesSlide20.xml><?xml version="1.0" encoding="utf-8"?>
+<p:notes xmlns:a="http://schemas.openxmlformats.org/drawingml/2006/main" xmlns:r="http://schemas.openxmlformats.org/officeDocument/2006/relationships" xmlns:p="http://schemas.openxmlformats.org/presentationml/2006/main">
+  <p:cSld>
+    <p:spTree>
+      <p:nvGrpSpPr>
+        <p:cNvPr id="1" name=""/>
+        <p:cNvGrpSpPr/>
+        <p:nvPr/>
+      </p:nvGrpSpPr>
+      <p:grpSpPr>
+        <a:xfrm>
+          <a:off x="0" y="0"/>
+          <a:ext cx="0" cy="0"/>
+          <a:chOff x="0" y="0"/>
+          <a:chExt cx="0" cy="0"/>
+        </a:xfrm>
+      </p:grpSpPr>
+      <p:sp>
+        <p:nvSpPr>
+          <p:cNvPr id="2" name="Slide Image Placeholder 1"/>
+          <p:cNvSpPr>
+            <a:spLocks noGrp="1" noRot="1" noChangeAspect="1"/>
+          </p:cNvSpPr>
+          <p:nvPr>
+            <p:ph type="sldImg"/>
+          </p:nvPr>
+        </p:nvSpPr>
+        <p:spPr>
+          <a:xfrm>
+            <a:off x="25400" y="742950"/>
+            <a:ext cx="6618288" cy="3724275"/>
+          </a:xfrm>
+        </p:spPr>
+      </p:sp>
+      <p:sp>
+        <p:nvSpPr>
+          <p:cNvPr id="3" name="Notes Placeholder 2"/>
+          <p:cNvSpPr>
+            <a:spLocks noGrp="1"/>
+          </p:cNvSpPr>
+          <p:nvPr>
+            <p:ph type="body" idx="1"/>
+          </p:nvPr>
+        </p:nvSpPr>
+        <p:spPr/>
+        <p:txBody>
+          <a:bodyPr/>
+          <a:lstStyle/>
+          <a:p>
+            <a:endParaRPr lang="pt-PT" dirty="0"/>
+          </a:p>
+        </p:txBody>
+      </p:sp>
+      <p:sp>
+        <p:nvSpPr>
+          <p:cNvPr id="4" name="Slide Number Placeholder 3"/>
+          <p:cNvSpPr>
+            <a:spLocks noGrp="1"/>
+          </p:cNvSpPr>
+          <p:nvPr>
+            <p:ph type="sldNum" sz="quarter" idx="5"/>
+          </p:nvPr>
+        </p:nvSpPr>
+        <p:spPr/>
+        <p:txBody>
+          <a:bodyPr/>
+          <a:lstStyle/>
+          <a:p>
+            <a:pPr>
+              <a:defRPr/>
+            </a:pPr>
+            <a:fld id="{5705EB50-1723-4F02-82E6-3547F8722922}" type="slidenum">
+              <a:rPr lang="pt-PT" smtClean="0"/>
+              <a:pPr>
+                <a:defRPr/>
+              </a:pPr>
+              <a:t>40</a:t>
+            </a:fld>
+            <a:endParaRPr lang="pt-PT"/>
+          </a:p>
+        </p:txBody>
+      </p:sp>
+    </p:spTree>
+    <p:extLst>
+      <p:ext uri="{BB962C8B-B14F-4D97-AF65-F5344CB8AC3E}">
+        <p14:creationId xmlns:p14="http://schemas.microsoft.com/office/powerpoint/2010/main" val="4074295571"/>
       </p:ext>
     </p:extLst>
   </p:cSld>
@@ -2078,8 +2320,8 @@
         </p:nvSpPr>
         <p:spPr>
           <a:xfrm>
-            <a:off x="92075" y="744538"/>
-            <a:ext cx="6627813" cy="3729037"/>
+            <a:off x="25400" y="742950"/>
+            <a:ext cx="6618288" cy="3724275"/>
           </a:xfrm>
           <a:ln/>
         </p:spPr>
@@ -2175,8 +2417,8 @@
         </p:nvSpPr>
         <p:spPr>
           <a:xfrm>
-            <a:off x="92075" y="744538"/>
-            <a:ext cx="6627813" cy="3729037"/>
+            <a:off x="25400" y="742950"/>
+            <a:ext cx="6618288" cy="3724275"/>
           </a:xfrm>
           <a:ln/>
         </p:spPr>
@@ -2267,8 +2509,8 @@
         </p:nvSpPr>
         <p:spPr>
           <a:xfrm>
-            <a:off x="92075" y="744538"/>
-            <a:ext cx="6627813" cy="3729037"/>
+            <a:off x="25400" y="742950"/>
+            <a:ext cx="6618288" cy="3724275"/>
           </a:xfrm>
           <a:ln/>
         </p:spPr>
@@ -2364,8 +2606,8 @@
         </p:nvSpPr>
         <p:spPr>
           <a:xfrm>
-            <a:off x="92075" y="744538"/>
-            <a:ext cx="6627813" cy="3729037"/>
+            <a:off x="25400" y="742950"/>
+            <a:ext cx="6618288" cy="3724275"/>
           </a:xfrm>
           <a:ln/>
         </p:spPr>
@@ -2461,8 +2703,8 @@
         </p:nvSpPr>
         <p:spPr>
           <a:xfrm>
-            <a:off x="92075" y="744538"/>
-            <a:ext cx="6627813" cy="3729037"/>
+            <a:off x="25400" y="742950"/>
+            <a:ext cx="6618288" cy="3724275"/>
           </a:xfrm>
           <a:ln/>
         </p:spPr>
@@ -2558,8 +2800,8 @@
         </p:nvSpPr>
         <p:spPr>
           <a:xfrm>
-            <a:off x="92075" y="744538"/>
-            <a:ext cx="6627813" cy="3729037"/>
+            <a:off x="25400" y="742950"/>
+            <a:ext cx="6618288" cy="3724275"/>
           </a:xfrm>
           <a:ln/>
         </p:spPr>
@@ -2655,8 +2897,8 @@
         </p:nvSpPr>
         <p:spPr>
           <a:xfrm>
-            <a:off x="92075" y="744538"/>
-            <a:ext cx="6627813" cy="3729037"/>
+            <a:off x="25400" y="742950"/>
+            <a:ext cx="6618288" cy="3724275"/>
           </a:xfrm>
           <a:ln/>
         </p:spPr>
@@ -2772,7 +3014,7 @@
           <a:p>
             <a:fld id="{C764DE79-268F-4C1A-8933-263129D2AF90}" type="datetimeFigureOut">
               <a:rPr lang="en-US" dirty="0"/>
-              <a:t>12/18/2025</a:t>
+              <a:t>2/25/2026</a:t>
             </a:fld>
             <a:endParaRPr lang="en-US" dirty="0"/>
           </a:p>
@@ -3049,7 +3291,7 @@
           <a:p>
             <a:fld id="{C764DE79-268F-4C1A-8933-263129D2AF90}" type="datetimeFigureOut">
               <a:rPr lang="en-US" dirty="0"/>
-              <a:t>12/18/2025</a:t>
+              <a:t>2/25/2026</a:t>
             </a:fld>
             <a:endParaRPr lang="en-US" dirty="0"/>
           </a:p>
@@ -3306,7 +3548,7 @@
           <a:p>
             <a:fld id="{C764DE79-268F-4C1A-8933-263129D2AF90}" type="datetimeFigureOut">
               <a:rPr lang="en-US" dirty="0"/>
-              <a:t>12/18/2025</a:t>
+              <a:t>2/25/2026</a:t>
             </a:fld>
             <a:endParaRPr lang="en-US" dirty="0"/>
           </a:p>
@@ -3476,7 +3718,7 @@
           <a:p>
             <a:fld id="{C764DE79-268F-4C1A-8933-263129D2AF90}" type="datetimeFigureOut">
               <a:rPr lang="en-US" dirty="0"/>
-              <a:t>12/18/2025</a:t>
+              <a:t>2/25/2026</a:t>
             </a:fld>
             <a:endParaRPr lang="en-US" dirty="0"/>
           </a:p>
@@ -3656,7 +3898,7 @@
           <a:p>
             <a:fld id="{C764DE79-268F-4C1A-8933-263129D2AF90}" type="datetimeFigureOut">
               <a:rPr lang="en-US" dirty="0"/>
-              <a:t>12/18/2025</a:t>
+              <a:t>2/25/2026</a:t>
             </a:fld>
             <a:endParaRPr lang="en-US" dirty="0"/>
           </a:p>
@@ -4112,7 +4354,7 @@
           <a:p>
             <a:fld id="{C764DE79-268F-4C1A-8933-263129D2AF90}" type="datetimeFigureOut">
               <a:rPr lang="en-US" dirty="0"/>
-              <a:t>12/18/2025</a:t>
+              <a:t>2/25/2026</a:t>
             </a:fld>
             <a:endParaRPr lang="en-US" dirty="0"/>
           </a:p>
@@ -4282,7 +4524,7 @@
           <a:p>
             <a:fld id="{C764DE79-268F-4C1A-8933-263129D2AF90}" type="datetimeFigureOut">
               <a:rPr lang="en-US" dirty="0"/>
-              <a:t>12/18/2025</a:t>
+              <a:t>2/25/2026</a:t>
             </a:fld>
             <a:endParaRPr lang="en-US" dirty="0"/>
           </a:p>
@@ -4528,7 +4770,7 @@
           <a:p>
             <a:fld id="{C764DE79-268F-4C1A-8933-263129D2AF90}" type="datetimeFigureOut">
               <a:rPr lang="en-US" dirty="0"/>
-              <a:t>12/18/2025</a:t>
+              <a:t>2/25/2026</a:t>
             </a:fld>
             <a:endParaRPr lang="en-US" dirty="0"/>
           </a:p>
@@ -4760,7 +5002,7 @@
           <a:p>
             <a:fld id="{C764DE79-268F-4C1A-8933-263129D2AF90}" type="datetimeFigureOut">
               <a:rPr lang="en-US" dirty="0"/>
-              <a:t>12/18/2025</a:t>
+              <a:t>2/25/2026</a:t>
             </a:fld>
             <a:endParaRPr lang="en-US" dirty="0"/>
           </a:p>
@@ -5127,7 +5369,7 @@
           <a:p>
             <a:fld id="{C764DE79-268F-4C1A-8933-263129D2AF90}" type="datetimeFigureOut">
               <a:rPr lang="en-US" dirty="0"/>
-              <a:t>12/18/2025</a:t>
+              <a:t>2/25/2026</a:t>
             </a:fld>
             <a:endParaRPr lang="en-US" dirty="0"/>
           </a:p>
@@ -5245,7 +5487,7 @@
           <a:p>
             <a:fld id="{C764DE79-268F-4C1A-8933-263129D2AF90}" type="datetimeFigureOut">
               <a:rPr lang="en-US" dirty="0"/>
-              <a:t>12/18/2025</a:t>
+              <a:t>2/25/2026</a:t>
             </a:fld>
             <a:endParaRPr lang="en-US" dirty="0"/>
           </a:p>
@@ -6588,7 +6830,7 @@
           <a:p>
             <a:fld id="{C764DE79-268F-4C1A-8933-263129D2AF90}" type="datetimeFigureOut">
               <a:rPr lang="en-US" dirty="0"/>
-              <a:t>12/18/2025</a:t>
+              <a:t>2/25/2026</a:t>
             </a:fld>
             <a:endParaRPr lang="en-US" dirty="0"/>
           </a:p>
@@ -28508,12 +28750,22 @@
             <a:r>
               <a:rPr lang="pt-PT" sz="1200" b="1" dirty="0" err="1">
                 <a:solidFill>
-                  <a:srgbClr val="7030A0"/>
-                </a:solidFill>
-                <a:latin typeface="Courier New" pitchFamily="49" charset="0"/>
-                <a:cs typeface="Courier New" pitchFamily="49" charset="0"/>
-              </a:rPr>
-              <a:t>library</a:t>
+                  <a:schemeClr val="tx1"/>
+                </a:solidFill>
+                <a:latin typeface="Courier New" pitchFamily="49" charset="0"/>
+                <a:cs typeface="Courier New" pitchFamily="49" charset="0"/>
+              </a:rPr>
+              <a:t>tb_ml</a:t>
+            </a:r>
+            <a:r>
+              <a:rPr lang="pt-PT" sz="1200" b="1" dirty="0">
+                <a:solidFill>
+                  <a:schemeClr val="tx1"/>
+                </a:solidFill>
+                <a:latin typeface="Courier New" pitchFamily="49" charset="0"/>
+                <a:cs typeface="Courier New" pitchFamily="49" charset="0"/>
+              </a:rPr>
+              <a:t> </a:t>
             </a:r>
             <a:r>
               <a:rPr lang="pt-PT" sz="1200" dirty="0">
@@ -28523,47 +28775,37 @@
                 <a:latin typeface="Courier New" pitchFamily="49" charset="0"/>
                 <a:cs typeface="Courier New" pitchFamily="49" charset="0"/>
               </a:rPr>
+              <a:t>&lt;-</a:t>
+            </a:r>
+            <a:r>
+              <a:rPr lang="pt-PT" sz="1200" b="1" dirty="0">
+                <a:solidFill>
+                  <a:schemeClr val="tx1"/>
+                </a:solidFill>
+                <a:latin typeface="Courier New" pitchFamily="49" charset="0"/>
+                <a:cs typeface="Courier New" pitchFamily="49" charset="0"/>
+              </a:rPr>
+              <a:t> </a:t>
+            </a:r>
+            <a:r>
+              <a:rPr lang="pt-PT" sz="1200" b="1" dirty="0" err="1">
+                <a:solidFill>
+                  <a:schemeClr val="tx1"/>
+                </a:solidFill>
+                <a:latin typeface="Courier New" pitchFamily="49" charset="0"/>
+                <a:cs typeface="Courier New" pitchFamily="49" charset="0"/>
+              </a:rPr>
+              <a:t>tibble</a:t>
+            </a:r>
+            <a:r>
+              <a:rPr lang="pt-PT" sz="1200" dirty="0">
+                <a:solidFill>
+                  <a:schemeClr val="tx1"/>
+                </a:solidFill>
+                <a:latin typeface="Courier New" pitchFamily="49" charset="0"/>
+                <a:cs typeface="Courier New" pitchFamily="49" charset="0"/>
+              </a:rPr>
               <a:t>(</a:t>
-            </a:r>
-            <a:r>
-              <a:rPr lang="pt-PT" sz="1200" b="1" dirty="0">
-                <a:solidFill>
-                  <a:srgbClr val="00B050"/>
-                </a:solidFill>
-                <a:latin typeface="Courier New" pitchFamily="49" charset="0"/>
-                <a:cs typeface="Courier New" pitchFamily="49" charset="0"/>
-              </a:rPr>
-              <a:t>"</a:t>
-            </a:r>
-            <a:r>
-              <a:rPr lang="pt-PT" sz="1200" b="1" dirty="0" err="1">
-                <a:solidFill>
-                  <a:srgbClr val="00B050"/>
-                </a:solidFill>
-                <a:latin typeface="Courier New" pitchFamily="49" charset="0"/>
-                <a:cs typeface="Courier New" pitchFamily="49" charset="0"/>
-              </a:rPr>
-              <a:t>rpart</a:t>
-            </a:r>
-            <a:r>
-              <a:rPr lang="pt-PT" sz="1200" b="1" dirty="0">
-                <a:solidFill>
-                  <a:srgbClr val="00B050"/>
-                </a:solidFill>
-                <a:latin typeface="Courier New" pitchFamily="49" charset="0"/>
-                <a:cs typeface="Courier New" pitchFamily="49" charset="0"/>
-              </a:rPr>
-              <a:t>"</a:t>
-            </a:r>
-            <a:r>
-              <a:rPr lang="pt-PT" sz="1200" dirty="0">
-                <a:solidFill>
-                  <a:schemeClr val="tx1"/>
-                </a:solidFill>
-                <a:latin typeface="Courier New" pitchFamily="49" charset="0"/>
-                <a:cs typeface="Courier New" pitchFamily="49" charset="0"/>
-              </a:rPr>
-              <a:t>)</a:t>
             </a:r>
           </a:p>
           <a:p>
@@ -28572,7 +28814,591 @@
                 <a:spcPts val="600"/>
               </a:spcBef>
             </a:pPr>
-            <a:endParaRPr lang="pt-PT" sz="1200" b="1" dirty="0">
+            <a:r>
+              <a:rPr lang="pt-PT" sz="1200" b="1" dirty="0">
+                <a:solidFill>
+                  <a:schemeClr val="tx1"/>
+                </a:solidFill>
+                <a:latin typeface="Courier New" pitchFamily="49" charset="0"/>
+                <a:cs typeface="Courier New" pitchFamily="49" charset="0"/>
+              </a:rPr>
+              <a:t>  x1 </a:t>
+            </a:r>
+            <a:r>
+              <a:rPr lang="pt-PT" sz="1200" dirty="0">
+                <a:solidFill>
+                  <a:schemeClr val="tx1"/>
+                </a:solidFill>
+                <a:latin typeface="Courier New" pitchFamily="49" charset="0"/>
+                <a:cs typeface="Courier New" pitchFamily="49" charset="0"/>
+              </a:rPr>
+              <a:t>=</a:t>
+            </a:r>
+            <a:r>
+              <a:rPr lang="pt-PT" sz="1200" b="1" dirty="0">
+                <a:solidFill>
+                  <a:schemeClr val="tx1"/>
+                </a:solidFill>
+                <a:latin typeface="Courier New" pitchFamily="49" charset="0"/>
+                <a:cs typeface="Courier New" pitchFamily="49" charset="0"/>
+              </a:rPr>
+              <a:t> </a:t>
+            </a:r>
+            <a:r>
+              <a:rPr lang="pt-PT" sz="1200" b="1" dirty="0" err="1">
+                <a:solidFill>
+                  <a:schemeClr val="tx1"/>
+                </a:solidFill>
+                <a:latin typeface="Courier New" pitchFamily="49" charset="0"/>
+                <a:cs typeface="Courier New" pitchFamily="49" charset="0"/>
+              </a:rPr>
+              <a:t>ceiling</a:t>
+            </a:r>
+            <a:r>
+              <a:rPr lang="pt-PT" sz="1200" dirty="0">
+                <a:solidFill>
+                  <a:schemeClr val="tx1"/>
+                </a:solidFill>
+                <a:latin typeface="Courier New" pitchFamily="49" charset="0"/>
+                <a:cs typeface="Courier New" pitchFamily="49" charset="0"/>
+              </a:rPr>
+              <a:t>(</a:t>
+            </a:r>
+            <a:r>
+              <a:rPr lang="pt-PT" sz="1200" b="1" dirty="0" err="1">
+                <a:solidFill>
+                  <a:schemeClr val="tx1"/>
+                </a:solidFill>
+                <a:latin typeface="Courier New" pitchFamily="49" charset="0"/>
+                <a:cs typeface="Courier New" pitchFamily="49" charset="0"/>
+              </a:rPr>
+              <a:t>runif</a:t>
+            </a:r>
+            <a:r>
+              <a:rPr lang="pt-PT" sz="1200" dirty="0">
+                <a:solidFill>
+                  <a:schemeClr val="tx1"/>
+                </a:solidFill>
+                <a:latin typeface="Courier New" pitchFamily="49" charset="0"/>
+                <a:cs typeface="Courier New" pitchFamily="49" charset="0"/>
+              </a:rPr>
+              <a:t>(</a:t>
+            </a:r>
+            <a:r>
+              <a:rPr lang="pt-PT" sz="1200" b="1" dirty="0">
+                <a:solidFill>
+                  <a:srgbClr val="0070C0"/>
+                </a:solidFill>
+                <a:latin typeface="Courier New" pitchFamily="49" charset="0"/>
+                <a:cs typeface="Courier New" pitchFamily="49" charset="0"/>
+              </a:rPr>
+              <a:t>20</a:t>
+            </a:r>
+            <a:r>
+              <a:rPr lang="pt-PT" sz="1200" dirty="0">
+                <a:solidFill>
+                  <a:schemeClr val="tx1"/>
+                </a:solidFill>
+                <a:latin typeface="Courier New" pitchFamily="49" charset="0"/>
+                <a:cs typeface="Courier New" pitchFamily="49" charset="0"/>
+              </a:rPr>
+              <a:t>,</a:t>
+            </a:r>
+            <a:r>
+              <a:rPr lang="pt-PT" sz="1200" b="1" dirty="0">
+                <a:solidFill>
+                  <a:schemeClr val="tx1"/>
+                </a:solidFill>
+                <a:latin typeface="Courier New" pitchFamily="49" charset="0"/>
+                <a:cs typeface="Courier New" pitchFamily="49" charset="0"/>
+              </a:rPr>
+              <a:t> min</a:t>
+            </a:r>
+            <a:r>
+              <a:rPr lang="pt-PT" sz="1200" dirty="0">
+                <a:solidFill>
+                  <a:schemeClr val="tx1"/>
+                </a:solidFill>
+                <a:latin typeface="Courier New" pitchFamily="49" charset="0"/>
+                <a:cs typeface="Courier New" pitchFamily="49" charset="0"/>
+              </a:rPr>
+              <a:t>=</a:t>
+            </a:r>
+            <a:r>
+              <a:rPr lang="pt-PT" sz="1200" b="1" dirty="0">
+                <a:solidFill>
+                  <a:srgbClr val="0070C0"/>
+                </a:solidFill>
+                <a:latin typeface="Courier New" pitchFamily="49" charset="0"/>
+                <a:cs typeface="Courier New" pitchFamily="49" charset="0"/>
+              </a:rPr>
+              <a:t>0</a:t>
+            </a:r>
+            <a:r>
+              <a:rPr lang="pt-PT" sz="1200" dirty="0">
+                <a:solidFill>
+                  <a:schemeClr val="tx1"/>
+                </a:solidFill>
+                <a:latin typeface="Courier New" pitchFamily="49" charset="0"/>
+                <a:cs typeface="Courier New" pitchFamily="49" charset="0"/>
+              </a:rPr>
+              <a:t>,</a:t>
+            </a:r>
+            <a:r>
+              <a:rPr lang="pt-PT" sz="1200" b="1" dirty="0">
+                <a:solidFill>
+                  <a:schemeClr val="tx1"/>
+                </a:solidFill>
+                <a:latin typeface="Courier New" pitchFamily="49" charset="0"/>
+                <a:cs typeface="Courier New" pitchFamily="49" charset="0"/>
+              </a:rPr>
+              <a:t> </a:t>
+            </a:r>
+            <a:r>
+              <a:rPr lang="pt-PT" sz="1200" b="1" dirty="0" err="1">
+                <a:solidFill>
+                  <a:schemeClr val="tx1"/>
+                </a:solidFill>
+                <a:latin typeface="Courier New" pitchFamily="49" charset="0"/>
+                <a:cs typeface="Courier New" pitchFamily="49" charset="0"/>
+              </a:rPr>
+              <a:t>max</a:t>
+            </a:r>
+            <a:r>
+              <a:rPr lang="pt-PT" sz="1200" dirty="0">
+                <a:solidFill>
+                  <a:schemeClr val="tx1"/>
+                </a:solidFill>
+                <a:latin typeface="Courier New" pitchFamily="49" charset="0"/>
+                <a:cs typeface="Courier New" pitchFamily="49" charset="0"/>
+              </a:rPr>
+              <a:t>=</a:t>
+            </a:r>
+            <a:r>
+              <a:rPr lang="pt-PT" sz="1200" b="1" dirty="0">
+                <a:solidFill>
+                  <a:srgbClr val="0070C0"/>
+                </a:solidFill>
+                <a:latin typeface="Courier New" pitchFamily="49" charset="0"/>
+                <a:cs typeface="Courier New" pitchFamily="49" charset="0"/>
+              </a:rPr>
+              <a:t>4</a:t>
+            </a:r>
+            <a:r>
+              <a:rPr lang="pt-PT" sz="1200" dirty="0">
+                <a:solidFill>
+                  <a:schemeClr val="tx1"/>
+                </a:solidFill>
+                <a:latin typeface="Courier New" pitchFamily="49" charset="0"/>
+                <a:cs typeface="Courier New" pitchFamily="49" charset="0"/>
+              </a:rPr>
+              <a:t>)),    </a:t>
+            </a:r>
+            <a:r>
+              <a:rPr lang="pt-PT" sz="1200" b="1" dirty="0">
+                <a:solidFill>
+                  <a:srgbClr val="00B050"/>
+                </a:solidFill>
+                <a:latin typeface="Courier New" pitchFamily="49" charset="0"/>
+                <a:cs typeface="Courier New" pitchFamily="49" charset="0"/>
+              </a:rPr>
+              <a:t>#x1 = {1, 2, 3, 4}</a:t>
+            </a:r>
+          </a:p>
+          <a:p>
+            <a:pPr algn="just">
+              <a:spcBef>
+                <a:spcPts val="600"/>
+              </a:spcBef>
+            </a:pPr>
+            <a:r>
+              <a:rPr lang="pt-PT" sz="1200" b="1" dirty="0">
+                <a:solidFill>
+                  <a:schemeClr val="tx1"/>
+                </a:solidFill>
+                <a:latin typeface="Courier New" pitchFamily="49" charset="0"/>
+                <a:cs typeface="Courier New" pitchFamily="49" charset="0"/>
+              </a:rPr>
+              <a:t>  x2 </a:t>
+            </a:r>
+            <a:r>
+              <a:rPr lang="pt-PT" sz="1200" dirty="0">
+                <a:solidFill>
+                  <a:schemeClr val="tx1"/>
+                </a:solidFill>
+                <a:latin typeface="Courier New" pitchFamily="49" charset="0"/>
+                <a:cs typeface="Courier New" pitchFamily="49" charset="0"/>
+              </a:rPr>
+              <a:t>=</a:t>
+            </a:r>
+            <a:r>
+              <a:rPr lang="pt-PT" sz="1200" b="1" dirty="0">
+                <a:solidFill>
+                  <a:schemeClr val="tx1"/>
+                </a:solidFill>
+                <a:latin typeface="Courier New" pitchFamily="49" charset="0"/>
+                <a:cs typeface="Courier New" pitchFamily="49" charset="0"/>
+              </a:rPr>
+              <a:t> </a:t>
+            </a:r>
+            <a:r>
+              <a:rPr lang="pt-PT" sz="1200" b="1" dirty="0" err="1">
+                <a:solidFill>
+                  <a:schemeClr val="tx1"/>
+                </a:solidFill>
+                <a:latin typeface="Courier New" pitchFamily="49" charset="0"/>
+                <a:cs typeface="Courier New" pitchFamily="49" charset="0"/>
+              </a:rPr>
+              <a:t>ceiling</a:t>
+            </a:r>
+            <a:r>
+              <a:rPr lang="pt-PT" sz="1200" dirty="0">
+                <a:solidFill>
+                  <a:schemeClr val="tx1"/>
+                </a:solidFill>
+                <a:latin typeface="Courier New" pitchFamily="49" charset="0"/>
+                <a:cs typeface="Courier New" pitchFamily="49" charset="0"/>
+              </a:rPr>
+              <a:t>(</a:t>
+            </a:r>
+            <a:r>
+              <a:rPr lang="pt-PT" sz="1200" b="1" dirty="0" err="1">
+                <a:solidFill>
+                  <a:schemeClr val="tx1"/>
+                </a:solidFill>
+                <a:latin typeface="Courier New" pitchFamily="49" charset="0"/>
+                <a:cs typeface="Courier New" pitchFamily="49" charset="0"/>
+              </a:rPr>
+              <a:t>runif</a:t>
+            </a:r>
+            <a:r>
+              <a:rPr lang="pt-PT" sz="1200" dirty="0">
+                <a:solidFill>
+                  <a:schemeClr val="tx1"/>
+                </a:solidFill>
+                <a:latin typeface="Courier New" pitchFamily="49" charset="0"/>
+                <a:cs typeface="Courier New" pitchFamily="49" charset="0"/>
+              </a:rPr>
+              <a:t>(</a:t>
+            </a:r>
+            <a:r>
+              <a:rPr lang="pt-PT" sz="1200" b="1" dirty="0">
+                <a:solidFill>
+                  <a:srgbClr val="0070C0"/>
+                </a:solidFill>
+                <a:latin typeface="Courier New" pitchFamily="49" charset="0"/>
+                <a:cs typeface="Courier New" pitchFamily="49" charset="0"/>
+              </a:rPr>
+              <a:t>20</a:t>
+            </a:r>
+            <a:r>
+              <a:rPr lang="pt-PT" sz="1200" dirty="0">
+                <a:solidFill>
+                  <a:schemeClr val="tx1"/>
+                </a:solidFill>
+                <a:latin typeface="Courier New" pitchFamily="49" charset="0"/>
+                <a:cs typeface="Courier New" pitchFamily="49" charset="0"/>
+              </a:rPr>
+              <a:t>,</a:t>
+            </a:r>
+            <a:r>
+              <a:rPr lang="pt-PT" sz="1200" b="1" dirty="0">
+                <a:solidFill>
+                  <a:schemeClr val="tx1"/>
+                </a:solidFill>
+                <a:latin typeface="Courier New" pitchFamily="49" charset="0"/>
+                <a:cs typeface="Courier New" pitchFamily="49" charset="0"/>
+              </a:rPr>
+              <a:t> min</a:t>
+            </a:r>
+            <a:r>
+              <a:rPr lang="pt-PT" sz="1200" dirty="0">
+                <a:solidFill>
+                  <a:schemeClr val="tx1"/>
+                </a:solidFill>
+                <a:latin typeface="Courier New" pitchFamily="49" charset="0"/>
+                <a:cs typeface="Courier New" pitchFamily="49" charset="0"/>
+              </a:rPr>
+              <a:t>=</a:t>
+            </a:r>
+            <a:r>
+              <a:rPr lang="pt-PT" sz="1200" b="1" dirty="0">
+                <a:solidFill>
+                  <a:srgbClr val="0070C0"/>
+                </a:solidFill>
+                <a:latin typeface="Courier New" pitchFamily="49" charset="0"/>
+                <a:cs typeface="Courier New" pitchFamily="49" charset="0"/>
+              </a:rPr>
+              <a:t>0</a:t>
+            </a:r>
+            <a:r>
+              <a:rPr lang="pt-PT" sz="1200" dirty="0">
+                <a:solidFill>
+                  <a:schemeClr val="tx1"/>
+                </a:solidFill>
+                <a:latin typeface="Courier New" pitchFamily="49" charset="0"/>
+                <a:cs typeface="Courier New" pitchFamily="49" charset="0"/>
+              </a:rPr>
+              <a:t>,</a:t>
+            </a:r>
+            <a:r>
+              <a:rPr lang="pt-PT" sz="1200" b="1" dirty="0">
+                <a:solidFill>
+                  <a:schemeClr val="tx1"/>
+                </a:solidFill>
+                <a:latin typeface="Courier New" pitchFamily="49" charset="0"/>
+                <a:cs typeface="Courier New" pitchFamily="49" charset="0"/>
+              </a:rPr>
+              <a:t> </a:t>
+            </a:r>
+            <a:r>
+              <a:rPr lang="pt-PT" sz="1200" b="1" dirty="0" err="1">
+                <a:solidFill>
+                  <a:schemeClr val="tx1"/>
+                </a:solidFill>
+                <a:latin typeface="Courier New" pitchFamily="49" charset="0"/>
+                <a:cs typeface="Courier New" pitchFamily="49" charset="0"/>
+              </a:rPr>
+              <a:t>max</a:t>
+            </a:r>
+            <a:r>
+              <a:rPr lang="pt-PT" sz="1200" dirty="0">
+                <a:solidFill>
+                  <a:schemeClr val="tx1"/>
+                </a:solidFill>
+                <a:latin typeface="Courier New" pitchFamily="49" charset="0"/>
+                <a:cs typeface="Courier New" pitchFamily="49" charset="0"/>
+              </a:rPr>
+              <a:t>=</a:t>
+            </a:r>
+            <a:r>
+              <a:rPr lang="pt-PT" sz="1200" b="1" dirty="0">
+                <a:solidFill>
+                  <a:srgbClr val="0070C0"/>
+                </a:solidFill>
+                <a:latin typeface="Courier New" pitchFamily="49" charset="0"/>
+                <a:cs typeface="Courier New" pitchFamily="49" charset="0"/>
+              </a:rPr>
+              <a:t>2</a:t>
+            </a:r>
+            <a:r>
+              <a:rPr lang="pt-PT" sz="1200" dirty="0">
+                <a:solidFill>
+                  <a:schemeClr val="tx1"/>
+                </a:solidFill>
+                <a:latin typeface="Courier New" pitchFamily="49" charset="0"/>
+                <a:cs typeface="Courier New" pitchFamily="49" charset="0"/>
+              </a:rPr>
+              <a:t>)),    </a:t>
+            </a:r>
+            <a:r>
+              <a:rPr lang="pt-PT" sz="1200" b="1" dirty="0">
+                <a:solidFill>
+                  <a:srgbClr val="00B050"/>
+                </a:solidFill>
+                <a:latin typeface="Courier New" pitchFamily="49" charset="0"/>
+                <a:cs typeface="Courier New" pitchFamily="49" charset="0"/>
+              </a:rPr>
+              <a:t>#x2 = {1, 2}</a:t>
+            </a:r>
+          </a:p>
+          <a:p>
+            <a:pPr algn="just">
+              <a:spcBef>
+                <a:spcPts val="600"/>
+              </a:spcBef>
+            </a:pPr>
+            <a:r>
+              <a:rPr lang="pt-PT" sz="1200" b="1" dirty="0">
+                <a:solidFill>
+                  <a:schemeClr val="tx1"/>
+                </a:solidFill>
+                <a:latin typeface="Courier New" pitchFamily="49" charset="0"/>
+                <a:cs typeface="Courier New" pitchFamily="49" charset="0"/>
+              </a:rPr>
+              <a:t>  x3 </a:t>
+            </a:r>
+            <a:r>
+              <a:rPr lang="pt-PT" sz="1200" dirty="0">
+                <a:solidFill>
+                  <a:schemeClr val="tx1"/>
+                </a:solidFill>
+                <a:latin typeface="Courier New" pitchFamily="49" charset="0"/>
+                <a:cs typeface="Courier New" pitchFamily="49" charset="0"/>
+              </a:rPr>
+              <a:t>=</a:t>
+            </a:r>
+            <a:r>
+              <a:rPr lang="pt-PT" sz="1200" b="1" dirty="0">
+                <a:solidFill>
+                  <a:schemeClr val="tx1"/>
+                </a:solidFill>
+                <a:latin typeface="Courier New" pitchFamily="49" charset="0"/>
+                <a:cs typeface="Courier New" pitchFamily="49" charset="0"/>
+              </a:rPr>
+              <a:t> </a:t>
+            </a:r>
+            <a:r>
+              <a:rPr lang="pt-PT" sz="1200" b="1" dirty="0" err="1">
+                <a:solidFill>
+                  <a:schemeClr val="tx1"/>
+                </a:solidFill>
+                <a:latin typeface="Courier New" pitchFamily="49" charset="0"/>
+                <a:cs typeface="Courier New" pitchFamily="49" charset="0"/>
+              </a:rPr>
+              <a:t>ceiling</a:t>
+            </a:r>
+            <a:r>
+              <a:rPr lang="pt-PT" sz="1200" dirty="0">
+                <a:solidFill>
+                  <a:schemeClr val="tx1"/>
+                </a:solidFill>
+                <a:latin typeface="Courier New" pitchFamily="49" charset="0"/>
+                <a:cs typeface="Courier New" pitchFamily="49" charset="0"/>
+              </a:rPr>
+              <a:t>(</a:t>
+            </a:r>
+            <a:r>
+              <a:rPr lang="pt-PT" sz="1200" b="1" dirty="0" err="1">
+                <a:solidFill>
+                  <a:schemeClr val="tx1"/>
+                </a:solidFill>
+                <a:latin typeface="Courier New" pitchFamily="49" charset="0"/>
+                <a:cs typeface="Courier New" pitchFamily="49" charset="0"/>
+              </a:rPr>
+              <a:t>runif</a:t>
+            </a:r>
+            <a:r>
+              <a:rPr lang="pt-PT" sz="1200" dirty="0">
+                <a:solidFill>
+                  <a:schemeClr val="tx1"/>
+                </a:solidFill>
+                <a:latin typeface="Courier New" pitchFamily="49" charset="0"/>
+                <a:cs typeface="Courier New" pitchFamily="49" charset="0"/>
+              </a:rPr>
+              <a:t>(</a:t>
+            </a:r>
+            <a:r>
+              <a:rPr lang="pt-PT" sz="1200" b="1" dirty="0">
+                <a:solidFill>
+                  <a:srgbClr val="0070C0"/>
+                </a:solidFill>
+                <a:latin typeface="Courier New" pitchFamily="49" charset="0"/>
+                <a:cs typeface="Courier New" pitchFamily="49" charset="0"/>
+              </a:rPr>
+              <a:t>20</a:t>
+            </a:r>
+            <a:r>
+              <a:rPr lang="pt-PT" sz="1200" dirty="0">
+                <a:solidFill>
+                  <a:schemeClr val="tx1"/>
+                </a:solidFill>
+                <a:latin typeface="Courier New" pitchFamily="49" charset="0"/>
+                <a:cs typeface="Courier New" pitchFamily="49" charset="0"/>
+              </a:rPr>
+              <a:t>,</a:t>
+            </a:r>
+            <a:r>
+              <a:rPr lang="pt-PT" sz="1200" b="1" dirty="0">
+                <a:solidFill>
+                  <a:schemeClr val="tx1"/>
+                </a:solidFill>
+                <a:latin typeface="Courier New" pitchFamily="49" charset="0"/>
+                <a:cs typeface="Courier New" pitchFamily="49" charset="0"/>
+              </a:rPr>
+              <a:t> min</a:t>
+            </a:r>
+            <a:r>
+              <a:rPr lang="pt-PT" sz="1200" dirty="0">
+                <a:solidFill>
+                  <a:schemeClr val="tx1"/>
+                </a:solidFill>
+                <a:latin typeface="Courier New" pitchFamily="49" charset="0"/>
+                <a:cs typeface="Courier New" pitchFamily="49" charset="0"/>
+              </a:rPr>
+              <a:t>=</a:t>
+            </a:r>
+            <a:r>
+              <a:rPr lang="pt-PT" sz="1200" b="1" dirty="0">
+                <a:solidFill>
+                  <a:srgbClr val="0070C0"/>
+                </a:solidFill>
+                <a:latin typeface="Courier New" pitchFamily="49" charset="0"/>
+                <a:cs typeface="Courier New" pitchFamily="49" charset="0"/>
+              </a:rPr>
+              <a:t>0</a:t>
+            </a:r>
+            <a:r>
+              <a:rPr lang="pt-PT" sz="1200" dirty="0">
+                <a:solidFill>
+                  <a:schemeClr val="tx1"/>
+                </a:solidFill>
+                <a:latin typeface="Courier New" pitchFamily="49" charset="0"/>
+                <a:cs typeface="Courier New" pitchFamily="49" charset="0"/>
+              </a:rPr>
+              <a:t>,</a:t>
+            </a:r>
+            <a:r>
+              <a:rPr lang="pt-PT" sz="1200" b="1" dirty="0">
+                <a:solidFill>
+                  <a:schemeClr val="tx1"/>
+                </a:solidFill>
+                <a:latin typeface="Courier New" pitchFamily="49" charset="0"/>
+                <a:cs typeface="Courier New" pitchFamily="49" charset="0"/>
+              </a:rPr>
+              <a:t> </a:t>
+            </a:r>
+            <a:r>
+              <a:rPr lang="pt-PT" sz="1200" b="1" dirty="0" err="1">
+                <a:solidFill>
+                  <a:schemeClr val="tx1"/>
+                </a:solidFill>
+                <a:latin typeface="Courier New" pitchFamily="49" charset="0"/>
+                <a:cs typeface="Courier New" pitchFamily="49" charset="0"/>
+              </a:rPr>
+              <a:t>max</a:t>
+            </a:r>
+            <a:r>
+              <a:rPr lang="pt-PT" sz="1200" dirty="0">
+                <a:solidFill>
+                  <a:schemeClr val="tx1"/>
+                </a:solidFill>
+                <a:latin typeface="Courier New" pitchFamily="49" charset="0"/>
+                <a:cs typeface="Courier New" pitchFamily="49" charset="0"/>
+              </a:rPr>
+              <a:t>=</a:t>
+            </a:r>
+            <a:r>
+              <a:rPr lang="pt-PT" sz="1200" b="1" dirty="0">
+                <a:solidFill>
+                  <a:srgbClr val="0070C0"/>
+                </a:solidFill>
+                <a:latin typeface="Courier New" pitchFamily="49" charset="0"/>
+                <a:cs typeface="Courier New" pitchFamily="49" charset="0"/>
+              </a:rPr>
+              <a:t>2</a:t>
+            </a:r>
+            <a:r>
+              <a:rPr lang="pt-PT" sz="1200" dirty="0">
+                <a:solidFill>
+                  <a:schemeClr val="tx1"/>
+                </a:solidFill>
+                <a:latin typeface="Courier New" pitchFamily="49" charset="0"/>
+                <a:cs typeface="Courier New" pitchFamily="49" charset="0"/>
+              </a:rPr>
+              <a:t>)),    </a:t>
+            </a:r>
+            <a:r>
+              <a:rPr lang="pt-PT" sz="1200" b="1" dirty="0">
+                <a:solidFill>
+                  <a:srgbClr val="00B050"/>
+                </a:solidFill>
+                <a:latin typeface="Courier New" pitchFamily="49" charset="0"/>
+                <a:cs typeface="Courier New" pitchFamily="49" charset="0"/>
+              </a:rPr>
+              <a:t>#x3 = {1, 2}</a:t>
+            </a:r>
+            <a:endParaRPr lang="pt-PT" sz="1200" dirty="0">
               <a:solidFill>
                 <a:schemeClr val="tx1"/>
               </a:solidFill>
@@ -28587,26 +29413,6 @@
               </a:spcBef>
             </a:pPr>
             <a:r>
-              <a:rPr lang="pt-PT" sz="1200" b="1" dirty="0" err="1">
-                <a:solidFill>
-                  <a:schemeClr val="tx1"/>
-                </a:solidFill>
-                <a:latin typeface="Courier New" pitchFamily="49" charset="0"/>
-                <a:cs typeface="Courier New" pitchFamily="49" charset="0"/>
-              </a:rPr>
-              <a:t>tb_rf</a:t>
-            </a:r>
-            <a:r>
-              <a:rPr lang="pt-PT" sz="1200" b="1" dirty="0">
-                <a:solidFill>
-                  <a:schemeClr val="tx1"/>
-                </a:solidFill>
-                <a:latin typeface="Courier New" pitchFamily="49" charset="0"/>
-                <a:cs typeface="Courier New" pitchFamily="49" charset="0"/>
-              </a:rPr>
-              <a:t> </a:t>
-            </a:r>
-            <a:r>
               <a:rPr lang="pt-PT" sz="1200" dirty="0">
                 <a:solidFill>
                   <a:schemeClr val="tx1"/>
@@ -28614,27 +29420,17 @@
                 <a:latin typeface="Courier New" pitchFamily="49" charset="0"/>
                 <a:cs typeface="Courier New" pitchFamily="49" charset="0"/>
               </a:rPr>
-              <a:t>&lt;-</a:t>
-            </a:r>
-            <a:r>
-              <a:rPr lang="pt-PT" sz="1200" b="1" dirty="0">
-                <a:solidFill>
-                  <a:schemeClr val="tx1"/>
-                </a:solidFill>
-                <a:latin typeface="Courier New" pitchFamily="49" charset="0"/>
-                <a:cs typeface="Courier New" pitchFamily="49" charset="0"/>
-              </a:rPr>
-              <a:t> </a:t>
-            </a:r>
-            <a:r>
-              <a:rPr lang="pt-PT" sz="1200" b="1" dirty="0" err="1">
-                <a:solidFill>
-                  <a:schemeClr val="tx1"/>
-                </a:solidFill>
-                <a:latin typeface="Courier New" pitchFamily="49" charset="0"/>
-                <a:cs typeface="Courier New" pitchFamily="49" charset="0"/>
-              </a:rPr>
-              <a:t>tibble</a:t>
+              <a:t>  </a:t>
+            </a:r>
+            <a:r>
+              <a:rPr lang="pt-PT" sz="1200" b="1" dirty="0">
+                <a:solidFill>
+                  <a:schemeClr val="tx1"/>
+                </a:solidFill>
+                <a:latin typeface="Courier New" pitchFamily="49" charset="0"/>
+                <a:cs typeface="Courier New" pitchFamily="49" charset="0"/>
+              </a:rPr>
+              <a:t>x</a:t>
             </a:r>
             <a:r>
               <a:rPr lang="pt-PT" sz="1200" dirty="0">
@@ -28644,7 +29440,77 @@
                 <a:latin typeface="Courier New" pitchFamily="49" charset="0"/>
                 <a:cs typeface="Courier New" pitchFamily="49" charset="0"/>
               </a:rPr>
-              <a:t>(</a:t>
+              <a:t> = </a:t>
+            </a:r>
+            <a:r>
+              <a:rPr lang="pt-PT" sz="1200" b="1" dirty="0">
+                <a:solidFill>
+                  <a:schemeClr val="tx1"/>
+                </a:solidFill>
+                <a:latin typeface="Courier New" pitchFamily="49" charset="0"/>
+                <a:cs typeface="Courier New" pitchFamily="49" charset="0"/>
+              </a:rPr>
+              <a:t>x1 </a:t>
+            </a:r>
+            <a:r>
+              <a:rPr lang="pt-PT" sz="1200" dirty="0">
+                <a:solidFill>
+                  <a:schemeClr val="tx1"/>
+                </a:solidFill>
+                <a:latin typeface="Courier New" pitchFamily="49" charset="0"/>
+                <a:cs typeface="Courier New" pitchFamily="49" charset="0"/>
+              </a:rPr>
+              <a:t>– (</a:t>
+            </a:r>
+            <a:r>
+              <a:rPr lang="pt-PT" sz="1200" b="1" dirty="0">
+                <a:solidFill>
+                  <a:schemeClr val="tx1"/>
+                </a:solidFill>
+                <a:latin typeface="Courier New" pitchFamily="49" charset="0"/>
+                <a:cs typeface="Courier New" pitchFamily="49" charset="0"/>
+              </a:rPr>
+              <a:t>x2 </a:t>
+            </a:r>
+            <a:r>
+              <a:rPr lang="pt-PT" sz="1200" dirty="0">
+                <a:solidFill>
+                  <a:schemeClr val="tx1"/>
+                </a:solidFill>
+                <a:latin typeface="Courier New" pitchFamily="49" charset="0"/>
+                <a:cs typeface="Courier New" pitchFamily="49" charset="0"/>
+              </a:rPr>
+              <a:t>+</a:t>
+            </a:r>
+            <a:r>
+              <a:rPr lang="pt-PT" sz="1200" b="1" dirty="0">
+                <a:solidFill>
+                  <a:schemeClr val="tx1"/>
+                </a:solidFill>
+                <a:latin typeface="Courier New" pitchFamily="49" charset="0"/>
+                <a:cs typeface="Courier New" pitchFamily="49" charset="0"/>
+              </a:rPr>
+              <a:t> x3</a:t>
+            </a:r>
+            <a:r>
+              <a:rPr lang="pt-PT" sz="1200" dirty="0">
+                <a:solidFill>
+                  <a:schemeClr val="tx1"/>
+                </a:solidFill>
+                <a:latin typeface="Courier New" pitchFamily="49" charset="0"/>
+                <a:cs typeface="Courier New" pitchFamily="49" charset="0"/>
+              </a:rPr>
+              <a:t>),                       </a:t>
+            </a:r>
+            <a:r>
+              <a:rPr lang="pt-PT" sz="1200" b="1" dirty="0">
+                <a:solidFill>
+                  <a:srgbClr val="00B050"/>
+                </a:solidFill>
+                <a:latin typeface="Courier New" pitchFamily="49" charset="0"/>
+                <a:cs typeface="Courier New" pitchFamily="49" charset="0"/>
+              </a:rPr>
+              <a:t>#x = {–3, -2, -1, 0, 1, 2}</a:t>
             </a:r>
           </a:p>
           <a:p>
@@ -28661,7 +29527,27 @@
                 <a:latin typeface="Courier New" pitchFamily="49" charset="0"/>
                 <a:cs typeface="Courier New" pitchFamily="49" charset="0"/>
               </a:rPr>
-              <a:t>  x1 </a:t>
+              <a:t>  </a:t>
+            </a:r>
+            <a:r>
+              <a:rPr lang="pt-PT" sz="1200" b="1" dirty="0" err="1">
+                <a:solidFill>
+                  <a:schemeClr val="tx1"/>
+                </a:solidFill>
+                <a:latin typeface="Courier New" pitchFamily="49" charset="0"/>
+                <a:cs typeface="Courier New" pitchFamily="49" charset="0"/>
+              </a:rPr>
+              <a:t>pi_y</a:t>
+            </a:r>
+            <a:r>
+              <a:rPr lang="pt-PT" sz="1200" b="1" dirty="0">
+                <a:solidFill>
+                  <a:schemeClr val="tx1"/>
+                </a:solidFill>
+                <a:latin typeface="Courier New" pitchFamily="49" charset="0"/>
+                <a:cs typeface="Courier New" pitchFamily="49" charset="0"/>
+              </a:rPr>
+              <a:t> </a:t>
             </a:r>
             <a:r>
               <a:rPr lang="pt-PT" sz="1200" dirty="0">
@@ -28691,7 +29577,7 @@
                 <a:latin typeface="Courier New" pitchFamily="49" charset="0"/>
                 <a:cs typeface="Courier New" pitchFamily="49" charset="0"/>
               </a:rPr>
-              <a:t>ceiling</a:t>
+              <a:t>exp</a:t>
             </a:r>
             <a:r>
               <a:rPr lang="pt-PT" sz="1200" dirty="0">
@@ -28704,6 +29590,66 @@
               <a:t>(</a:t>
             </a:r>
             <a:r>
+              <a:rPr lang="pt-PT" sz="1200" b="1" dirty="0">
+                <a:solidFill>
+                  <a:schemeClr val="tx1"/>
+                </a:solidFill>
+                <a:latin typeface="Courier New" pitchFamily="49" charset="0"/>
+                <a:cs typeface="Courier New" pitchFamily="49" charset="0"/>
+              </a:rPr>
+              <a:t>x</a:t>
+            </a:r>
+            <a:r>
+              <a:rPr lang="pt-PT" sz="1200" dirty="0">
+                <a:solidFill>
+                  <a:schemeClr val="tx1"/>
+                </a:solidFill>
+                <a:latin typeface="Courier New" pitchFamily="49" charset="0"/>
+                <a:cs typeface="Courier New" pitchFamily="49" charset="0"/>
+              </a:rPr>
+              <a:t>)/(</a:t>
+            </a:r>
+            <a:r>
+              <a:rPr lang="pt-PT" sz="1200" b="1" dirty="0">
+                <a:solidFill>
+                  <a:srgbClr val="0070C0"/>
+                </a:solidFill>
+                <a:latin typeface="Courier New" pitchFamily="49" charset="0"/>
+                <a:cs typeface="Courier New" pitchFamily="49" charset="0"/>
+              </a:rPr>
+              <a:t>1</a:t>
+            </a:r>
+            <a:r>
+              <a:rPr lang="pt-PT" sz="1200" b="1" dirty="0">
+                <a:solidFill>
+                  <a:schemeClr val="tx1"/>
+                </a:solidFill>
+                <a:latin typeface="Courier New" pitchFamily="49" charset="0"/>
+                <a:cs typeface="Courier New" pitchFamily="49" charset="0"/>
+              </a:rPr>
+              <a:t> </a:t>
+            </a:r>
+            <a:r>
+              <a:rPr lang="pt-PT" sz="1200" dirty="0">
+                <a:solidFill>
+                  <a:schemeClr val="tx1"/>
+                </a:solidFill>
+                <a:latin typeface="Courier New" pitchFamily="49" charset="0"/>
+                <a:cs typeface="Courier New" pitchFamily="49" charset="0"/>
+              </a:rPr>
+              <a:t>+</a:t>
+            </a:r>
+            <a:r>
+              <a:rPr lang="pt-PT" sz="1200" b="1" dirty="0">
+                <a:solidFill>
+                  <a:schemeClr val="tx1"/>
+                </a:solidFill>
+                <a:latin typeface="Courier New" pitchFamily="49" charset="0"/>
+                <a:cs typeface="Courier New" pitchFamily="49" charset="0"/>
+              </a:rPr>
+              <a:t> </a:t>
+            </a:r>
+            <a:r>
               <a:rPr lang="pt-PT" sz="1200" b="1" dirty="0" err="1">
                 <a:solidFill>
                   <a:schemeClr val="tx1"/>
@@ -28711,7 +29657,7 @@
                 <a:latin typeface="Courier New" pitchFamily="49" charset="0"/>
                 <a:cs typeface="Courier New" pitchFamily="49" charset="0"/>
               </a:rPr>
-              <a:t>runif</a:t>
+              <a:t>exp</a:t>
             </a:r>
             <a:r>
               <a:rPr lang="pt-PT" sz="1200" dirty="0">
@@ -28726,12 +29672,12 @@
             <a:r>
               <a:rPr lang="pt-PT" sz="1200" b="1" dirty="0">
                 <a:solidFill>
-                  <a:srgbClr val="0070C0"/>
-                </a:solidFill>
-                <a:latin typeface="Courier New" pitchFamily="49" charset="0"/>
-                <a:cs typeface="Courier New" pitchFamily="49" charset="0"/>
-              </a:rPr>
-              <a:t>20</a:t>
+                  <a:schemeClr val="tx1"/>
+                </a:solidFill>
+                <a:latin typeface="Courier New" pitchFamily="49" charset="0"/>
+                <a:cs typeface="Courier New" pitchFamily="49" charset="0"/>
+              </a:rPr>
+              <a:t>x</a:t>
             </a:r>
             <a:r>
               <a:rPr lang="pt-PT" sz="1200" dirty="0">
@@ -28741,97 +29687,17 @@
                 <a:latin typeface="Courier New" pitchFamily="49" charset="0"/>
                 <a:cs typeface="Courier New" pitchFamily="49" charset="0"/>
               </a:rPr>
-              <a:t>,</a:t>
-            </a:r>
-            <a:r>
-              <a:rPr lang="pt-PT" sz="1200" b="1" dirty="0">
-                <a:solidFill>
-                  <a:schemeClr val="tx1"/>
-                </a:solidFill>
-                <a:latin typeface="Courier New" pitchFamily="49" charset="0"/>
-                <a:cs typeface="Courier New" pitchFamily="49" charset="0"/>
-              </a:rPr>
-              <a:t> min</a:t>
-            </a:r>
-            <a:r>
-              <a:rPr lang="pt-PT" sz="1200" dirty="0">
-                <a:solidFill>
-                  <a:schemeClr val="tx1"/>
-                </a:solidFill>
-                <a:latin typeface="Courier New" pitchFamily="49" charset="0"/>
-                <a:cs typeface="Courier New" pitchFamily="49" charset="0"/>
-              </a:rPr>
-              <a:t>=</a:t>
-            </a:r>
-            <a:r>
-              <a:rPr lang="pt-PT" sz="1200" b="1" dirty="0">
-                <a:solidFill>
-                  <a:srgbClr val="0070C0"/>
-                </a:solidFill>
-                <a:latin typeface="Courier New" pitchFamily="49" charset="0"/>
-                <a:cs typeface="Courier New" pitchFamily="49" charset="0"/>
-              </a:rPr>
-              <a:t>0</a:t>
-            </a:r>
-            <a:r>
-              <a:rPr lang="pt-PT" sz="1200" dirty="0">
-                <a:solidFill>
-                  <a:schemeClr val="tx1"/>
-                </a:solidFill>
-                <a:latin typeface="Courier New" pitchFamily="49" charset="0"/>
-                <a:cs typeface="Courier New" pitchFamily="49" charset="0"/>
-              </a:rPr>
-              <a:t>,</a:t>
-            </a:r>
-            <a:r>
-              <a:rPr lang="pt-PT" sz="1200" b="1" dirty="0">
-                <a:solidFill>
-                  <a:schemeClr val="tx1"/>
-                </a:solidFill>
-                <a:latin typeface="Courier New" pitchFamily="49" charset="0"/>
-                <a:cs typeface="Courier New" pitchFamily="49" charset="0"/>
-              </a:rPr>
-              <a:t> </a:t>
-            </a:r>
-            <a:r>
-              <a:rPr lang="pt-PT" sz="1200" b="1" dirty="0" err="1">
-                <a:solidFill>
-                  <a:schemeClr val="tx1"/>
-                </a:solidFill>
-                <a:latin typeface="Courier New" pitchFamily="49" charset="0"/>
-                <a:cs typeface="Courier New" pitchFamily="49" charset="0"/>
-              </a:rPr>
-              <a:t>max</a:t>
-            </a:r>
-            <a:r>
-              <a:rPr lang="pt-PT" sz="1200" dirty="0">
-                <a:solidFill>
-                  <a:schemeClr val="tx1"/>
-                </a:solidFill>
-                <a:latin typeface="Courier New" pitchFamily="49" charset="0"/>
-                <a:cs typeface="Courier New" pitchFamily="49" charset="0"/>
-              </a:rPr>
-              <a:t>=</a:t>
-            </a:r>
-            <a:r>
-              <a:rPr lang="pt-PT" sz="1200" b="1" dirty="0">
-                <a:solidFill>
-                  <a:srgbClr val="0070C0"/>
-                </a:solidFill>
-                <a:latin typeface="Courier New" pitchFamily="49" charset="0"/>
-                <a:cs typeface="Courier New" pitchFamily="49" charset="0"/>
-              </a:rPr>
-              <a:t>4</a:t>
-            </a:r>
-            <a:r>
-              <a:rPr lang="pt-PT" sz="1200" dirty="0">
-                <a:solidFill>
-                  <a:schemeClr val="tx1"/>
-                </a:solidFill>
-                <a:latin typeface="Courier New" pitchFamily="49" charset="0"/>
-                <a:cs typeface="Courier New" pitchFamily="49" charset="0"/>
-              </a:rPr>
-              <a:t>)),</a:t>
+              <a:t>)),               </a:t>
+            </a:r>
+            <a:r>
+              <a:rPr lang="pt-PT" sz="1200" b="1" dirty="0">
+                <a:solidFill>
+                  <a:srgbClr val="00B050"/>
+                </a:solidFill>
+                <a:latin typeface="Courier New" pitchFamily="49" charset="0"/>
+                <a:cs typeface="Courier New" pitchFamily="49" charset="0"/>
+              </a:rPr>
+              <a:t>#pi_y = [0, 1]</a:t>
             </a:r>
           </a:p>
           <a:p>
@@ -28848,7 +29714,7 @@
                 <a:latin typeface="Courier New" pitchFamily="49" charset="0"/>
                 <a:cs typeface="Courier New" pitchFamily="49" charset="0"/>
               </a:rPr>
-              <a:t>  x2 </a:t>
+              <a:t>  y </a:t>
             </a:r>
             <a:r>
               <a:rPr lang="pt-PT" sz="1200" dirty="0">
@@ -28878,7 +29744,7 @@
                 <a:latin typeface="Courier New" pitchFamily="49" charset="0"/>
                 <a:cs typeface="Courier New" pitchFamily="49" charset="0"/>
               </a:rPr>
-              <a:t>ceiling</a:t>
+              <a:t>factor</a:t>
             </a:r>
             <a:r>
               <a:rPr lang="pt-PT" sz="1200" dirty="0">
@@ -28898,7 +29764,7 @@
                 <a:latin typeface="Courier New" pitchFamily="49" charset="0"/>
                 <a:cs typeface="Courier New" pitchFamily="49" charset="0"/>
               </a:rPr>
-              <a:t>runif</a:t>
+              <a:t>rbinom</a:t>
             </a:r>
             <a:r>
               <a:rPr lang="pt-PT" sz="1200" dirty="0">
@@ -28938,7 +29804,17 @@
                 <a:latin typeface="Courier New" pitchFamily="49" charset="0"/>
                 <a:cs typeface="Courier New" pitchFamily="49" charset="0"/>
               </a:rPr>
-              <a:t> min</a:t>
+              <a:t> </a:t>
+            </a:r>
+            <a:r>
+              <a:rPr lang="pt-PT" sz="1200" b="1" dirty="0" err="1">
+                <a:solidFill>
+                  <a:schemeClr val="tx1"/>
+                </a:solidFill>
+                <a:latin typeface="Courier New" pitchFamily="49" charset="0"/>
+                <a:cs typeface="Courier New" pitchFamily="49" charset="0"/>
+              </a:rPr>
+              <a:t>size</a:t>
             </a:r>
             <a:r>
               <a:rPr lang="pt-PT" sz="1200" dirty="0">
@@ -28958,7 +29834,7 @@
                 <a:latin typeface="Courier New" pitchFamily="49" charset="0"/>
                 <a:cs typeface="Courier New" pitchFamily="49" charset="0"/>
               </a:rPr>
-              <a:t>0</a:t>
+              <a:t>1</a:t>
             </a:r>
             <a:r>
               <a:rPr lang="pt-PT" sz="1200" dirty="0">
@@ -28988,7 +29864,7 @@
                 <a:latin typeface="Courier New" pitchFamily="49" charset="0"/>
                 <a:cs typeface="Courier New" pitchFamily="49" charset="0"/>
               </a:rPr>
-              <a:t>max</a:t>
+              <a:t>prob</a:t>
             </a:r>
             <a:r>
               <a:rPr lang="pt-PT" sz="1200" dirty="0">
@@ -29001,14 +29877,14 @@
               <a:t>=</a:t>
             </a:r>
             <a:r>
-              <a:rPr lang="pt-PT" sz="1200" b="1" dirty="0">
-                <a:solidFill>
-                  <a:srgbClr val="0070C0"/>
-                </a:solidFill>
-                <a:latin typeface="Courier New" pitchFamily="49" charset="0"/>
-                <a:cs typeface="Courier New" pitchFamily="49" charset="0"/>
-              </a:rPr>
-              <a:t>2</a:t>
+              <a:rPr lang="pt-PT" sz="1200" b="1" dirty="0" err="1">
+                <a:solidFill>
+                  <a:schemeClr val="tx1"/>
+                </a:solidFill>
+                <a:latin typeface="Courier New" pitchFamily="49" charset="0"/>
+                <a:cs typeface="Courier New" pitchFamily="49" charset="0"/>
+              </a:rPr>
+              <a:t>pi_y</a:t>
             </a:r>
             <a:r>
               <a:rPr lang="pt-PT" sz="1200" dirty="0">
@@ -29018,7 +29894,17 @@
                 <a:latin typeface="Courier New" pitchFamily="49" charset="0"/>
                 <a:cs typeface="Courier New" pitchFamily="49" charset="0"/>
               </a:rPr>
-              <a:t>)),</a:t>
+              <a:t>)) </a:t>
+            </a:r>
+            <a:r>
+              <a:rPr lang="pt-PT" sz="1200" b="1" dirty="0">
+                <a:solidFill>
+                  <a:srgbClr val="00B050"/>
+                </a:solidFill>
+                <a:latin typeface="Courier New" pitchFamily="49" charset="0"/>
+                <a:cs typeface="Courier New" pitchFamily="49" charset="0"/>
+              </a:rPr>
+              <a:t>#y = {0, 1}</a:t>
             </a:r>
           </a:p>
           <a:p>
@@ -29028,16 +29914,6 @@
               </a:spcBef>
             </a:pPr>
             <a:r>
-              <a:rPr lang="pt-PT" sz="1200" b="1" dirty="0">
-                <a:solidFill>
-                  <a:schemeClr val="tx1"/>
-                </a:solidFill>
-                <a:latin typeface="Courier New" pitchFamily="49" charset="0"/>
-                <a:cs typeface="Courier New" pitchFamily="49" charset="0"/>
-              </a:rPr>
-              <a:t>  x3 </a:t>
-            </a:r>
-            <a:r>
               <a:rPr lang="pt-PT" sz="1200" dirty="0">
                 <a:solidFill>
                   <a:schemeClr val="tx1"/>
@@ -29045,167 +29921,7 @@
                 <a:latin typeface="Courier New" pitchFamily="49" charset="0"/>
                 <a:cs typeface="Courier New" pitchFamily="49" charset="0"/>
               </a:rPr>
-              <a:t>=</a:t>
-            </a:r>
-            <a:r>
-              <a:rPr lang="pt-PT" sz="1200" b="1" dirty="0">
-                <a:solidFill>
-                  <a:schemeClr val="tx1"/>
-                </a:solidFill>
-                <a:latin typeface="Courier New" pitchFamily="49" charset="0"/>
-                <a:cs typeface="Courier New" pitchFamily="49" charset="0"/>
-              </a:rPr>
-              <a:t> </a:t>
-            </a:r>
-            <a:r>
-              <a:rPr lang="pt-PT" sz="1200" b="1" dirty="0" err="1">
-                <a:solidFill>
-                  <a:schemeClr val="tx1"/>
-                </a:solidFill>
-                <a:latin typeface="Courier New" pitchFamily="49" charset="0"/>
-                <a:cs typeface="Courier New" pitchFamily="49" charset="0"/>
-              </a:rPr>
-              <a:t>ceiling</a:t>
-            </a:r>
-            <a:r>
-              <a:rPr lang="pt-PT" sz="1200" dirty="0">
-                <a:solidFill>
-                  <a:schemeClr val="tx1"/>
-                </a:solidFill>
-                <a:latin typeface="Courier New" pitchFamily="49" charset="0"/>
-                <a:cs typeface="Courier New" pitchFamily="49" charset="0"/>
-              </a:rPr>
-              <a:t>(</a:t>
-            </a:r>
-            <a:r>
-              <a:rPr lang="pt-PT" sz="1200" b="1" dirty="0" err="1">
-                <a:solidFill>
-                  <a:schemeClr val="tx1"/>
-                </a:solidFill>
-                <a:latin typeface="Courier New" pitchFamily="49" charset="0"/>
-                <a:cs typeface="Courier New" pitchFamily="49" charset="0"/>
-              </a:rPr>
-              <a:t>runif</a:t>
-            </a:r>
-            <a:r>
-              <a:rPr lang="pt-PT" sz="1200" dirty="0">
-                <a:solidFill>
-                  <a:schemeClr val="tx1"/>
-                </a:solidFill>
-                <a:latin typeface="Courier New" pitchFamily="49" charset="0"/>
-                <a:cs typeface="Courier New" pitchFamily="49" charset="0"/>
-              </a:rPr>
-              <a:t>(</a:t>
-            </a:r>
-            <a:r>
-              <a:rPr lang="pt-PT" sz="1200" b="1" dirty="0">
-                <a:solidFill>
-                  <a:srgbClr val="0070C0"/>
-                </a:solidFill>
-                <a:latin typeface="Courier New" pitchFamily="49" charset="0"/>
-                <a:cs typeface="Courier New" pitchFamily="49" charset="0"/>
-              </a:rPr>
-              <a:t>20</a:t>
-            </a:r>
-            <a:r>
-              <a:rPr lang="pt-PT" sz="1200" dirty="0">
-                <a:solidFill>
-                  <a:schemeClr val="tx1"/>
-                </a:solidFill>
-                <a:latin typeface="Courier New" pitchFamily="49" charset="0"/>
-                <a:cs typeface="Courier New" pitchFamily="49" charset="0"/>
-              </a:rPr>
-              <a:t>,</a:t>
-            </a:r>
-            <a:r>
-              <a:rPr lang="pt-PT" sz="1200" b="1" dirty="0">
-                <a:solidFill>
-                  <a:schemeClr val="tx1"/>
-                </a:solidFill>
-                <a:latin typeface="Courier New" pitchFamily="49" charset="0"/>
-                <a:cs typeface="Courier New" pitchFamily="49" charset="0"/>
-              </a:rPr>
-              <a:t> min</a:t>
-            </a:r>
-            <a:r>
-              <a:rPr lang="pt-PT" sz="1200" dirty="0">
-                <a:solidFill>
-                  <a:schemeClr val="tx1"/>
-                </a:solidFill>
-                <a:latin typeface="Courier New" pitchFamily="49" charset="0"/>
-                <a:cs typeface="Courier New" pitchFamily="49" charset="0"/>
-              </a:rPr>
-              <a:t>=</a:t>
-            </a:r>
-            <a:r>
-              <a:rPr lang="pt-PT" sz="1200" b="1" dirty="0">
-                <a:solidFill>
-                  <a:srgbClr val="0070C0"/>
-                </a:solidFill>
-                <a:latin typeface="Courier New" pitchFamily="49" charset="0"/>
-                <a:cs typeface="Courier New" pitchFamily="49" charset="0"/>
-              </a:rPr>
-              <a:t>0</a:t>
-            </a:r>
-            <a:r>
-              <a:rPr lang="pt-PT" sz="1200" dirty="0">
-                <a:solidFill>
-                  <a:schemeClr val="tx1"/>
-                </a:solidFill>
-                <a:latin typeface="Courier New" pitchFamily="49" charset="0"/>
-                <a:cs typeface="Courier New" pitchFamily="49" charset="0"/>
-              </a:rPr>
-              <a:t>,</a:t>
-            </a:r>
-            <a:r>
-              <a:rPr lang="pt-PT" sz="1200" b="1" dirty="0">
-                <a:solidFill>
-                  <a:schemeClr val="tx1"/>
-                </a:solidFill>
-                <a:latin typeface="Courier New" pitchFamily="49" charset="0"/>
-                <a:cs typeface="Courier New" pitchFamily="49" charset="0"/>
-              </a:rPr>
-              <a:t> </a:t>
-            </a:r>
-            <a:r>
-              <a:rPr lang="pt-PT" sz="1200" b="1" dirty="0" err="1">
-                <a:solidFill>
-                  <a:schemeClr val="tx1"/>
-                </a:solidFill>
-                <a:latin typeface="Courier New" pitchFamily="49" charset="0"/>
-                <a:cs typeface="Courier New" pitchFamily="49" charset="0"/>
-              </a:rPr>
-              <a:t>max</a:t>
-            </a:r>
-            <a:r>
-              <a:rPr lang="pt-PT" sz="1200" dirty="0">
-                <a:solidFill>
-                  <a:schemeClr val="tx1"/>
-                </a:solidFill>
-                <a:latin typeface="Courier New" pitchFamily="49" charset="0"/>
-                <a:cs typeface="Courier New" pitchFamily="49" charset="0"/>
-              </a:rPr>
-              <a:t>=</a:t>
-            </a:r>
-            <a:r>
-              <a:rPr lang="pt-PT" sz="1200" b="1" dirty="0">
-                <a:solidFill>
-                  <a:srgbClr val="0070C0"/>
-                </a:solidFill>
-                <a:latin typeface="Courier New" pitchFamily="49" charset="0"/>
-                <a:cs typeface="Courier New" pitchFamily="49" charset="0"/>
-              </a:rPr>
-              <a:t>2</a:t>
-            </a:r>
-            <a:r>
-              <a:rPr lang="pt-PT" sz="1200" dirty="0">
-                <a:solidFill>
-                  <a:schemeClr val="tx1"/>
-                </a:solidFill>
-                <a:latin typeface="Courier New" pitchFamily="49" charset="0"/>
-                <a:cs typeface="Courier New" pitchFamily="49" charset="0"/>
-              </a:rPr>
-              <a:t>)),</a:t>
+              <a:t>) </a:t>
             </a:r>
           </a:p>
           <a:p>
@@ -29215,16 +29931,6 @@
               </a:spcBef>
             </a:pPr>
             <a:r>
-              <a:rPr lang="pt-PT" sz="1200" b="1" dirty="0">
-                <a:solidFill>
-                  <a:schemeClr val="tx1"/>
-                </a:solidFill>
-                <a:latin typeface="Courier New" pitchFamily="49" charset="0"/>
-                <a:cs typeface="Courier New" pitchFamily="49" charset="0"/>
-              </a:rPr>
-              <a:t>  </a:t>
-            </a:r>
-            <a:r>
               <a:rPr lang="pt-PT" sz="1200" b="1" dirty="0" err="1">
                 <a:solidFill>
                   <a:schemeClr val="tx1"/>
@@ -29232,7 +29938,7 @@
                 <a:latin typeface="Courier New" pitchFamily="49" charset="0"/>
                 <a:cs typeface="Courier New" pitchFamily="49" charset="0"/>
               </a:rPr>
-              <a:t>pi_y</a:t>
+              <a:t>tb_ml</a:t>
             </a:r>
             <a:r>
               <a:rPr lang="pt-PT" sz="1200" b="1" dirty="0">
@@ -29252,217 +29958,7 @@
                 <a:latin typeface="Courier New" pitchFamily="49" charset="0"/>
                 <a:cs typeface="Courier New" pitchFamily="49" charset="0"/>
               </a:rPr>
-              <a:t>=</a:t>
-            </a:r>
-            <a:r>
-              <a:rPr lang="pt-PT" sz="1200" b="1" dirty="0">
-                <a:solidFill>
-                  <a:schemeClr val="tx1"/>
-                </a:solidFill>
-                <a:latin typeface="Courier New" pitchFamily="49" charset="0"/>
-                <a:cs typeface="Courier New" pitchFamily="49" charset="0"/>
-              </a:rPr>
-              <a:t> </a:t>
-            </a:r>
-            <a:r>
-              <a:rPr lang="pt-PT" sz="1200" b="1" dirty="0" err="1">
-                <a:solidFill>
-                  <a:schemeClr val="tx1"/>
-                </a:solidFill>
-                <a:latin typeface="Courier New" pitchFamily="49" charset="0"/>
-                <a:cs typeface="Courier New" pitchFamily="49" charset="0"/>
-              </a:rPr>
-              <a:t>exp</a:t>
-            </a:r>
-            <a:r>
-              <a:rPr lang="pt-PT" sz="1200" dirty="0">
-                <a:solidFill>
-                  <a:schemeClr val="tx1"/>
-                </a:solidFill>
-                <a:latin typeface="Courier New" pitchFamily="49" charset="0"/>
-                <a:cs typeface="Courier New" pitchFamily="49" charset="0"/>
-              </a:rPr>
-              <a:t>(</a:t>
-            </a:r>
-            <a:r>
-              <a:rPr lang="pt-PT" sz="1200" b="1" dirty="0">
-                <a:solidFill>
-                  <a:schemeClr val="tx1"/>
-                </a:solidFill>
-                <a:latin typeface="Courier New" pitchFamily="49" charset="0"/>
-                <a:cs typeface="Courier New" pitchFamily="49" charset="0"/>
-              </a:rPr>
-              <a:t>x1 </a:t>
-            </a:r>
-            <a:r>
-              <a:rPr lang="pt-PT" sz="1200" dirty="0">
-                <a:solidFill>
-                  <a:schemeClr val="tx1"/>
-                </a:solidFill>
-                <a:latin typeface="Courier New" pitchFamily="49" charset="0"/>
-                <a:cs typeface="Courier New" pitchFamily="49" charset="0"/>
-              </a:rPr>
-              <a:t>– (</a:t>
-            </a:r>
-            <a:r>
-              <a:rPr lang="pt-PT" sz="1200" b="1" dirty="0">
-                <a:solidFill>
-                  <a:schemeClr val="tx1"/>
-                </a:solidFill>
-                <a:latin typeface="Courier New" pitchFamily="49" charset="0"/>
-                <a:cs typeface="Courier New" pitchFamily="49" charset="0"/>
-              </a:rPr>
-              <a:t>x2 </a:t>
-            </a:r>
-            <a:r>
-              <a:rPr lang="pt-PT" sz="1200" dirty="0">
-                <a:solidFill>
-                  <a:schemeClr val="tx1"/>
-                </a:solidFill>
-                <a:latin typeface="Courier New" pitchFamily="49" charset="0"/>
-                <a:cs typeface="Courier New" pitchFamily="49" charset="0"/>
-              </a:rPr>
-              <a:t>+</a:t>
-            </a:r>
-            <a:r>
-              <a:rPr lang="pt-PT" sz="1200" b="1" dirty="0">
-                <a:solidFill>
-                  <a:schemeClr val="tx1"/>
-                </a:solidFill>
-                <a:latin typeface="Courier New" pitchFamily="49" charset="0"/>
-                <a:cs typeface="Courier New" pitchFamily="49" charset="0"/>
-              </a:rPr>
-              <a:t> x3</a:t>
-            </a:r>
-            <a:r>
-              <a:rPr lang="pt-PT" sz="1200" dirty="0">
-                <a:solidFill>
-                  <a:schemeClr val="tx1"/>
-                </a:solidFill>
-                <a:latin typeface="Courier New" pitchFamily="49" charset="0"/>
-                <a:cs typeface="Courier New" pitchFamily="49" charset="0"/>
-              </a:rPr>
-              <a:t>))/(</a:t>
-            </a:r>
-            <a:r>
-              <a:rPr lang="pt-PT" sz="1200" b="1" dirty="0">
-                <a:solidFill>
-                  <a:srgbClr val="0070C0"/>
-                </a:solidFill>
-                <a:latin typeface="Courier New" pitchFamily="49" charset="0"/>
-                <a:cs typeface="Courier New" pitchFamily="49" charset="0"/>
-              </a:rPr>
-              <a:t>1</a:t>
-            </a:r>
-            <a:r>
-              <a:rPr lang="pt-PT" sz="1200" b="1" dirty="0">
-                <a:solidFill>
-                  <a:schemeClr val="tx1"/>
-                </a:solidFill>
-                <a:latin typeface="Courier New" pitchFamily="49" charset="0"/>
-                <a:cs typeface="Courier New" pitchFamily="49" charset="0"/>
-              </a:rPr>
-              <a:t> </a:t>
-            </a:r>
-            <a:r>
-              <a:rPr lang="pt-PT" sz="1200" dirty="0">
-                <a:solidFill>
-                  <a:schemeClr val="tx1"/>
-                </a:solidFill>
-                <a:latin typeface="Courier New" pitchFamily="49" charset="0"/>
-                <a:cs typeface="Courier New" pitchFamily="49" charset="0"/>
-              </a:rPr>
-              <a:t>+</a:t>
-            </a:r>
-            <a:r>
-              <a:rPr lang="pt-PT" sz="1200" b="1" dirty="0">
-                <a:solidFill>
-                  <a:schemeClr val="tx1"/>
-                </a:solidFill>
-                <a:latin typeface="Courier New" pitchFamily="49" charset="0"/>
-                <a:cs typeface="Courier New" pitchFamily="49" charset="0"/>
-              </a:rPr>
-              <a:t> </a:t>
-            </a:r>
-            <a:r>
-              <a:rPr lang="pt-PT" sz="1200" b="1" dirty="0" err="1">
-                <a:solidFill>
-                  <a:schemeClr val="tx1"/>
-                </a:solidFill>
-                <a:latin typeface="Courier New" pitchFamily="49" charset="0"/>
-                <a:cs typeface="Courier New" pitchFamily="49" charset="0"/>
-              </a:rPr>
-              <a:t>exp</a:t>
-            </a:r>
-            <a:r>
-              <a:rPr lang="pt-PT" sz="1200" dirty="0">
-                <a:solidFill>
-                  <a:schemeClr val="tx1"/>
-                </a:solidFill>
-                <a:latin typeface="Courier New" pitchFamily="49" charset="0"/>
-                <a:cs typeface="Courier New" pitchFamily="49" charset="0"/>
-              </a:rPr>
-              <a:t>(</a:t>
-            </a:r>
-            <a:r>
-              <a:rPr lang="pt-PT" sz="1200" b="1" dirty="0">
-                <a:solidFill>
-                  <a:schemeClr val="tx1"/>
-                </a:solidFill>
-                <a:latin typeface="Courier New" pitchFamily="49" charset="0"/>
-                <a:cs typeface="Courier New" pitchFamily="49" charset="0"/>
-              </a:rPr>
-              <a:t>x1 </a:t>
-            </a:r>
-            <a:r>
-              <a:rPr lang="pt-PT" sz="1200" dirty="0">
-                <a:solidFill>
-                  <a:schemeClr val="tx1"/>
-                </a:solidFill>
-                <a:latin typeface="Courier New" pitchFamily="49" charset="0"/>
-                <a:cs typeface="Courier New" pitchFamily="49" charset="0"/>
-              </a:rPr>
-              <a:t>– (</a:t>
-            </a:r>
-            <a:r>
-              <a:rPr lang="pt-PT" sz="1200" b="1" dirty="0">
-                <a:solidFill>
-                  <a:schemeClr val="tx1"/>
-                </a:solidFill>
-                <a:latin typeface="Courier New" pitchFamily="49" charset="0"/>
-                <a:cs typeface="Courier New" pitchFamily="49" charset="0"/>
-              </a:rPr>
-              <a:t>x2 </a:t>
-            </a:r>
-            <a:r>
-              <a:rPr lang="pt-PT" sz="1200" dirty="0">
-                <a:solidFill>
-                  <a:schemeClr val="tx1"/>
-                </a:solidFill>
-                <a:latin typeface="Courier New" pitchFamily="49" charset="0"/>
-                <a:cs typeface="Courier New" pitchFamily="49" charset="0"/>
-              </a:rPr>
-              <a:t>+</a:t>
-            </a:r>
-            <a:r>
-              <a:rPr lang="pt-PT" sz="1200" b="1" dirty="0">
-                <a:solidFill>
-                  <a:schemeClr val="tx1"/>
-                </a:solidFill>
-                <a:latin typeface="Courier New" pitchFamily="49" charset="0"/>
-                <a:cs typeface="Courier New" pitchFamily="49" charset="0"/>
-              </a:rPr>
-              <a:t> x3</a:t>
-            </a:r>
-            <a:r>
-              <a:rPr lang="pt-PT" sz="1200" dirty="0">
-                <a:solidFill>
-                  <a:schemeClr val="tx1"/>
-                </a:solidFill>
-                <a:latin typeface="Courier New" pitchFamily="49" charset="0"/>
-                <a:cs typeface="Courier New" pitchFamily="49" charset="0"/>
-              </a:rPr>
-              <a:t>))),</a:t>
+              <a:t>|&gt;</a:t>
             </a:r>
           </a:p>
           <a:p>
@@ -29479,7 +29975,17 @@
                 <a:latin typeface="Courier New" pitchFamily="49" charset="0"/>
                 <a:cs typeface="Courier New" pitchFamily="49" charset="0"/>
               </a:rPr>
-              <a:t>  y </a:t>
+              <a:t>  </a:t>
+            </a:r>
+            <a:r>
+              <a:rPr lang="pt-PT" sz="1200" b="1" dirty="0" err="1">
+                <a:solidFill>
+                  <a:schemeClr val="tx1"/>
+                </a:solidFill>
+                <a:latin typeface="Courier New" pitchFamily="49" charset="0"/>
+                <a:cs typeface="Courier New" pitchFamily="49" charset="0"/>
+              </a:rPr>
+              <a:t>ggplot</a:t>
             </a:r>
             <a:r>
               <a:rPr lang="pt-PT" sz="1200" dirty="0">
@@ -29489,6 +29995,46 @@
                 <a:latin typeface="Courier New" pitchFamily="49" charset="0"/>
                 <a:cs typeface="Courier New" pitchFamily="49" charset="0"/>
               </a:rPr>
+              <a:t>(</a:t>
+            </a:r>
+            <a:r>
+              <a:rPr lang="pt-PT" sz="1200" b="1" dirty="0" err="1">
+                <a:solidFill>
+                  <a:schemeClr val="tx1"/>
+                </a:solidFill>
+                <a:latin typeface="Courier New" pitchFamily="49" charset="0"/>
+                <a:cs typeface="Courier New" pitchFamily="49" charset="0"/>
+              </a:rPr>
+              <a:t>aes</a:t>
+            </a:r>
+            <a:r>
+              <a:rPr lang="pt-PT" sz="1200" dirty="0">
+                <a:solidFill>
+                  <a:schemeClr val="tx1"/>
+                </a:solidFill>
+                <a:latin typeface="Courier New" pitchFamily="49" charset="0"/>
+                <a:cs typeface="Courier New" pitchFamily="49" charset="0"/>
+              </a:rPr>
+              <a:t>(</a:t>
+            </a:r>
+            <a:r>
+              <a:rPr lang="pt-PT" sz="1200" b="1" dirty="0">
+                <a:solidFill>
+                  <a:schemeClr val="tx1"/>
+                </a:solidFill>
+                <a:latin typeface="Courier New" pitchFamily="49" charset="0"/>
+                <a:cs typeface="Courier New" pitchFamily="49" charset="0"/>
+              </a:rPr>
+              <a:t>x</a:t>
+            </a:r>
+            <a:r>
+              <a:rPr lang="pt-PT" sz="1200" dirty="0">
+                <a:solidFill>
+                  <a:schemeClr val="tx1"/>
+                </a:solidFill>
+                <a:latin typeface="Courier New" pitchFamily="49" charset="0"/>
+                <a:cs typeface="Courier New" pitchFamily="49" charset="0"/>
+              </a:rPr>
               <a:t>=</a:t>
             </a:r>
             <a:r>
@@ -29499,19 +30045,69 @@
                 <a:latin typeface="Courier New" pitchFamily="49" charset="0"/>
                 <a:cs typeface="Courier New" pitchFamily="49" charset="0"/>
               </a:rPr>
+              <a:t>x1</a:t>
+            </a:r>
+            <a:r>
+              <a:rPr lang="pt-PT" sz="1200" dirty="0">
+                <a:solidFill>
+                  <a:schemeClr val="tx1"/>
+                </a:solidFill>
+                <a:latin typeface="Courier New" pitchFamily="49" charset="0"/>
+                <a:cs typeface="Courier New" pitchFamily="49" charset="0"/>
+              </a:rPr>
+              <a:t>,</a:t>
+            </a:r>
+            <a:r>
+              <a:rPr lang="pt-PT" sz="1200" b="1" dirty="0">
+                <a:solidFill>
+                  <a:schemeClr val="tx1"/>
+                </a:solidFill>
+                <a:latin typeface="Courier New" pitchFamily="49" charset="0"/>
+                <a:cs typeface="Courier New" pitchFamily="49" charset="0"/>
+              </a:rPr>
+              <a:t> y</a:t>
+            </a:r>
+            <a:r>
+              <a:rPr lang="pt-PT" sz="1200" dirty="0">
+                <a:solidFill>
+                  <a:schemeClr val="tx1"/>
+                </a:solidFill>
+                <a:latin typeface="Courier New" pitchFamily="49" charset="0"/>
+                <a:cs typeface="Courier New" pitchFamily="49" charset="0"/>
+              </a:rPr>
+              <a:t>=</a:t>
+            </a:r>
+            <a:r>
+              <a:rPr lang="pt-PT" sz="1200" b="1" dirty="0">
+                <a:solidFill>
+                  <a:schemeClr val="tx1"/>
+                </a:solidFill>
+                <a:latin typeface="Courier New" pitchFamily="49" charset="0"/>
+                <a:cs typeface="Courier New" pitchFamily="49" charset="0"/>
+              </a:rPr>
+              <a:t>y</a:t>
+            </a:r>
+            <a:r>
+              <a:rPr lang="pt-PT" sz="1200" dirty="0">
+                <a:solidFill>
+                  <a:schemeClr val="tx1"/>
+                </a:solidFill>
+                <a:latin typeface="Courier New" pitchFamily="49" charset="0"/>
+                <a:cs typeface="Courier New" pitchFamily="49" charset="0"/>
+              </a:rPr>
+              <a:t>))</a:t>
+            </a:r>
+            <a:r>
+              <a:rPr lang="pt-PT" sz="1200" b="1" dirty="0">
+                <a:solidFill>
+                  <a:schemeClr val="tx1"/>
+                </a:solidFill>
+                <a:latin typeface="Courier New" pitchFamily="49" charset="0"/>
+                <a:cs typeface="Courier New" pitchFamily="49" charset="0"/>
+              </a:rPr>
               <a:t> </a:t>
             </a:r>
             <a:r>
-              <a:rPr lang="pt-PT" sz="1200" b="1" dirty="0" err="1">
-                <a:solidFill>
-                  <a:schemeClr val="tx1"/>
-                </a:solidFill>
-                <a:latin typeface="Courier New" pitchFamily="49" charset="0"/>
-                <a:cs typeface="Courier New" pitchFamily="49" charset="0"/>
-              </a:rPr>
-              <a:t>rbinom</a:t>
-            </a:r>
-            <a:r>
               <a:rPr lang="pt-PT" sz="1200" dirty="0">
                 <a:solidFill>
                   <a:schemeClr val="tx1"/>
@@ -29519,50 +30115,80 @@
                 <a:latin typeface="Courier New" pitchFamily="49" charset="0"/>
                 <a:cs typeface="Courier New" pitchFamily="49" charset="0"/>
               </a:rPr>
+              <a:t>+ </a:t>
+            </a:r>
+            <a:r>
+              <a:rPr lang="en-US" sz="1200" b="1" dirty="0" err="1">
+                <a:solidFill>
+                  <a:schemeClr val="tx1"/>
+                </a:solidFill>
+                <a:latin typeface="Courier New" pitchFamily="49" charset="0"/>
+                <a:cs typeface="Courier New" pitchFamily="49" charset="0"/>
+              </a:rPr>
+              <a:t>geom_jitter</a:t>
+            </a:r>
+            <a:r>
+              <a:rPr lang="en-US" sz="1200" dirty="0">
+                <a:solidFill>
+                  <a:schemeClr val="tx1"/>
+                </a:solidFill>
+                <a:latin typeface="Courier New" pitchFamily="49" charset="0"/>
+                <a:cs typeface="Courier New" pitchFamily="49" charset="0"/>
+              </a:rPr>
               <a:t>(</a:t>
             </a:r>
             <a:r>
-              <a:rPr lang="pt-PT" sz="1200" b="1" dirty="0">
+              <a:rPr lang="en-US" sz="1200" b="1" dirty="0">
+                <a:solidFill>
+                  <a:schemeClr val="tx1"/>
+                </a:solidFill>
+                <a:latin typeface="Courier New" pitchFamily="49" charset="0"/>
+                <a:cs typeface="Courier New" pitchFamily="49" charset="0"/>
+              </a:rPr>
+              <a:t>height</a:t>
+            </a:r>
+            <a:r>
+              <a:rPr lang="en-US" sz="1200" dirty="0">
+                <a:solidFill>
+                  <a:schemeClr val="tx1"/>
+                </a:solidFill>
+                <a:latin typeface="Courier New" pitchFamily="49" charset="0"/>
+                <a:cs typeface="Courier New" pitchFamily="49" charset="0"/>
+              </a:rPr>
+              <a:t>=</a:t>
+            </a:r>
+            <a:r>
+              <a:rPr lang="en-US" sz="1200" b="1" dirty="0">
                 <a:solidFill>
                   <a:srgbClr val="0070C0"/>
                 </a:solidFill>
                 <a:latin typeface="Courier New" pitchFamily="49" charset="0"/>
                 <a:cs typeface="Courier New" pitchFamily="49" charset="0"/>
               </a:rPr>
-              <a:t>20</a:t>
-            </a:r>
-            <a:r>
-              <a:rPr lang="pt-PT" sz="1200" dirty="0">
-                <a:solidFill>
-                  <a:schemeClr val="tx1"/>
-                </a:solidFill>
-                <a:latin typeface="Courier New" pitchFamily="49" charset="0"/>
-                <a:cs typeface="Courier New" pitchFamily="49" charset="0"/>
-              </a:rPr>
-              <a:t>,</a:t>
-            </a:r>
-            <a:r>
-              <a:rPr lang="pt-PT" sz="1200" b="1" dirty="0">
-                <a:solidFill>
-                  <a:schemeClr val="tx1"/>
-                </a:solidFill>
-                <a:latin typeface="Courier New" pitchFamily="49" charset="0"/>
-                <a:cs typeface="Courier New" pitchFamily="49" charset="0"/>
-              </a:rPr>
-              <a:t> </a:t>
-            </a:r>
-            <a:r>
-              <a:rPr lang="pt-PT" sz="1200" b="1" dirty="0" err="1">
-                <a:solidFill>
-                  <a:schemeClr val="tx1"/>
-                </a:solidFill>
-                <a:latin typeface="Courier New" pitchFamily="49" charset="0"/>
-                <a:cs typeface="Courier New" pitchFamily="49" charset="0"/>
-              </a:rPr>
-              <a:t>size</a:t>
-            </a:r>
-            <a:r>
-              <a:rPr lang="pt-PT" sz="1200" dirty="0">
+              <a:t>0.05</a:t>
+            </a:r>
+            <a:r>
+              <a:rPr lang="en-US" sz="1200" dirty="0">
+                <a:solidFill>
+                  <a:schemeClr val="tx1"/>
+                </a:solidFill>
+                <a:latin typeface="Courier New" pitchFamily="49" charset="0"/>
+                <a:cs typeface="Courier New" pitchFamily="49" charset="0"/>
+              </a:rPr>
+              <a:t>, </a:t>
+            </a:r>
+            <a:r>
+              <a:rPr lang="en-US" sz="1200" b="1" dirty="0">
+                <a:solidFill>
+                  <a:schemeClr val="tx1"/>
+                </a:solidFill>
+                <a:latin typeface="Courier New" pitchFamily="49" charset="0"/>
+                <a:cs typeface="Courier New" pitchFamily="49" charset="0"/>
+              </a:rPr>
+              <a:t>width</a:t>
+            </a:r>
+            <a:r>
+              <a:rPr lang="en-US" sz="1200" dirty="0">
                 <a:solidFill>
                   <a:schemeClr val="tx1"/>
                 </a:solidFill>
@@ -29572,67 +30198,47 @@
               <a:t>=</a:t>
             </a:r>
             <a:r>
-              <a:rPr lang="pt-PT" sz="1200" b="1" dirty="0">
+              <a:rPr lang="en-US" sz="1200" b="1" dirty="0">
                 <a:solidFill>
                   <a:srgbClr val="0070C0"/>
                 </a:solidFill>
                 <a:latin typeface="Courier New" pitchFamily="49" charset="0"/>
                 <a:cs typeface="Courier New" pitchFamily="49" charset="0"/>
               </a:rPr>
-              <a:t>1</a:t>
-            </a:r>
-            <a:r>
-              <a:rPr lang="pt-PT" sz="1200" dirty="0">
-                <a:solidFill>
-                  <a:schemeClr val="tx1"/>
-                </a:solidFill>
-                <a:latin typeface="Courier New" pitchFamily="49" charset="0"/>
-                <a:cs typeface="Courier New" pitchFamily="49" charset="0"/>
-              </a:rPr>
-              <a:t>,</a:t>
-            </a:r>
-            <a:r>
-              <a:rPr lang="pt-PT" sz="1200" b="1" dirty="0">
-                <a:solidFill>
-                  <a:schemeClr val="tx1"/>
-                </a:solidFill>
-                <a:latin typeface="Courier New" pitchFamily="49" charset="0"/>
-                <a:cs typeface="Courier New" pitchFamily="49" charset="0"/>
-              </a:rPr>
-              <a:t> </a:t>
-            </a:r>
-            <a:r>
-              <a:rPr lang="pt-PT" sz="1200" b="1" dirty="0" err="1">
-                <a:solidFill>
-                  <a:schemeClr val="tx1"/>
-                </a:solidFill>
-                <a:latin typeface="Courier New" pitchFamily="49" charset="0"/>
-                <a:cs typeface="Courier New" pitchFamily="49" charset="0"/>
-              </a:rPr>
-              <a:t>prob</a:t>
-            </a:r>
-            <a:r>
-              <a:rPr lang="pt-PT" sz="1200" dirty="0">
-                <a:solidFill>
-                  <a:schemeClr val="tx1"/>
-                </a:solidFill>
-                <a:latin typeface="Courier New" pitchFamily="49" charset="0"/>
-                <a:cs typeface="Courier New" pitchFamily="49" charset="0"/>
-              </a:rPr>
-              <a:t>=</a:t>
-            </a:r>
-            <a:r>
-              <a:rPr lang="pt-PT" sz="1200" b="1" dirty="0" err="1">
-                <a:solidFill>
-                  <a:schemeClr val="tx1"/>
-                </a:solidFill>
-                <a:latin typeface="Courier New" pitchFamily="49" charset="0"/>
-                <a:cs typeface="Courier New" pitchFamily="49" charset="0"/>
-              </a:rPr>
-              <a:t>pi_y</a:t>
-            </a:r>
-            <a:r>
-              <a:rPr lang="pt-PT" sz="1200" dirty="0">
+              <a:t>0.05</a:t>
+            </a:r>
+            <a:r>
+              <a:rPr lang="en-US" sz="1200" dirty="0">
+                <a:solidFill>
+                  <a:schemeClr val="tx1"/>
+                </a:solidFill>
+                <a:latin typeface="Courier New" pitchFamily="49" charset="0"/>
+                <a:cs typeface="Courier New" pitchFamily="49" charset="0"/>
+              </a:rPr>
+              <a:t>, </a:t>
+            </a:r>
+            <a:r>
+              <a:rPr lang="en-US" sz="1200" b="1" dirty="0">
+                <a:solidFill>
+                  <a:schemeClr val="tx1"/>
+                </a:solidFill>
+                <a:latin typeface="Courier New" pitchFamily="49" charset="0"/>
+                <a:cs typeface="Courier New" pitchFamily="49" charset="0"/>
+              </a:rPr>
+              <a:t>alpha=</a:t>
+            </a:r>
+            <a:r>
+              <a:rPr lang="en-US" sz="1200" b="1" dirty="0">
+                <a:solidFill>
+                  <a:srgbClr val="0070C0"/>
+                </a:solidFill>
+                <a:latin typeface="Courier New" pitchFamily="49" charset="0"/>
+                <a:cs typeface="Courier New" pitchFamily="49" charset="0"/>
+              </a:rPr>
+              <a:t>0.5</a:t>
+            </a:r>
+            <a:r>
+              <a:rPr lang="en-US" sz="1200" dirty="0">
                 <a:solidFill>
                   <a:schemeClr val="tx1"/>
                 </a:solidFill>
@@ -29641,545 +30247,7 @@
               </a:rPr>
               <a:t>)</a:t>
             </a:r>
-          </a:p>
-          <a:p>
-            <a:pPr algn="just">
-              <a:spcBef>
-                <a:spcPts val="600"/>
-              </a:spcBef>
-            </a:pPr>
-            <a:r>
-              <a:rPr lang="pt-PT" sz="1200" dirty="0">
-                <a:solidFill>
-                  <a:schemeClr val="tx1"/>
-                </a:solidFill>
-                <a:latin typeface="Courier New" pitchFamily="49" charset="0"/>
-                <a:cs typeface="Courier New" pitchFamily="49" charset="0"/>
-              </a:rPr>
-              <a:t>) |&gt; </a:t>
-            </a:r>
-            <a:r>
-              <a:rPr lang="pt-PT" sz="1200" b="1" dirty="0" err="1">
-                <a:solidFill>
-                  <a:schemeClr val="tx1"/>
-                </a:solidFill>
-                <a:latin typeface="Courier New" pitchFamily="49" charset="0"/>
-                <a:cs typeface="Courier New" pitchFamily="49" charset="0"/>
-              </a:rPr>
-              <a:t>mutate</a:t>
-            </a:r>
-            <a:r>
-              <a:rPr lang="pt-PT" sz="1200" dirty="0">
-                <a:solidFill>
-                  <a:schemeClr val="tx1"/>
-                </a:solidFill>
-                <a:latin typeface="Courier New" pitchFamily="49" charset="0"/>
-                <a:cs typeface="Courier New" pitchFamily="49" charset="0"/>
-              </a:rPr>
-              <a:t>(</a:t>
-            </a:r>
-            <a:r>
-              <a:rPr lang="pt-PT" sz="1200" b="1" dirty="0" err="1">
-                <a:solidFill>
-                  <a:schemeClr val="tx1"/>
-                </a:solidFill>
-                <a:latin typeface="Courier New" pitchFamily="49" charset="0"/>
-                <a:cs typeface="Courier New" pitchFamily="49" charset="0"/>
-              </a:rPr>
-              <a:t>across</a:t>
-            </a:r>
-            <a:r>
-              <a:rPr lang="pt-PT" sz="1200" dirty="0">
-                <a:solidFill>
-                  <a:schemeClr val="tx1"/>
-                </a:solidFill>
-                <a:latin typeface="Courier New" pitchFamily="49" charset="0"/>
-                <a:cs typeface="Courier New" pitchFamily="49" charset="0"/>
-              </a:rPr>
-              <a:t>(</a:t>
-            </a:r>
-            <a:r>
-              <a:rPr lang="pt-PT" sz="1200" b="1" dirty="0">
-                <a:solidFill>
-                  <a:schemeClr val="tx1"/>
-                </a:solidFill>
-                <a:latin typeface="Courier New" pitchFamily="49" charset="0"/>
-                <a:cs typeface="Courier New" pitchFamily="49" charset="0"/>
-              </a:rPr>
-              <a:t>c</a:t>
-            </a:r>
-            <a:r>
-              <a:rPr lang="pt-PT" sz="1200" dirty="0">
-                <a:solidFill>
-                  <a:schemeClr val="tx1"/>
-                </a:solidFill>
-                <a:latin typeface="Courier New" pitchFamily="49" charset="0"/>
-                <a:cs typeface="Courier New" pitchFamily="49" charset="0"/>
-              </a:rPr>
-              <a:t>(</a:t>
-            </a:r>
-            <a:r>
-              <a:rPr lang="pt-PT" sz="1200" b="1" dirty="0">
-                <a:solidFill>
-                  <a:schemeClr val="tx1"/>
-                </a:solidFill>
-                <a:latin typeface="Courier New" pitchFamily="49" charset="0"/>
-                <a:cs typeface="Courier New" pitchFamily="49" charset="0"/>
-              </a:rPr>
-              <a:t>x1</a:t>
-            </a:r>
-            <a:r>
-              <a:rPr lang="pt-PT" sz="1200" dirty="0">
-                <a:solidFill>
-                  <a:schemeClr val="tx1"/>
-                </a:solidFill>
-                <a:latin typeface="Courier New" pitchFamily="49" charset="0"/>
-                <a:cs typeface="Courier New" pitchFamily="49" charset="0"/>
-              </a:rPr>
-              <a:t>:</a:t>
-            </a:r>
-            <a:r>
-              <a:rPr lang="pt-PT" sz="1200" b="1" dirty="0">
-                <a:solidFill>
-                  <a:schemeClr val="tx1"/>
-                </a:solidFill>
-                <a:latin typeface="Courier New" pitchFamily="49" charset="0"/>
-                <a:cs typeface="Courier New" pitchFamily="49" charset="0"/>
-              </a:rPr>
-              <a:t>x3</a:t>
-            </a:r>
-            <a:r>
-              <a:rPr lang="pt-PT" sz="1200" dirty="0">
-                <a:solidFill>
-                  <a:schemeClr val="tx1"/>
-                </a:solidFill>
-                <a:latin typeface="Courier New" pitchFamily="49" charset="0"/>
-                <a:cs typeface="Courier New" pitchFamily="49" charset="0"/>
-              </a:rPr>
-              <a:t>,</a:t>
-            </a:r>
-            <a:r>
-              <a:rPr lang="pt-PT" sz="1200" b="1" dirty="0">
-                <a:solidFill>
-                  <a:schemeClr val="tx1"/>
-                </a:solidFill>
-                <a:latin typeface="Courier New" pitchFamily="49" charset="0"/>
-                <a:cs typeface="Courier New" pitchFamily="49" charset="0"/>
-              </a:rPr>
-              <a:t> y</a:t>
-            </a:r>
-            <a:r>
-              <a:rPr lang="pt-PT" sz="1200" dirty="0">
-                <a:solidFill>
-                  <a:schemeClr val="tx1"/>
-                </a:solidFill>
-                <a:latin typeface="Courier New" pitchFamily="49" charset="0"/>
-                <a:cs typeface="Courier New" pitchFamily="49" charset="0"/>
-              </a:rPr>
-              <a:t>),</a:t>
-            </a:r>
-            <a:r>
-              <a:rPr lang="pt-PT" sz="1200" b="1" dirty="0">
-                <a:solidFill>
-                  <a:schemeClr val="tx1"/>
-                </a:solidFill>
-                <a:latin typeface="Courier New" pitchFamily="49" charset="0"/>
-                <a:cs typeface="Courier New" pitchFamily="49" charset="0"/>
-              </a:rPr>
-              <a:t> </a:t>
-            </a:r>
-            <a:r>
-              <a:rPr lang="pt-PT" sz="1200" b="1" dirty="0" err="1">
-                <a:solidFill>
-                  <a:schemeClr val="tx1"/>
-                </a:solidFill>
-                <a:latin typeface="Courier New" pitchFamily="49" charset="0"/>
-                <a:cs typeface="Courier New" pitchFamily="49" charset="0"/>
-              </a:rPr>
-              <a:t>as.factor</a:t>
-            </a:r>
-            <a:r>
-              <a:rPr lang="pt-PT" sz="1200" dirty="0">
-                <a:solidFill>
-                  <a:schemeClr val="tx1"/>
-                </a:solidFill>
-                <a:latin typeface="Courier New" pitchFamily="49" charset="0"/>
-                <a:cs typeface="Courier New" pitchFamily="49" charset="0"/>
-              </a:rPr>
-              <a:t>))</a:t>
-            </a:r>
-          </a:p>
-          <a:p>
-            <a:pPr algn="just">
-              <a:spcBef>
-                <a:spcPts val="600"/>
-              </a:spcBef>
-            </a:pPr>
-            <a:r>
-              <a:rPr lang="pt-PT" sz="1200" b="1" dirty="0" err="1">
-                <a:solidFill>
-                  <a:schemeClr val="tx1"/>
-                </a:solidFill>
-                <a:latin typeface="Courier New" pitchFamily="49" charset="0"/>
-                <a:cs typeface="Courier New" pitchFamily="49" charset="0"/>
-              </a:rPr>
-              <a:t>res_rd</a:t>
-            </a:r>
-            <a:r>
-              <a:rPr lang="pt-PT" sz="1200" b="1" dirty="0">
-                <a:solidFill>
-                  <a:schemeClr val="tx1"/>
-                </a:solidFill>
-                <a:latin typeface="Courier New" pitchFamily="49" charset="0"/>
-                <a:cs typeface="Courier New" pitchFamily="49" charset="0"/>
-              </a:rPr>
-              <a:t> </a:t>
-            </a:r>
-            <a:r>
-              <a:rPr lang="pt-PT" sz="1200" dirty="0">
-                <a:solidFill>
-                  <a:schemeClr val="tx1"/>
-                </a:solidFill>
-                <a:latin typeface="Courier New" pitchFamily="49" charset="0"/>
-                <a:cs typeface="Courier New" pitchFamily="49" charset="0"/>
-              </a:rPr>
-              <a:t>&lt;-</a:t>
-            </a:r>
-            <a:r>
-              <a:rPr lang="pt-PT" sz="1200" b="1" dirty="0">
-                <a:solidFill>
-                  <a:schemeClr val="tx1"/>
-                </a:solidFill>
-                <a:latin typeface="Courier New" pitchFamily="49" charset="0"/>
-                <a:cs typeface="Courier New" pitchFamily="49" charset="0"/>
-              </a:rPr>
-              <a:t> </a:t>
-            </a:r>
-            <a:r>
-              <a:rPr lang="pt-PT" sz="1200" b="1" dirty="0" err="1">
-                <a:solidFill>
-                  <a:schemeClr val="tx1"/>
-                </a:solidFill>
-                <a:latin typeface="Courier New" pitchFamily="49" charset="0"/>
-                <a:cs typeface="Courier New" pitchFamily="49" charset="0"/>
-              </a:rPr>
-              <a:t>rpart</a:t>
-            </a:r>
-            <a:r>
-              <a:rPr lang="pt-PT" sz="1200" dirty="0">
-                <a:solidFill>
-                  <a:schemeClr val="tx1"/>
-                </a:solidFill>
-                <a:latin typeface="Courier New" pitchFamily="49" charset="0"/>
-                <a:cs typeface="Courier New" pitchFamily="49" charset="0"/>
-              </a:rPr>
-              <a:t>(</a:t>
-            </a:r>
-            <a:r>
-              <a:rPr lang="pt-PT" sz="1200" b="1" dirty="0">
-                <a:solidFill>
-                  <a:schemeClr val="tx1"/>
-                </a:solidFill>
-                <a:latin typeface="Courier New" pitchFamily="49" charset="0"/>
-                <a:cs typeface="Courier New" pitchFamily="49" charset="0"/>
-              </a:rPr>
-              <a:t>y </a:t>
-            </a:r>
-            <a:r>
-              <a:rPr lang="pt-PT" sz="1200" dirty="0">
-                <a:solidFill>
-                  <a:schemeClr val="tx1"/>
-                </a:solidFill>
-                <a:latin typeface="Courier New" pitchFamily="49" charset="0"/>
-                <a:cs typeface="Courier New" pitchFamily="49" charset="0"/>
-              </a:rPr>
-              <a:t>~</a:t>
-            </a:r>
-            <a:r>
-              <a:rPr lang="pt-PT" sz="1200" b="1" dirty="0">
-                <a:solidFill>
-                  <a:schemeClr val="tx1"/>
-                </a:solidFill>
-                <a:latin typeface="Courier New" pitchFamily="49" charset="0"/>
-                <a:cs typeface="Courier New" pitchFamily="49" charset="0"/>
-              </a:rPr>
-              <a:t> x1 </a:t>
-            </a:r>
-            <a:r>
-              <a:rPr lang="pt-PT" sz="1200" dirty="0">
-                <a:solidFill>
-                  <a:schemeClr val="tx1"/>
-                </a:solidFill>
-                <a:latin typeface="Courier New" pitchFamily="49" charset="0"/>
-                <a:cs typeface="Courier New" pitchFamily="49" charset="0"/>
-              </a:rPr>
-              <a:t>+</a:t>
-            </a:r>
-            <a:r>
-              <a:rPr lang="pt-PT" sz="1200" b="1" dirty="0">
-                <a:solidFill>
-                  <a:schemeClr val="tx1"/>
-                </a:solidFill>
-                <a:latin typeface="Courier New" pitchFamily="49" charset="0"/>
-                <a:cs typeface="Courier New" pitchFamily="49" charset="0"/>
-              </a:rPr>
-              <a:t> x2 </a:t>
-            </a:r>
-            <a:r>
-              <a:rPr lang="pt-PT" sz="1200" dirty="0">
-                <a:solidFill>
-                  <a:schemeClr val="tx1"/>
-                </a:solidFill>
-                <a:latin typeface="Courier New" pitchFamily="49" charset="0"/>
-                <a:cs typeface="Courier New" pitchFamily="49" charset="0"/>
-              </a:rPr>
-              <a:t>+</a:t>
-            </a:r>
-            <a:r>
-              <a:rPr lang="pt-PT" sz="1200" b="1" dirty="0">
-                <a:solidFill>
-                  <a:schemeClr val="tx1"/>
-                </a:solidFill>
-                <a:latin typeface="Courier New" pitchFamily="49" charset="0"/>
-                <a:cs typeface="Courier New" pitchFamily="49" charset="0"/>
-              </a:rPr>
-              <a:t> x3</a:t>
-            </a:r>
-            <a:r>
-              <a:rPr lang="pt-PT" sz="1200" dirty="0">
-                <a:solidFill>
-                  <a:schemeClr val="tx1"/>
-                </a:solidFill>
-                <a:latin typeface="Courier New" pitchFamily="49" charset="0"/>
-                <a:cs typeface="Courier New" pitchFamily="49" charset="0"/>
-              </a:rPr>
-              <a:t>,</a:t>
-            </a:r>
-            <a:r>
-              <a:rPr lang="pt-PT" sz="1200" b="1" dirty="0">
-                <a:solidFill>
-                  <a:schemeClr val="tx1"/>
-                </a:solidFill>
-                <a:latin typeface="Courier New" pitchFamily="49" charset="0"/>
-                <a:cs typeface="Courier New" pitchFamily="49" charset="0"/>
-              </a:rPr>
-              <a:t> data</a:t>
-            </a:r>
-            <a:r>
-              <a:rPr lang="pt-PT" sz="1200" dirty="0">
-                <a:solidFill>
-                  <a:schemeClr val="tx1"/>
-                </a:solidFill>
-                <a:latin typeface="Courier New" pitchFamily="49" charset="0"/>
-                <a:cs typeface="Courier New" pitchFamily="49" charset="0"/>
-              </a:rPr>
-              <a:t>=</a:t>
-            </a:r>
-            <a:r>
-              <a:rPr lang="pt-PT" sz="1200" b="1" dirty="0" err="1">
-                <a:solidFill>
-                  <a:schemeClr val="tx1"/>
-                </a:solidFill>
-                <a:latin typeface="Courier New" pitchFamily="49" charset="0"/>
-                <a:cs typeface="Courier New" pitchFamily="49" charset="0"/>
-              </a:rPr>
-              <a:t>tb_rf</a:t>
-            </a:r>
-            <a:r>
-              <a:rPr lang="pt-PT" sz="1200" dirty="0">
-                <a:solidFill>
-                  <a:schemeClr val="tx1"/>
-                </a:solidFill>
-                <a:latin typeface="Courier New" pitchFamily="49" charset="0"/>
-                <a:cs typeface="Courier New" pitchFamily="49" charset="0"/>
-              </a:rPr>
-              <a:t>,</a:t>
-            </a:r>
-            <a:r>
-              <a:rPr lang="pt-PT" sz="1200" b="1" dirty="0">
-                <a:solidFill>
-                  <a:schemeClr val="tx1"/>
-                </a:solidFill>
-                <a:latin typeface="Courier New" pitchFamily="49" charset="0"/>
-                <a:cs typeface="Courier New" pitchFamily="49" charset="0"/>
-              </a:rPr>
-              <a:t> </a:t>
-            </a:r>
-            <a:r>
-              <a:rPr lang="pt-PT" sz="1200" b="1" dirty="0" err="1">
-                <a:solidFill>
-                  <a:schemeClr val="tx1"/>
-                </a:solidFill>
-                <a:latin typeface="Courier New" pitchFamily="49" charset="0"/>
-                <a:cs typeface="Courier New" pitchFamily="49" charset="0"/>
-              </a:rPr>
-              <a:t>method</a:t>
-            </a:r>
-            <a:r>
-              <a:rPr lang="pt-PT" sz="1200" dirty="0">
-                <a:solidFill>
-                  <a:schemeClr val="tx1"/>
-                </a:solidFill>
-                <a:latin typeface="Courier New" pitchFamily="49" charset="0"/>
-                <a:cs typeface="Courier New" pitchFamily="49" charset="0"/>
-              </a:rPr>
-              <a:t>=</a:t>
-            </a:r>
-            <a:r>
-              <a:rPr lang="pt-PT" sz="1200" b="1" dirty="0">
-                <a:solidFill>
-                  <a:srgbClr val="00B050"/>
-                </a:solidFill>
-                <a:latin typeface="Courier New" pitchFamily="49" charset="0"/>
-                <a:cs typeface="Courier New" pitchFamily="49" charset="0"/>
-              </a:rPr>
-              <a:t>"</a:t>
-            </a:r>
-            <a:r>
-              <a:rPr lang="pt-PT" sz="1200" b="1" dirty="0" err="1">
-                <a:solidFill>
-                  <a:srgbClr val="00B050"/>
-                </a:solidFill>
-                <a:latin typeface="Courier New" pitchFamily="49" charset="0"/>
-                <a:cs typeface="Courier New" pitchFamily="49" charset="0"/>
-              </a:rPr>
-              <a:t>class</a:t>
-            </a:r>
-            <a:r>
-              <a:rPr lang="pt-PT" sz="1200" b="1" dirty="0">
-                <a:solidFill>
-                  <a:srgbClr val="00B050"/>
-                </a:solidFill>
-                <a:latin typeface="Courier New" pitchFamily="49" charset="0"/>
-                <a:cs typeface="Courier New" pitchFamily="49" charset="0"/>
-              </a:rPr>
-              <a:t>"</a:t>
-            </a:r>
-            <a:r>
-              <a:rPr lang="pt-PT" sz="1200" dirty="0">
-                <a:solidFill>
-                  <a:schemeClr val="tx1"/>
-                </a:solidFill>
-                <a:latin typeface="Courier New" pitchFamily="49" charset="0"/>
-                <a:cs typeface="Courier New" pitchFamily="49" charset="0"/>
-              </a:rPr>
-              <a:t>,</a:t>
-            </a:r>
-          </a:p>
-          <a:p>
-            <a:pPr algn="just">
-              <a:spcBef>
-                <a:spcPts val="600"/>
-              </a:spcBef>
-            </a:pPr>
-            <a:r>
-              <a:rPr lang="pt-PT" sz="1200" b="1" dirty="0">
-                <a:solidFill>
-                  <a:schemeClr val="tx1"/>
-                </a:solidFill>
-                <a:latin typeface="Courier New" pitchFamily="49" charset="0"/>
-                <a:cs typeface="Courier New" pitchFamily="49" charset="0"/>
-              </a:rPr>
-              <a:t>  </a:t>
-            </a:r>
-            <a:r>
-              <a:rPr lang="pt-PT" sz="1200" b="1" dirty="0" err="1">
-                <a:solidFill>
-                  <a:schemeClr val="tx1"/>
-                </a:solidFill>
-                <a:latin typeface="Courier New" pitchFamily="49" charset="0"/>
-                <a:cs typeface="Courier New" pitchFamily="49" charset="0"/>
-              </a:rPr>
-              <a:t>control</a:t>
-            </a:r>
-            <a:r>
-              <a:rPr lang="pt-PT" sz="1200" b="1" dirty="0">
-                <a:solidFill>
-                  <a:schemeClr val="tx1"/>
-                </a:solidFill>
-                <a:latin typeface="Courier New" pitchFamily="49" charset="0"/>
-                <a:cs typeface="Courier New" pitchFamily="49" charset="0"/>
-              </a:rPr>
-              <a:t> </a:t>
-            </a:r>
-            <a:r>
-              <a:rPr lang="pt-PT" sz="1200" dirty="0">
-                <a:solidFill>
-                  <a:schemeClr val="tx1"/>
-                </a:solidFill>
-                <a:latin typeface="Courier New" pitchFamily="49" charset="0"/>
-                <a:cs typeface="Courier New" pitchFamily="49" charset="0"/>
-              </a:rPr>
-              <a:t>= </a:t>
-            </a:r>
-            <a:r>
-              <a:rPr lang="pt-PT" sz="1200" b="1" dirty="0" err="1">
-                <a:solidFill>
-                  <a:schemeClr val="tx1"/>
-                </a:solidFill>
-                <a:latin typeface="Courier New" pitchFamily="49" charset="0"/>
-                <a:cs typeface="Courier New" pitchFamily="49" charset="0"/>
-              </a:rPr>
-              <a:t>rpart.control</a:t>
-            </a:r>
-            <a:r>
-              <a:rPr lang="pt-PT" sz="1200" dirty="0">
-                <a:solidFill>
-                  <a:schemeClr val="tx1"/>
-                </a:solidFill>
-                <a:latin typeface="Courier New" pitchFamily="49" charset="0"/>
-                <a:cs typeface="Courier New" pitchFamily="49" charset="0"/>
-              </a:rPr>
-              <a:t>(</a:t>
-            </a:r>
-            <a:r>
-              <a:rPr lang="pt-PT" sz="1200" b="1" dirty="0" err="1">
-                <a:solidFill>
-                  <a:schemeClr val="tx1"/>
-                </a:solidFill>
-                <a:latin typeface="Courier New" pitchFamily="49" charset="0"/>
-                <a:cs typeface="Courier New" pitchFamily="49" charset="0"/>
-              </a:rPr>
-              <a:t>minsplit</a:t>
-            </a:r>
-            <a:r>
-              <a:rPr lang="pt-PT" sz="1200" dirty="0">
-                <a:solidFill>
-                  <a:schemeClr val="tx1"/>
-                </a:solidFill>
-                <a:latin typeface="Courier New" pitchFamily="49" charset="0"/>
-                <a:cs typeface="Courier New" pitchFamily="49" charset="0"/>
-              </a:rPr>
-              <a:t>=</a:t>
-            </a:r>
-            <a:r>
-              <a:rPr lang="pt-PT" sz="1200" b="1" dirty="0">
-                <a:solidFill>
-                  <a:srgbClr val="0070C0"/>
-                </a:solidFill>
-                <a:latin typeface="Courier New" pitchFamily="49" charset="0"/>
-                <a:cs typeface="Courier New" pitchFamily="49" charset="0"/>
-              </a:rPr>
-              <a:t>5</a:t>
-            </a:r>
-            <a:r>
-              <a:rPr lang="pt-PT" sz="1200" dirty="0">
-                <a:solidFill>
-                  <a:schemeClr val="tx1"/>
-                </a:solidFill>
-                <a:latin typeface="Courier New" pitchFamily="49" charset="0"/>
-                <a:cs typeface="Courier New" pitchFamily="49" charset="0"/>
-              </a:rPr>
-              <a:t>))</a:t>
-            </a:r>
-          </a:p>
-          <a:p>
-            <a:pPr algn="just">
-              <a:spcBef>
-                <a:spcPts val="600"/>
-              </a:spcBef>
-            </a:pPr>
-            <a:endParaRPr lang="pt-PT" sz="1200" b="1" dirty="0">
+            <a:endParaRPr lang="pt-PT" sz="1200" dirty="0">
               <a:solidFill>
                 <a:schemeClr val="tx1"/>
               </a:solidFill>
@@ -30194,6 +30262,16 @@
               </a:spcBef>
             </a:pPr>
             <a:r>
+              <a:rPr lang="pt-PT" sz="1200" dirty="0">
+                <a:solidFill>
+                  <a:schemeClr val="tx1"/>
+                </a:solidFill>
+                <a:latin typeface="Courier New" pitchFamily="49" charset="0"/>
+                <a:cs typeface="Courier New" pitchFamily="49" charset="0"/>
+              </a:rPr>
+              <a:t>  </a:t>
+            </a:r>
+            <a:r>
               <a:rPr lang="pt-PT" sz="1200" b="1" dirty="0" err="1">
                 <a:solidFill>
                   <a:schemeClr val="tx1"/>
@@ -30201,10 +30279,10 @@
                 <a:latin typeface="Courier New" pitchFamily="49" charset="0"/>
                 <a:cs typeface="Courier New" pitchFamily="49" charset="0"/>
               </a:rPr>
-              <a:t>plot</a:t>
-            </a:r>
-            <a:r>
-              <a:rPr lang="pt-PT" sz="1200" b="1" dirty="0">
+              <a:t>facet_grid</a:t>
+            </a:r>
+            <a:r>
+              <a:rPr lang="pt-PT" sz="1200" dirty="0">
                 <a:solidFill>
                   <a:schemeClr val="tx1"/>
                 </a:solidFill>
@@ -30214,6 +30292,46 @@
               <a:t>(</a:t>
             </a:r>
             <a:r>
+              <a:rPr lang="pt-PT" sz="1200" b="1" dirty="0">
+                <a:solidFill>
+                  <a:schemeClr val="tx1"/>
+                </a:solidFill>
+                <a:latin typeface="Courier New" pitchFamily="49" charset="0"/>
+                <a:cs typeface="Courier New" pitchFamily="49" charset="0"/>
+              </a:rPr>
+              <a:t>x3</a:t>
+            </a:r>
+            <a:r>
+              <a:rPr lang="pt-PT" sz="1200" dirty="0">
+                <a:solidFill>
+                  <a:schemeClr val="tx1"/>
+                </a:solidFill>
+                <a:latin typeface="Courier New" pitchFamily="49" charset="0"/>
+                <a:cs typeface="Courier New" pitchFamily="49" charset="0"/>
+              </a:rPr>
+              <a:t> ~ </a:t>
+            </a:r>
+            <a:r>
+              <a:rPr lang="pt-PT" sz="1200" b="1" dirty="0">
+                <a:solidFill>
+                  <a:schemeClr val="tx1"/>
+                </a:solidFill>
+                <a:latin typeface="Courier New" pitchFamily="49" charset="0"/>
+                <a:cs typeface="Courier New" pitchFamily="49" charset="0"/>
+              </a:rPr>
+              <a:t>x2</a:t>
+            </a:r>
+            <a:r>
+              <a:rPr lang="pt-PT" sz="1200" dirty="0">
+                <a:solidFill>
+                  <a:schemeClr val="tx1"/>
+                </a:solidFill>
+                <a:latin typeface="Courier New" pitchFamily="49" charset="0"/>
+                <a:cs typeface="Courier New" pitchFamily="49" charset="0"/>
+              </a:rPr>
+              <a:t>, </a:t>
+            </a:r>
+            <a:r>
               <a:rPr lang="pt-PT" sz="1200" b="1" dirty="0" err="1">
                 <a:solidFill>
                   <a:schemeClr val="tx1"/>
@@ -30221,210 +30339,50 @@
                 <a:latin typeface="Courier New" pitchFamily="49" charset="0"/>
                 <a:cs typeface="Courier New" pitchFamily="49" charset="0"/>
               </a:rPr>
-              <a:t>res_rd</a:t>
-            </a:r>
-            <a:r>
-              <a:rPr lang="pt-PT" sz="1200" b="1" dirty="0">
-                <a:solidFill>
-                  <a:schemeClr val="tx1"/>
-                </a:solidFill>
-                <a:latin typeface="Courier New" pitchFamily="49" charset="0"/>
-                <a:cs typeface="Courier New" pitchFamily="49" charset="0"/>
-              </a:rPr>
-              <a:t>, </a:t>
+              <a:t>labeller</a:t>
+            </a:r>
+            <a:r>
+              <a:rPr lang="pt-PT" sz="1200" dirty="0">
+                <a:solidFill>
+                  <a:schemeClr val="tx1"/>
+                </a:solidFill>
+                <a:latin typeface="Courier New" pitchFamily="49" charset="0"/>
+                <a:cs typeface="Courier New" pitchFamily="49" charset="0"/>
+              </a:rPr>
+              <a:t> = </a:t>
+            </a:r>
+            <a:r>
+              <a:rPr lang="pt-PT" sz="1200" b="1" dirty="0">
+                <a:solidFill>
+                  <a:srgbClr val="00B050"/>
+                </a:solidFill>
+                <a:latin typeface="Courier New" pitchFamily="49" charset="0"/>
+                <a:cs typeface="Courier New" pitchFamily="49" charset="0"/>
+              </a:rPr>
+              <a:t>"</a:t>
             </a:r>
             <a:r>
               <a:rPr lang="pt-PT" sz="1200" b="1" dirty="0" err="1">
                 <a:solidFill>
-                  <a:schemeClr val="tx1"/>
-                </a:solidFill>
-                <a:latin typeface="Courier New" pitchFamily="49" charset="0"/>
-                <a:cs typeface="Courier New" pitchFamily="49" charset="0"/>
-              </a:rPr>
-              <a:t>branch</a:t>
-            </a:r>
-            <a:r>
-              <a:rPr lang="pt-PT" sz="1200" b="1" dirty="0">
-                <a:solidFill>
-                  <a:schemeClr val="tx1"/>
-                </a:solidFill>
-                <a:latin typeface="Courier New" pitchFamily="49" charset="0"/>
-                <a:cs typeface="Courier New" pitchFamily="49" charset="0"/>
-              </a:rPr>
-              <a:t>=</a:t>
-            </a:r>
-            <a:r>
-              <a:rPr lang="pt-PT" sz="1200" b="1" dirty="0">
-                <a:solidFill>
-                  <a:srgbClr val="0070C0"/>
-                </a:solidFill>
-                <a:latin typeface="Courier New" pitchFamily="49" charset="0"/>
-                <a:cs typeface="Courier New" pitchFamily="49" charset="0"/>
-              </a:rPr>
-              <a:t>0</a:t>
-            </a:r>
-            <a:r>
-              <a:rPr lang="pt-PT" sz="1200" b="1" dirty="0">
-                <a:solidFill>
-                  <a:schemeClr val="tx1"/>
-                </a:solidFill>
-                <a:latin typeface="Courier New" pitchFamily="49" charset="0"/>
-                <a:cs typeface="Courier New" pitchFamily="49" charset="0"/>
-              </a:rPr>
-              <a:t>, </a:t>
-            </a:r>
-            <a:r>
-              <a:rPr lang="pt-PT" sz="1200" b="1" dirty="0" err="1">
-                <a:solidFill>
-                  <a:schemeClr val="tx1"/>
-                </a:solidFill>
-                <a:latin typeface="Courier New" pitchFamily="49" charset="0"/>
-                <a:cs typeface="Courier New" pitchFamily="49" charset="0"/>
-              </a:rPr>
-              <a:t>margin</a:t>
-            </a:r>
-            <a:r>
-              <a:rPr lang="pt-PT" sz="1200" b="1" dirty="0">
-                <a:solidFill>
-                  <a:schemeClr val="tx1"/>
-                </a:solidFill>
-                <a:latin typeface="Courier New" pitchFamily="49" charset="0"/>
-                <a:cs typeface="Courier New" pitchFamily="49" charset="0"/>
-              </a:rPr>
-              <a:t>=</a:t>
-            </a:r>
-            <a:r>
-              <a:rPr lang="pt-PT" sz="1200" b="1" dirty="0">
-                <a:solidFill>
-                  <a:srgbClr val="0070C0"/>
-                </a:solidFill>
-                <a:latin typeface="Courier New" pitchFamily="49" charset="0"/>
-                <a:cs typeface="Courier New" pitchFamily="49" charset="0"/>
-              </a:rPr>
-              <a:t>0</a:t>
-            </a:r>
-            <a:r>
-              <a:rPr lang="pt-PT" sz="1200" b="1" dirty="0">
-                <a:solidFill>
-                  <a:schemeClr val="tx1"/>
-                </a:solidFill>
-                <a:latin typeface="Courier New" pitchFamily="49" charset="0"/>
-                <a:cs typeface="Courier New" pitchFamily="49" charset="0"/>
-              </a:rPr>
-              <a:t>.</a:t>
-            </a:r>
-            <a:r>
-              <a:rPr lang="pt-PT" sz="1200" b="1" dirty="0">
-                <a:solidFill>
-                  <a:srgbClr val="0070C0"/>
-                </a:solidFill>
-                <a:latin typeface="Courier New" pitchFamily="49" charset="0"/>
-                <a:cs typeface="Courier New" pitchFamily="49" charset="0"/>
-              </a:rPr>
-              <a:t>02</a:t>
-            </a:r>
-            <a:r>
-              <a:rPr lang="pt-PT" sz="1200" b="1" dirty="0">
-                <a:solidFill>
-                  <a:schemeClr val="tx1"/>
-                </a:solidFill>
-                <a:latin typeface="Courier New" pitchFamily="49" charset="0"/>
-                <a:cs typeface="Courier New" pitchFamily="49" charset="0"/>
-              </a:rPr>
-              <a:t>, </a:t>
-            </a:r>
-            <a:r>
-              <a:rPr lang="pt-PT" sz="1200" b="1" dirty="0" err="1">
-                <a:solidFill>
-                  <a:schemeClr val="tx1"/>
-                </a:solidFill>
-                <a:latin typeface="Courier New" pitchFamily="49" charset="0"/>
-                <a:cs typeface="Courier New" pitchFamily="49" charset="0"/>
-              </a:rPr>
-              <a:t>branch.lwd</a:t>
-            </a:r>
-            <a:r>
-              <a:rPr lang="pt-PT" sz="1200" b="1" dirty="0">
-                <a:solidFill>
-                  <a:schemeClr val="tx1"/>
-                </a:solidFill>
-                <a:latin typeface="Courier New" pitchFamily="49" charset="0"/>
-                <a:cs typeface="Courier New" pitchFamily="49" charset="0"/>
-              </a:rPr>
-              <a:t>=</a:t>
-            </a:r>
-            <a:r>
-              <a:rPr lang="pt-PT" sz="1200" b="1" dirty="0">
-                <a:solidFill>
-                  <a:srgbClr val="0070C0"/>
-                </a:solidFill>
-                <a:latin typeface="Courier New" pitchFamily="49" charset="0"/>
-                <a:cs typeface="Courier New" pitchFamily="49" charset="0"/>
-              </a:rPr>
-              <a:t>2</a:t>
-            </a:r>
-            <a:r>
-              <a:rPr lang="pt-PT" sz="1200" b="1" dirty="0">
-                <a:solidFill>
-                  <a:schemeClr val="tx1"/>
-                </a:solidFill>
-                <a:latin typeface="Courier New" pitchFamily="49" charset="0"/>
-                <a:cs typeface="Courier New" pitchFamily="49" charset="0"/>
-              </a:rPr>
-              <a:t>, </a:t>
-            </a:r>
-            <a:r>
-              <a:rPr lang="pt-PT" sz="1200" b="1" dirty="0" err="1">
-                <a:solidFill>
-                  <a:schemeClr val="tx1"/>
-                </a:solidFill>
-                <a:latin typeface="Courier New" pitchFamily="49" charset="0"/>
-                <a:cs typeface="Courier New" pitchFamily="49" charset="0"/>
-              </a:rPr>
-              <a:t>branch.col</a:t>
-            </a:r>
-            <a:r>
-              <a:rPr lang="pt-PT" sz="1200" b="1" dirty="0">
-                <a:solidFill>
-                  <a:schemeClr val="tx1"/>
-                </a:solidFill>
-                <a:latin typeface="Courier New" pitchFamily="49" charset="0"/>
-                <a:cs typeface="Courier New" pitchFamily="49" charset="0"/>
-              </a:rPr>
-              <a:t>=</a:t>
-            </a:r>
-            <a:r>
-              <a:rPr lang="pt-PT" sz="1200" b="1" dirty="0">
-                <a:solidFill>
                   <a:srgbClr val="00B050"/>
                 </a:solidFill>
                 <a:latin typeface="Courier New" pitchFamily="49" charset="0"/>
                 <a:cs typeface="Courier New" pitchFamily="49" charset="0"/>
               </a:rPr>
+              <a:t>label_both</a:t>
+            </a:r>
+            <a:r>
+              <a:rPr lang="pt-PT" sz="1200" b="1" dirty="0">
+                <a:solidFill>
+                  <a:srgbClr val="00B050"/>
+                </a:solidFill>
+                <a:latin typeface="Courier New" pitchFamily="49" charset="0"/>
+                <a:cs typeface="Courier New" pitchFamily="49" charset="0"/>
+              </a:rPr>
               <a:t>"</a:t>
             </a:r>
             <a:r>
-              <a:rPr lang="pt-PT" sz="1200" b="1" dirty="0" err="1">
-                <a:solidFill>
-                  <a:srgbClr val="00B050"/>
-                </a:solidFill>
-                <a:latin typeface="Courier New" pitchFamily="49" charset="0"/>
-                <a:cs typeface="Courier New" pitchFamily="49" charset="0"/>
-              </a:rPr>
-              <a:t>blue</a:t>
-            </a:r>
-            <a:r>
-              <a:rPr lang="pt-PT" sz="1200" b="1" dirty="0">
-                <a:solidFill>
-                  <a:srgbClr val="00B050"/>
-                </a:solidFill>
-                <a:latin typeface="Courier New" pitchFamily="49" charset="0"/>
-                <a:cs typeface="Courier New" pitchFamily="49" charset="0"/>
-              </a:rPr>
-              <a:t>"</a:t>
-            </a:r>
-            <a:r>
-              <a:rPr lang="pt-PT" sz="1200" b="1" dirty="0">
+              <a:rPr lang="pt-PT" sz="1200" dirty="0">
                 <a:solidFill>
                   <a:schemeClr val="tx1"/>
                 </a:solidFill>
@@ -30448,257 +30406,27 @@
                 <a:latin typeface="Courier New" pitchFamily="49" charset="0"/>
                 <a:cs typeface="Courier New" pitchFamily="49" charset="0"/>
               </a:rPr>
-              <a:t>text</a:t>
-            </a:r>
-            <a:r>
-              <a:rPr lang="pt-PT" sz="1200" b="1" dirty="0">
-                <a:solidFill>
-                  <a:schemeClr val="tx1"/>
-                </a:solidFill>
-                <a:latin typeface="Courier New" pitchFamily="49" charset="0"/>
-                <a:cs typeface="Courier New" pitchFamily="49" charset="0"/>
-              </a:rPr>
-              <a:t>(</a:t>
-            </a:r>
-            <a:r>
-              <a:rPr lang="pt-PT" sz="1200" b="1" dirty="0" err="1">
-                <a:solidFill>
-                  <a:schemeClr val="tx1"/>
-                </a:solidFill>
-                <a:latin typeface="Courier New" pitchFamily="49" charset="0"/>
-                <a:cs typeface="Courier New" pitchFamily="49" charset="0"/>
-              </a:rPr>
-              <a:t>res_rd</a:t>
-            </a:r>
-            <a:r>
-              <a:rPr lang="pt-PT" sz="1200" b="1" dirty="0">
-                <a:solidFill>
-                  <a:schemeClr val="tx1"/>
-                </a:solidFill>
-                <a:latin typeface="Courier New" pitchFamily="49" charset="0"/>
-                <a:cs typeface="Courier New" pitchFamily="49" charset="0"/>
-              </a:rPr>
-              <a:t>, </a:t>
-            </a:r>
-            <a:r>
-              <a:rPr lang="pt-PT" sz="1200" b="1" dirty="0" err="1">
-                <a:solidFill>
-                  <a:schemeClr val="tx1"/>
-                </a:solidFill>
-                <a:latin typeface="Courier New" pitchFamily="49" charset="0"/>
-                <a:cs typeface="Courier New" pitchFamily="49" charset="0"/>
-              </a:rPr>
-              <a:t>minlength</a:t>
-            </a:r>
-            <a:r>
-              <a:rPr lang="pt-PT" sz="1200" b="1" dirty="0">
-                <a:solidFill>
-                  <a:schemeClr val="tx1"/>
-                </a:solidFill>
-                <a:latin typeface="Courier New" pitchFamily="49" charset="0"/>
-                <a:cs typeface="Courier New" pitchFamily="49" charset="0"/>
-              </a:rPr>
-              <a:t>=</a:t>
-            </a:r>
-            <a:r>
-              <a:rPr lang="pt-PT" sz="1200" b="1" dirty="0">
-                <a:solidFill>
-                  <a:srgbClr val="0070C0"/>
-                </a:solidFill>
-                <a:latin typeface="Courier New" pitchFamily="49" charset="0"/>
-                <a:cs typeface="Courier New" pitchFamily="49" charset="0"/>
-              </a:rPr>
-              <a:t>2</a:t>
-            </a:r>
-            <a:r>
-              <a:rPr lang="pt-PT" sz="1200" b="1" dirty="0">
-                <a:solidFill>
-                  <a:schemeClr val="tx1"/>
-                </a:solidFill>
-                <a:latin typeface="Courier New" pitchFamily="49" charset="0"/>
-                <a:cs typeface="Courier New" pitchFamily="49" charset="0"/>
-              </a:rPr>
-              <a:t>, </a:t>
-            </a:r>
-            <a:r>
-              <a:rPr lang="pt-PT" sz="1200" b="1" dirty="0" err="1">
-                <a:solidFill>
-                  <a:schemeClr val="tx1"/>
-                </a:solidFill>
-                <a:latin typeface="Courier New" pitchFamily="49" charset="0"/>
-                <a:cs typeface="Courier New" pitchFamily="49" charset="0"/>
-              </a:rPr>
-              <a:t>use.n</a:t>
-            </a:r>
-            <a:r>
-              <a:rPr lang="pt-PT" sz="1200" b="1" dirty="0">
-                <a:solidFill>
-                  <a:schemeClr val="tx1"/>
-                </a:solidFill>
-                <a:latin typeface="Courier New" pitchFamily="49" charset="0"/>
-                <a:cs typeface="Courier New" pitchFamily="49" charset="0"/>
-              </a:rPr>
-              <a:t>=</a:t>
-            </a:r>
-            <a:r>
-              <a:rPr lang="pt-PT" sz="1200" b="1" dirty="0">
-                <a:solidFill>
-                  <a:srgbClr val="7030A0"/>
-                </a:solidFill>
-                <a:latin typeface="Courier New" pitchFamily="49" charset="0"/>
-                <a:cs typeface="Courier New" pitchFamily="49" charset="0"/>
-              </a:rPr>
-              <a:t>TRUE</a:t>
-            </a:r>
-            <a:r>
-              <a:rPr lang="pt-PT" sz="1200" b="1" dirty="0">
-                <a:solidFill>
-                  <a:schemeClr val="tx1"/>
-                </a:solidFill>
-                <a:latin typeface="Courier New" pitchFamily="49" charset="0"/>
-                <a:cs typeface="Courier New" pitchFamily="49" charset="0"/>
-              </a:rPr>
-              <a:t>, </a:t>
-            </a:r>
-            <a:r>
-              <a:rPr lang="pt-PT" sz="1200" b="1" dirty="0" err="1">
-                <a:solidFill>
-                  <a:schemeClr val="tx1"/>
-                </a:solidFill>
-                <a:latin typeface="Courier New" pitchFamily="49" charset="0"/>
-                <a:cs typeface="Courier New" pitchFamily="49" charset="0"/>
-              </a:rPr>
-              <a:t>fancy</a:t>
-            </a:r>
-            <a:r>
-              <a:rPr lang="pt-PT" sz="1200" b="1" dirty="0">
-                <a:solidFill>
-                  <a:schemeClr val="tx1"/>
-                </a:solidFill>
-                <a:latin typeface="Courier New" pitchFamily="49" charset="0"/>
-                <a:cs typeface="Courier New" pitchFamily="49" charset="0"/>
-              </a:rPr>
-              <a:t>=</a:t>
-            </a:r>
-            <a:r>
-              <a:rPr lang="pt-PT" sz="1200" b="1" dirty="0">
-                <a:solidFill>
-                  <a:srgbClr val="7030A0"/>
-                </a:solidFill>
-                <a:latin typeface="Courier New" pitchFamily="49" charset="0"/>
-                <a:cs typeface="Courier New" pitchFamily="49" charset="0"/>
-              </a:rPr>
-              <a:t>TRUE</a:t>
-            </a:r>
-            <a:r>
-              <a:rPr lang="pt-PT" sz="1200" b="1" dirty="0">
-                <a:solidFill>
-                  <a:schemeClr val="tx1"/>
-                </a:solidFill>
-                <a:latin typeface="Courier New" pitchFamily="49" charset="0"/>
-                <a:cs typeface="Courier New" pitchFamily="49" charset="0"/>
-              </a:rPr>
-              <a:t>, </a:t>
-            </a:r>
-            <a:r>
-              <a:rPr lang="pt-PT" sz="1200" b="1" dirty="0" err="1">
-                <a:solidFill>
-                  <a:schemeClr val="tx1"/>
-                </a:solidFill>
-                <a:latin typeface="Courier New" pitchFamily="49" charset="0"/>
-                <a:cs typeface="Courier New" pitchFamily="49" charset="0"/>
-              </a:rPr>
-              <a:t>fwidth</a:t>
-            </a:r>
-            <a:r>
-              <a:rPr lang="pt-PT" sz="1200" b="1" dirty="0">
-                <a:solidFill>
-                  <a:schemeClr val="tx1"/>
-                </a:solidFill>
-                <a:latin typeface="Courier New" pitchFamily="49" charset="0"/>
-                <a:cs typeface="Courier New" pitchFamily="49" charset="0"/>
-              </a:rPr>
-              <a:t>=</a:t>
-            </a:r>
-            <a:r>
-              <a:rPr lang="pt-PT" sz="1200" b="1" dirty="0">
-                <a:solidFill>
-                  <a:srgbClr val="0070C0"/>
-                </a:solidFill>
-                <a:latin typeface="Courier New" pitchFamily="49" charset="0"/>
-                <a:cs typeface="Courier New" pitchFamily="49" charset="0"/>
-              </a:rPr>
-              <a:t>1</a:t>
-            </a:r>
-            <a:r>
-              <a:rPr lang="pt-PT" sz="1200" b="1" dirty="0">
-                <a:solidFill>
-                  <a:schemeClr val="tx1"/>
-                </a:solidFill>
-                <a:latin typeface="Courier New" pitchFamily="49" charset="0"/>
-                <a:cs typeface="Courier New" pitchFamily="49" charset="0"/>
-              </a:rPr>
-              <a:t>.</a:t>
-            </a:r>
-            <a:r>
-              <a:rPr lang="pt-PT" sz="1200" b="1" dirty="0">
-                <a:solidFill>
-                  <a:srgbClr val="0070C0"/>
-                </a:solidFill>
-                <a:latin typeface="Courier New" pitchFamily="49" charset="0"/>
-                <a:cs typeface="Courier New" pitchFamily="49" charset="0"/>
-              </a:rPr>
-              <a:t>5</a:t>
-            </a:r>
-            <a:r>
-              <a:rPr lang="pt-PT" sz="1200" b="1" dirty="0">
-                <a:solidFill>
-                  <a:schemeClr val="tx1"/>
-                </a:solidFill>
-                <a:latin typeface="Courier New" pitchFamily="49" charset="0"/>
-                <a:cs typeface="Courier New" pitchFamily="49" charset="0"/>
-              </a:rPr>
-              <a:t>, </a:t>
-            </a:r>
-            <a:r>
-              <a:rPr lang="pt-PT" sz="1200" b="1" dirty="0" err="1">
-                <a:solidFill>
-                  <a:schemeClr val="tx1"/>
-                </a:solidFill>
-                <a:latin typeface="Courier New" pitchFamily="49" charset="0"/>
-                <a:cs typeface="Courier New" pitchFamily="49" charset="0"/>
-              </a:rPr>
-              <a:t>fheight</a:t>
-            </a:r>
-            <a:r>
-              <a:rPr lang="pt-PT" sz="1200" b="1" dirty="0">
-                <a:solidFill>
-                  <a:schemeClr val="tx1"/>
-                </a:solidFill>
-                <a:latin typeface="Courier New" pitchFamily="49" charset="0"/>
-                <a:cs typeface="Courier New" pitchFamily="49" charset="0"/>
-              </a:rPr>
-              <a:t>=</a:t>
-            </a:r>
-            <a:r>
-              <a:rPr lang="pt-PT" sz="1200" b="1" dirty="0">
-                <a:solidFill>
-                  <a:srgbClr val="0070C0"/>
-                </a:solidFill>
-                <a:latin typeface="Courier New" pitchFamily="49" charset="0"/>
-                <a:cs typeface="Courier New" pitchFamily="49" charset="0"/>
-              </a:rPr>
-              <a:t>1</a:t>
-            </a:r>
-            <a:r>
-              <a:rPr lang="pt-PT" sz="1200" b="1" dirty="0">
-                <a:solidFill>
-                  <a:schemeClr val="tx1"/>
-                </a:solidFill>
-                <a:latin typeface="Courier New" pitchFamily="49" charset="0"/>
-                <a:cs typeface="Courier New" pitchFamily="49" charset="0"/>
-              </a:rPr>
-              <a:t>,</a:t>
+              <a:t>tb_ml</a:t>
+            </a:r>
+            <a:r>
+              <a:rPr lang="pt-PT" sz="1200" b="1" dirty="0">
+                <a:solidFill>
+                  <a:schemeClr val="tx1"/>
+                </a:solidFill>
+                <a:latin typeface="Courier New" pitchFamily="49" charset="0"/>
+                <a:cs typeface="Courier New" pitchFamily="49" charset="0"/>
+              </a:rPr>
+              <a:t> </a:t>
+            </a:r>
+            <a:r>
+              <a:rPr lang="pt-PT" sz="1200" dirty="0">
+                <a:solidFill>
+                  <a:schemeClr val="tx1"/>
+                </a:solidFill>
+                <a:latin typeface="Courier New" pitchFamily="49" charset="0"/>
+                <a:cs typeface="Courier New" pitchFamily="49" charset="0"/>
+              </a:rPr>
+              <a:t>|&gt;</a:t>
             </a:r>
           </a:p>
           <a:p>
@@ -30725,10 +30453,50 @@
                 <a:latin typeface="Courier New" pitchFamily="49" charset="0"/>
                 <a:cs typeface="Courier New" pitchFamily="49" charset="0"/>
               </a:rPr>
-              <a:t>cex</a:t>
-            </a:r>
-            <a:r>
-              <a:rPr lang="pt-PT" sz="1200" b="1" dirty="0">
+              <a:t>ggplot</a:t>
+            </a:r>
+            <a:r>
+              <a:rPr lang="pt-PT" sz="1200" dirty="0">
+                <a:solidFill>
+                  <a:schemeClr val="tx1"/>
+                </a:solidFill>
+                <a:latin typeface="Courier New" pitchFamily="49" charset="0"/>
+                <a:cs typeface="Courier New" pitchFamily="49" charset="0"/>
+              </a:rPr>
+              <a:t>(</a:t>
+            </a:r>
+            <a:r>
+              <a:rPr lang="pt-PT" sz="1200" b="1" dirty="0" err="1">
+                <a:solidFill>
+                  <a:schemeClr val="tx1"/>
+                </a:solidFill>
+                <a:latin typeface="Courier New" pitchFamily="49" charset="0"/>
+                <a:cs typeface="Courier New" pitchFamily="49" charset="0"/>
+              </a:rPr>
+              <a:t>aes</a:t>
+            </a:r>
+            <a:r>
+              <a:rPr lang="pt-PT" sz="1200" dirty="0">
+                <a:solidFill>
+                  <a:schemeClr val="tx1"/>
+                </a:solidFill>
+                <a:latin typeface="Courier New" pitchFamily="49" charset="0"/>
+                <a:cs typeface="Courier New" pitchFamily="49" charset="0"/>
+              </a:rPr>
+              <a:t>(</a:t>
+            </a:r>
+            <a:r>
+              <a:rPr lang="pt-PT" sz="1200" b="1" dirty="0">
+                <a:solidFill>
+                  <a:schemeClr val="tx1"/>
+                </a:solidFill>
+                <a:latin typeface="Courier New" pitchFamily="49" charset="0"/>
+                <a:cs typeface="Courier New" pitchFamily="49" charset="0"/>
+              </a:rPr>
+              <a:t>x</a:t>
+            </a:r>
+            <a:r>
+              <a:rPr lang="pt-PT" sz="1200" dirty="0">
                 <a:solidFill>
                   <a:schemeClr val="tx1"/>
                 </a:solidFill>
@@ -30740,22 +30508,326 @@
             <a:r>
               <a:rPr lang="pt-PT" sz="1200" b="1" dirty="0">
                 <a:solidFill>
+                  <a:schemeClr val="tx1"/>
+                </a:solidFill>
+                <a:latin typeface="Courier New" pitchFamily="49" charset="0"/>
+                <a:cs typeface="Courier New" pitchFamily="49" charset="0"/>
+              </a:rPr>
+              <a:t>x</a:t>
+            </a:r>
+            <a:r>
+              <a:rPr lang="pt-PT" sz="1200" dirty="0">
+                <a:solidFill>
+                  <a:schemeClr val="tx1"/>
+                </a:solidFill>
+                <a:latin typeface="Courier New" pitchFamily="49" charset="0"/>
+                <a:cs typeface="Courier New" pitchFamily="49" charset="0"/>
+              </a:rPr>
+              <a:t>,</a:t>
+            </a:r>
+            <a:r>
+              <a:rPr lang="pt-PT" sz="1200" b="1" dirty="0">
+                <a:solidFill>
+                  <a:schemeClr val="tx1"/>
+                </a:solidFill>
+                <a:latin typeface="Courier New" pitchFamily="49" charset="0"/>
+                <a:cs typeface="Courier New" pitchFamily="49" charset="0"/>
+              </a:rPr>
+              <a:t> y</a:t>
+            </a:r>
+            <a:r>
+              <a:rPr lang="pt-PT" sz="1200" dirty="0">
+                <a:solidFill>
+                  <a:schemeClr val="tx1"/>
+                </a:solidFill>
+                <a:latin typeface="Courier New" pitchFamily="49" charset="0"/>
+                <a:cs typeface="Courier New" pitchFamily="49" charset="0"/>
+              </a:rPr>
+              <a:t>=</a:t>
+            </a:r>
+            <a:r>
+              <a:rPr lang="pt-PT" sz="1200" b="1" dirty="0">
+                <a:solidFill>
+                  <a:schemeClr val="tx1"/>
+                </a:solidFill>
+                <a:latin typeface="Courier New" pitchFamily="49" charset="0"/>
+                <a:cs typeface="Courier New" pitchFamily="49" charset="0"/>
+              </a:rPr>
+              <a:t>y</a:t>
+            </a:r>
+            <a:r>
+              <a:rPr lang="pt-PT" sz="1200" dirty="0">
+                <a:solidFill>
+                  <a:schemeClr val="tx1"/>
+                </a:solidFill>
+                <a:latin typeface="Courier New" pitchFamily="49" charset="0"/>
+                <a:cs typeface="Courier New" pitchFamily="49" charset="0"/>
+              </a:rPr>
+              <a:t>))</a:t>
+            </a:r>
+            <a:r>
+              <a:rPr lang="pt-PT" sz="1200" b="1" dirty="0">
+                <a:solidFill>
+                  <a:schemeClr val="tx1"/>
+                </a:solidFill>
+                <a:latin typeface="Courier New" pitchFamily="49" charset="0"/>
+                <a:cs typeface="Courier New" pitchFamily="49" charset="0"/>
+              </a:rPr>
+              <a:t> </a:t>
+            </a:r>
+            <a:r>
+              <a:rPr lang="pt-PT" sz="1200" dirty="0">
+                <a:solidFill>
+                  <a:schemeClr val="tx1"/>
+                </a:solidFill>
+                <a:latin typeface="Courier New" pitchFamily="49" charset="0"/>
+                <a:cs typeface="Courier New" pitchFamily="49" charset="0"/>
+              </a:rPr>
+              <a:t>+</a:t>
+            </a:r>
+          </a:p>
+          <a:p>
+            <a:pPr algn="just">
+              <a:spcBef>
+                <a:spcPts val="600"/>
+              </a:spcBef>
+            </a:pPr>
+            <a:r>
+              <a:rPr lang="pt-PT" sz="1200" dirty="0">
+                <a:solidFill>
+                  <a:schemeClr val="tx1"/>
+                </a:solidFill>
+                <a:latin typeface="Courier New" pitchFamily="49" charset="0"/>
+                <a:cs typeface="Courier New" pitchFamily="49" charset="0"/>
+              </a:rPr>
+              <a:t>  </a:t>
+            </a:r>
+            <a:r>
+              <a:rPr lang="en-US" sz="1200" b="1" dirty="0" err="1">
+                <a:solidFill>
+                  <a:schemeClr val="tx1"/>
+                </a:solidFill>
+                <a:latin typeface="Courier New" pitchFamily="49" charset="0"/>
+                <a:cs typeface="Courier New" pitchFamily="49" charset="0"/>
+              </a:rPr>
+              <a:t>geom_jitter</a:t>
+            </a:r>
+            <a:r>
+              <a:rPr lang="en-US" sz="1200" b="1" dirty="0">
+                <a:solidFill>
+                  <a:schemeClr val="tx1"/>
+                </a:solidFill>
+                <a:latin typeface="Courier New" pitchFamily="49" charset="0"/>
+                <a:cs typeface="Courier New" pitchFamily="49" charset="0"/>
+              </a:rPr>
+              <a:t>(height</a:t>
+            </a:r>
+            <a:r>
+              <a:rPr lang="en-US" sz="1200" dirty="0">
+                <a:solidFill>
+                  <a:schemeClr val="tx1"/>
+                </a:solidFill>
+                <a:latin typeface="Courier New" pitchFamily="49" charset="0"/>
+                <a:cs typeface="Courier New" pitchFamily="49" charset="0"/>
+              </a:rPr>
+              <a:t>=</a:t>
+            </a:r>
+            <a:r>
+              <a:rPr lang="en-US" sz="1200" b="1" dirty="0">
+                <a:solidFill>
                   <a:srgbClr val="0070C0"/>
                 </a:solidFill>
                 <a:latin typeface="Courier New" pitchFamily="49" charset="0"/>
                 <a:cs typeface="Courier New" pitchFamily="49" charset="0"/>
               </a:rPr>
+              <a:t>0.05</a:t>
+            </a:r>
+            <a:r>
+              <a:rPr lang="en-US" sz="1200" dirty="0">
+                <a:solidFill>
+                  <a:schemeClr val="tx1"/>
+                </a:solidFill>
+                <a:latin typeface="Courier New" pitchFamily="49" charset="0"/>
+                <a:cs typeface="Courier New" pitchFamily="49" charset="0"/>
+              </a:rPr>
+              <a:t>, </a:t>
+            </a:r>
+            <a:r>
+              <a:rPr lang="en-US" sz="1200" b="1" dirty="0">
+                <a:solidFill>
+                  <a:schemeClr val="tx1"/>
+                </a:solidFill>
+                <a:latin typeface="Courier New" pitchFamily="49" charset="0"/>
+                <a:cs typeface="Courier New" pitchFamily="49" charset="0"/>
+              </a:rPr>
+              <a:t>width</a:t>
+            </a:r>
+            <a:r>
+              <a:rPr lang="en-US" sz="1200" dirty="0">
+                <a:solidFill>
+                  <a:schemeClr val="tx1"/>
+                </a:solidFill>
+                <a:latin typeface="Courier New" pitchFamily="49" charset="0"/>
+                <a:cs typeface="Courier New" pitchFamily="49" charset="0"/>
+              </a:rPr>
+              <a:t>=</a:t>
+            </a:r>
+            <a:r>
+              <a:rPr lang="en-US" sz="1200" b="1" dirty="0">
+                <a:solidFill>
+                  <a:srgbClr val="0070C0"/>
+                </a:solidFill>
+                <a:latin typeface="Courier New" pitchFamily="49" charset="0"/>
+                <a:cs typeface="Courier New" pitchFamily="49" charset="0"/>
+              </a:rPr>
+              <a:t>0.05</a:t>
+            </a:r>
+            <a:r>
+              <a:rPr lang="en-US" sz="1200" dirty="0">
+                <a:solidFill>
+                  <a:schemeClr val="tx1"/>
+                </a:solidFill>
+                <a:latin typeface="Courier New" pitchFamily="49" charset="0"/>
+                <a:cs typeface="Courier New" pitchFamily="49" charset="0"/>
+              </a:rPr>
+              <a:t>, </a:t>
+            </a:r>
+            <a:r>
+              <a:rPr lang="en-US" sz="1200" b="1" dirty="0">
+                <a:solidFill>
+                  <a:schemeClr val="tx1"/>
+                </a:solidFill>
+                <a:latin typeface="Courier New" pitchFamily="49" charset="0"/>
+                <a:cs typeface="Courier New" pitchFamily="49" charset="0"/>
+              </a:rPr>
+              <a:t>alpha</a:t>
+            </a:r>
+            <a:r>
+              <a:rPr lang="en-US" sz="1200" dirty="0">
+                <a:solidFill>
+                  <a:schemeClr val="tx1"/>
+                </a:solidFill>
+                <a:latin typeface="Courier New" pitchFamily="49" charset="0"/>
+                <a:cs typeface="Courier New" pitchFamily="49" charset="0"/>
+              </a:rPr>
+              <a:t>=</a:t>
+            </a:r>
+            <a:r>
+              <a:rPr lang="en-US" sz="1200" b="1" dirty="0">
+                <a:solidFill>
+                  <a:srgbClr val="0070C0"/>
+                </a:solidFill>
+                <a:latin typeface="Courier New" pitchFamily="49" charset="0"/>
+                <a:cs typeface="Courier New" pitchFamily="49" charset="0"/>
+              </a:rPr>
+              <a:t>0.5</a:t>
+            </a:r>
+            <a:r>
+              <a:rPr lang="en-US" sz="1200" dirty="0">
+                <a:solidFill>
+                  <a:schemeClr val="tx1"/>
+                </a:solidFill>
+                <a:latin typeface="Courier New" pitchFamily="49" charset="0"/>
+                <a:cs typeface="Courier New" pitchFamily="49" charset="0"/>
+              </a:rPr>
+              <a:t>) +</a:t>
+            </a:r>
+          </a:p>
+          <a:p>
+            <a:pPr algn="just">
+              <a:spcBef>
+                <a:spcPts val="600"/>
+              </a:spcBef>
+            </a:pPr>
+            <a:r>
+              <a:rPr lang="pt-PT" sz="1200" dirty="0">
+                <a:solidFill>
+                  <a:schemeClr val="tx1"/>
+                </a:solidFill>
+                <a:latin typeface="Courier New" pitchFamily="49" charset="0"/>
+                <a:cs typeface="Courier New" pitchFamily="49" charset="0"/>
+              </a:rPr>
+              <a:t>  </a:t>
+            </a:r>
+            <a:r>
+              <a:rPr lang="pt-PT" sz="1200" b="1" dirty="0" err="1">
+                <a:solidFill>
+                  <a:schemeClr val="tx1"/>
+                </a:solidFill>
+                <a:latin typeface="Courier New" pitchFamily="49" charset="0"/>
+                <a:cs typeface="Courier New" pitchFamily="49" charset="0"/>
+              </a:rPr>
+              <a:t>geom_vline</a:t>
+            </a:r>
+            <a:r>
+              <a:rPr lang="pt-PT" sz="1200" dirty="0">
+                <a:solidFill>
+                  <a:schemeClr val="tx1"/>
+                </a:solidFill>
+                <a:latin typeface="Courier New" pitchFamily="49" charset="0"/>
+                <a:cs typeface="Courier New" pitchFamily="49" charset="0"/>
+              </a:rPr>
+              <a:t>(</a:t>
+            </a:r>
+            <a:r>
+              <a:rPr lang="pt-PT" sz="1200" b="1" dirty="0" err="1">
+                <a:solidFill>
+                  <a:schemeClr val="tx1"/>
+                </a:solidFill>
+                <a:latin typeface="Courier New" pitchFamily="49" charset="0"/>
+                <a:cs typeface="Courier New" pitchFamily="49" charset="0"/>
+              </a:rPr>
+              <a:t>xintercept</a:t>
+            </a:r>
+            <a:r>
+              <a:rPr lang="pt-PT" sz="1200" dirty="0">
+                <a:solidFill>
+                  <a:schemeClr val="tx1"/>
+                </a:solidFill>
+                <a:latin typeface="Courier New" pitchFamily="49" charset="0"/>
+                <a:cs typeface="Courier New" pitchFamily="49" charset="0"/>
+              </a:rPr>
+              <a:t>=</a:t>
+            </a:r>
+            <a:r>
+              <a:rPr lang="pt-PT" sz="1200" b="1" dirty="0">
+                <a:solidFill>
+                  <a:srgbClr val="0070C0"/>
+                </a:solidFill>
+                <a:latin typeface="Courier New" pitchFamily="49" charset="0"/>
+                <a:cs typeface="Courier New" pitchFamily="49" charset="0"/>
+              </a:rPr>
               <a:t>0</a:t>
             </a:r>
             <a:r>
-              <a:rPr lang="pt-PT" sz="1200" b="1" dirty="0">
-                <a:solidFill>
-                  <a:schemeClr val="tx1"/>
-                </a:solidFill>
-                <a:latin typeface="Courier New" pitchFamily="49" charset="0"/>
-                <a:cs typeface="Courier New" pitchFamily="49" charset="0"/>
-              </a:rPr>
-              <a:t>.</a:t>
+              <a:rPr lang="pt-PT" sz="1200" dirty="0">
+                <a:solidFill>
+                  <a:schemeClr val="tx1"/>
+                </a:solidFill>
+                <a:latin typeface="Courier New" pitchFamily="49" charset="0"/>
+                <a:cs typeface="Courier New" pitchFamily="49" charset="0"/>
+              </a:rPr>
+              <a:t>, </a:t>
+            </a:r>
+            <a:r>
+              <a:rPr lang="pt-PT" sz="1200" b="1" dirty="0" err="1">
+                <a:solidFill>
+                  <a:schemeClr val="tx1"/>
+                </a:solidFill>
+                <a:latin typeface="Courier New" pitchFamily="49" charset="0"/>
+                <a:cs typeface="Courier New" pitchFamily="49" charset="0"/>
+              </a:rPr>
+              <a:t>linetype</a:t>
+            </a:r>
+            <a:r>
+              <a:rPr lang="pt-PT" sz="1200" dirty="0">
+                <a:solidFill>
+                  <a:schemeClr val="tx1"/>
+                </a:solidFill>
+                <a:latin typeface="Courier New" pitchFamily="49" charset="0"/>
+                <a:cs typeface="Courier New" pitchFamily="49" charset="0"/>
+              </a:rPr>
+              <a:t>=</a:t>
             </a:r>
             <a:r>
               <a:rPr lang="pt-PT" sz="1200" b="1" dirty="0">
@@ -30765,10 +30837,10 @@
                 <a:latin typeface="Courier New" pitchFamily="49" charset="0"/>
                 <a:cs typeface="Courier New" pitchFamily="49" charset="0"/>
               </a:rPr>
-              <a:t>8</a:t>
-            </a:r>
-            <a:r>
-              <a:rPr lang="pt-PT" sz="1200" b="1" dirty="0">
+              <a:t>3</a:t>
+            </a:r>
+            <a:r>
+              <a:rPr lang="pt-PT" sz="1200" dirty="0">
                 <a:solidFill>
                   <a:schemeClr val="tx1"/>
                 </a:solidFill>
@@ -30785,10 +30857,10 @@
                 <a:latin typeface="Courier New" pitchFamily="49" charset="0"/>
                 <a:cs typeface="Courier New" pitchFamily="49" charset="0"/>
               </a:rPr>
-              <a:t>font</a:t>
-            </a:r>
-            <a:r>
-              <a:rPr lang="pt-PT" sz="1200" b="1" dirty="0">
+              <a:t>linewidth</a:t>
+            </a:r>
+            <a:r>
+              <a:rPr lang="pt-PT" sz="1200" dirty="0">
                 <a:solidFill>
                   <a:schemeClr val="tx1"/>
                 </a:solidFill>
@@ -30805,10 +30877,10 @@
                 <a:latin typeface="Courier New" pitchFamily="49" charset="0"/>
                 <a:cs typeface="Courier New" pitchFamily="49" charset="0"/>
               </a:rPr>
-              <a:t>2</a:t>
-            </a:r>
-            <a:r>
-              <a:rPr lang="pt-PT" sz="1200" b="1" dirty="0">
+              <a:t>0.5</a:t>
+            </a:r>
+            <a:r>
+              <a:rPr lang="pt-PT" sz="1200" dirty="0">
                 <a:solidFill>
                   <a:schemeClr val="tx1"/>
                 </a:solidFill>
@@ -30879,7 +30951,7 @@
               <a:t> </a:t>
             </a:r>
             <a:r>
-              <a:rPr lang="pt-PT" sz="2800" dirty="0">
+              <a:rPr lang="pt-PT" sz="2800" i="1" dirty="0" err="1">
                 <a:solidFill>
                   <a:schemeClr val="bg1">
                     <a:lumMod val="50000"/>
@@ -30887,9 +30959,42 @@
                 </a:solidFill>
                 <a:latin typeface="Humnst777 BT" pitchFamily="34" charset="0"/>
               </a:rPr>
-              <a:t>Árvores de decisão</a:t>
-            </a:r>
-            <a:endParaRPr lang="pt-PT" sz="2800" b="1" i="1" dirty="0">
+              <a:t>Machine</a:t>
+            </a:r>
+            <a:r>
+              <a:rPr lang="pt-PT" sz="2800" i="1" dirty="0">
+                <a:solidFill>
+                  <a:schemeClr val="bg1">
+                    <a:lumMod val="50000"/>
+                  </a:schemeClr>
+                </a:solidFill>
+                <a:latin typeface="Humnst777 BT" pitchFamily="34" charset="0"/>
+              </a:rPr>
+              <a:t> </a:t>
+            </a:r>
+            <a:r>
+              <a:rPr lang="pt-PT" sz="2800" i="1" dirty="0" err="1">
+                <a:solidFill>
+                  <a:schemeClr val="bg1">
+                    <a:lumMod val="50000"/>
+                  </a:schemeClr>
+                </a:solidFill>
+                <a:latin typeface="Humnst777 BT" pitchFamily="34" charset="0"/>
+              </a:rPr>
+              <a:t>Learning</a:t>
+            </a:r>
+            <a:r>
+              <a:rPr lang="pt-PT" sz="2800" dirty="0">
+                <a:solidFill>
+                  <a:schemeClr val="bg1">
+                    <a:lumMod val="50000"/>
+                  </a:schemeClr>
+                </a:solidFill>
+                <a:latin typeface="Humnst777 BT" pitchFamily="34" charset="0"/>
+              </a:rPr>
+              <a:t>: Dados</a:t>
+            </a:r>
+            <a:endParaRPr lang="pt-PT" sz="2800" b="1" dirty="0">
               <a:solidFill>
                 <a:schemeClr val="bg1">
                   <a:lumMod val="50000"/>
@@ -30932,10 +31037,10 @@
       </p:grpSpPr>
       <p:pic>
         <p:nvPicPr>
-          <p:cNvPr id="11" name="Picture 10" descr="A diagram of a mathematical equation&#10;&#10;Description automatically generated">
+          <p:cNvPr id="13" name="Picture 12">
             <a:extLst>
               <a:ext uri="{FF2B5EF4-FFF2-40B4-BE49-F238E27FC236}">
-                <a16:creationId xmlns:a16="http://schemas.microsoft.com/office/drawing/2014/main" id="{41FE373F-87EA-14B1-DF58-E4A335B79270}"/>
+                <a16:creationId xmlns:a16="http://schemas.microsoft.com/office/drawing/2014/main" id="{FCDC5047-31B2-0F7F-2640-DF7974A2D75A}"/>
               </a:ext>
             </a:extLst>
           </p:cNvPr>
@@ -30958,8 +31063,8 @@
         </p:blipFill>
         <p:spPr>
           <a:xfrm>
-            <a:off x="3006036" y="2133600"/>
-            <a:ext cx="6186309" cy="4064926"/>
+            <a:off x="2280377" y="2136251"/>
+            <a:ext cx="7558222" cy="4064926"/>
           </a:xfrm>
           <a:prstGeom prst="rect">
             <a:avLst/>
@@ -31189,7 +31294,7 @@
               <a:t> </a:t>
             </a:r>
             <a:r>
-              <a:rPr lang="pt-PT" sz="2800" dirty="0">
+              <a:rPr lang="pt-PT" sz="2800" i="1" dirty="0" err="1">
                 <a:solidFill>
                   <a:schemeClr val="bg1">
                     <a:lumMod val="50000"/>
@@ -31197,7 +31302,40 @@
                 </a:solidFill>
                 <a:latin typeface="Humnst777 BT" pitchFamily="34" charset="0"/>
               </a:rPr>
-              <a:t>Árvores de decisão</a:t>
+              <a:t>Machine</a:t>
+            </a:r>
+            <a:r>
+              <a:rPr lang="pt-PT" sz="2800" i="1" dirty="0">
+                <a:solidFill>
+                  <a:schemeClr val="bg1">
+                    <a:lumMod val="50000"/>
+                  </a:schemeClr>
+                </a:solidFill>
+                <a:latin typeface="Humnst777 BT" pitchFamily="34" charset="0"/>
+              </a:rPr>
+              <a:t> </a:t>
+            </a:r>
+            <a:r>
+              <a:rPr lang="pt-PT" sz="2800" i="1" dirty="0" err="1">
+                <a:solidFill>
+                  <a:schemeClr val="bg1">
+                    <a:lumMod val="50000"/>
+                  </a:schemeClr>
+                </a:solidFill>
+                <a:latin typeface="Humnst777 BT" pitchFamily="34" charset="0"/>
+              </a:rPr>
+              <a:t>Learning</a:t>
+            </a:r>
+            <a:r>
+              <a:rPr lang="pt-PT" sz="2800" dirty="0">
+                <a:solidFill>
+                  <a:schemeClr val="bg1">
+                    <a:lumMod val="50000"/>
+                  </a:schemeClr>
+                </a:solidFill>
+                <a:latin typeface="Humnst777 BT" pitchFamily="34" charset="0"/>
+              </a:rPr>
+              <a:t>: Dados</a:t>
             </a:r>
             <a:endParaRPr lang="pt-PT" sz="2800" b="1" i="1" dirty="0">
               <a:solidFill>
@@ -31224,6 +31362,3646 @@
 </file>
 
 <file path=ppt/slides/slide32.xml><?xml version="1.0" encoding="utf-8"?>
+<p:sld xmlns:a="http://schemas.openxmlformats.org/drawingml/2006/main" xmlns:r="http://schemas.openxmlformats.org/officeDocument/2006/relationships" xmlns:p="http://schemas.openxmlformats.org/presentationml/2006/main">
+  <p:cSld>
+    <p:spTree>
+      <p:nvGrpSpPr>
+        <p:cNvPr id="1" name="">
+          <a:extLst>
+            <a:ext uri="{FF2B5EF4-FFF2-40B4-BE49-F238E27FC236}">
+              <a16:creationId xmlns:a16="http://schemas.microsoft.com/office/drawing/2014/main" id="{7E41076E-B8CE-BE66-7463-BD4BA377B323}"/>
+            </a:ext>
+          </a:extLst>
+        </p:cNvPr>
+        <p:cNvGrpSpPr/>
+        <p:nvPr/>
+      </p:nvGrpSpPr>
+      <p:grpSpPr>
+        <a:xfrm>
+          <a:off x="0" y="0"/>
+          <a:ext cx="0" cy="0"/>
+          <a:chOff x="0" y="0"/>
+          <a:chExt cx="0" cy="0"/>
+        </a:xfrm>
+      </p:grpSpPr>
+      <p:sp>
+        <p:nvSpPr>
+          <p:cNvPr id="17413" name="Text Box 39">
+            <a:extLst>
+              <a:ext uri="{FF2B5EF4-FFF2-40B4-BE49-F238E27FC236}">
+                <a16:creationId xmlns:a16="http://schemas.microsoft.com/office/drawing/2014/main" id="{56BC6236-A143-C97D-77CA-B8C956B97EFA}"/>
+              </a:ext>
+            </a:extLst>
+          </p:cNvPr>
+          <p:cNvSpPr txBox="1">
+            <a:spLocks noChangeArrowheads="1"/>
+          </p:cNvSpPr>
+          <p:nvPr/>
+        </p:nvSpPr>
+        <p:spPr bwMode="auto">
+          <a:xfrm rot="5400000" flipV="1">
+            <a:off x="9299576" y="946151"/>
+            <a:ext cx="504825" cy="1006475"/>
+          </a:xfrm>
+          <a:prstGeom prst="rect">
+            <a:avLst/>
+          </a:prstGeom>
+          <a:noFill/>
+          <a:ln w="9525">
+            <a:noFill/>
+            <a:miter lim="800000"/>
+            <a:headEnd/>
+            <a:tailEnd/>
+          </a:ln>
+        </p:spPr>
+        <p:txBody>
+          <a:bodyPr>
+            <a:spAutoFit/>
+          </a:bodyPr>
+          <a:lstStyle/>
+          <a:p>
+            <a:r>
+              <a:rPr lang="pt-PT">
+                <a:solidFill>
+                  <a:srgbClr val="CC301F"/>
+                </a:solidFill>
+              </a:rPr>
+              <a:t>«</a:t>
+            </a:r>
+          </a:p>
+        </p:txBody>
+      </p:sp>
+      <p:sp>
+        <p:nvSpPr>
+          <p:cNvPr id="8194" name="Rectangle 2">
+            <a:extLst>
+              <a:ext uri="{FF2B5EF4-FFF2-40B4-BE49-F238E27FC236}">
+                <a16:creationId xmlns:a16="http://schemas.microsoft.com/office/drawing/2014/main" id="{060E1B81-C50D-BF70-2B0D-CCDE627D4C73}"/>
+              </a:ext>
+            </a:extLst>
+          </p:cNvPr>
+          <p:cNvSpPr>
+            <a:spLocks noChangeArrowheads="1"/>
+          </p:cNvSpPr>
+          <p:nvPr/>
+        </p:nvSpPr>
+        <p:spPr bwMode="auto">
+          <a:xfrm>
+            <a:off x="1524001" y="-507831"/>
+            <a:ext cx="184731" cy="1015663"/>
+          </a:xfrm>
+          <a:prstGeom prst="rect">
+            <a:avLst/>
+          </a:prstGeom>
+          <a:noFill/>
+          <a:ln w="9525">
+            <a:noFill/>
+            <a:miter lim="800000"/>
+            <a:headEnd/>
+            <a:tailEnd/>
+          </a:ln>
+          <a:effectLst/>
+        </p:spPr>
+        <p:txBody>
+          <a:bodyPr vert="horz" wrap="none" lIns="91440" tIns="45720" rIns="91440" bIns="45720" numCol="1" anchor="ctr" anchorCtr="0" compatLnSpc="1">
+            <a:prstTxWarp prst="textNoShape">
+              <a:avLst/>
+            </a:prstTxWarp>
+            <a:spAutoFit/>
+          </a:bodyPr>
+          <a:lstStyle/>
+          <a:p>
+            <a:endParaRPr lang="en-US"/>
+          </a:p>
+        </p:txBody>
+      </p:sp>
+      <p:sp>
+        <p:nvSpPr>
+          <p:cNvPr id="8196" name="Rectangle 4">
+            <a:extLst>
+              <a:ext uri="{FF2B5EF4-FFF2-40B4-BE49-F238E27FC236}">
+                <a16:creationId xmlns:a16="http://schemas.microsoft.com/office/drawing/2014/main" id="{41E08636-42A7-99A2-4CD6-9D6D8F59F341}"/>
+              </a:ext>
+            </a:extLst>
+          </p:cNvPr>
+          <p:cNvSpPr>
+            <a:spLocks noChangeArrowheads="1"/>
+          </p:cNvSpPr>
+          <p:nvPr/>
+        </p:nvSpPr>
+        <p:spPr bwMode="auto">
+          <a:xfrm>
+            <a:off x="1524001" y="-507831"/>
+            <a:ext cx="184731" cy="1015663"/>
+          </a:xfrm>
+          <a:prstGeom prst="rect">
+            <a:avLst/>
+          </a:prstGeom>
+          <a:noFill/>
+          <a:ln w="9525">
+            <a:noFill/>
+            <a:miter lim="800000"/>
+            <a:headEnd/>
+            <a:tailEnd/>
+          </a:ln>
+          <a:effectLst/>
+        </p:spPr>
+        <p:txBody>
+          <a:bodyPr vert="horz" wrap="none" lIns="91440" tIns="45720" rIns="91440" bIns="45720" numCol="1" anchor="ctr" anchorCtr="0" compatLnSpc="1">
+            <a:prstTxWarp prst="textNoShape">
+              <a:avLst/>
+            </a:prstTxWarp>
+            <a:spAutoFit/>
+          </a:bodyPr>
+          <a:lstStyle/>
+          <a:p>
+            <a:endParaRPr lang="en-US"/>
+          </a:p>
+        </p:txBody>
+      </p:sp>
+      <p:sp>
+        <p:nvSpPr>
+          <p:cNvPr id="14" name="Rectangle 38">
+            <a:extLst>
+              <a:ext uri="{FF2B5EF4-FFF2-40B4-BE49-F238E27FC236}">
+                <a16:creationId xmlns:a16="http://schemas.microsoft.com/office/drawing/2014/main" id="{AE64D192-637F-33B3-4B78-39C5D424D4B4}"/>
+              </a:ext>
+            </a:extLst>
+          </p:cNvPr>
+          <p:cNvSpPr>
+            <a:spLocks noChangeArrowheads="1"/>
+          </p:cNvSpPr>
+          <p:nvPr/>
+        </p:nvSpPr>
+        <p:spPr bwMode="auto">
+          <a:xfrm>
+            <a:off x="4295776" y="404814"/>
+            <a:ext cx="6048375" cy="854075"/>
+          </a:xfrm>
+          <a:prstGeom prst="rect">
+            <a:avLst/>
+          </a:prstGeom>
+          <a:noFill/>
+          <a:ln w="9525">
+            <a:noFill/>
+            <a:miter lim="800000"/>
+            <a:headEnd/>
+            <a:tailEnd/>
+          </a:ln>
+        </p:spPr>
+        <p:txBody>
+          <a:bodyPr anchor="ctr"/>
+          <a:lstStyle/>
+          <a:p>
+            <a:pPr algn="r">
+              <a:spcBef>
+                <a:spcPct val="0"/>
+              </a:spcBef>
+            </a:pPr>
+            <a:r>
+              <a:rPr lang="pt-PT" sz="3800" dirty="0">
+                <a:solidFill>
+                  <a:schemeClr val="bg1">
+                    <a:lumMod val="50000"/>
+                  </a:schemeClr>
+                </a:solidFill>
+                <a:latin typeface="Humnst777 BT" pitchFamily="34" charset="0"/>
+              </a:rPr>
+              <a:t>Modelos</a:t>
+            </a:r>
+          </a:p>
+        </p:txBody>
+      </p:sp>
+      <p:sp>
+        <p:nvSpPr>
+          <p:cNvPr id="3" name="Text Box 13">
+            <a:extLst>
+              <a:ext uri="{FF2B5EF4-FFF2-40B4-BE49-F238E27FC236}">
+                <a16:creationId xmlns:a16="http://schemas.microsoft.com/office/drawing/2014/main" id="{A1D9BDCF-1806-094E-B6B1-76758D89CF43}"/>
+              </a:ext>
+            </a:extLst>
+          </p:cNvPr>
+          <p:cNvSpPr txBox="1">
+            <a:spLocks noChangeArrowheads="1"/>
+          </p:cNvSpPr>
+          <p:nvPr/>
+        </p:nvSpPr>
+        <p:spPr bwMode="auto">
+          <a:xfrm>
+            <a:off x="2315804" y="2153756"/>
+            <a:ext cx="7560392" cy="3416320"/>
+          </a:xfrm>
+          <a:prstGeom prst="rect">
+            <a:avLst/>
+          </a:prstGeom>
+          <a:solidFill>
+            <a:schemeClr val="bg1">
+              <a:lumMod val="95000"/>
+            </a:schemeClr>
+          </a:solidFill>
+          <a:ln w="9525">
+            <a:solidFill>
+              <a:schemeClr val="tx1"/>
+            </a:solidFill>
+            <a:miter lim="800000"/>
+            <a:headEnd/>
+            <a:tailEnd/>
+          </a:ln>
+        </p:spPr>
+        <p:txBody>
+          <a:bodyPr wrap="square">
+            <a:spAutoFit/>
+          </a:bodyPr>
+          <a:lstStyle/>
+          <a:p>
+            <a:pPr algn="just">
+              <a:spcBef>
+                <a:spcPts val="600"/>
+              </a:spcBef>
+            </a:pPr>
+            <a:r>
+              <a:rPr lang="pt-PT" sz="1200" b="1" dirty="0" err="1">
+                <a:solidFill>
+                  <a:srgbClr val="7030A0"/>
+                </a:solidFill>
+                <a:latin typeface="Courier New" pitchFamily="49" charset="0"/>
+                <a:cs typeface="Courier New" pitchFamily="49" charset="0"/>
+              </a:rPr>
+              <a:t>library</a:t>
+            </a:r>
+            <a:r>
+              <a:rPr lang="pt-PT" sz="1200" dirty="0">
+                <a:solidFill>
+                  <a:schemeClr val="tx1"/>
+                </a:solidFill>
+                <a:latin typeface="Courier New" pitchFamily="49" charset="0"/>
+                <a:cs typeface="Courier New" pitchFamily="49" charset="0"/>
+              </a:rPr>
+              <a:t>(</a:t>
+            </a:r>
+            <a:r>
+              <a:rPr lang="pt-PT" sz="1200" b="1" dirty="0">
+                <a:solidFill>
+                  <a:srgbClr val="00B050"/>
+                </a:solidFill>
+                <a:latin typeface="Courier New" pitchFamily="49" charset="0"/>
+                <a:cs typeface="Courier New" pitchFamily="49" charset="0"/>
+              </a:rPr>
+              <a:t>"</a:t>
+            </a:r>
+            <a:r>
+              <a:rPr lang="pt-PT" sz="1200" b="1" dirty="0" err="1">
+                <a:solidFill>
+                  <a:srgbClr val="00B050"/>
+                </a:solidFill>
+                <a:latin typeface="Courier New" pitchFamily="49" charset="0"/>
+                <a:cs typeface="Courier New" pitchFamily="49" charset="0"/>
+              </a:rPr>
+              <a:t>rpart</a:t>
+            </a:r>
+            <a:r>
+              <a:rPr lang="pt-PT" sz="1200" b="1" dirty="0">
+                <a:solidFill>
+                  <a:srgbClr val="00B050"/>
+                </a:solidFill>
+                <a:latin typeface="Courier New" pitchFamily="49" charset="0"/>
+                <a:cs typeface="Courier New" pitchFamily="49" charset="0"/>
+              </a:rPr>
+              <a:t>"</a:t>
+            </a:r>
+            <a:r>
+              <a:rPr lang="pt-PT" sz="1200" dirty="0">
+                <a:solidFill>
+                  <a:schemeClr val="tx1"/>
+                </a:solidFill>
+                <a:latin typeface="Courier New" pitchFamily="49" charset="0"/>
+                <a:cs typeface="Courier New" pitchFamily="49" charset="0"/>
+              </a:rPr>
+              <a:t>)</a:t>
+            </a:r>
+          </a:p>
+          <a:p>
+            <a:pPr algn="just">
+              <a:spcBef>
+                <a:spcPts val="600"/>
+              </a:spcBef>
+            </a:pPr>
+            <a:endParaRPr lang="pt-PT" sz="1200" b="1" dirty="0">
+              <a:solidFill>
+                <a:schemeClr val="tx1"/>
+              </a:solidFill>
+              <a:latin typeface="Courier New" pitchFamily="49" charset="0"/>
+              <a:cs typeface="Courier New" pitchFamily="49" charset="0"/>
+            </a:endParaRPr>
+          </a:p>
+          <a:p>
+            <a:pPr algn="just">
+              <a:spcBef>
+                <a:spcPts val="600"/>
+              </a:spcBef>
+            </a:pPr>
+            <a:r>
+              <a:rPr lang="pt-PT" sz="1200" b="1" dirty="0" err="1">
+                <a:solidFill>
+                  <a:schemeClr val="tx1"/>
+                </a:solidFill>
+                <a:latin typeface="Courier New" pitchFamily="49" charset="0"/>
+                <a:cs typeface="Courier New" pitchFamily="49" charset="0"/>
+              </a:rPr>
+              <a:t>res_rf</a:t>
+            </a:r>
+            <a:r>
+              <a:rPr lang="pt-PT" sz="1200" b="1" dirty="0">
+                <a:solidFill>
+                  <a:schemeClr val="tx1"/>
+                </a:solidFill>
+                <a:latin typeface="Courier New" pitchFamily="49" charset="0"/>
+                <a:cs typeface="Courier New" pitchFamily="49" charset="0"/>
+              </a:rPr>
+              <a:t> </a:t>
+            </a:r>
+            <a:r>
+              <a:rPr lang="pt-PT" sz="1200" dirty="0">
+                <a:solidFill>
+                  <a:schemeClr val="tx1"/>
+                </a:solidFill>
+                <a:latin typeface="Courier New" pitchFamily="49" charset="0"/>
+                <a:cs typeface="Courier New" pitchFamily="49" charset="0"/>
+              </a:rPr>
+              <a:t>&lt;-</a:t>
+            </a:r>
+            <a:r>
+              <a:rPr lang="pt-PT" sz="1200" b="1" dirty="0">
+                <a:solidFill>
+                  <a:schemeClr val="tx1"/>
+                </a:solidFill>
+                <a:latin typeface="Courier New" pitchFamily="49" charset="0"/>
+                <a:cs typeface="Courier New" pitchFamily="49" charset="0"/>
+              </a:rPr>
+              <a:t> </a:t>
+            </a:r>
+            <a:r>
+              <a:rPr lang="pt-PT" sz="1200" b="1" dirty="0" err="1">
+                <a:solidFill>
+                  <a:schemeClr val="tx1"/>
+                </a:solidFill>
+                <a:latin typeface="Courier New" pitchFamily="49" charset="0"/>
+                <a:cs typeface="Courier New" pitchFamily="49" charset="0"/>
+              </a:rPr>
+              <a:t>rpart</a:t>
+            </a:r>
+            <a:r>
+              <a:rPr lang="pt-PT" sz="1200" dirty="0">
+                <a:solidFill>
+                  <a:schemeClr val="tx1"/>
+                </a:solidFill>
+                <a:latin typeface="Courier New" pitchFamily="49" charset="0"/>
+                <a:cs typeface="Courier New" pitchFamily="49" charset="0"/>
+              </a:rPr>
+              <a:t>(</a:t>
+            </a:r>
+            <a:r>
+              <a:rPr lang="pt-PT" sz="1200" b="1" dirty="0">
+                <a:solidFill>
+                  <a:schemeClr val="tx1"/>
+                </a:solidFill>
+                <a:latin typeface="Courier New" pitchFamily="49" charset="0"/>
+                <a:cs typeface="Courier New" pitchFamily="49" charset="0"/>
+              </a:rPr>
+              <a:t>y </a:t>
+            </a:r>
+            <a:r>
+              <a:rPr lang="pt-PT" sz="1200" dirty="0">
+                <a:solidFill>
+                  <a:schemeClr val="tx1"/>
+                </a:solidFill>
+                <a:latin typeface="Courier New" pitchFamily="49" charset="0"/>
+                <a:cs typeface="Courier New" pitchFamily="49" charset="0"/>
+              </a:rPr>
+              <a:t>~</a:t>
+            </a:r>
+            <a:r>
+              <a:rPr lang="pt-PT" sz="1200" b="1" dirty="0">
+                <a:solidFill>
+                  <a:schemeClr val="tx1"/>
+                </a:solidFill>
+                <a:latin typeface="Courier New" pitchFamily="49" charset="0"/>
+                <a:cs typeface="Courier New" pitchFamily="49" charset="0"/>
+              </a:rPr>
+              <a:t> x1 </a:t>
+            </a:r>
+            <a:r>
+              <a:rPr lang="pt-PT" sz="1200" dirty="0">
+                <a:solidFill>
+                  <a:schemeClr val="tx1"/>
+                </a:solidFill>
+                <a:latin typeface="Courier New" pitchFamily="49" charset="0"/>
+                <a:cs typeface="Courier New" pitchFamily="49" charset="0"/>
+              </a:rPr>
+              <a:t>+</a:t>
+            </a:r>
+            <a:r>
+              <a:rPr lang="pt-PT" sz="1200" b="1" dirty="0">
+                <a:solidFill>
+                  <a:schemeClr val="tx1"/>
+                </a:solidFill>
+                <a:latin typeface="Courier New" pitchFamily="49" charset="0"/>
+                <a:cs typeface="Courier New" pitchFamily="49" charset="0"/>
+              </a:rPr>
+              <a:t> x2 </a:t>
+            </a:r>
+            <a:r>
+              <a:rPr lang="pt-PT" sz="1200" dirty="0">
+                <a:solidFill>
+                  <a:schemeClr val="tx1"/>
+                </a:solidFill>
+                <a:latin typeface="Courier New" pitchFamily="49" charset="0"/>
+                <a:cs typeface="Courier New" pitchFamily="49" charset="0"/>
+              </a:rPr>
+              <a:t>+</a:t>
+            </a:r>
+            <a:r>
+              <a:rPr lang="pt-PT" sz="1200" b="1" dirty="0">
+                <a:solidFill>
+                  <a:schemeClr val="tx1"/>
+                </a:solidFill>
+                <a:latin typeface="Courier New" pitchFamily="49" charset="0"/>
+                <a:cs typeface="Courier New" pitchFamily="49" charset="0"/>
+              </a:rPr>
+              <a:t> x3</a:t>
+            </a:r>
+            <a:r>
+              <a:rPr lang="pt-PT" sz="1200" dirty="0">
+                <a:solidFill>
+                  <a:schemeClr val="tx1"/>
+                </a:solidFill>
+                <a:latin typeface="Courier New" pitchFamily="49" charset="0"/>
+                <a:cs typeface="Courier New" pitchFamily="49" charset="0"/>
+              </a:rPr>
+              <a:t>,</a:t>
+            </a:r>
+            <a:r>
+              <a:rPr lang="pt-PT" sz="1200" b="1" dirty="0">
+                <a:solidFill>
+                  <a:schemeClr val="tx1"/>
+                </a:solidFill>
+                <a:latin typeface="Courier New" pitchFamily="49" charset="0"/>
+                <a:cs typeface="Courier New" pitchFamily="49" charset="0"/>
+              </a:rPr>
+              <a:t> data</a:t>
+            </a:r>
+            <a:r>
+              <a:rPr lang="pt-PT" sz="1200" dirty="0">
+                <a:solidFill>
+                  <a:schemeClr val="tx1"/>
+                </a:solidFill>
+                <a:latin typeface="Courier New" pitchFamily="49" charset="0"/>
+                <a:cs typeface="Courier New" pitchFamily="49" charset="0"/>
+              </a:rPr>
+              <a:t>=</a:t>
+            </a:r>
+            <a:r>
+              <a:rPr lang="pt-PT" sz="1200" b="1" dirty="0" err="1">
+                <a:solidFill>
+                  <a:schemeClr val="tx1"/>
+                </a:solidFill>
+                <a:latin typeface="Courier New" pitchFamily="49" charset="0"/>
+                <a:cs typeface="Courier New" pitchFamily="49" charset="0"/>
+              </a:rPr>
+              <a:t>tb_ml</a:t>
+            </a:r>
+            <a:r>
+              <a:rPr lang="pt-PT" sz="1200" dirty="0">
+                <a:solidFill>
+                  <a:schemeClr val="tx1"/>
+                </a:solidFill>
+                <a:latin typeface="Courier New" pitchFamily="49" charset="0"/>
+                <a:cs typeface="Courier New" pitchFamily="49" charset="0"/>
+              </a:rPr>
+              <a:t>,</a:t>
+            </a:r>
+            <a:r>
+              <a:rPr lang="pt-PT" sz="1200" b="1" dirty="0">
+                <a:solidFill>
+                  <a:schemeClr val="tx1"/>
+                </a:solidFill>
+                <a:latin typeface="Courier New" pitchFamily="49" charset="0"/>
+                <a:cs typeface="Courier New" pitchFamily="49" charset="0"/>
+              </a:rPr>
+              <a:t> </a:t>
+            </a:r>
+            <a:r>
+              <a:rPr lang="pt-PT" sz="1200" b="1" dirty="0" err="1">
+                <a:solidFill>
+                  <a:schemeClr val="tx1"/>
+                </a:solidFill>
+                <a:latin typeface="Courier New" pitchFamily="49" charset="0"/>
+                <a:cs typeface="Courier New" pitchFamily="49" charset="0"/>
+              </a:rPr>
+              <a:t>method</a:t>
+            </a:r>
+            <a:r>
+              <a:rPr lang="pt-PT" sz="1200" dirty="0">
+                <a:solidFill>
+                  <a:schemeClr val="tx1"/>
+                </a:solidFill>
+                <a:latin typeface="Courier New" pitchFamily="49" charset="0"/>
+                <a:cs typeface="Courier New" pitchFamily="49" charset="0"/>
+              </a:rPr>
+              <a:t>=</a:t>
+            </a:r>
+            <a:r>
+              <a:rPr lang="pt-PT" sz="1200" b="1" dirty="0">
+                <a:solidFill>
+                  <a:srgbClr val="00B050"/>
+                </a:solidFill>
+                <a:latin typeface="Courier New" pitchFamily="49" charset="0"/>
+                <a:cs typeface="Courier New" pitchFamily="49" charset="0"/>
+              </a:rPr>
+              <a:t>"</a:t>
+            </a:r>
+            <a:r>
+              <a:rPr lang="pt-PT" sz="1200" b="1" dirty="0" err="1">
+                <a:solidFill>
+                  <a:srgbClr val="00B050"/>
+                </a:solidFill>
+                <a:latin typeface="Courier New" pitchFamily="49" charset="0"/>
+                <a:cs typeface="Courier New" pitchFamily="49" charset="0"/>
+              </a:rPr>
+              <a:t>class</a:t>
+            </a:r>
+            <a:r>
+              <a:rPr lang="pt-PT" sz="1200" b="1" dirty="0">
+                <a:solidFill>
+                  <a:srgbClr val="00B050"/>
+                </a:solidFill>
+                <a:latin typeface="Courier New" pitchFamily="49" charset="0"/>
+                <a:cs typeface="Courier New" pitchFamily="49" charset="0"/>
+              </a:rPr>
+              <a:t>"</a:t>
+            </a:r>
+            <a:r>
+              <a:rPr lang="pt-PT" sz="1200" dirty="0">
+                <a:solidFill>
+                  <a:schemeClr val="tx1"/>
+                </a:solidFill>
+                <a:latin typeface="Courier New" pitchFamily="49" charset="0"/>
+                <a:cs typeface="Courier New" pitchFamily="49" charset="0"/>
+              </a:rPr>
+              <a:t>,</a:t>
+            </a:r>
+          </a:p>
+          <a:p>
+            <a:pPr algn="just">
+              <a:spcBef>
+                <a:spcPts val="600"/>
+              </a:spcBef>
+            </a:pPr>
+            <a:r>
+              <a:rPr lang="pt-PT" sz="1200" b="1" dirty="0">
+                <a:solidFill>
+                  <a:schemeClr val="tx1"/>
+                </a:solidFill>
+                <a:latin typeface="Courier New" pitchFamily="49" charset="0"/>
+                <a:cs typeface="Courier New" pitchFamily="49" charset="0"/>
+              </a:rPr>
+              <a:t>  </a:t>
+            </a:r>
+            <a:r>
+              <a:rPr lang="pt-PT" sz="1200" b="1" dirty="0" err="1">
+                <a:solidFill>
+                  <a:schemeClr val="tx1"/>
+                </a:solidFill>
+                <a:latin typeface="Courier New" pitchFamily="49" charset="0"/>
+                <a:cs typeface="Courier New" pitchFamily="49" charset="0"/>
+              </a:rPr>
+              <a:t>control</a:t>
+            </a:r>
+            <a:r>
+              <a:rPr lang="pt-PT" sz="1200" b="1" dirty="0">
+                <a:solidFill>
+                  <a:schemeClr val="tx1"/>
+                </a:solidFill>
+                <a:latin typeface="Courier New" pitchFamily="49" charset="0"/>
+                <a:cs typeface="Courier New" pitchFamily="49" charset="0"/>
+              </a:rPr>
+              <a:t> </a:t>
+            </a:r>
+            <a:r>
+              <a:rPr lang="pt-PT" sz="1200" dirty="0">
+                <a:solidFill>
+                  <a:schemeClr val="tx1"/>
+                </a:solidFill>
+                <a:latin typeface="Courier New" pitchFamily="49" charset="0"/>
+                <a:cs typeface="Courier New" pitchFamily="49" charset="0"/>
+              </a:rPr>
+              <a:t>= </a:t>
+            </a:r>
+            <a:r>
+              <a:rPr lang="pt-PT" sz="1200" b="1" dirty="0" err="1">
+                <a:solidFill>
+                  <a:schemeClr val="tx1"/>
+                </a:solidFill>
+                <a:latin typeface="Courier New" pitchFamily="49" charset="0"/>
+                <a:cs typeface="Courier New" pitchFamily="49" charset="0"/>
+              </a:rPr>
+              <a:t>rpart.control</a:t>
+            </a:r>
+            <a:r>
+              <a:rPr lang="pt-PT" sz="1200" dirty="0">
+                <a:solidFill>
+                  <a:schemeClr val="tx1"/>
+                </a:solidFill>
+                <a:latin typeface="Courier New" pitchFamily="49" charset="0"/>
+                <a:cs typeface="Courier New" pitchFamily="49" charset="0"/>
+              </a:rPr>
+              <a:t>(</a:t>
+            </a:r>
+            <a:r>
+              <a:rPr lang="pt-PT" sz="1200" b="1" dirty="0" err="1">
+                <a:solidFill>
+                  <a:schemeClr val="tx1"/>
+                </a:solidFill>
+                <a:latin typeface="Courier New" pitchFamily="49" charset="0"/>
+                <a:cs typeface="Courier New" pitchFamily="49" charset="0"/>
+              </a:rPr>
+              <a:t>minsplit</a:t>
+            </a:r>
+            <a:r>
+              <a:rPr lang="pt-PT" sz="1200" dirty="0">
+                <a:solidFill>
+                  <a:schemeClr val="tx1"/>
+                </a:solidFill>
+                <a:latin typeface="Courier New" pitchFamily="49" charset="0"/>
+                <a:cs typeface="Courier New" pitchFamily="49" charset="0"/>
+              </a:rPr>
+              <a:t>=</a:t>
+            </a:r>
+            <a:r>
+              <a:rPr lang="pt-PT" sz="1200" b="1" dirty="0">
+                <a:solidFill>
+                  <a:srgbClr val="0070C0"/>
+                </a:solidFill>
+                <a:latin typeface="Courier New" pitchFamily="49" charset="0"/>
+                <a:cs typeface="Courier New" pitchFamily="49" charset="0"/>
+              </a:rPr>
+              <a:t>5</a:t>
+            </a:r>
+            <a:r>
+              <a:rPr lang="pt-PT" sz="1200" dirty="0">
+                <a:solidFill>
+                  <a:schemeClr val="tx1"/>
+                </a:solidFill>
+                <a:latin typeface="Courier New" pitchFamily="49" charset="0"/>
+                <a:cs typeface="Courier New" pitchFamily="49" charset="0"/>
+              </a:rPr>
+              <a:t>))</a:t>
+            </a:r>
+          </a:p>
+          <a:p>
+            <a:pPr algn="just">
+              <a:spcBef>
+                <a:spcPts val="600"/>
+              </a:spcBef>
+            </a:pPr>
+            <a:endParaRPr lang="pt-PT" sz="1200" dirty="0">
+              <a:solidFill>
+                <a:schemeClr val="tx1"/>
+              </a:solidFill>
+              <a:latin typeface="Courier New" pitchFamily="49" charset="0"/>
+              <a:cs typeface="Courier New" pitchFamily="49" charset="0"/>
+            </a:endParaRPr>
+          </a:p>
+          <a:p>
+            <a:pPr algn="just">
+              <a:spcBef>
+                <a:spcPts val="600"/>
+              </a:spcBef>
+            </a:pPr>
+            <a:r>
+              <a:rPr lang="en-US" sz="1200" b="1" dirty="0">
+                <a:solidFill>
+                  <a:schemeClr val="tx1"/>
+                </a:solidFill>
+                <a:latin typeface="Courier New" pitchFamily="49" charset="0"/>
+                <a:cs typeface="Courier New" pitchFamily="49" charset="0"/>
+              </a:rPr>
+              <a:t>table</a:t>
+            </a:r>
+            <a:r>
+              <a:rPr lang="en-US" sz="1200" dirty="0">
+                <a:solidFill>
+                  <a:schemeClr val="tx1"/>
+                </a:solidFill>
+                <a:latin typeface="Courier New" pitchFamily="49" charset="0"/>
+                <a:cs typeface="Courier New" pitchFamily="49" charset="0"/>
+              </a:rPr>
+              <a:t>(</a:t>
+            </a:r>
+            <a:r>
+              <a:rPr lang="en-US" sz="1200" b="1" dirty="0">
+                <a:solidFill>
+                  <a:schemeClr val="tx1"/>
+                </a:solidFill>
+                <a:latin typeface="Courier New" pitchFamily="49" charset="0"/>
+                <a:cs typeface="Courier New" pitchFamily="49" charset="0"/>
+              </a:rPr>
+              <a:t>predict</a:t>
+            </a:r>
+            <a:r>
+              <a:rPr lang="en-US" sz="1200" dirty="0">
+                <a:solidFill>
+                  <a:schemeClr val="tx1"/>
+                </a:solidFill>
+                <a:latin typeface="Courier New" pitchFamily="49" charset="0"/>
+                <a:cs typeface="Courier New" pitchFamily="49" charset="0"/>
+              </a:rPr>
+              <a:t>(</a:t>
+            </a:r>
+            <a:r>
+              <a:rPr lang="en-US" sz="1200" b="1" dirty="0" err="1">
+                <a:solidFill>
+                  <a:schemeClr val="tx1"/>
+                </a:solidFill>
+                <a:latin typeface="Courier New" pitchFamily="49" charset="0"/>
+                <a:cs typeface="Courier New" pitchFamily="49" charset="0"/>
+              </a:rPr>
+              <a:t>res_rf</a:t>
+            </a:r>
+            <a:r>
+              <a:rPr lang="en-US" sz="1200" dirty="0">
+                <a:solidFill>
+                  <a:schemeClr val="tx1"/>
+                </a:solidFill>
+                <a:latin typeface="Courier New" pitchFamily="49" charset="0"/>
+                <a:cs typeface="Courier New" pitchFamily="49" charset="0"/>
+              </a:rPr>
+              <a:t>, </a:t>
+            </a:r>
+            <a:r>
+              <a:rPr lang="en-US" sz="1200" b="1" dirty="0">
+                <a:solidFill>
+                  <a:schemeClr val="tx1"/>
+                </a:solidFill>
+                <a:latin typeface="Courier New" pitchFamily="49" charset="0"/>
+                <a:cs typeface="Courier New" pitchFamily="49" charset="0"/>
+              </a:rPr>
+              <a:t>type</a:t>
+            </a:r>
+            <a:r>
+              <a:rPr lang="en-US" sz="1200" dirty="0">
+                <a:solidFill>
+                  <a:schemeClr val="tx1"/>
+                </a:solidFill>
+                <a:latin typeface="Courier New" pitchFamily="49" charset="0"/>
+                <a:cs typeface="Courier New" pitchFamily="49" charset="0"/>
+              </a:rPr>
+              <a:t>=</a:t>
+            </a:r>
+            <a:r>
+              <a:rPr lang="en-US" sz="1200" b="1" dirty="0">
+                <a:solidFill>
+                  <a:srgbClr val="00B050"/>
+                </a:solidFill>
+                <a:latin typeface="Courier New" pitchFamily="49" charset="0"/>
+                <a:cs typeface="Courier New" pitchFamily="49" charset="0"/>
+              </a:rPr>
+              <a:t>"class"</a:t>
+            </a:r>
+            <a:r>
+              <a:rPr lang="en-US" sz="1200" dirty="0">
+                <a:solidFill>
+                  <a:schemeClr val="tx1"/>
+                </a:solidFill>
+                <a:latin typeface="Courier New" pitchFamily="49" charset="0"/>
+                <a:cs typeface="Courier New" pitchFamily="49" charset="0"/>
+              </a:rPr>
+              <a:t>), </a:t>
+            </a:r>
+            <a:r>
+              <a:rPr lang="en-US" sz="1200" b="1" dirty="0" err="1">
+                <a:solidFill>
+                  <a:schemeClr val="tx1"/>
+                </a:solidFill>
+                <a:latin typeface="Courier New" pitchFamily="49" charset="0"/>
+                <a:cs typeface="Courier New" pitchFamily="49" charset="0"/>
+              </a:rPr>
+              <a:t>tb_ml</a:t>
+            </a:r>
+            <a:r>
+              <a:rPr lang="en-US" sz="1200" dirty="0" err="1">
+                <a:solidFill>
+                  <a:schemeClr val="tx1"/>
+                </a:solidFill>
+                <a:latin typeface="Courier New" pitchFamily="49" charset="0"/>
+                <a:cs typeface="Courier New" pitchFamily="49" charset="0"/>
+              </a:rPr>
+              <a:t>$</a:t>
+            </a:r>
+            <a:r>
+              <a:rPr lang="en-US" sz="1200" b="1" dirty="0" err="1">
+                <a:solidFill>
+                  <a:schemeClr val="tx1"/>
+                </a:solidFill>
+                <a:latin typeface="Courier New" pitchFamily="49" charset="0"/>
+                <a:cs typeface="Courier New" pitchFamily="49" charset="0"/>
+              </a:rPr>
+              <a:t>y</a:t>
+            </a:r>
+            <a:r>
+              <a:rPr lang="en-US" sz="1200" dirty="0">
+                <a:solidFill>
+                  <a:schemeClr val="tx1"/>
+                </a:solidFill>
+                <a:latin typeface="Courier New" pitchFamily="49" charset="0"/>
+                <a:cs typeface="Courier New" pitchFamily="49" charset="0"/>
+              </a:rPr>
+              <a:t>)</a:t>
+            </a:r>
+            <a:endParaRPr lang="pt-PT" sz="1200" dirty="0">
+              <a:solidFill>
+                <a:schemeClr val="tx1"/>
+              </a:solidFill>
+              <a:latin typeface="Courier New" pitchFamily="49" charset="0"/>
+              <a:cs typeface="Courier New" pitchFamily="49" charset="0"/>
+            </a:endParaRPr>
+          </a:p>
+          <a:p>
+            <a:pPr algn="just">
+              <a:spcBef>
+                <a:spcPts val="600"/>
+              </a:spcBef>
+            </a:pPr>
+            <a:r>
+              <a:rPr lang="pt-PT" sz="1200" b="1" dirty="0">
+                <a:solidFill>
+                  <a:srgbClr val="00B050"/>
+                </a:solidFill>
+                <a:latin typeface="Courier New" pitchFamily="49" charset="0"/>
+                <a:cs typeface="Courier New" pitchFamily="49" charset="0"/>
+              </a:rPr>
+              <a:t>#   0  1</a:t>
+            </a:r>
+          </a:p>
+          <a:p>
+            <a:pPr algn="just">
+              <a:spcBef>
+                <a:spcPts val="600"/>
+              </a:spcBef>
+            </a:pPr>
+            <a:r>
+              <a:rPr lang="pt-PT" sz="1200" b="1" dirty="0">
+                <a:solidFill>
+                  <a:srgbClr val="00B050"/>
+                </a:solidFill>
+                <a:latin typeface="Courier New" pitchFamily="49" charset="0"/>
+                <a:cs typeface="Courier New" pitchFamily="49" charset="0"/>
+              </a:rPr>
+              <a:t>#0 10  2</a:t>
+            </a:r>
+          </a:p>
+          <a:p>
+            <a:pPr algn="just">
+              <a:spcBef>
+                <a:spcPts val="600"/>
+              </a:spcBef>
+            </a:pPr>
+            <a:r>
+              <a:rPr lang="pt-PT" sz="1200" b="1" dirty="0">
+                <a:solidFill>
+                  <a:srgbClr val="00B050"/>
+                </a:solidFill>
+                <a:latin typeface="Courier New" pitchFamily="49" charset="0"/>
+                <a:cs typeface="Courier New" pitchFamily="49" charset="0"/>
+              </a:rPr>
+              <a:t>#1  0  8</a:t>
+            </a:r>
+          </a:p>
+          <a:p>
+            <a:pPr algn="just">
+              <a:spcBef>
+                <a:spcPts val="600"/>
+              </a:spcBef>
+            </a:pPr>
+            <a:endParaRPr lang="pt-PT" sz="1200" dirty="0">
+              <a:solidFill>
+                <a:schemeClr val="tx1"/>
+              </a:solidFill>
+              <a:latin typeface="Courier New" pitchFamily="49" charset="0"/>
+              <a:cs typeface="Courier New" pitchFamily="49" charset="0"/>
+            </a:endParaRPr>
+          </a:p>
+          <a:p>
+            <a:pPr algn="just">
+              <a:spcBef>
+                <a:spcPts val="600"/>
+              </a:spcBef>
+            </a:pPr>
+            <a:r>
+              <a:rPr lang="pt-PT" sz="1200" b="1" dirty="0" err="1">
+                <a:solidFill>
+                  <a:schemeClr val="tx1"/>
+                </a:solidFill>
+                <a:latin typeface="Courier New" pitchFamily="49" charset="0"/>
+                <a:cs typeface="Courier New" pitchFamily="49" charset="0"/>
+              </a:rPr>
+              <a:t>plot</a:t>
+            </a:r>
+            <a:r>
+              <a:rPr lang="pt-PT" sz="1200" b="1" dirty="0">
+                <a:solidFill>
+                  <a:schemeClr val="tx1"/>
+                </a:solidFill>
+                <a:latin typeface="Courier New" pitchFamily="49" charset="0"/>
+                <a:cs typeface="Courier New" pitchFamily="49" charset="0"/>
+              </a:rPr>
+              <a:t>(</a:t>
+            </a:r>
+            <a:r>
+              <a:rPr lang="pt-PT" sz="1200" b="1" dirty="0" err="1">
+                <a:solidFill>
+                  <a:schemeClr val="tx1"/>
+                </a:solidFill>
+                <a:latin typeface="Courier New" pitchFamily="49" charset="0"/>
+                <a:cs typeface="Courier New" pitchFamily="49" charset="0"/>
+              </a:rPr>
+              <a:t>res_rf</a:t>
+            </a:r>
+            <a:r>
+              <a:rPr lang="pt-PT" sz="1200" b="1" dirty="0">
+                <a:solidFill>
+                  <a:schemeClr val="tx1"/>
+                </a:solidFill>
+                <a:latin typeface="Courier New" pitchFamily="49" charset="0"/>
+                <a:cs typeface="Courier New" pitchFamily="49" charset="0"/>
+              </a:rPr>
+              <a:t>, </a:t>
+            </a:r>
+            <a:r>
+              <a:rPr lang="pt-PT" sz="1200" b="1" dirty="0" err="1">
+                <a:solidFill>
+                  <a:schemeClr val="tx1"/>
+                </a:solidFill>
+                <a:latin typeface="Courier New" pitchFamily="49" charset="0"/>
+                <a:cs typeface="Courier New" pitchFamily="49" charset="0"/>
+              </a:rPr>
+              <a:t>branch</a:t>
+            </a:r>
+            <a:r>
+              <a:rPr lang="pt-PT" sz="1200" b="1" dirty="0">
+                <a:solidFill>
+                  <a:schemeClr val="tx1"/>
+                </a:solidFill>
+                <a:latin typeface="Courier New" pitchFamily="49" charset="0"/>
+                <a:cs typeface="Courier New" pitchFamily="49" charset="0"/>
+              </a:rPr>
+              <a:t>=</a:t>
+            </a:r>
+            <a:r>
+              <a:rPr lang="pt-PT" sz="1200" b="1" dirty="0">
+                <a:solidFill>
+                  <a:srgbClr val="0070C0"/>
+                </a:solidFill>
+                <a:latin typeface="Courier New" pitchFamily="49" charset="0"/>
+                <a:cs typeface="Courier New" pitchFamily="49" charset="0"/>
+              </a:rPr>
+              <a:t>0</a:t>
+            </a:r>
+            <a:r>
+              <a:rPr lang="pt-PT" sz="1200" b="1" dirty="0">
+                <a:solidFill>
+                  <a:schemeClr val="tx1"/>
+                </a:solidFill>
+                <a:latin typeface="Courier New" pitchFamily="49" charset="0"/>
+                <a:cs typeface="Courier New" pitchFamily="49" charset="0"/>
+              </a:rPr>
+              <a:t>, </a:t>
+            </a:r>
+            <a:r>
+              <a:rPr lang="pt-PT" sz="1200" b="1" dirty="0" err="1">
+                <a:solidFill>
+                  <a:schemeClr val="tx1"/>
+                </a:solidFill>
+                <a:latin typeface="Courier New" pitchFamily="49" charset="0"/>
+                <a:cs typeface="Courier New" pitchFamily="49" charset="0"/>
+              </a:rPr>
+              <a:t>margin</a:t>
+            </a:r>
+            <a:r>
+              <a:rPr lang="pt-PT" sz="1200" b="1" dirty="0">
+                <a:solidFill>
+                  <a:schemeClr val="tx1"/>
+                </a:solidFill>
+                <a:latin typeface="Courier New" pitchFamily="49" charset="0"/>
+                <a:cs typeface="Courier New" pitchFamily="49" charset="0"/>
+              </a:rPr>
+              <a:t>=</a:t>
+            </a:r>
+            <a:r>
+              <a:rPr lang="pt-PT" sz="1200" b="1" dirty="0">
+                <a:solidFill>
+                  <a:srgbClr val="0070C0"/>
+                </a:solidFill>
+                <a:latin typeface="Courier New" pitchFamily="49" charset="0"/>
+                <a:cs typeface="Courier New" pitchFamily="49" charset="0"/>
+              </a:rPr>
+              <a:t>0</a:t>
+            </a:r>
+            <a:r>
+              <a:rPr lang="pt-PT" sz="1200" b="1" dirty="0">
+                <a:solidFill>
+                  <a:schemeClr val="tx1"/>
+                </a:solidFill>
+                <a:latin typeface="Courier New" pitchFamily="49" charset="0"/>
+                <a:cs typeface="Courier New" pitchFamily="49" charset="0"/>
+              </a:rPr>
+              <a:t>.</a:t>
+            </a:r>
+            <a:r>
+              <a:rPr lang="pt-PT" sz="1200" b="1" dirty="0">
+                <a:solidFill>
+                  <a:srgbClr val="0070C0"/>
+                </a:solidFill>
+                <a:latin typeface="Courier New" pitchFamily="49" charset="0"/>
+                <a:cs typeface="Courier New" pitchFamily="49" charset="0"/>
+              </a:rPr>
+              <a:t>02</a:t>
+            </a:r>
+            <a:r>
+              <a:rPr lang="pt-PT" sz="1200" b="1" dirty="0">
+                <a:solidFill>
+                  <a:schemeClr val="tx1"/>
+                </a:solidFill>
+                <a:latin typeface="Courier New" pitchFamily="49" charset="0"/>
+                <a:cs typeface="Courier New" pitchFamily="49" charset="0"/>
+              </a:rPr>
+              <a:t>, </a:t>
+            </a:r>
+            <a:r>
+              <a:rPr lang="pt-PT" sz="1200" b="1" dirty="0" err="1">
+                <a:solidFill>
+                  <a:schemeClr val="tx1"/>
+                </a:solidFill>
+                <a:latin typeface="Courier New" pitchFamily="49" charset="0"/>
+                <a:cs typeface="Courier New" pitchFamily="49" charset="0"/>
+              </a:rPr>
+              <a:t>branch.lwd</a:t>
+            </a:r>
+            <a:r>
+              <a:rPr lang="pt-PT" sz="1200" b="1" dirty="0">
+                <a:solidFill>
+                  <a:schemeClr val="tx1"/>
+                </a:solidFill>
+                <a:latin typeface="Courier New" pitchFamily="49" charset="0"/>
+                <a:cs typeface="Courier New" pitchFamily="49" charset="0"/>
+              </a:rPr>
+              <a:t>=</a:t>
+            </a:r>
+            <a:r>
+              <a:rPr lang="pt-PT" sz="1200" b="1" dirty="0">
+                <a:solidFill>
+                  <a:srgbClr val="0070C0"/>
+                </a:solidFill>
+                <a:latin typeface="Courier New" pitchFamily="49" charset="0"/>
+                <a:cs typeface="Courier New" pitchFamily="49" charset="0"/>
+              </a:rPr>
+              <a:t>2</a:t>
+            </a:r>
+            <a:r>
+              <a:rPr lang="pt-PT" sz="1200" b="1" dirty="0">
+                <a:solidFill>
+                  <a:schemeClr val="tx1"/>
+                </a:solidFill>
+                <a:latin typeface="Courier New" pitchFamily="49" charset="0"/>
+                <a:cs typeface="Courier New" pitchFamily="49" charset="0"/>
+              </a:rPr>
+              <a:t>, </a:t>
+            </a:r>
+            <a:r>
+              <a:rPr lang="pt-PT" sz="1200" b="1" dirty="0" err="1">
+                <a:solidFill>
+                  <a:schemeClr val="tx1"/>
+                </a:solidFill>
+                <a:latin typeface="Courier New" pitchFamily="49" charset="0"/>
+                <a:cs typeface="Courier New" pitchFamily="49" charset="0"/>
+              </a:rPr>
+              <a:t>branch.col</a:t>
+            </a:r>
+            <a:r>
+              <a:rPr lang="pt-PT" sz="1200" b="1" dirty="0">
+                <a:solidFill>
+                  <a:schemeClr val="tx1"/>
+                </a:solidFill>
+                <a:latin typeface="Courier New" pitchFamily="49" charset="0"/>
+                <a:cs typeface="Courier New" pitchFamily="49" charset="0"/>
+              </a:rPr>
+              <a:t>=</a:t>
+            </a:r>
+            <a:r>
+              <a:rPr lang="pt-PT" sz="1200" b="1" dirty="0">
+                <a:solidFill>
+                  <a:srgbClr val="00B050"/>
+                </a:solidFill>
+                <a:latin typeface="Courier New" pitchFamily="49" charset="0"/>
+                <a:cs typeface="Courier New" pitchFamily="49" charset="0"/>
+              </a:rPr>
+              <a:t>"</a:t>
+            </a:r>
+            <a:r>
+              <a:rPr lang="pt-PT" sz="1200" b="1" dirty="0" err="1">
+                <a:solidFill>
+                  <a:srgbClr val="00B050"/>
+                </a:solidFill>
+                <a:latin typeface="Courier New" pitchFamily="49" charset="0"/>
+                <a:cs typeface="Courier New" pitchFamily="49" charset="0"/>
+              </a:rPr>
+              <a:t>blue</a:t>
+            </a:r>
+            <a:r>
+              <a:rPr lang="pt-PT" sz="1200" b="1" dirty="0">
+                <a:solidFill>
+                  <a:srgbClr val="00B050"/>
+                </a:solidFill>
+                <a:latin typeface="Courier New" pitchFamily="49" charset="0"/>
+                <a:cs typeface="Courier New" pitchFamily="49" charset="0"/>
+              </a:rPr>
+              <a:t>"</a:t>
+            </a:r>
+            <a:r>
+              <a:rPr lang="pt-PT" sz="1200" b="1" dirty="0">
+                <a:solidFill>
+                  <a:schemeClr val="tx1"/>
+                </a:solidFill>
+                <a:latin typeface="Courier New" pitchFamily="49" charset="0"/>
+                <a:cs typeface="Courier New" pitchFamily="49" charset="0"/>
+              </a:rPr>
+              <a:t>)</a:t>
+            </a:r>
+          </a:p>
+          <a:p>
+            <a:pPr algn="just">
+              <a:spcBef>
+                <a:spcPts val="600"/>
+              </a:spcBef>
+            </a:pPr>
+            <a:r>
+              <a:rPr lang="pt-PT" sz="1200" b="1" dirty="0" err="1">
+                <a:solidFill>
+                  <a:schemeClr val="tx1"/>
+                </a:solidFill>
+                <a:latin typeface="Courier New" pitchFamily="49" charset="0"/>
+                <a:cs typeface="Courier New" pitchFamily="49" charset="0"/>
+              </a:rPr>
+              <a:t>text</a:t>
+            </a:r>
+            <a:r>
+              <a:rPr lang="pt-PT" sz="1200" b="1" dirty="0">
+                <a:solidFill>
+                  <a:schemeClr val="tx1"/>
+                </a:solidFill>
+                <a:latin typeface="Courier New" pitchFamily="49" charset="0"/>
+                <a:cs typeface="Courier New" pitchFamily="49" charset="0"/>
+              </a:rPr>
+              <a:t>(</a:t>
+            </a:r>
+            <a:r>
+              <a:rPr lang="pt-PT" sz="1200" b="1" dirty="0" err="1">
+                <a:solidFill>
+                  <a:schemeClr val="tx1"/>
+                </a:solidFill>
+                <a:latin typeface="Courier New" pitchFamily="49" charset="0"/>
+                <a:cs typeface="Courier New" pitchFamily="49" charset="0"/>
+              </a:rPr>
+              <a:t>res_rf</a:t>
+            </a:r>
+            <a:r>
+              <a:rPr lang="pt-PT" sz="1200" b="1" dirty="0">
+                <a:solidFill>
+                  <a:schemeClr val="tx1"/>
+                </a:solidFill>
+                <a:latin typeface="Courier New" pitchFamily="49" charset="0"/>
+                <a:cs typeface="Courier New" pitchFamily="49" charset="0"/>
+              </a:rPr>
+              <a:t>, </a:t>
+            </a:r>
+            <a:r>
+              <a:rPr lang="pt-PT" sz="1200" b="1" dirty="0" err="1">
+                <a:solidFill>
+                  <a:schemeClr val="tx1"/>
+                </a:solidFill>
+                <a:latin typeface="Courier New" pitchFamily="49" charset="0"/>
+                <a:cs typeface="Courier New" pitchFamily="49" charset="0"/>
+              </a:rPr>
+              <a:t>minlength</a:t>
+            </a:r>
+            <a:r>
+              <a:rPr lang="pt-PT" sz="1200" b="1" dirty="0">
+                <a:solidFill>
+                  <a:schemeClr val="tx1"/>
+                </a:solidFill>
+                <a:latin typeface="Courier New" pitchFamily="49" charset="0"/>
+                <a:cs typeface="Courier New" pitchFamily="49" charset="0"/>
+              </a:rPr>
+              <a:t>=</a:t>
+            </a:r>
+            <a:r>
+              <a:rPr lang="pt-PT" sz="1200" b="1" dirty="0">
+                <a:solidFill>
+                  <a:srgbClr val="0070C0"/>
+                </a:solidFill>
+                <a:latin typeface="Courier New" pitchFamily="49" charset="0"/>
+                <a:cs typeface="Courier New" pitchFamily="49" charset="0"/>
+              </a:rPr>
+              <a:t>2</a:t>
+            </a:r>
+            <a:r>
+              <a:rPr lang="pt-PT" sz="1200" b="1" dirty="0">
+                <a:solidFill>
+                  <a:schemeClr val="tx1"/>
+                </a:solidFill>
+                <a:latin typeface="Courier New" pitchFamily="49" charset="0"/>
+                <a:cs typeface="Courier New" pitchFamily="49" charset="0"/>
+              </a:rPr>
+              <a:t>, </a:t>
+            </a:r>
+            <a:r>
+              <a:rPr lang="pt-PT" sz="1200" b="1" dirty="0" err="1">
+                <a:solidFill>
+                  <a:schemeClr val="tx1"/>
+                </a:solidFill>
+                <a:latin typeface="Courier New" pitchFamily="49" charset="0"/>
+                <a:cs typeface="Courier New" pitchFamily="49" charset="0"/>
+              </a:rPr>
+              <a:t>use.n</a:t>
+            </a:r>
+            <a:r>
+              <a:rPr lang="pt-PT" sz="1200" b="1" dirty="0">
+                <a:solidFill>
+                  <a:schemeClr val="tx1"/>
+                </a:solidFill>
+                <a:latin typeface="Courier New" pitchFamily="49" charset="0"/>
+                <a:cs typeface="Courier New" pitchFamily="49" charset="0"/>
+              </a:rPr>
+              <a:t>=</a:t>
+            </a:r>
+            <a:r>
+              <a:rPr lang="pt-PT" sz="1200" b="1" dirty="0">
+                <a:solidFill>
+                  <a:srgbClr val="7030A0"/>
+                </a:solidFill>
+                <a:latin typeface="Courier New" pitchFamily="49" charset="0"/>
+                <a:cs typeface="Courier New" pitchFamily="49" charset="0"/>
+              </a:rPr>
+              <a:t>TRUE</a:t>
+            </a:r>
+            <a:r>
+              <a:rPr lang="pt-PT" sz="1200" b="1" dirty="0">
+                <a:solidFill>
+                  <a:schemeClr val="tx1"/>
+                </a:solidFill>
+                <a:latin typeface="Courier New" pitchFamily="49" charset="0"/>
+                <a:cs typeface="Courier New" pitchFamily="49" charset="0"/>
+              </a:rPr>
+              <a:t>, </a:t>
+            </a:r>
+            <a:r>
+              <a:rPr lang="pt-PT" sz="1200" b="1" dirty="0" err="1">
+                <a:solidFill>
+                  <a:schemeClr val="tx1"/>
+                </a:solidFill>
+                <a:latin typeface="Courier New" pitchFamily="49" charset="0"/>
+                <a:cs typeface="Courier New" pitchFamily="49" charset="0"/>
+              </a:rPr>
+              <a:t>fancy</a:t>
+            </a:r>
+            <a:r>
+              <a:rPr lang="pt-PT" sz="1200" b="1" dirty="0">
+                <a:solidFill>
+                  <a:schemeClr val="tx1"/>
+                </a:solidFill>
+                <a:latin typeface="Courier New" pitchFamily="49" charset="0"/>
+                <a:cs typeface="Courier New" pitchFamily="49" charset="0"/>
+              </a:rPr>
+              <a:t>=</a:t>
+            </a:r>
+            <a:r>
+              <a:rPr lang="pt-PT" sz="1200" b="1" dirty="0">
+                <a:solidFill>
+                  <a:srgbClr val="7030A0"/>
+                </a:solidFill>
+                <a:latin typeface="Courier New" pitchFamily="49" charset="0"/>
+                <a:cs typeface="Courier New" pitchFamily="49" charset="0"/>
+              </a:rPr>
+              <a:t>TRUE</a:t>
+            </a:r>
+            <a:r>
+              <a:rPr lang="pt-PT" sz="1200" b="1" dirty="0">
+                <a:solidFill>
+                  <a:schemeClr val="tx1"/>
+                </a:solidFill>
+                <a:latin typeface="Courier New" pitchFamily="49" charset="0"/>
+                <a:cs typeface="Courier New" pitchFamily="49" charset="0"/>
+              </a:rPr>
+              <a:t>, </a:t>
+            </a:r>
+            <a:r>
+              <a:rPr lang="pt-PT" sz="1200" b="1" dirty="0" err="1">
+                <a:solidFill>
+                  <a:schemeClr val="tx1"/>
+                </a:solidFill>
+                <a:latin typeface="Courier New" pitchFamily="49" charset="0"/>
+                <a:cs typeface="Courier New" pitchFamily="49" charset="0"/>
+              </a:rPr>
+              <a:t>fwidth</a:t>
+            </a:r>
+            <a:r>
+              <a:rPr lang="pt-PT" sz="1200" b="1" dirty="0">
+                <a:solidFill>
+                  <a:schemeClr val="tx1"/>
+                </a:solidFill>
+                <a:latin typeface="Courier New" pitchFamily="49" charset="0"/>
+                <a:cs typeface="Courier New" pitchFamily="49" charset="0"/>
+              </a:rPr>
+              <a:t>=</a:t>
+            </a:r>
+            <a:r>
+              <a:rPr lang="pt-PT" sz="1200" b="1" dirty="0">
+                <a:solidFill>
+                  <a:srgbClr val="0070C0"/>
+                </a:solidFill>
+                <a:latin typeface="Courier New" pitchFamily="49" charset="0"/>
+                <a:cs typeface="Courier New" pitchFamily="49" charset="0"/>
+              </a:rPr>
+              <a:t>1</a:t>
+            </a:r>
+            <a:r>
+              <a:rPr lang="pt-PT" sz="1200" b="1" dirty="0">
+                <a:solidFill>
+                  <a:schemeClr val="tx1"/>
+                </a:solidFill>
+                <a:latin typeface="Courier New" pitchFamily="49" charset="0"/>
+                <a:cs typeface="Courier New" pitchFamily="49" charset="0"/>
+              </a:rPr>
+              <a:t>.</a:t>
+            </a:r>
+            <a:r>
+              <a:rPr lang="pt-PT" sz="1200" b="1" dirty="0">
+                <a:solidFill>
+                  <a:srgbClr val="0070C0"/>
+                </a:solidFill>
+                <a:latin typeface="Courier New" pitchFamily="49" charset="0"/>
+                <a:cs typeface="Courier New" pitchFamily="49" charset="0"/>
+              </a:rPr>
+              <a:t>5</a:t>
+            </a:r>
+            <a:r>
+              <a:rPr lang="pt-PT" sz="1200" b="1" dirty="0">
+                <a:solidFill>
+                  <a:schemeClr val="tx1"/>
+                </a:solidFill>
+                <a:latin typeface="Courier New" pitchFamily="49" charset="0"/>
+                <a:cs typeface="Courier New" pitchFamily="49" charset="0"/>
+              </a:rPr>
+              <a:t>, </a:t>
+            </a:r>
+            <a:r>
+              <a:rPr lang="pt-PT" sz="1200" b="1" dirty="0" err="1">
+                <a:solidFill>
+                  <a:schemeClr val="tx1"/>
+                </a:solidFill>
+                <a:latin typeface="Courier New" pitchFamily="49" charset="0"/>
+                <a:cs typeface="Courier New" pitchFamily="49" charset="0"/>
+              </a:rPr>
+              <a:t>fheight</a:t>
+            </a:r>
+            <a:r>
+              <a:rPr lang="pt-PT" sz="1200" b="1" dirty="0">
+                <a:solidFill>
+                  <a:schemeClr val="tx1"/>
+                </a:solidFill>
+                <a:latin typeface="Courier New" pitchFamily="49" charset="0"/>
+                <a:cs typeface="Courier New" pitchFamily="49" charset="0"/>
+              </a:rPr>
+              <a:t>=</a:t>
+            </a:r>
+            <a:r>
+              <a:rPr lang="pt-PT" sz="1200" b="1" dirty="0">
+                <a:solidFill>
+                  <a:srgbClr val="0070C0"/>
+                </a:solidFill>
+                <a:latin typeface="Courier New" pitchFamily="49" charset="0"/>
+                <a:cs typeface="Courier New" pitchFamily="49" charset="0"/>
+              </a:rPr>
+              <a:t>1</a:t>
+            </a:r>
+            <a:r>
+              <a:rPr lang="pt-PT" sz="1200" b="1" dirty="0">
+                <a:solidFill>
+                  <a:schemeClr val="tx1"/>
+                </a:solidFill>
+                <a:latin typeface="Courier New" pitchFamily="49" charset="0"/>
+                <a:cs typeface="Courier New" pitchFamily="49" charset="0"/>
+              </a:rPr>
+              <a:t>,</a:t>
+            </a:r>
+          </a:p>
+          <a:p>
+            <a:pPr algn="just">
+              <a:spcBef>
+                <a:spcPts val="600"/>
+              </a:spcBef>
+            </a:pPr>
+            <a:r>
+              <a:rPr lang="pt-PT" sz="1200" b="1" dirty="0">
+                <a:solidFill>
+                  <a:schemeClr val="tx1"/>
+                </a:solidFill>
+                <a:latin typeface="Courier New" pitchFamily="49" charset="0"/>
+                <a:cs typeface="Courier New" pitchFamily="49" charset="0"/>
+              </a:rPr>
+              <a:t>  </a:t>
+            </a:r>
+            <a:r>
+              <a:rPr lang="pt-PT" sz="1200" b="1" dirty="0" err="1">
+                <a:solidFill>
+                  <a:schemeClr val="tx1"/>
+                </a:solidFill>
+                <a:latin typeface="Courier New" pitchFamily="49" charset="0"/>
+                <a:cs typeface="Courier New" pitchFamily="49" charset="0"/>
+              </a:rPr>
+              <a:t>cex</a:t>
+            </a:r>
+            <a:r>
+              <a:rPr lang="pt-PT" sz="1200" b="1" dirty="0">
+                <a:solidFill>
+                  <a:schemeClr val="tx1"/>
+                </a:solidFill>
+                <a:latin typeface="Courier New" pitchFamily="49" charset="0"/>
+                <a:cs typeface="Courier New" pitchFamily="49" charset="0"/>
+              </a:rPr>
+              <a:t>=</a:t>
+            </a:r>
+            <a:r>
+              <a:rPr lang="pt-PT" sz="1200" b="1" dirty="0">
+                <a:solidFill>
+                  <a:srgbClr val="0070C0"/>
+                </a:solidFill>
+                <a:latin typeface="Courier New" pitchFamily="49" charset="0"/>
+                <a:cs typeface="Courier New" pitchFamily="49" charset="0"/>
+              </a:rPr>
+              <a:t>0</a:t>
+            </a:r>
+            <a:r>
+              <a:rPr lang="pt-PT" sz="1200" b="1" dirty="0">
+                <a:solidFill>
+                  <a:schemeClr val="tx1"/>
+                </a:solidFill>
+                <a:latin typeface="Courier New" pitchFamily="49" charset="0"/>
+                <a:cs typeface="Courier New" pitchFamily="49" charset="0"/>
+              </a:rPr>
+              <a:t>.</a:t>
+            </a:r>
+            <a:r>
+              <a:rPr lang="pt-PT" sz="1200" b="1" dirty="0">
+                <a:solidFill>
+                  <a:srgbClr val="0070C0"/>
+                </a:solidFill>
+                <a:latin typeface="Courier New" pitchFamily="49" charset="0"/>
+                <a:cs typeface="Courier New" pitchFamily="49" charset="0"/>
+              </a:rPr>
+              <a:t>8</a:t>
+            </a:r>
+            <a:r>
+              <a:rPr lang="pt-PT" sz="1200" b="1" dirty="0">
+                <a:solidFill>
+                  <a:schemeClr val="tx1"/>
+                </a:solidFill>
+                <a:latin typeface="Courier New" pitchFamily="49" charset="0"/>
+                <a:cs typeface="Courier New" pitchFamily="49" charset="0"/>
+              </a:rPr>
+              <a:t>, </a:t>
+            </a:r>
+            <a:r>
+              <a:rPr lang="pt-PT" sz="1200" b="1" dirty="0" err="1">
+                <a:solidFill>
+                  <a:schemeClr val="tx1"/>
+                </a:solidFill>
+                <a:latin typeface="Courier New" pitchFamily="49" charset="0"/>
+                <a:cs typeface="Courier New" pitchFamily="49" charset="0"/>
+              </a:rPr>
+              <a:t>font</a:t>
+            </a:r>
+            <a:r>
+              <a:rPr lang="pt-PT" sz="1200" b="1" dirty="0">
+                <a:solidFill>
+                  <a:schemeClr val="tx1"/>
+                </a:solidFill>
+                <a:latin typeface="Courier New" pitchFamily="49" charset="0"/>
+                <a:cs typeface="Courier New" pitchFamily="49" charset="0"/>
+              </a:rPr>
+              <a:t>=</a:t>
+            </a:r>
+            <a:r>
+              <a:rPr lang="pt-PT" sz="1200" b="1" dirty="0">
+                <a:solidFill>
+                  <a:srgbClr val="0070C0"/>
+                </a:solidFill>
+                <a:latin typeface="Courier New" pitchFamily="49" charset="0"/>
+                <a:cs typeface="Courier New" pitchFamily="49" charset="0"/>
+              </a:rPr>
+              <a:t>2</a:t>
+            </a:r>
+            <a:r>
+              <a:rPr lang="pt-PT" sz="1200" b="1" dirty="0">
+                <a:solidFill>
+                  <a:schemeClr val="tx1"/>
+                </a:solidFill>
+                <a:latin typeface="Courier New" pitchFamily="49" charset="0"/>
+                <a:cs typeface="Courier New" pitchFamily="49" charset="0"/>
+              </a:rPr>
+              <a:t>)</a:t>
+            </a:r>
+          </a:p>
+        </p:txBody>
+      </p:sp>
+      <p:sp>
+        <p:nvSpPr>
+          <p:cNvPr id="4" name="Text Box 376">
+            <a:extLst>
+              <a:ext uri="{FF2B5EF4-FFF2-40B4-BE49-F238E27FC236}">
+                <a16:creationId xmlns:a16="http://schemas.microsoft.com/office/drawing/2014/main" id="{D9938055-AFE2-80F2-5A59-3F74E4EB269F}"/>
+              </a:ext>
+            </a:extLst>
+          </p:cNvPr>
+          <p:cNvSpPr txBox="1">
+            <a:spLocks noChangeArrowheads="1"/>
+          </p:cNvSpPr>
+          <p:nvPr/>
+        </p:nvSpPr>
+        <p:spPr bwMode="auto">
+          <a:xfrm>
+            <a:off x="2206626" y="1521983"/>
+            <a:ext cx="7705725" cy="523220"/>
+          </a:xfrm>
+          <a:prstGeom prst="rect">
+            <a:avLst/>
+          </a:prstGeom>
+          <a:noFill/>
+          <a:ln w="9525">
+            <a:noFill/>
+            <a:miter lim="800000"/>
+            <a:headEnd/>
+            <a:tailEnd/>
+          </a:ln>
+        </p:spPr>
+        <p:txBody>
+          <a:bodyPr>
+            <a:spAutoFit/>
+          </a:bodyPr>
+          <a:lstStyle/>
+          <a:p>
+            <a:pPr>
+              <a:spcBef>
+                <a:spcPct val="0"/>
+              </a:spcBef>
+            </a:pPr>
+            <a:r>
+              <a:rPr lang="pt-PT" sz="2800" b="1" dirty="0">
+                <a:solidFill>
+                  <a:srgbClr val="CC301F"/>
+                </a:solidFill>
+              </a:rPr>
+              <a:t>»</a:t>
+            </a:r>
+            <a:r>
+              <a:rPr lang="pt-PT" sz="2800" dirty="0">
+                <a:solidFill>
+                  <a:schemeClr val="bg2"/>
+                </a:solidFill>
+                <a:latin typeface="Humnst777 BT" pitchFamily="34" charset="0"/>
+              </a:rPr>
+              <a:t> </a:t>
+            </a:r>
+            <a:r>
+              <a:rPr lang="pt-PT" sz="2800" i="1" dirty="0" err="1">
+                <a:solidFill>
+                  <a:schemeClr val="bg1">
+                    <a:lumMod val="50000"/>
+                  </a:schemeClr>
+                </a:solidFill>
+                <a:latin typeface="Humnst777 BT" pitchFamily="34" charset="0"/>
+              </a:rPr>
+              <a:t>Machine</a:t>
+            </a:r>
+            <a:r>
+              <a:rPr lang="pt-PT" sz="2800" i="1" dirty="0">
+                <a:solidFill>
+                  <a:schemeClr val="bg1">
+                    <a:lumMod val="50000"/>
+                  </a:schemeClr>
+                </a:solidFill>
+                <a:latin typeface="Humnst777 BT" pitchFamily="34" charset="0"/>
+              </a:rPr>
+              <a:t> </a:t>
+            </a:r>
+            <a:r>
+              <a:rPr lang="pt-PT" sz="2800" i="1" dirty="0" err="1">
+                <a:solidFill>
+                  <a:schemeClr val="bg1">
+                    <a:lumMod val="50000"/>
+                  </a:schemeClr>
+                </a:solidFill>
+                <a:latin typeface="Humnst777 BT" pitchFamily="34" charset="0"/>
+              </a:rPr>
+              <a:t>Learning</a:t>
+            </a:r>
+            <a:r>
+              <a:rPr lang="pt-PT" sz="2800" dirty="0">
+                <a:solidFill>
+                  <a:schemeClr val="bg1">
+                    <a:lumMod val="50000"/>
+                  </a:schemeClr>
+                </a:solidFill>
+                <a:latin typeface="Humnst777 BT" pitchFamily="34" charset="0"/>
+              </a:rPr>
+              <a:t>: Árvores de decisão</a:t>
+            </a:r>
+            <a:endParaRPr lang="pt-PT" sz="2800" b="1" i="1" dirty="0">
+              <a:solidFill>
+                <a:schemeClr val="bg1">
+                  <a:lumMod val="50000"/>
+                </a:schemeClr>
+              </a:solidFill>
+              <a:latin typeface="Humnst777 BT" pitchFamily="34" charset="0"/>
+            </a:endParaRPr>
+          </a:p>
+        </p:txBody>
+      </p:sp>
+    </p:spTree>
+    <p:extLst>
+      <p:ext uri="{BB962C8B-B14F-4D97-AF65-F5344CB8AC3E}">
+        <p14:creationId xmlns:p14="http://schemas.microsoft.com/office/powerpoint/2010/main" val="4009348248"/>
+      </p:ext>
+    </p:extLst>
+  </p:cSld>
+  <p:clrMapOvr>
+    <a:masterClrMapping/>
+  </p:clrMapOvr>
+</p:sld>
+</file>
+
+<file path=ppt/slides/slide33.xml><?xml version="1.0" encoding="utf-8"?>
+<p:sld xmlns:a="http://schemas.openxmlformats.org/drawingml/2006/main" xmlns:r="http://schemas.openxmlformats.org/officeDocument/2006/relationships" xmlns:p="http://schemas.openxmlformats.org/presentationml/2006/main">
+  <p:cSld>
+    <p:spTree>
+      <p:nvGrpSpPr>
+        <p:cNvPr id="1" name="">
+          <a:extLst>
+            <a:ext uri="{FF2B5EF4-FFF2-40B4-BE49-F238E27FC236}">
+              <a16:creationId xmlns:a16="http://schemas.microsoft.com/office/drawing/2014/main" id="{925F5B74-F02B-133F-2CED-63B18815036C}"/>
+            </a:ext>
+          </a:extLst>
+        </p:cNvPr>
+        <p:cNvGrpSpPr/>
+        <p:nvPr/>
+      </p:nvGrpSpPr>
+      <p:grpSpPr>
+        <a:xfrm>
+          <a:off x="0" y="0"/>
+          <a:ext cx="0" cy="0"/>
+          <a:chOff x="0" y="0"/>
+          <a:chExt cx="0" cy="0"/>
+        </a:xfrm>
+      </p:grpSpPr>
+      <p:pic>
+        <p:nvPicPr>
+          <p:cNvPr id="3" name="Picture 2">
+            <a:extLst>
+              <a:ext uri="{FF2B5EF4-FFF2-40B4-BE49-F238E27FC236}">
+                <a16:creationId xmlns:a16="http://schemas.microsoft.com/office/drawing/2014/main" id="{8FC1B4A6-8BDC-AFD3-62BA-83366BF889D6}"/>
+              </a:ext>
+            </a:extLst>
+          </p:cNvPr>
+          <p:cNvPicPr>
+            <a:picLocks noChangeAspect="1"/>
+          </p:cNvPicPr>
+          <p:nvPr/>
+        </p:nvPicPr>
+        <p:blipFill>
+          <a:blip r:embed="rId3">
+            <a:extLst>
+              <a:ext uri="{28A0092B-C50C-407E-A947-70E740481C1C}">
+                <a14:useLocalDpi xmlns:a14="http://schemas.microsoft.com/office/drawing/2010/main" val="0"/>
+              </a:ext>
+            </a:extLst>
+          </a:blip>
+          <a:stretch>
+            <a:fillRect/>
+          </a:stretch>
+        </p:blipFill>
+        <p:spPr>
+          <a:xfrm>
+            <a:off x="3006036" y="2133600"/>
+            <a:ext cx="6186309" cy="4064926"/>
+          </a:xfrm>
+          <a:prstGeom prst="rect">
+            <a:avLst/>
+          </a:prstGeom>
+        </p:spPr>
+      </p:pic>
+      <p:sp>
+        <p:nvSpPr>
+          <p:cNvPr id="17413" name="Text Box 39">
+            <a:extLst>
+              <a:ext uri="{FF2B5EF4-FFF2-40B4-BE49-F238E27FC236}">
+                <a16:creationId xmlns:a16="http://schemas.microsoft.com/office/drawing/2014/main" id="{51DD8C3B-3A28-A3E2-ECE0-2C7BC4C42F69}"/>
+              </a:ext>
+            </a:extLst>
+          </p:cNvPr>
+          <p:cNvSpPr txBox="1">
+            <a:spLocks noChangeArrowheads="1"/>
+          </p:cNvSpPr>
+          <p:nvPr/>
+        </p:nvSpPr>
+        <p:spPr bwMode="auto">
+          <a:xfrm rot="5400000" flipV="1">
+            <a:off x="9299576" y="946151"/>
+            <a:ext cx="504825" cy="1006475"/>
+          </a:xfrm>
+          <a:prstGeom prst="rect">
+            <a:avLst/>
+          </a:prstGeom>
+          <a:noFill/>
+          <a:ln w="9525">
+            <a:noFill/>
+            <a:miter lim="800000"/>
+            <a:headEnd/>
+            <a:tailEnd/>
+          </a:ln>
+        </p:spPr>
+        <p:txBody>
+          <a:bodyPr>
+            <a:spAutoFit/>
+          </a:bodyPr>
+          <a:lstStyle/>
+          <a:p>
+            <a:r>
+              <a:rPr lang="pt-PT">
+                <a:solidFill>
+                  <a:srgbClr val="CC301F"/>
+                </a:solidFill>
+              </a:rPr>
+              <a:t>«</a:t>
+            </a:r>
+          </a:p>
+        </p:txBody>
+      </p:sp>
+      <p:sp>
+        <p:nvSpPr>
+          <p:cNvPr id="8194" name="Rectangle 2">
+            <a:extLst>
+              <a:ext uri="{FF2B5EF4-FFF2-40B4-BE49-F238E27FC236}">
+                <a16:creationId xmlns:a16="http://schemas.microsoft.com/office/drawing/2014/main" id="{B6D9BC0D-057E-A9AF-1335-3CF16E6FE857}"/>
+              </a:ext>
+            </a:extLst>
+          </p:cNvPr>
+          <p:cNvSpPr>
+            <a:spLocks noChangeArrowheads="1"/>
+          </p:cNvSpPr>
+          <p:nvPr/>
+        </p:nvSpPr>
+        <p:spPr bwMode="auto">
+          <a:xfrm>
+            <a:off x="1524001" y="-507831"/>
+            <a:ext cx="184731" cy="1015663"/>
+          </a:xfrm>
+          <a:prstGeom prst="rect">
+            <a:avLst/>
+          </a:prstGeom>
+          <a:noFill/>
+          <a:ln w="9525">
+            <a:noFill/>
+            <a:miter lim="800000"/>
+            <a:headEnd/>
+            <a:tailEnd/>
+          </a:ln>
+          <a:effectLst/>
+        </p:spPr>
+        <p:txBody>
+          <a:bodyPr vert="horz" wrap="none" lIns="91440" tIns="45720" rIns="91440" bIns="45720" numCol="1" anchor="ctr" anchorCtr="0" compatLnSpc="1">
+            <a:prstTxWarp prst="textNoShape">
+              <a:avLst/>
+            </a:prstTxWarp>
+            <a:spAutoFit/>
+          </a:bodyPr>
+          <a:lstStyle/>
+          <a:p>
+            <a:endParaRPr lang="en-US"/>
+          </a:p>
+        </p:txBody>
+      </p:sp>
+      <p:sp>
+        <p:nvSpPr>
+          <p:cNvPr id="8196" name="Rectangle 4">
+            <a:extLst>
+              <a:ext uri="{FF2B5EF4-FFF2-40B4-BE49-F238E27FC236}">
+                <a16:creationId xmlns:a16="http://schemas.microsoft.com/office/drawing/2014/main" id="{84936C53-18AA-0256-933A-8780302E062D}"/>
+              </a:ext>
+            </a:extLst>
+          </p:cNvPr>
+          <p:cNvSpPr>
+            <a:spLocks noChangeArrowheads="1"/>
+          </p:cNvSpPr>
+          <p:nvPr/>
+        </p:nvSpPr>
+        <p:spPr bwMode="auto">
+          <a:xfrm>
+            <a:off x="1524001" y="-507831"/>
+            <a:ext cx="184731" cy="1015663"/>
+          </a:xfrm>
+          <a:prstGeom prst="rect">
+            <a:avLst/>
+          </a:prstGeom>
+          <a:noFill/>
+          <a:ln w="9525">
+            <a:noFill/>
+            <a:miter lim="800000"/>
+            <a:headEnd/>
+            <a:tailEnd/>
+          </a:ln>
+          <a:effectLst/>
+        </p:spPr>
+        <p:txBody>
+          <a:bodyPr vert="horz" wrap="none" lIns="91440" tIns="45720" rIns="91440" bIns="45720" numCol="1" anchor="ctr" anchorCtr="0" compatLnSpc="1">
+            <a:prstTxWarp prst="textNoShape">
+              <a:avLst/>
+            </a:prstTxWarp>
+            <a:spAutoFit/>
+          </a:bodyPr>
+          <a:lstStyle/>
+          <a:p>
+            <a:endParaRPr lang="en-US"/>
+          </a:p>
+        </p:txBody>
+      </p:sp>
+      <p:sp>
+        <p:nvSpPr>
+          <p:cNvPr id="14" name="Rectangle 38">
+            <a:extLst>
+              <a:ext uri="{FF2B5EF4-FFF2-40B4-BE49-F238E27FC236}">
+                <a16:creationId xmlns:a16="http://schemas.microsoft.com/office/drawing/2014/main" id="{1F158B33-AF7E-3B2A-C5E0-96BF8D24E634}"/>
+              </a:ext>
+            </a:extLst>
+          </p:cNvPr>
+          <p:cNvSpPr>
+            <a:spLocks noChangeArrowheads="1"/>
+          </p:cNvSpPr>
+          <p:nvPr/>
+        </p:nvSpPr>
+        <p:spPr bwMode="auto">
+          <a:xfrm>
+            <a:off x="4295776" y="404814"/>
+            <a:ext cx="6048375" cy="854075"/>
+          </a:xfrm>
+          <a:prstGeom prst="rect">
+            <a:avLst/>
+          </a:prstGeom>
+          <a:noFill/>
+          <a:ln w="9525">
+            <a:noFill/>
+            <a:miter lim="800000"/>
+            <a:headEnd/>
+            <a:tailEnd/>
+          </a:ln>
+        </p:spPr>
+        <p:txBody>
+          <a:bodyPr anchor="ctr"/>
+          <a:lstStyle/>
+          <a:p>
+            <a:pPr algn="r">
+              <a:spcBef>
+                <a:spcPct val="0"/>
+              </a:spcBef>
+            </a:pPr>
+            <a:r>
+              <a:rPr lang="pt-PT" sz="3800" dirty="0">
+                <a:solidFill>
+                  <a:schemeClr val="bg1">
+                    <a:lumMod val="50000"/>
+                  </a:schemeClr>
+                </a:solidFill>
+                <a:latin typeface="Humnst777 BT" pitchFamily="34" charset="0"/>
+              </a:rPr>
+              <a:t>Modelos</a:t>
+            </a:r>
+          </a:p>
+        </p:txBody>
+      </p:sp>
+      <p:sp>
+        <p:nvSpPr>
+          <p:cNvPr id="4" name="Text Box 376">
+            <a:extLst>
+              <a:ext uri="{FF2B5EF4-FFF2-40B4-BE49-F238E27FC236}">
+                <a16:creationId xmlns:a16="http://schemas.microsoft.com/office/drawing/2014/main" id="{C810C02C-D71C-96CF-6DC3-4D8F8BDD1376}"/>
+              </a:ext>
+            </a:extLst>
+          </p:cNvPr>
+          <p:cNvSpPr txBox="1">
+            <a:spLocks noChangeArrowheads="1"/>
+          </p:cNvSpPr>
+          <p:nvPr/>
+        </p:nvSpPr>
+        <p:spPr bwMode="auto">
+          <a:xfrm>
+            <a:off x="2206626" y="1521983"/>
+            <a:ext cx="7705725" cy="523220"/>
+          </a:xfrm>
+          <a:prstGeom prst="rect">
+            <a:avLst/>
+          </a:prstGeom>
+          <a:noFill/>
+          <a:ln w="9525">
+            <a:noFill/>
+            <a:miter lim="800000"/>
+            <a:headEnd/>
+            <a:tailEnd/>
+          </a:ln>
+        </p:spPr>
+        <p:txBody>
+          <a:bodyPr>
+            <a:spAutoFit/>
+          </a:bodyPr>
+          <a:lstStyle/>
+          <a:p>
+            <a:pPr>
+              <a:spcBef>
+                <a:spcPct val="0"/>
+              </a:spcBef>
+            </a:pPr>
+            <a:r>
+              <a:rPr lang="pt-PT" sz="2800" b="1" dirty="0">
+                <a:solidFill>
+                  <a:srgbClr val="CC301F"/>
+                </a:solidFill>
+              </a:rPr>
+              <a:t>»</a:t>
+            </a:r>
+            <a:r>
+              <a:rPr lang="pt-PT" sz="2800" dirty="0">
+                <a:solidFill>
+                  <a:schemeClr val="bg2"/>
+                </a:solidFill>
+                <a:latin typeface="Humnst777 BT" pitchFamily="34" charset="0"/>
+              </a:rPr>
+              <a:t> </a:t>
+            </a:r>
+            <a:r>
+              <a:rPr lang="pt-PT" sz="2800" i="1" dirty="0" err="1">
+                <a:solidFill>
+                  <a:schemeClr val="bg1">
+                    <a:lumMod val="50000"/>
+                  </a:schemeClr>
+                </a:solidFill>
+                <a:latin typeface="Humnst777 BT" pitchFamily="34" charset="0"/>
+              </a:rPr>
+              <a:t>Machine</a:t>
+            </a:r>
+            <a:r>
+              <a:rPr lang="pt-PT" sz="2800" i="1" dirty="0">
+                <a:solidFill>
+                  <a:schemeClr val="bg1">
+                    <a:lumMod val="50000"/>
+                  </a:schemeClr>
+                </a:solidFill>
+                <a:latin typeface="Humnst777 BT" pitchFamily="34" charset="0"/>
+              </a:rPr>
+              <a:t> </a:t>
+            </a:r>
+            <a:r>
+              <a:rPr lang="pt-PT" sz="2800" i="1" dirty="0" err="1">
+                <a:solidFill>
+                  <a:schemeClr val="bg1">
+                    <a:lumMod val="50000"/>
+                  </a:schemeClr>
+                </a:solidFill>
+                <a:latin typeface="Humnst777 BT" pitchFamily="34" charset="0"/>
+              </a:rPr>
+              <a:t>Learning</a:t>
+            </a:r>
+            <a:r>
+              <a:rPr lang="pt-PT" sz="2800" dirty="0">
+                <a:solidFill>
+                  <a:schemeClr val="bg1">
+                    <a:lumMod val="50000"/>
+                  </a:schemeClr>
+                </a:solidFill>
+                <a:latin typeface="Humnst777 BT" pitchFamily="34" charset="0"/>
+              </a:rPr>
+              <a:t>: Árvores de decisão</a:t>
+            </a:r>
+            <a:endParaRPr lang="pt-PT" sz="2800" b="1" i="1" dirty="0">
+              <a:solidFill>
+                <a:schemeClr val="bg1">
+                  <a:lumMod val="50000"/>
+                </a:schemeClr>
+              </a:solidFill>
+              <a:latin typeface="Humnst777 BT" pitchFamily="34" charset="0"/>
+            </a:endParaRPr>
+          </a:p>
+        </p:txBody>
+      </p:sp>
+    </p:spTree>
+    <p:extLst>
+      <p:ext uri="{BB962C8B-B14F-4D97-AF65-F5344CB8AC3E}">
+        <p14:creationId xmlns:p14="http://schemas.microsoft.com/office/powerpoint/2010/main" val="220434999"/>
+      </p:ext>
+    </p:extLst>
+  </p:cSld>
+  <p:clrMapOvr>
+    <a:masterClrMapping/>
+  </p:clrMapOvr>
+</p:sld>
+</file>
+
+<file path=ppt/slides/slide34.xml><?xml version="1.0" encoding="utf-8"?>
+<p:sld xmlns:a="http://schemas.openxmlformats.org/drawingml/2006/main" xmlns:r="http://schemas.openxmlformats.org/officeDocument/2006/relationships" xmlns:p="http://schemas.openxmlformats.org/presentationml/2006/main">
+  <p:cSld>
+    <p:spTree>
+      <p:nvGrpSpPr>
+        <p:cNvPr id="1" name="">
+          <a:extLst>
+            <a:ext uri="{FF2B5EF4-FFF2-40B4-BE49-F238E27FC236}">
+              <a16:creationId xmlns:a16="http://schemas.microsoft.com/office/drawing/2014/main" id="{40CCDFA2-E7FC-5FEA-9D1D-4CC3E7AC8208}"/>
+            </a:ext>
+          </a:extLst>
+        </p:cNvPr>
+        <p:cNvGrpSpPr/>
+        <p:nvPr/>
+      </p:nvGrpSpPr>
+      <p:grpSpPr>
+        <a:xfrm>
+          <a:off x="0" y="0"/>
+          <a:ext cx="0" cy="0"/>
+          <a:chOff x="0" y="0"/>
+          <a:chExt cx="0" cy="0"/>
+        </a:xfrm>
+      </p:grpSpPr>
+      <p:sp>
+        <p:nvSpPr>
+          <p:cNvPr id="17413" name="Text Box 39">
+            <a:extLst>
+              <a:ext uri="{FF2B5EF4-FFF2-40B4-BE49-F238E27FC236}">
+                <a16:creationId xmlns:a16="http://schemas.microsoft.com/office/drawing/2014/main" id="{86C89C83-5018-44EF-AED6-6F35916CE445}"/>
+              </a:ext>
+            </a:extLst>
+          </p:cNvPr>
+          <p:cNvSpPr txBox="1">
+            <a:spLocks noChangeArrowheads="1"/>
+          </p:cNvSpPr>
+          <p:nvPr/>
+        </p:nvSpPr>
+        <p:spPr bwMode="auto">
+          <a:xfrm rot="5400000" flipV="1">
+            <a:off x="9299576" y="946151"/>
+            <a:ext cx="504825" cy="1006475"/>
+          </a:xfrm>
+          <a:prstGeom prst="rect">
+            <a:avLst/>
+          </a:prstGeom>
+          <a:noFill/>
+          <a:ln w="9525">
+            <a:noFill/>
+            <a:miter lim="800000"/>
+            <a:headEnd/>
+            <a:tailEnd/>
+          </a:ln>
+        </p:spPr>
+        <p:txBody>
+          <a:bodyPr>
+            <a:spAutoFit/>
+          </a:bodyPr>
+          <a:lstStyle/>
+          <a:p>
+            <a:r>
+              <a:rPr lang="pt-PT">
+                <a:solidFill>
+                  <a:srgbClr val="CC301F"/>
+                </a:solidFill>
+              </a:rPr>
+              <a:t>«</a:t>
+            </a:r>
+          </a:p>
+        </p:txBody>
+      </p:sp>
+      <p:sp>
+        <p:nvSpPr>
+          <p:cNvPr id="8194" name="Rectangle 2">
+            <a:extLst>
+              <a:ext uri="{FF2B5EF4-FFF2-40B4-BE49-F238E27FC236}">
+                <a16:creationId xmlns:a16="http://schemas.microsoft.com/office/drawing/2014/main" id="{B309D9A1-C1AD-4067-42D3-9BBE41ECAA3C}"/>
+              </a:ext>
+            </a:extLst>
+          </p:cNvPr>
+          <p:cNvSpPr>
+            <a:spLocks noChangeArrowheads="1"/>
+          </p:cNvSpPr>
+          <p:nvPr/>
+        </p:nvSpPr>
+        <p:spPr bwMode="auto">
+          <a:xfrm>
+            <a:off x="1524001" y="-507831"/>
+            <a:ext cx="184731" cy="1015663"/>
+          </a:xfrm>
+          <a:prstGeom prst="rect">
+            <a:avLst/>
+          </a:prstGeom>
+          <a:noFill/>
+          <a:ln w="9525">
+            <a:noFill/>
+            <a:miter lim="800000"/>
+            <a:headEnd/>
+            <a:tailEnd/>
+          </a:ln>
+          <a:effectLst/>
+        </p:spPr>
+        <p:txBody>
+          <a:bodyPr vert="horz" wrap="none" lIns="91440" tIns="45720" rIns="91440" bIns="45720" numCol="1" anchor="ctr" anchorCtr="0" compatLnSpc="1">
+            <a:prstTxWarp prst="textNoShape">
+              <a:avLst/>
+            </a:prstTxWarp>
+            <a:spAutoFit/>
+          </a:bodyPr>
+          <a:lstStyle/>
+          <a:p>
+            <a:endParaRPr lang="en-US"/>
+          </a:p>
+        </p:txBody>
+      </p:sp>
+      <p:sp>
+        <p:nvSpPr>
+          <p:cNvPr id="8196" name="Rectangle 4">
+            <a:extLst>
+              <a:ext uri="{FF2B5EF4-FFF2-40B4-BE49-F238E27FC236}">
+                <a16:creationId xmlns:a16="http://schemas.microsoft.com/office/drawing/2014/main" id="{E61BAA68-AE16-7EA8-1AB0-36BFBC8A3622}"/>
+              </a:ext>
+            </a:extLst>
+          </p:cNvPr>
+          <p:cNvSpPr>
+            <a:spLocks noChangeArrowheads="1"/>
+          </p:cNvSpPr>
+          <p:nvPr/>
+        </p:nvSpPr>
+        <p:spPr bwMode="auto">
+          <a:xfrm>
+            <a:off x="1524001" y="-507831"/>
+            <a:ext cx="184731" cy="1015663"/>
+          </a:xfrm>
+          <a:prstGeom prst="rect">
+            <a:avLst/>
+          </a:prstGeom>
+          <a:noFill/>
+          <a:ln w="9525">
+            <a:noFill/>
+            <a:miter lim="800000"/>
+            <a:headEnd/>
+            <a:tailEnd/>
+          </a:ln>
+          <a:effectLst/>
+        </p:spPr>
+        <p:txBody>
+          <a:bodyPr vert="horz" wrap="none" lIns="91440" tIns="45720" rIns="91440" bIns="45720" numCol="1" anchor="ctr" anchorCtr="0" compatLnSpc="1">
+            <a:prstTxWarp prst="textNoShape">
+              <a:avLst/>
+            </a:prstTxWarp>
+            <a:spAutoFit/>
+          </a:bodyPr>
+          <a:lstStyle/>
+          <a:p>
+            <a:endParaRPr lang="en-US"/>
+          </a:p>
+        </p:txBody>
+      </p:sp>
+      <p:sp>
+        <p:nvSpPr>
+          <p:cNvPr id="14" name="Rectangle 38">
+            <a:extLst>
+              <a:ext uri="{FF2B5EF4-FFF2-40B4-BE49-F238E27FC236}">
+                <a16:creationId xmlns:a16="http://schemas.microsoft.com/office/drawing/2014/main" id="{371E49CF-354B-CFEB-C970-5A063EACB7F0}"/>
+              </a:ext>
+            </a:extLst>
+          </p:cNvPr>
+          <p:cNvSpPr>
+            <a:spLocks noChangeArrowheads="1"/>
+          </p:cNvSpPr>
+          <p:nvPr/>
+        </p:nvSpPr>
+        <p:spPr bwMode="auto">
+          <a:xfrm>
+            <a:off x="4295776" y="404814"/>
+            <a:ext cx="6048375" cy="854075"/>
+          </a:xfrm>
+          <a:prstGeom prst="rect">
+            <a:avLst/>
+          </a:prstGeom>
+          <a:noFill/>
+          <a:ln w="9525">
+            <a:noFill/>
+            <a:miter lim="800000"/>
+            <a:headEnd/>
+            <a:tailEnd/>
+          </a:ln>
+        </p:spPr>
+        <p:txBody>
+          <a:bodyPr anchor="ctr"/>
+          <a:lstStyle/>
+          <a:p>
+            <a:pPr algn="r">
+              <a:spcBef>
+                <a:spcPct val="0"/>
+              </a:spcBef>
+            </a:pPr>
+            <a:r>
+              <a:rPr lang="pt-PT" sz="3800" dirty="0">
+                <a:solidFill>
+                  <a:schemeClr val="bg1">
+                    <a:lumMod val="50000"/>
+                  </a:schemeClr>
+                </a:solidFill>
+                <a:latin typeface="Humnst777 BT" pitchFamily="34" charset="0"/>
+              </a:rPr>
+              <a:t>Modelos</a:t>
+            </a:r>
+          </a:p>
+        </p:txBody>
+      </p:sp>
+      <p:sp>
+        <p:nvSpPr>
+          <p:cNvPr id="3" name="Text Box 13">
+            <a:extLst>
+              <a:ext uri="{FF2B5EF4-FFF2-40B4-BE49-F238E27FC236}">
+                <a16:creationId xmlns:a16="http://schemas.microsoft.com/office/drawing/2014/main" id="{DAD0929C-855F-3483-7A5F-29177A444340}"/>
+              </a:ext>
+            </a:extLst>
+          </p:cNvPr>
+          <p:cNvSpPr txBox="1">
+            <a:spLocks noChangeArrowheads="1"/>
+          </p:cNvSpPr>
+          <p:nvPr/>
+        </p:nvSpPr>
+        <p:spPr bwMode="auto">
+          <a:xfrm>
+            <a:off x="2315804" y="2153756"/>
+            <a:ext cx="7560392" cy="2893100"/>
+          </a:xfrm>
+          <a:prstGeom prst="rect">
+            <a:avLst/>
+          </a:prstGeom>
+          <a:solidFill>
+            <a:schemeClr val="bg1">
+              <a:lumMod val="95000"/>
+            </a:schemeClr>
+          </a:solidFill>
+          <a:ln w="9525">
+            <a:solidFill>
+              <a:schemeClr val="tx1"/>
+            </a:solidFill>
+            <a:miter lim="800000"/>
+            <a:headEnd/>
+            <a:tailEnd/>
+          </a:ln>
+        </p:spPr>
+        <p:txBody>
+          <a:bodyPr wrap="square">
+            <a:spAutoFit/>
+          </a:bodyPr>
+          <a:lstStyle/>
+          <a:p>
+            <a:pPr algn="just">
+              <a:spcBef>
+                <a:spcPts val="600"/>
+              </a:spcBef>
+            </a:pPr>
+            <a:r>
+              <a:rPr lang="pt-PT" sz="1200" b="1" dirty="0" err="1">
+                <a:solidFill>
+                  <a:srgbClr val="7030A0"/>
+                </a:solidFill>
+                <a:latin typeface="Courier New" pitchFamily="49" charset="0"/>
+                <a:cs typeface="Courier New" pitchFamily="49" charset="0"/>
+              </a:rPr>
+              <a:t>library</a:t>
+            </a:r>
+            <a:r>
+              <a:rPr lang="pt-PT" sz="1200" dirty="0">
+                <a:solidFill>
+                  <a:schemeClr val="tx1"/>
+                </a:solidFill>
+                <a:latin typeface="Courier New" pitchFamily="49" charset="0"/>
+                <a:cs typeface="Courier New" pitchFamily="49" charset="0"/>
+              </a:rPr>
+              <a:t>(</a:t>
+            </a:r>
+            <a:r>
+              <a:rPr lang="pt-PT" sz="1200" b="1" dirty="0">
+                <a:solidFill>
+                  <a:srgbClr val="00B050"/>
+                </a:solidFill>
+                <a:latin typeface="Courier New" pitchFamily="49" charset="0"/>
+                <a:cs typeface="Courier New" pitchFamily="49" charset="0"/>
+              </a:rPr>
+              <a:t>"</a:t>
+            </a:r>
+            <a:r>
+              <a:rPr lang="pt-PT" sz="1200" b="1" dirty="0" err="1">
+                <a:solidFill>
+                  <a:srgbClr val="00B050"/>
+                </a:solidFill>
+                <a:latin typeface="Courier New" pitchFamily="49" charset="0"/>
+                <a:cs typeface="Courier New" pitchFamily="49" charset="0"/>
+              </a:rPr>
+              <a:t>nnet</a:t>
+            </a:r>
+            <a:r>
+              <a:rPr lang="pt-PT" sz="1200" b="1" dirty="0">
+                <a:solidFill>
+                  <a:srgbClr val="00B050"/>
+                </a:solidFill>
+                <a:latin typeface="Courier New" pitchFamily="49" charset="0"/>
+                <a:cs typeface="Courier New" pitchFamily="49" charset="0"/>
+              </a:rPr>
+              <a:t>"</a:t>
+            </a:r>
+            <a:r>
+              <a:rPr lang="pt-PT" sz="1200" dirty="0">
+                <a:solidFill>
+                  <a:schemeClr val="tx1"/>
+                </a:solidFill>
+                <a:latin typeface="Courier New" pitchFamily="49" charset="0"/>
+                <a:cs typeface="Courier New" pitchFamily="49" charset="0"/>
+              </a:rPr>
+              <a:t>)</a:t>
+            </a:r>
+          </a:p>
+          <a:p>
+            <a:pPr algn="just">
+              <a:spcBef>
+                <a:spcPts val="600"/>
+              </a:spcBef>
+            </a:pPr>
+            <a:r>
+              <a:rPr lang="pt-PT" sz="1200" b="1" dirty="0" err="1">
+                <a:solidFill>
+                  <a:srgbClr val="7030A0"/>
+                </a:solidFill>
+                <a:latin typeface="Courier New" pitchFamily="49" charset="0"/>
+                <a:cs typeface="Courier New" pitchFamily="49" charset="0"/>
+              </a:rPr>
+              <a:t>library</a:t>
+            </a:r>
+            <a:r>
+              <a:rPr lang="pt-PT" sz="1200" dirty="0">
+                <a:solidFill>
+                  <a:schemeClr val="tx1"/>
+                </a:solidFill>
+                <a:latin typeface="Courier New" pitchFamily="49" charset="0"/>
+                <a:cs typeface="Courier New" pitchFamily="49" charset="0"/>
+              </a:rPr>
+              <a:t>(</a:t>
+            </a:r>
+            <a:r>
+              <a:rPr lang="pt-PT" sz="1200" b="1" dirty="0">
+                <a:solidFill>
+                  <a:srgbClr val="00B050"/>
+                </a:solidFill>
+                <a:latin typeface="Courier New" pitchFamily="49" charset="0"/>
+                <a:cs typeface="Courier New" pitchFamily="49" charset="0"/>
+              </a:rPr>
+              <a:t>"</a:t>
+            </a:r>
+            <a:r>
+              <a:rPr lang="pt-PT" sz="1200" b="1" dirty="0" err="1">
+                <a:solidFill>
+                  <a:srgbClr val="00B050"/>
+                </a:solidFill>
+                <a:latin typeface="Courier New" pitchFamily="49" charset="0"/>
+                <a:cs typeface="Courier New" pitchFamily="49" charset="0"/>
+              </a:rPr>
+              <a:t>NeuralNetTools</a:t>
+            </a:r>
+            <a:r>
+              <a:rPr lang="pt-PT" sz="1200" b="1" dirty="0">
+                <a:solidFill>
+                  <a:srgbClr val="00B050"/>
+                </a:solidFill>
+                <a:latin typeface="Courier New" pitchFamily="49" charset="0"/>
+                <a:cs typeface="Courier New" pitchFamily="49" charset="0"/>
+              </a:rPr>
+              <a:t>"</a:t>
+            </a:r>
+            <a:r>
+              <a:rPr lang="pt-PT" sz="1200" dirty="0">
+                <a:solidFill>
+                  <a:schemeClr val="tx1"/>
+                </a:solidFill>
+                <a:latin typeface="Courier New" pitchFamily="49" charset="0"/>
+                <a:cs typeface="Courier New" pitchFamily="49" charset="0"/>
+              </a:rPr>
+              <a:t>)</a:t>
+            </a:r>
+          </a:p>
+          <a:p>
+            <a:pPr algn="just">
+              <a:spcBef>
+                <a:spcPts val="600"/>
+              </a:spcBef>
+            </a:pPr>
+            <a:endParaRPr lang="pt-PT" sz="1200" b="1" dirty="0">
+              <a:solidFill>
+                <a:schemeClr val="tx1"/>
+              </a:solidFill>
+              <a:latin typeface="Courier New" pitchFamily="49" charset="0"/>
+              <a:cs typeface="Courier New" pitchFamily="49" charset="0"/>
+            </a:endParaRPr>
+          </a:p>
+          <a:p>
+            <a:pPr algn="just">
+              <a:spcBef>
+                <a:spcPts val="600"/>
+              </a:spcBef>
+            </a:pPr>
+            <a:r>
+              <a:rPr lang="pt-PT" sz="1200" b="1" dirty="0" err="1">
+                <a:solidFill>
+                  <a:schemeClr val="tx1"/>
+                </a:solidFill>
+                <a:latin typeface="Courier New" pitchFamily="49" charset="0"/>
+                <a:cs typeface="Courier New" pitchFamily="49" charset="0"/>
+              </a:rPr>
+              <a:t>res_nnet</a:t>
+            </a:r>
+            <a:r>
+              <a:rPr lang="pt-PT" sz="1200" b="1" dirty="0">
+                <a:solidFill>
+                  <a:schemeClr val="tx1"/>
+                </a:solidFill>
+                <a:latin typeface="Courier New" pitchFamily="49" charset="0"/>
+                <a:cs typeface="Courier New" pitchFamily="49" charset="0"/>
+              </a:rPr>
+              <a:t> </a:t>
+            </a:r>
+            <a:r>
+              <a:rPr lang="pt-PT" sz="1200" dirty="0">
+                <a:solidFill>
+                  <a:schemeClr val="tx1"/>
+                </a:solidFill>
+                <a:latin typeface="Courier New" pitchFamily="49" charset="0"/>
+                <a:cs typeface="Courier New" pitchFamily="49" charset="0"/>
+              </a:rPr>
+              <a:t>&lt;-</a:t>
+            </a:r>
+            <a:r>
+              <a:rPr lang="pt-PT" sz="1200" b="1" dirty="0">
+                <a:solidFill>
+                  <a:schemeClr val="tx1"/>
+                </a:solidFill>
+                <a:latin typeface="Courier New" pitchFamily="49" charset="0"/>
+                <a:cs typeface="Courier New" pitchFamily="49" charset="0"/>
+              </a:rPr>
+              <a:t> </a:t>
+            </a:r>
+            <a:r>
+              <a:rPr lang="pt-PT" sz="1200" b="1" dirty="0" err="1">
+                <a:solidFill>
+                  <a:schemeClr val="tx1"/>
+                </a:solidFill>
+                <a:latin typeface="Courier New" pitchFamily="49" charset="0"/>
+                <a:cs typeface="Courier New" pitchFamily="49" charset="0"/>
+              </a:rPr>
+              <a:t>rpart</a:t>
+            </a:r>
+            <a:r>
+              <a:rPr lang="pt-PT" sz="1200" dirty="0">
+                <a:solidFill>
+                  <a:schemeClr val="tx1"/>
+                </a:solidFill>
+                <a:latin typeface="Courier New" pitchFamily="49" charset="0"/>
+                <a:cs typeface="Courier New" pitchFamily="49" charset="0"/>
+              </a:rPr>
+              <a:t>(</a:t>
+            </a:r>
+            <a:r>
+              <a:rPr lang="pt-PT" sz="1200" b="1" dirty="0">
+                <a:solidFill>
+                  <a:schemeClr val="tx1"/>
+                </a:solidFill>
+                <a:latin typeface="Courier New" pitchFamily="49" charset="0"/>
+                <a:cs typeface="Courier New" pitchFamily="49" charset="0"/>
+              </a:rPr>
+              <a:t>y </a:t>
+            </a:r>
+            <a:r>
+              <a:rPr lang="pt-PT" sz="1200" dirty="0">
+                <a:solidFill>
+                  <a:schemeClr val="tx1"/>
+                </a:solidFill>
+                <a:latin typeface="Courier New" pitchFamily="49" charset="0"/>
+                <a:cs typeface="Courier New" pitchFamily="49" charset="0"/>
+              </a:rPr>
+              <a:t>~</a:t>
+            </a:r>
+            <a:r>
+              <a:rPr lang="pt-PT" sz="1200" b="1" dirty="0">
+                <a:solidFill>
+                  <a:schemeClr val="tx1"/>
+                </a:solidFill>
+                <a:latin typeface="Courier New" pitchFamily="49" charset="0"/>
+                <a:cs typeface="Courier New" pitchFamily="49" charset="0"/>
+              </a:rPr>
+              <a:t> x1 </a:t>
+            </a:r>
+            <a:r>
+              <a:rPr lang="pt-PT" sz="1200" dirty="0">
+                <a:solidFill>
+                  <a:schemeClr val="tx1"/>
+                </a:solidFill>
+                <a:latin typeface="Courier New" pitchFamily="49" charset="0"/>
+                <a:cs typeface="Courier New" pitchFamily="49" charset="0"/>
+              </a:rPr>
+              <a:t>+</a:t>
+            </a:r>
+            <a:r>
+              <a:rPr lang="pt-PT" sz="1200" b="1" dirty="0">
+                <a:solidFill>
+                  <a:schemeClr val="tx1"/>
+                </a:solidFill>
+                <a:latin typeface="Courier New" pitchFamily="49" charset="0"/>
+                <a:cs typeface="Courier New" pitchFamily="49" charset="0"/>
+              </a:rPr>
+              <a:t> x2 </a:t>
+            </a:r>
+            <a:r>
+              <a:rPr lang="pt-PT" sz="1200" dirty="0">
+                <a:solidFill>
+                  <a:schemeClr val="tx1"/>
+                </a:solidFill>
+                <a:latin typeface="Courier New" pitchFamily="49" charset="0"/>
+                <a:cs typeface="Courier New" pitchFamily="49" charset="0"/>
+              </a:rPr>
+              <a:t>+</a:t>
+            </a:r>
+            <a:r>
+              <a:rPr lang="pt-PT" sz="1200" b="1" dirty="0">
+                <a:solidFill>
+                  <a:schemeClr val="tx1"/>
+                </a:solidFill>
+                <a:latin typeface="Courier New" pitchFamily="49" charset="0"/>
+                <a:cs typeface="Courier New" pitchFamily="49" charset="0"/>
+              </a:rPr>
+              <a:t> x3</a:t>
+            </a:r>
+            <a:r>
+              <a:rPr lang="pt-PT" sz="1200" dirty="0">
+                <a:solidFill>
+                  <a:schemeClr val="tx1"/>
+                </a:solidFill>
+                <a:latin typeface="Courier New" pitchFamily="49" charset="0"/>
+                <a:cs typeface="Courier New" pitchFamily="49" charset="0"/>
+              </a:rPr>
+              <a:t>,</a:t>
+            </a:r>
+            <a:r>
+              <a:rPr lang="pt-PT" sz="1200" b="1" dirty="0">
+                <a:solidFill>
+                  <a:schemeClr val="tx1"/>
+                </a:solidFill>
+                <a:latin typeface="Courier New" pitchFamily="49" charset="0"/>
+                <a:cs typeface="Courier New" pitchFamily="49" charset="0"/>
+              </a:rPr>
+              <a:t> data</a:t>
+            </a:r>
+            <a:r>
+              <a:rPr lang="pt-PT" sz="1200" dirty="0">
+                <a:solidFill>
+                  <a:schemeClr val="tx1"/>
+                </a:solidFill>
+                <a:latin typeface="Courier New" pitchFamily="49" charset="0"/>
+                <a:cs typeface="Courier New" pitchFamily="49" charset="0"/>
+              </a:rPr>
+              <a:t>=</a:t>
+            </a:r>
+            <a:r>
+              <a:rPr lang="pt-PT" sz="1200" b="1" dirty="0" err="1">
+                <a:solidFill>
+                  <a:schemeClr val="tx1"/>
+                </a:solidFill>
+                <a:latin typeface="Courier New" pitchFamily="49" charset="0"/>
+                <a:cs typeface="Courier New" pitchFamily="49" charset="0"/>
+              </a:rPr>
+              <a:t>tb_ml</a:t>
+            </a:r>
+            <a:r>
+              <a:rPr lang="pt-PT" sz="1200" dirty="0">
+                <a:solidFill>
+                  <a:schemeClr val="tx1"/>
+                </a:solidFill>
+                <a:latin typeface="Courier New" pitchFamily="49" charset="0"/>
+                <a:cs typeface="Courier New" pitchFamily="49" charset="0"/>
+              </a:rPr>
+              <a:t>,</a:t>
+            </a:r>
+            <a:r>
+              <a:rPr lang="pt-PT" sz="1200" b="1" dirty="0">
+                <a:solidFill>
+                  <a:schemeClr val="tx1"/>
+                </a:solidFill>
+                <a:latin typeface="Courier New" pitchFamily="49" charset="0"/>
+                <a:cs typeface="Courier New" pitchFamily="49" charset="0"/>
+              </a:rPr>
+              <a:t> </a:t>
+            </a:r>
+            <a:r>
+              <a:rPr lang="pt-PT" sz="1200" b="1" dirty="0" err="1">
+                <a:solidFill>
+                  <a:schemeClr val="tx1"/>
+                </a:solidFill>
+                <a:latin typeface="Courier New" pitchFamily="49" charset="0"/>
+                <a:cs typeface="Courier New" pitchFamily="49" charset="0"/>
+              </a:rPr>
+              <a:t>size</a:t>
+            </a:r>
+            <a:r>
+              <a:rPr lang="pt-PT" sz="1200" dirty="0">
+                <a:solidFill>
+                  <a:schemeClr val="tx1"/>
+                </a:solidFill>
+                <a:latin typeface="Courier New" pitchFamily="49" charset="0"/>
+                <a:cs typeface="Courier New" pitchFamily="49" charset="0"/>
+              </a:rPr>
+              <a:t>=</a:t>
+            </a:r>
+            <a:r>
+              <a:rPr lang="pt-PT" sz="1200" b="1" dirty="0">
+                <a:solidFill>
+                  <a:srgbClr val="0070C0"/>
+                </a:solidFill>
+                <a:latin typeface="Courier New" pitchFamily="49" charset="0"/>
+                <a:cs typeface="Courier New" pitchFamily="49" charset="0"/>
+              </a:rPr>
+              <a:t>1</a:t>
+            </a:r>
+            <a:r>
+              <a:rPr lang="pt-PT" sz="1200" b="1" dirty="0">
+                <a:solidFill>
+                  <a:schemeClr val="tx1"/>
+                </a:solidFill>
+                <a:latin typeface="Courier New" pitchFamily="49" charset="0"/>
+                <a:cs typeface="Courier New" pitchFamily="49" charset="0"/>
+              </a:rPr>
+              <a:t>, trace</a:t>
+            </a:r>
+            <a:r>
+              <a:rPr lang="pt-PT" sz="1200" dirty="0">
+                <a:solidFill>
+                  <a:schemeClr val="tx1"/>
+                </a:solidFill>
+                <a:latin typeface="Courier New" pitchFamily="49" charset="0"/>
+                <a:cs typeface="Courier New" pitchFamily="49" charset="0"/>
+              </a:rPr>
+              <a:t>=</a:t>
+            </a:r>
+            <a:r>
+              <a:rPr lang="pt-PT" sz="1200" b="1" dirty="0">
+                <a:solidFill>
+                  <a:srgbClr val="7030A0"/>
+                </a:solidFill>
+                <a:latin typeface="Courier New" pitchFamily="49" charset="0"/>
+                <a:cs typeface="Courier New" pitchFamily="49" charset="0"/>
+              </a:rPr>
+              <a:t>FALSE</a:t>
+            </a:r>
+            <a:r>
+              <a:rPr lang="pt-PT" sz="1200" dirty="0">
+                <a:solidFill>
+                  <a:schemeClr val="tx1"/>
+                </a:solidFill>
+                <a:latin typeface="Courier New" pitchFamily="49" charset="0"/>
+                <a:cs typeface="Courier New" pitchFamily="49" charset="0"/>
+              </a:rPr>
+              <a:t>)</a:t>
+            </a:r>
+          </a:p>
+          <a:p>
+            <a:pPr algn="just">
+              <a:spcBef>
+                <a:spcPts val="600"/>
+              </a:spcBef>
+            </a:pPr>
+            <a:endParaRPr lang="pt-PT" sz="1200" dirty="0">
+              <a:solidFill>
+                <a:schemeClr val="tx1"/>
+              </a:solidFill>
+              <a:latin typeface="Courier New" pitchFamily="49" charset="0"/>
+              <a:cs typeface="Courier New" pitchFamily="49" charset="0"/>
+            </a:endParaRPr>
+          </a:p>
+          <a:p>
+            <a:pPr algn="just">
+              <a:spcBef>
+                <a:spcPts val="600"/>
+              </a:spcBef>
+            </a:pPr>
+            <a:r>
+              <a:rPr lang="en-US" sz="1200" b="1" dirty="0">
+                <a:solidFill>
+                  <a:schemeClr val="tx1"/>
+                </a:solidFill>
+                <a:latin typeface="Courier New" pitchFamily="49" charset="0"/>
+                <a:cs typeface="Courier New" pitchFamily="49" charset="0"/>
+              </a:rPr>
+              <a:t>table</a:t>
+            </a:r>
+            <a:r>
+              <a:rPr lang="en-US" sz="1200" dirty="0">
+                <a:solidFill>
+                  <a:schemeClr val="tx1"/>
+                </a:solidFill>
+                <a:latin typeface="Courier New" pitchFamily="49" charset="0"/>
+                <a:cs typeface="Courier New" pitchFamily="49" charset="0"/>
+              </a:rPr>
+              <a:t>(</a:t>
+            </a:r>
+            <a:r>
+              <a:rPr lang="en-US" sz="1200" b="1" dirty="0">
+                <a:solidFill>
+                  <a:schemeClr val="tx1"/>
+                </a:solidFill>
+                <a:latin typeface="Courier New" pitchFamily="49" charset="0"/>
+                <a:cs typeface="Courier New" pitchFamily="49" charset="0"/>
+              </a:rPr>
+              <a:t>predict</a:t>
+            </a:r>
+            <a:r>
+              <a:rPr lang="en-US" sz="1200" dirty="0">
+                <a:solidFill>
+                  <a:schemeClr val="tx1"/>
+                </a:solidFill>
+                <a:latin typeface="Courier New" pitchFamily="49" charset="0"/>
+                <a:cs typeface="Courier New" pitchFamily="49" charset="0"/>
+              </a:rPr>
+              <a:t>(</a:t>
+            </a:r>
+            <a:r>
+              <a:rPr lang="en-US" sz="1200" b="1" dirty="0" err="1">
+                <a:solidFill>
+                  <a:schemeClr val="tx1"/>
+                </a:solidFill>
+                <a:latin typeface="Courier New" pitchFamily="49" charset="0"/>
+                <a:cs typeface="Courier New" pitchFamily="49" charset="0"/>
+              </a:rPr>
+              <a:t>res_nnet</a:t>
+            </a:r>
+            <a:r>
+              <a:rPr lang="en-US" sz="1200" dirty="0">
+                <a:solidFill>
+                  <a:schemeClr val="tx1"/>
+                </a:solidFill>
+                <a:latin typeface="Courier New" pitchFamily="49" charset="0"/>
+                <a:cs typeface="Courier New" pitchFamily="49" charset="0"/>
+              </a:rPr>
+              <a:t>, </a:t>
+            </a:r>
+            <a:r>
+              <a:rPr lang="en-US" sz="1200" b="1" dirty="0">
+                <a:solidFill>
+                  <a:schemeClr val="tx1"/>
+                </a:solidFill>
+                <a:latin typeface="Courier New" pitchFamily="49" charset="0"/>
+                <a:cs typeface="Courier New" pitchFamily="49" charset="0"/>
+              </a:rPr>
+              <a:t>type</a:t>
+            </a:r>
+            <a:r>
+              <a:rPr lang="en-US" sz="1200" dirty="0">
+                <a:solidFill>
+                  <a:schemeClr val="tx1"/>
+                </a:solidFill>
+                <a:latin typeface="Courier New" pitchFamily="49" charset="0"/>
+                <a:cs typeface="Courier New" pitchFamily="49" charset="0"/>
+              </a:rPr>
+              <a:t>=</a:t>
+            </a:r>
+            <a:r>
+              <a:rPr lang="en-US" sz="1200" b="1" dirty="0">
+                <a:solidFill>
+                  <a:srgbClr val="00B050"/>
+                </a:solidFill>
+                <a:latin typeface="Courier New" pitchFamily="49" charset="0"/>
+                <a:cs typeface="Courier New" pitchFamily="49" charset="0"/>
+              </a:rPr>
+              <a:t>"class"</a:t>
+            </a:r>
+            <a:r>
+              <a:rPr lang="en-US" sz="1200" dirty="0">
+                <a:solidFill>
+                  <a:schemeClr val="tx1"/>
+                </a:solidFill>
+                <a:latin typeface="Courier New" pitchFamily="49" charset="0"/>
+                <a:cs typeface="Courier New" pitchFamily="49" charset="0"/>
+              </a:rPr>
+              <a:t>), </a:t>
+            </a:r>
+            <a:r>
+              <a:rPr lang="en-US" sz="1200" b="1" dirty="0" err="1">
+                <a:solidFill>
+                  <a:schemeClr val="tx1"/>
+                </a:solidFill>
+                <a:latin typeface="Courier New" pitchFamily="49" charset="0"/>
+                <a:cs typeface="Courier New" pitchFamily="49" charset="0"/>
+              </a:rPr>
+              <a:t>tb_ml</a:t>
+            </a:r>
+            <a:r>
+              <a:rPr lang="en-US" sz="1200" dirty="0" err="1">
+                <a:solidFill>
+                  <a:schemeClr val="tx1"/>
+                </a:solidFill>
+                <a:latin typeface="Courier New" pitchFamily="49" charset="0"/>
+                <a:cs typeface="Courier New" pitchFamily="49" charset="0"/>
+              </a:rPr>
+              <a:t>$</a:t>
+            </a:r>
+            <a:r>
+              <a:rPr lang="en-US" sz="1200" b="1" dirty="0" err="1">
+                <a:solidFill>
+                  <a:schemeClr val="tx1"/>
+                </a:solidFill>
+                <a:latin typeface="Courier New" pitchFamily="49" charset="0"/>
+                <a:cs typeface="Courier New" pitchFamily="49" charset="0"/>
+              </a:rPr>
+              <a:t>y</a:t>
+            </a:r>
+            <a:r>
+              <a:rPr lang="en-US" sz="1200" dirty="0">
+                <a:solidFill>
+                  <a:schemeClr val="tx1"/>
+                </a:solidFill>
+                <a:latin typeface="Courier New" pitchFamily="49" charset="0"/>
+                <a:cs typeface="Courier New" pitchFamily="49" charset="0"/>
+              </a:rPr>
+              <a:t>)</a:t>
+            </a:r>
+            <a:endParaRPr lang="pt-PT" sz="1200" dirty="0">
+              <a:solidFill>
+                <a:schemeClr val="tx1"/>
+              </a:solidFill>
+              <a:latin typeface="Courier New" pitchFamily="49" charset="0"/>
+              <a:cs typeface="Courier New" pitchFamily="49" charset="0"/>
+            </a:endParaRPr>
+          </a:p>
+          <a:p>
+            <a:pPr algn="just">
+              <a:spcBef>
+                <a:spcPts val="600"/>
+              </a:spcBef>
+            </a:pPr>
+            <a:r>
+              <a:rPr lang="pt-PT" sz="1200" b="1" dirty="0">
+                <a:solidFill>
+                  <a:srgbClr val="00B050"/>
+                </a:solidFill>
+                <a:latin typeface="Courier New" pitchFamily="49" charset="0"/>
+                <a:cs typeface="Courier New" pitchFamily="49" charset="0"/>
+              </a:rPr>
+              <a:t>#   0  1</a:t>
+            </a:r>
+          </a:p>
+          <a:p>
+            <a:pPr algn="just">
+              <a:spcBef>
+                <a:spcPts val="600"/>
+              </a:spcBef>
+            </a:pPr>
+            <a:r>
+              <a:rPr lang="pt-PT" sz="1200" b="1" dirty="0">
+                <a:solidFill>
+                  <a:srgbClr val="00B050"/>
+                </a:solidFill>
+                <a:latin typeface="Courier New" pitchFamily="49" charset="0"/>
+                <a:cs typeface="Courier New" pitchFamily="49" charset="0"/>
+              </a:rPr>
+              <a:t>#0  9  1</a:t>
+            </a:r>
+          </a:p>
+          <a:p>
+            <a:pPr algn="just">
+              <a:spcBef>
+                <a:spcPts val="600"/>
+              </a:spcBef>
+            </a:pPr>
+            <a:r>
+              <a:rPr lang="pt-PT" sz="1200" b="1" dirty="0">
+                <a:solidFill>
+                  <a:srgbClr val="00B050"/>
+                </a:solidFill>
+                <a:latin typeface="Courier New" pitchFamily="49" charset="0"/>
+                <a:cs typeface="Courier New" pitchFamily="49" charset="0"/>
+              </a:rPr>
+              <a:t>#1  1  9</a:t>
+            </a:r>
+          </a:p>
+          <a:p>
+            <a:pPr algn="just">
+              <a:spcBef>
+                <a:spcPts val="600"/>
+              </a:spcBef>
+            </a:pPr>
+            <a:endParaRPr lang="pt-PT" sz="1200" dirty="0">
+              <a:solidFill>
+                <a:schemeClr val="tx1"/>
+              </a:solidFill>
+              <a:latin typeface="Courier New" pitchFamily="49" charset="0"/>
+              <a:cs typeface="Courier New" pitchFamily="49" charset="0"/>
+            </a:endParaRPr>
+          </a:p>
+          <a:p>
+            <a:pPr algn="just">
+              <a:spcBef>
+                <a:spcPts val="600"/>
+              </a:spcBef>
+            </a:pPr>
+            <a:r>
+              <a:rPr lang="pt-PT" sz="1200" b="1" dirty="0" err="1">
+                <a:solidFill>
+                  <a:schemeClr val="tx1"/>
+                </a:solidFill>
+                <a:latin typeface="Courier New" pitchFamily="49" charset="0"/>
+                <a:cs typeface="Courier New" pitchFamily="49" charset="0"/>
+              </a:rPr>
+              <a:t>plotnet</a:t>
+            </a:r>
+            <a:r>
+              <a:rPr lang="pt-PT" sz="1200" dirty="0">
+                <a:solidFill>
+                  <a:schemeClr val="tx1"/>
+                </a:solidFill>
+                <a:latin typeface="Courier New" pitchFamily="49" charset="0"/>
+                <a:cs typeface="Courier New" pitchFamily="49" charset="0"/>
+              </a:rPr>
+              <a:t>(</a:t>
+            </a:r>
+            <a:r>
+              <a:rPr lang="pt-PT" sz="1200" b="1" dirty="0" err="1">
+                <a:solidFill>
+                  <a:schemeClr val="tx1"/>
+                </a:solidFill>
+                <a:latin typeface="Courier New" pitchFamily="49" charset="0"/>
+                <a:cs typeface="Courier New" pitchFamily="49" charset="0"/>
+              </a:rPr>
+              <a:t>res_nnet</a:t>
+            </a:r>
+            <a:r>
+              <a:rPr lang="pt-PT" sz="1200" dirty="0">
+                <a:solidFill>
+                  <a:schemeClr val="tx1"/>
+                </a:solidFill>
+                <a:latin typeface="Courier New" pitchFamily="49" charset="0"/>
+                <a:cs typeface="Courier New" pitchFamily="49" charset="0"/>
+              </a:rPr>
+              <a:t>,</a:t>
+            </a:r>
+            <a:r>
+              <a:rPr lang="pt-PT" sz="1200" b="1" dirty="0">
+                <a:solidFill>
+                  <a:schemeClr val="tx1"/>
+                </a:solidFill>
+                <a:latin typeface="Courier New" pitchFamily="49" charset="0"/>
+                <a:cs typeface="Courier New" pitchFamily="49" charset="0"/>
+              </a:rPr>
+              <a:t> </a:t>
+            </a:r>
+            <a:r>
+              <a:rPr lang="pt-PT" sz="1200" b="1" dirty="0" err="1">
+                <a:solidFill>
+                  <a:schemeClr val="tx1"/>
+                </a:solidFill>
+                <a:latin typeface="Courier New" pitchFamily="49" charset="0"/>
+                <a:cs typeface="Courier New" pitchFamily="49" charset="0"/>
+              </a:rPr>
+              <a:t>pos_col</a:t>
+            </a:r>
+            <a:r>
+              <a:rPr lang="pt-PT" sz="1200" dirty="0">
+                <a:solidFill>
+                  <a:schemeClr val="tx1"/>
+                </a:solidFill>
+                <a:latin typeface="Courier New" pitchFamily="49" charset="0"/>
+                <a:cs typeface="Courier New" pitchFamily="49" charset="0"/>
+              </a:rPr>
+              <a:t>=</a:t>
+            </a:r>
+            <a:r>
+              <a:rPr lang="en-US" sz="1200" b="1" dirty="0">
+                <a:solidFill>
+                  <a:srgbClr val="00B050"/>
+                </a:solidFill>
+                <a:latin typeface="Courier New" pitchFamily="49" charset="0"/>
+                <a:cs typeface="Courier New" pitchFamily="49" charset="0"/>
+              </a:rPr>
+              <a:t>"</a:t>
+            </a:r>
+            <a:r>
+              <a:rPr lang="pt-PT" sz="1200" b="1" dirty="0" err="1">
+                <a:solidFill>
+                  <a:srgbClr val="00B050"/>
+                </a:solidFill>
+                <a:latin typeface="Courier New" pitchFamily="49" charset="0"/>
+                <a:cs typeface="Courier New" pitchFamily="49" charset="0"/>
+              </a:rPr>
+              <a:t>blue</a:t>
+            </a:r>
+            <a:r>
+              <a:rPr lang="pt-PT" sz="1200" b="1" dirty="0">
+                <a:solidFill>
+                  <a:srgbClr val="00B050"/>
+                </a:solidFill>
+                <a:latin typeface="Courier New" pitchFamily="49" charset="0"/>
+                <a:cs typeface="Courier New" pitchFamily="49" charset="0"/>
+              </a:rPr>
+              <a:t>"</a:t>
+            </a:r>
+            <a:r>
+              <a:rPr lang="pt-PT" sz="1200" dirty="0">
+                <a:solidFill>
+                  <a:schemeClr val="tx1"/>
+                </a:solidFill>
+                <a:latin typeface="Courier New" pitchFamily="49" charset="0"/>
+                <a:cs typeface="Courier New" pitchFamily="49" charset="0"/>
+              </a:rPr>
+              <a:t>, </a:t>
+            </a:r>
+            <a:r>
+              <a:rPr lang="pt-PT" sz="1200" b="1" dirty="0" err="1">
+                <a:solidFill>
+                  <a:schemeClr val="tx1"/>
+                </a:solidFill>
+                <a:latin typeface="Courier New" pitchFamily="49" charset="0"/>
+                <a:cs typeface="Courier New" pitchFamily="49" charset="0"/>
+              </a:rPr>
+              <a:t>neg_col</a:t>
+            </a:r>
+            <a:r>
+              <a:rPr lang="pt-PT" sz="1200" dirty="0">
+                <a:solidFill>
+                  <a:schemeClr val="tx1"/>
+                </a:solidFill>
+                <a:latin typeface="Courier New" pitchFamily="49" charset="0"/>
+                <a:cs typeface="Courier New" pitchFamily="49" charset="0"/>
+              </a:rPr>
+              <a:t>=</a:t>
+            </a:r>
+            <a:r>
+              <a:rPr lang="en-US" sz="1200" b="1" dirty="0">
+                <a:solidFill>
+                  <a:srgbClr val="00B050"/>
+                </a:solidFill>
+                <a:latin typeface="Courier New" pitchFamily="49" charset="0"/>
+                <a:cs typeface="Courier New" pitchFamily="49" charset="0"/>
+              </a:rPr>
+              <a:t>"</a:t>
+            </a:r>
+            <a:r>
+              <a:rPr lang="pt-PT" sz="1200" b="1" dirty="0" err="1">
+                <a:solidFill>
+                  <a:srgbClr val="00B050"/>
+                </a:solidFill>
+                <a:latin typeface="Courier New" pitchFamily="49" charset="0"/>
+                <a:cs typeface="Courier New" pitchFamily="49" charset="0"/>
+              </a:rPr>
+              <a:t>red</a:t>
+            </a:r>
+            <a:r>
+              <a:rPr lang="pt-PT" sz="1200" b="1" dirty="0">
+                <a:solidFill>
+                  <a:srgbClr val="00B050"/>
+                </a:solidFill>
+                <a:latin typeface="Courier New" pitchFamily="49" charset="0"/>
+                <a:cs typeface="Courier New" pitchFamily="49" charset="0"/>
+              </a:rPr>
+              <a:t>"</a:t>
+            </a:r>
+            <a:r>
+              <a:rPr lang="pt-PT" sz="1200" dirty="0">
+                <a:solidFill>
+                  <a:schemeClr val="tx1"/>
+                </a:solidFill>
+                <a:latin typeface="Courier New" pitchFamily="49" charset="0"/>
+                <a:cs typeface="Courier New" pitchFamily="49" charset="0"/>
+              </a:rPr>
+              <a:t>)</a:t>
+            </a:r>
+          </a:p>
+        </p:txBody>
+      </p:sp>
+      <p:sp>
+        <p:nvSpPr>
+          <p:cNvPr id="4" name="Text Box 376">
+            <a:extLst>
+              <a:ext uri="{FF2B5EF4-FFF2-40B4-BE49-F238E27FC236}">
+                <a16:creationId xmlns:a16="http://schemas.microsoft.com/office/drawing/2014/main" id="{1AB1F1AD-D7DD-3B1B-3906-71451893DEEB}"/>
+              </a:ext>
+            </a:extLst>
+          </p:cNvPr>
+          <p:cNvSpPr txBox="1">
+            <a:spLocks noChangeArrowheads="1"/>
+          </p:cNvSpPr>
+          <p:nvPr/>
+        </p:nvSpPr>
+        <p:spPr bwMode="auto">
+          <a:xfrm>
+            <a:off x="2206626" y="1521983"/>
+            <a:ext cx="7705725" cy="523220"/>
+          </a:xfrm>
+          <a:prstGeom prst="rect">
+            <a:avLst/>
+          </a:prstGeom>
+          <a:noFill/>
+          <a:ln w="9525">
+            <a:noFill/>
+            <a:miter lim="800000"/>
+            <a:headEnd/>
+            <a:tailEnd/>
+          </a:ln>
+        </p:spPr>
+        <p:txBody>
+          <a:bodyPr>
+            <a:spAutoFit/>
+          </a:bodyPr>
+          <a:lstStyle/>
+          <a:p>
+            <a:pPr>
+              <a:spcBef>
+                <a:spcPct val="0"/>
+              </a:spcBef>
+            </a:pPr>
+            <a:r>
+              <a:rPr lang="pt-PT" sz="2800" b="1" dirty="0">
+                <a:solidFill>
+                  <a:srgbClr val="CC301F"/>
+                </a:solidFill>
+              </a:rPr>
+              <a:t>»</a:t>
+            </a:r>
+            <a:r>
+              <a:rPr lang="pt-PT" sz="2800" dirty="0">
+                <a:solidFill>
+                  <a:schemeClr val="bg2"/>
+                </a:solidFill>
+                <a:latin typeface="Humnst777 BT" pitchFamily="34" charset="0"/>
+              </a:rPr>
+              <a:t> </a:t>
+            </a:r>
+            <a:r>
+              <a:rPr lang="pt-PT" sz="2800" i="1" dirty="0" err="1">
+                <a:solidFill>
+                  <a:schemeClr val="bg1">
+                    <a:lumMod val="50000"/>
+                  </a:schemeClr>
+                </a:solidFill>
+                <a:latin typeface="Humnst777 BT" pitchFamily="34" charset="0"/>
+              </a:rPr>
+              <a:t>Machine</a:t>
+            </a:r>
+            <a:r>
+              <a:rPr lang="pt-PT" sz="2800" i="1" dirty="0">
+                <a:solidFill>
+                  <a:schemeClr val="bg1">
+                    <a:lumMod val="50000"/>
+                  </a:schemeClr>
+                </a:solidFill>
+                <a:latin typeface="Humnst777 BT" pitchFamily="34" charset="0"/>
+              </a:rPr>
+              <a:t> </a:t>
+            </a:r>
+            <a:r>
+              <a:rPr lang="pt-PT" sz="2800" i="1" dirty="0" err="1">
+                <a:solidFill>
+                  <a:schemeClr val="bg1">
+                    <a:lumMod val="50000"/>
+                  </a:schemeClr>
+                </a:solidFill>
+                <a:latin typeface="Humnst777 BT" pitchFamily="34" charset="0"/>
+              </a:rPr>
+              <a:t>Learning</a:t>
+            </a:r>
+            <a:r>
+              <a:rPr lang="pt-PT" sz="2800" dirty="0">
+                <a:solidFill>
+                  <a:schemeClr val="bg1">
+                    <a:lumMod val="50000"/>
+                  </a:schemeClr>
+                </a:solidFill>
+                <a:latin typeface="Humnst777 BT" pitchFamily="34" charset="0"/>
+              </a:rPr>
+              <a:t>: Redes neuronais</a:t>
+            </a:r>
+            <a:endParaRPr lang="pt-PT" sz="2800" b="1" i="1" dirty="0">
+              <a:solidFill>
+                <a:schemeClr val="bg1">
+                  <a:lumMod val="50000"/>
+                </a:schemeClr>
+              </a:solidFill>
+              <a:latin typeface="Humnst777 BT" pitchFamily="34" charset="0"/>
+            </a:endParaRPr>
+          </a:p>
+        </p:txBody>
+      </p:sp>
+    </p:spTree>
+    <p:extLst>
+      <p:ext uri="{BB962C8B-B14F-4D97-AF65-F5344CB8AC3E}">
+        <p14:creationId xmlns:p14="http://schemas.microsoft.com/office/powerpoint/2010/main" val="2627257385"/>
+      </p:ext>
+    </p:extLst>
+  </p:cSld>
+  <p:clrMapOvr>
+    <a:masterClrMapping/>
+  </p:clrMapOvr>
+</p:sld>
+</file>
+
+<file path=ppt/slides/slide35.xml><?xml version="1.0" encoding="utf-8"?>
+<p:sld xmlns:a="http://schemas.openxmlformats.org/drawingml/2006/main" xmlns:r="http://schemas.openxmlformats.org/officeDocument/2006/relationships" xmlns:p="http://schemas.openxmlformats.org/presentationml/2006/main">
+  <p:cSld>
+    <p:spTree>
+      <p:nvGrpSpPr>
+        <p:cNvPr id="1" name="">
+          <a:extLst>
+            <a:ext uri="{FF2B5EF4-FFF2-40B4-BE49-F238E27FC236}">
+              <a16:creationId xmlns:a16="http://schemas.microsoft.com/office/drawing/2014/main" id="{E81CB0F6-A4E3-A944-CEA1-82EAF5F4F689}"/>
+            </a:ext>
+          </a:extLst>
+        </p:cNvPr>
+        <p:cNvGrpSpPr/>
+        <p:nvPr/>
+      </p:nvGrpSpPr>
+      <p:grpSpPr>
+        <a:xfrm>
+          <a:off x="0" y="0"/>
+          <a:ext cx="0" cy="0"/>
+          <a:chOff x="0" y="0"/>
+          <a:chExt cx="0" cy="0"/>
+        </a:xfrm>
+      </p:grpSpPr>
+      <p:pic>
+        <p:nvPicPr>
+          <p:cNvPr id="3" name="Picture 2">
+            <a:extLst>
+              <a:ext uri="{FF2B5EF4-FFF2-40B4-BE49-F238E27FC236}">
+                <a16:creationId xmlns:a16="http://schemas.microsoft.com/office/drawing/2014/main" id="{DB901859-09A9-6733-23C8-2E1FBDE1707B}"/>
+              </a:ext>
+            </a:extLst>
+          </p:cNvPr>
+          <p:cNvPicPr>
+            <a:picLocks noChangeAspect="1"/>
+          </p:cNvPicPr>
+          <p:nvPr/>
+        </p:nvPicPr>
+        <p:blipFill>
+          <a:blip r:embed="rId3">
+            <a:extLst>
+              <a:ext uri="{28A0092B-C50C-407E-A947-70E740481C1C}">
+                <a14:useLocalDpi xmlns:a14="http://schemas.microsoft.com/office/drawing/2010/main" val="0"/>
+              </a:ext>
+            </a:extLst>
+          </a:blip>
+          <a:stretch>
+            <a:fillRect/>
+          </a:stretch>
+        </p:blipFill>
+        <p:spPr>
+          <a:xfrm>
+            <a:off x="3002845" y="2158307"/>
+            <a:ext cx="6186309" cy="4064926"/>
+          </a:xfrm>
+          <a:prstGeom prst="rect">
+            <a:avLst/>
+          </a:prstGeom>
+        </p:spPr>
+      </p:pic>
+      <p:sp>
+        <p:nvSpPr>
+          <p:cNvPr id="17413" name="Text Box 39">
+            <a:extLst>
+              <a:ext uri="{FF2B5EF4-FFF2-40B4-BE49-F238E27FC236}">
+                <a16:creationId xmlns:a16="http://schemas.microsoft.com/office/drawing/2014/main" id="{9C58DB2C-52AB-96DC-2356-264613F59A9B}"/>
+              </a:ext>
+            </a:extLst>
+          </p:cNvPr>
+          <p:cNvSpPr txBox="1">
+            <a:spLocks noChangeArrowheads="1"/>
+          </p:cNvSpPr>
+          <p:nvPr/>
+        </p:nvSpPr>
+        <p:spPr bwMode="auto">
+          <a:xfrm rot="5400000" flipV="1">
+            <a:off x="9299576" y="946151"/>
+            <a:ext cx="504825" cy="1006475"/>
+          </a:xfrm>
+          <a:prstGeom prst="rect">
+            <a:avLst/>
+          </a:prstGeom>
+          <a:noFill/>
+          <a:ln w="9525">
+            <a:noFill/>
+            <a:miter lim="800000"/>
+            <a:headEnd/>
+            <a:tailEnd/>
+          </a:ln>
+        </p:spPr>
+        <p:txBody>
+          <a:bodyPr>
+            <a:spAutoFit/>
+          </a:bodyPr>
+          <a:lstStyle/>
+          <a:p>
+            <a:r>
+              <a:rPr lang="pt-PT">
+                <a:solidFill>
+                  <a:srgbClr val="CC301F"/>
+                </a:solidFill>
+              </a:rPr>
+              <a:t>«</a:t>
+            </a:r>
+          </a:p>
+        </p:txBody>
+      </p:sp>
+      <p:sp>
+        <p:nvSpPr>
+          <p:cNvPr id="8194" name="Rectangle 2">
+            <a:extLst>
+              <a:ext uri="{FF2B5EF4-FFF2-40B4-BE49-F238E27FC236}">
+                <a16:creationId xmlns:a16="http://schemas.microsoft.com/office/drawing/2014/main" id="{41107A0D-4D27-F6A3-349C-EC9AA43C2582}"/>
+              </a:ext>
+            </a:extLst>
+          </p:cNvPr>
+          <p:cNvSpPr>
+            <a:spLocks noChangeArrowheads="1"/>
+          </p:cNvSpPr>
+          <p:nvPr/>
+        </p:nvSpPr>
+        <p:spPr bwMode="auto">
+          <a:xfrm>
+            <a:off x="1524001" y="-507831"/>
+            <a:ext cx="184731" cy="1015663"/>
+          </a:xfrm>
+          <a:prstGeom prst="rect">
+            <a:avLst/>
+          </a:prstGeom>
+          <a:noFill/>
+          <a:ln w="9525">
+            <a:noFill/>
+            <a:miter lim="800000"/>
+            <a:headEnd/>
+            <a:tailEnd/>
+          </a:ln>
+          <a:effectLst/>
+        </p:spPr>
+        <p:txBody>
+          <a:bodyPr vert="horz" wrap="none" lIns="91440" tIns="45720" rIns="91440" bIns="45720" numCol="1" anchor="ctr" anchorCtr="0" compatLnSpc="1">
+            <a:prstTxWarp prst="textNoShape">
+              <a:avLst/>
+            </a:prstTxWarp>
+            <a:spAutoFit/>
+          </a:bodyPr>
+          <a:lstStyle/>
+          <a:p>
+            <a:endParaRPr lang="en-US"/>
+          </a:p>
+        </p:txBody>
+      </p:sp>
+      <p:sp>
+        <p:nvSpPr>
+          <p:cNvPr id="8196" name="Rectangle 4">
+            <a:extLst>
+              <a:ext uri="{FF2B5EF4-FFF2-40B4-BE49-F238E27FC236}">
+                <a16:creationId xmlns:a16="http://schemas.microsoft.com/office/drawing/2014/main" id="{948D2651-0851-E5D0-0BBF-E662C37D4974}"/>
+              </a:ext>
+            </a:extLst>
+          </p:cNvPr>
+          <p:cNvSpPr>
+            <a:spLocks noChangeArrowheads="1"/>
+          </p:cNvSpPr>
+          <p:nvPr/>
+        </p:nvSpPr>
+        <p:spPr bwMode="auto">
+          <a:xfrm>
+            <a:off x="1524001" y="-507831"/>
+            <a:ext cx="184731" cy="1015663"/>
+          </a:xfrm>
+          <a:prstGeom prst="rect">
+            <a:avLst/>
+          </a:prstGeom>
+          <a:noFill/>
+          <a:ln w="9525">
+            <a:noFill/>
+            <a:miter lim="800000"/>
+            <a:headEnd/>
+            <a:tailEnd/>
+          </a:ln>
+          <a:effectLst/>
+        </p:spPr>
+        <p:txBody>
+          <a:bodyPr vert="horz" wrap="none" lIns="91440" tIns="45720" rIns="91440" bIns="45720" numCol="1" anchor="ctr" anchorCtr="0" compatLnSpc="1">
+            <a:prstTxWarp prst="textNoShape">
+              <a:avLst/>
+            </a:prstTxWarp>
+            <a:spAutoFit/>
+          </a:bodyPr>
+          <a:lstStyle/>
+          <a:p>
+            <a:endParaRPr lang="en-US"/>
+          </a:p>
+        </p:txBody>
+      </p:sp>
+      <p:sp>
+        <p:nvSpPr>
+          <p:cNvPr id="14" name="Rectangle 38">
+            <a:extLst>
+              <a:ext uri="{FF2B5EF4-FFF2-40B4-BE49-F238E27FC236}">
+                <a16:creationId xmlns:a16="http://schemas.microsoft.com/office/drawing/2014/main" id="{712278CC-789A-F595-BDDF-46F9543EF011}"/>
+              </a:ext>
+            </a:extLst>
+          </p:cNvPr>
+          <p:cNvSpPr>
+            <a:spLocks noChangeArrowheads="1"/>
+          </p:cNvSpPr>
+          <p:nvPr/>
+        </p:nvSpPr>
+        <p:spPr bwMode="auto">
+          <a:xfrm>
+            <a:off x="4295776" y="404814"/>
+            <a:ext cx="6048375" cy="854075"/>
+          </a:xfrm>
+          <a:prstGeom prst="rect">
+            <a:avLst/>
+          </a:prstGeom>
+          <a:noFill/>
+          <a:ln w="9525">
+            <a:noFill/>
+            <a:miter lim="800000"/>
+            <a:headEnd/>
+            <a:tailEnd/>
+          </a:ln>
+        </p:spPr>
+        <p:txBody>
+          <a:bodyPr anchor="ctr"/>
+          <a:lstStyle/>
+          <a:p>
+            <a:pPr algn="r">
+              <a:spcBef>
+                <a:spcPct val="0"/>
+              </a:spcBef>
+            </a:pPr>
+            <a:r>
+              <a:rPr lang="pt-PT" sz="3800" dirty="0">
+                <a:solidFill>
+                  <a:schemeClr val="bg1">
+                    <a:lumMod val="50000"/>
+                  </a:schemeClr>
+                </a:solidFill>
+                <a:latin typeface="Humnst777 BT" pitchFamily="34" charset="0"/>
+              </a:rPr>
+              <a:t>Modelos</a:t>
+            </a:r>
+          </a:p>
+        </p:txBody>
+      </p:sp>
+      <p:sp>
+        <p:nvSpPr>
+          <p:cNvPr id="4" name="Text Box 376">
+            <a:extLst>
+              <a:ext uri="{FF2B5EF4-FFF2-40B4-BE49-F238E27FC236}">
+                <a16:creationId xmlns:a16="http://schemas.microsoft.com/office/drawing/2014/main" id="{2148E2D1-8108-1EBD-2DA2-ED7A4904FDD3}"/>
+              </a:ext>
+            </a:extLst>
+          </p:cNvPr>
+          <p:cNvSpPr txBox="1">
+            <a:spLocks noChangeArrowheads="1"/>
+          </p:cNvSpPr>
+          <p:nvPr/>
+        </p:nvSpPr>
+        <p:spPr bwMode="auto">
+          <a:xfrm>
+            <a:off x="2206626" y="1521983"/>
+            <a:ext cx="7705725" cy="523220"/>
+          </a:xfrm>
+          <a:prstGeom prst="rect">
+            <a:avLst/>
+          </a:prstGeom>
+          <a:noFill/>
+          <a:ln w="9525">
+            <a:noFill/>
+            <a:miter lim="800000"/>
+            <a:headEnd/>
+            <a:tailEnd/>
+          </a:ln>
+        </p:spPr>
+        <p:txBody>
+          <a:bodyPr>
+            <a:spAutoFit/>
+          </a:bodyPr>
+          <a:lstStyle/>
+          <a:p>
+            <a:pPr>
+              <a:spcBef>
+                <a:spcPct val="0"/>
+              </a:spcBef>
+            </a:pPr>
+            <a:r>
+              <a:rPr lang="pt-PT" sz="2800" b="1" dirty="0">
+                <a:solidFill>
+                  <a:srgbClr val="CC301F"/>
+                </a:solidFill>
+              </a:rPr>
+              <a:t>»</a:t>
+            </a:r>
+            <a:r>
+              <a:rPr lang="pt-PT" sz="2800" dirty="0">
+                <a:solidFill>
+                  <a:schemeClr val="bg2"/>
+                </a:solidFill>
+                <a:latin typeface="Humnst777 BT" pitchFamily="34" charset="0"/>
+              </a:rPr>
+              <a:t> </a:t>
+            </a:r>
+            <a:r>
+              <a:rPr lang="pt-PT" sz="2800" i="1" dirty="0" err="1">
+                <a:solidFill>
+                  <a:schemeClr val="bg1">
+                    <a:lumMod val="50000"/>
+                  </a:schemeClr>
+                </a:solidFill>
+                <a:latin typeface="Humnst777 BT" pitchFamily="34" charset="0"/>
+              </a:rPr>
+              <a:t>Machine</a:t>
+            </a:r>
+            <a:r>
+              <a:rPr lang="pt-PT" sz="2800" i="1" dirty="0">
+                <a:solidFill>
+                  <a:schemeClr val="bg1">
+                    <a:lumMod val="50000"/>
+                  </a:schemeClr>
+                </a:solidFill>
+                <a:latin typeface="Humnst777 BT" pitchFamily="34" charset="0"/>
+              </a:rPr>
+              <a:t> </a:t>
+            </a:r>
+            <a:r>
+              <a:rPr lang="pt-PT" sz="2800" i="1" dirty="0" err="1">
+                <a:solidFill>
+                  <a:schemeClr val="bg1">
+                    <a:lumMod val="50000"/>
+                  </a:schemeClr>
+                </a:solidFill>
+                <a:latin typeface="Humnst777 BT" pitchFamily="34" charset="0"/>
+              </a:rPr>
+              <a:t>Learning</a:t>
+            </a:r>
+            <a:r>
+              <a:rPr lang="pt-PT" sz="2800" dirty="0">
+                <a:solidFill>
+                  <a:schemeClr val="bg1">
+                    <a:lumMod val="50000"/>
+                  </a:schemeClr>
+                </a:solidFill>
+                <a:latin typeface="Humnst777 BT" pitchFamily="34" charset="0"/>
+              </a:rPr>
+              <a:t>: Redes neuronais</a:t>
+            </a:r>
+            <a:endParaRPr lang="pt-PT" sz="2800" b="1" i="1" dirty="0">
+              <a:solidFill>
+                <a:schemeClr val="bg1">
+                  <a:lumMod val="50000"/>
+                </a:schemeClr>
+              </a:solidFill>
+              <a:latin typeface="Humnst777 BT" pitchFamily="34" charset="0"/>
+            </a:endParaRPr>
+          </a:p>
+        </p:txBody>
+      </p:sp>
+    </p:spTree>
+    <p:extLst>
+      <p:ext uri="{BB962C8B-B14F-4D97-AF65-F5344CB8AC3E}">
+        <p14:creationId xmlns:p14="http://schemas.microsoft.com/office/powerpoint/2010/main" val="1172547757"/>
+      </p:ext>
+    </p:extLst>
+  </p:cSld>
+  <p:clrMapOvr>
+    <a:masterClrMapping/>
+  </p:clrMapOvr>
+</p:sld>
+</file>
+
+<file path=ppt/slides/slide36.xml><?xml version="1.0" encoding="utf-8"?>
 <p:sld xmlns:a="http://schemas.openxmlformats.org/drawingml/2006/main" xmlns:r="http://schemas.openxmlformats.org/officeDocument/2006/relationships" xmlns:p="http://schemas.openxmlformats.org/presentationml/2006/main">
   <p:cSld>
     <p:spTree>
@@ -32502,7 +36280,7 @@
 </p:sld>
 </file>
 
-<file path=ppt/slides/slide33.xml><?xml version="1.0" encoding="utf-8"?>
+<file path=ppt/slides/slide37.xml><?xml version="1.0" encoding="utf-8"?>
 <p:sld xmlns:a="http://schemas.openxmlformats.org/drawingml/2006/main" xmlns:r="http://schemas.openxmlformats.org/officeDocument/2006/relationships" xmlns:p="http://schemas.openxmlformats.org/presentationml/2006/main">
   <p:cSld>
     <p:spTree>
@@ -34573,7 +38351,7 @@
 </p:sld>
 </file>
 
-<file path=ppt/slides/slide34.xml><?xml version="1.0" encoding="utf-8"?>
+<file path=ppt/slides/slide38.xml><?xml version="1.0" encoding="utf-8"?>
 <p:sld xmlns:a="http://schemas.openxmlformats.org/drawingml/2006/main" xmlns:r="http://schemas.openxmlformats.org/officeDocument/2006/relationships" xmlns:p="http://schemas.openxmlformats.org/presentationml/2006/main">
   <p:cSld>
     <p:spTree>
@@ -37064,7 +40842,7 @@
 </p:sld>
 </file>
 
-<file path=ppt/slides/slide35.xml><?xml version="1.0" encoding="utf-8"?>
+<file path=ppt/slides/slide39.xml><?xml version="1.0" encoding="utf-8"?>
 <p:sld xmlns:a="http://schemas.openxmlformats.org/drawingml/2006/main" xmlns:r="http://schemas.openxmlformats.org/officeDocument/2006/relationships" xmlns:p="http://schemas.openxmlformats.org/presentationml/2006/main">
   <p:cSld>
     <p:spTree>
@@ -37899,7 +41677,587 @@
 </p:sld>
 </file>
 
-<file path=ppt/slides/slide36.xml><?xml version="1.0" encoding="utf-8"?>
+<file path=ppt/slides/slide4.xml><?xml version="1.0" encoding="utf-8"?>
+<p:sld xmlns:a="http://schemas.openxmlformats.org/drawingml/2006/main" xmlns:r="http://schemas.openxmlformats.org/officeDocument/2006/relationships" xmlns:p="http://schemas.openxmlformats.org/presentationml/2006/main">
+  <p:cSld>
+    <p:spTree>
+      <p:nvGrpSpPr>
+        <p:cNvPr id="1" name=""/>
+        <p:cNvGrpSpPr/>
+        <p:nvPr/>
+      </p:nvGrpSpPr>
+      <p:grpSpPr>
+        <a:xfrm>
+          <a:off x="0" y="0"/>
+          <a:ext cx="0" cy="0"/>
+          <a:chOff x="0" y="0"/>
+          <a:chExt cx="0" cy="0"/>
+        </a:xfrm>
+      </p:grpSpPr>
+      <p:sp>
+        <p:nvSpPr>
+          <p:cNvPr id="3077" name="Text Box 16"/>
+          <p:cNvSpPr txBox="1">
+            <a:spLocks noChangeArrowheads="1"/>
+          </p:cNvSpPr>
+          <p:nvPr/>
+        </p:nvSpPr>
+        <p:spPr bwMode="auto">
+          <a:xfrm>
+            <a:off x="2711625" y="1557338"/>
+            <a:ext cx="4968875" cy="4616648"/>
+          </a:xfrm>
+          <a:prstGeom prst="rect">
+            <a:avLst/>
+          </a:prstGeom>
+          <a:noFill/>
+          <a:ln w="9525">
+            <a:noFill/>
+            <a:miter lim="800000"/>
+            <a:headEnd/>
+            <a:tailEnd/>
+          </a:ln>
+        </p:spPr>
+        <p:txBody>
+          <a:bodyPr>
+            <a:spAutoFit/>
+          </a:bodyPr>
+          <a:lstStyle/>
+          <a:p>
+            <a:pPr>
+              <a:spcBef>
+                <a:spcPts val="600"/>
+              </a:spcBef>
+              <a:buClr>
+                <a:srgbClr val="CC0000"/>
+              </a:buClr>
+              <a:buFont typeface="Wingdings" pitchFamily="2" charset="2"/>
+              <a:buChar char="§"/>
+            </a:pPr>
+            <a:r>
+              <a:rPr lang="pt-PT" sz="1800" b="1" dirty="0">
+                <a:solidFill>
+                  <a:schemeClr val="accent2"/>
+                </a:solidFill>
+                <a:latin typeface="Humnst777 BT" pitchFamily="34" charset="0"/>
+              </a:rPr>
+              <a:t>  </a:t>
+            </a:r>
+            <a:r>
+              <a:rPr lang="pt-PT" sz="1800" b="1" dirty="0">
+                <a:solidFill>
+                  <a:srgbClr val="003E6C"/>
+                </a:solidFill>
+                <a:latin typeface="Humnst777 BT" pitchFamily="34" charset="0"/>
+              </a:rPr>
+              <a:t>Transformação dos dados</a:t>
+            </a:r>
+          </a:p>
+          <a:p>
+            <a:pPr lvl="1">
+              <a:spcBef>
+                <a:spcPts val="600"/>
+              </a:spcBef>
+              <a:buClr>
+                <a:srgbClr val="CC0000"/>
+              </a:buClr>
+              <a:buFont typeface="Wingdings" pitchFamily="2" charset="2"/>
+              <a:buChar char="§"/>
+            </a:pPr>
+            <a:r>
+              <a:rPr lang="pt-PT" sz="1800" b="1" dirty="0">
+                <a:solidFill>
+                  <a:srgbClr val="003E6C"/>
+                </a:solidFill>
+                <a:latin typeface="Humnst777 BT" pitchFamily="34" charset="0"/>
+              </a:rPr>
+              <a:t> </a:t>
+            </a:r>
+            <a:r>
+              <a:rPr lang="pt-PT" sz="1800" dirty="0">
+                <a:solidFill>
+                  <a:srgbClr val="003E6C"/>
+                </a:solidFill>
+                <a:latin typeface="Humnst777 BT" pitchFamily="34" charset="0"/>
+              </a:rPr>
+              <a:t>Vetores numéricos</a:t>
+            </a:r>
+          </a:p>
+          <a:p>
+            <a:pPr lvl="1">
+              <a:spcBef>
+                <a:spcPts val="600"/>
+              </a:spcBef>
+              <a:buClr>
+                <a:srgbClr val="CC0000"/>
+              </a:buClr>
+              <a:buFont typeface="Wingdings" pitchFamily="2" charset="2"/>
+              <a:buChar char="§"/>
+            </a:pPr>
+            <a:r>
+              <a:rPr lang="pt-PT" sz="1800" dirty="0">
+                <a:solidFill>
+                  <a:srgbClr val="003E6C"/>
+                </a:solidFill>
+                <a:latin typeface="Humnst777 BT" pitchFamily="34" charset="0"/>
+              </a:rPr>
+              <a:t> Fatores</a:t>
+            </a:r>
+          </a:p>
+          <a:p>
+            <a:pPr lvl="1">
+              <a:spcBef>
+                <a:spcPts val="600"/>
+              </a:spcBef>
+              <a:buClr>
+                <a:srgbClr val="CC0000"/>
+              </a:buClr>
+              <a:buFont typeface="Wingdings" pitchFamily="2" charset="2"/>
+              <a:buChar char="§"/>
+            </a:pPr>
+            <a:r>
+              <a:rPr lang="pt-PT" sz="1800" dirty="0">
+                <a:solidFill>
+                  <a:srgbClr val="003E6C"/>
+                </a:solidFill>
+                <a:latin typeface="Humnst777 BT" pitchFamily="34" charset="0"/>
+              </a:rPr>
+              <a:t> Vetores lógicos</a:t>
+            </a:r>
+          </a:p>
+          <a:p>
+            <a:pPr>
+              <a:spcBef>
+                <a:spcPts val="600"/>
+              </a:spcBef>
+              <a:buClr>
+                <a:srgbClr val="CC0000"/>
+              </a:buClr>
+              <a:buFont typeface="Wingdings" pitchFamily="2" charset="2"/>
+              <a:buChar char="§"/>
+            </a:pPr>
+            <a:r>
+              <a:rPr lang="pt-PT" sz="1800" b="1" dirty="0">
+                <a:solidFill>
+                  <a:srgbClr val="003E6C"/>
+                </a:solidFill>
+                <a:latin typeface="Humnst777 BT" pitchFamily="34" charset="0"/>
+              </a:rPr>
+              <a:t>  Exploração dos dados</a:t>
+            </a:r>
+          </a:p>
+          <a:p>
+            <a:pPr lvl="1">
+              <a:spcBef>
+                <a:spcPts val="600"/>
+              </a:spcBef>
+              <a:buClr>
+                <a:srgbClr val="CC0000"/>
+              </a:buClr>
+              <a:buFont typeface="Wingdings" pitchFamily="2" charset="2"/>
+              <a:buChar char="§"/>
+            </a:pPr>
+            <a:r>
+              <a:rPr lang="pt-PT" sz="1800" b="1" dirty="0">
+                <a:solidFill>
+                  <a:srgbClr val="003E6C"/>
+                </a:solidFill>
+                <a:latin typeface="Humnst777 BT" pitchFamily="34" charset="0"/>
+              </a:rPr>
+              <a:t> </a:t>
+            </a:r>
+            <a:r>
+              <a:rPr lang="pt-PT" sz="1800" dirty="0">
+                <a:solidFill>
+                  <a:srgbClr val="003E6C"/>
+                </a:solidFill>
+                <a:latin typeface="Humnst777 BT" pitchFamily="34" charset="0"/>
+              </a:rPr>
+              <a:t>Variação</a:t>
+            </a:r>
+          </a:p>
+          <a:p>
+            <a:pPr lvl="1">
+              <a:spcBef>
+                <a:spcPts val="600"/>
+              </a:spcBef>
+              <a:buClr>
+                <a:srgbClr val="CC0000"/>
+              </a:buClr>
+              <a:buFont typeface="Wingdings" pitchFamily="2" charset="2"/>
+              <a:buChar char="§"/>
+            </a:pPr>
+            <a:r>
+              <a:rPr lang="pt-PT" sz="1800" dirty="0">
+                <a:solidFill>
+                  <a:srgbClr val="003E6C"/>
+                </a:solidFill>
+                <a:latin typeface="Humnst777 BT" pitchFamily="34" charset="0"/>
+              </a:rPr>
+              <a:t> Valores em falta</a:t>
+            </a:r>
+          </a:p>
+          <a:p>
+            <a:pPr lvl="1">
+              <a:spcBef>
+                <a:spcPts val="600"/>
+              </a:spcBef>
+              <a:buClr>
+                <a:srgbClr val="CC0000"/>
+              </a:buClr>
+              <a:buFont typeface="Wingdings" pitchFamily="2" charset="2"/>
+              <a:buChar char="§"/>
+            </a:pPr>
+            <a:r>
+              <a:rPr lang="pt-PT" sz="1800" dirty="0">
+                <a:solidFill>
+                  <a:srgbClr val="003E6C"/>
+                </a:solidFill>
+                <a:latin typeface="Humnst777 BT" pitchFamily="34" charset="0"/>
+              </a:rPr>
+              <a:t> Covariação</a:t>
+            </a:r>
+          </a:p>
+          <a:p>
+            <a:pPr lvl="1">
+              <a:spcBef>
+                <a:spcPts val="600"/>
+              </a:spcBef>
+              <a:buClr>
+                <a:srgbClr val="CC0000"/>
+              </a:buClr>
+              <a:buFont typeface="Wingdings" pitchFamily="2" charset="2"/>
+              <a:buChar char="§"/>
+            </a:pPr>
+            <a:r>
+              <a:rPr lang="pt-PT" sz="1800" dirty="0">
+                <a:solidFill>
+                  <a:srgbClr val="003E6C"/>
+                </a:solidFill>
+                <a:latin typeface="Humnst777 BT" pitchFamily="34" charset="0"/>
+              </a:rPr>
+              <a:t> Padrões e Modelos</a:t>
+            </a:r>
+          </a:p>
+          <a:p>
+            <a:pPr>
+              <a:spcBef>
+                <a:spcPts val="600"/>
+              </a:spcBef>
+              <a:buClr>
+                <a:srgbClr val="CC0000"/>
+              </a:buClr>
+              <a:buFont typeface="Wingdings" pitchFamily="2" charset="2"/>
+              <a:buChar char="§"/>
+            </a:pPr>
+            <a:r>
+              <a:rPr lang="pt-PT" sz="1800" b="1" dirty="0">
+                <a:solidFill>
+                  <a:srgbClr val="003E6C"/>
+                </a:solidFill>
+                <a:latin typeface="Humnst777 BT" pitchFamily="34" charset="0"/>
+              </a:rPr>
+              <a:t>  Modelação</a:t>
+            </a:r>
+          </a:p>
+          <a:p>
+            <a:pPr lvl="1">
+              <a:spcBef>
+                <a:spcPts val="600"/>
+              </a:spcBef>
+              <a:buClr>
+                <a:srgbClr val="CC0000"/>
+              </a:buClr>
+              <a:buFont typeface="Wingdings" pitchFamily="2" charset="2"/>
+              <a:buChar char="§"/>
+            </a:pPr>
+            <a:r>
+              <a:rPr lang="pt-PT" sz="1800" b="1" dirty="0">
+                <a:solidFill>
+                  <a:srgbClr val="003E6C"/>
+                </a:solidFill>
+                <a:latin typeface="Humnst777 BT" pitchFamily="34" charset="0"/>
+              </a:rPr>
+              <a:t> </a:t>
+            </a:r>
+            <a:r>
+              <a:rPr lang="pt-PT" sz="1800" dirty="0">
+                <a:solidFill>
+                  <a:srgbClr val="003E6C"/>
+                </a:solidFill>
+                <a:latin typeface="Humnst777 BT" pitchFamily="34" charset="0"/>
+              </a:rPr>
+              <a:t>Construir modelo simples</a:t>
+            </a:r>
+          </a:p>
+          <a:p>
+            <a:pPr lvl="1">
+              <a:spcBef>
+                <a:spcPts val="600"/>
+              </a:spcBef>
+              <a:buClr>
+                <a:srgbClr val="CC0000"/>
+              </a:buClr>
+              <a:buFont typeface="Wingdings" pitchFamily="2" charset="2"/>
+              <a:buChar char="§"/>
+            </a:pPr>
+            <a:r>
+              <a:rPr lang="pt-PT" sz="1800" dirty="0">
+                <a:solidFill>
+                  <a:srgbClr val="003E6C"/>
+                </a:solidFill>
+                <a:latin typeface="Humnst777 BT" pitchFamily="34" charset="0"/>
+              </a:rPr>
+              <a:t> Construir modelo com </a:t>
+            </a:r>
+            <a:r>
+              <a:rPr lang="pt-PT" sz="1800" dirty="0" err="1">
+                <a:solidFill>
+                  <a:srgbClr val="003E6C"/>
+                </a:solidFill>
+                <a:latin typeface="Humnst777 BT" pitchFamily="34" charset="0"/>
+              </a:rPr>
+              <a:t>workflow</a:t>
+            </a:r>
+            <a:r>
+              <a:rPr lang="pt-PT" sz="1800" dirty="0">
+                <a:solidFill>
+                  <a:srgbClr val="003E6C"/>
+                </a:solidFill>
+                <a:latin typeface="Humnst777 BT" pitchFamily="34" charset="0"/>
+              </a:rPr>
+              <a:t>()</a:t>
+            </a:r>
+          </a:p>
+          <a:p>
+            <a:pPr lvl="1">
+              <a:spcBef>
+                <a:spcPts val="600"/>
+              </a:spcBef>
+              <a:buClr>
+                <a:srgbClr val="CC0000"/>
+              </a:buClr>
+              <a:buFont typeface="Wingdings" pitchFamily="2" charset="2"/>
+              <a:buChar char="§"/>
+            </a:pPr>
+            <a:r>
+              <a:rPr lang="pt-PT" sz="1800" dirty="0">
+                <a:solidFill>
+                  <a:srgbClr val="003E6C"/>
+                </a:solidFill>
+                <a:latin typeface="Humnst777 BT" pitchFamily="34" charset="0"/>
+              </a:rPr>
+              <a:t> Construir vários modelos com </a:t>
+            </a:r>
+            <a:r>
+              <a:rPr lang="pt-PT" sz="1800" dirty="0" err="1">
+                <a:solidFill>
+                  <a:srgbClr val="003E6C"/>
+                </a:solidFill>
+                <a:latin typeface="Humnst777 BT" pitchFamily="34" charset="0"/>
+              </a:rPr>
+              <a:t>workflow</a:t>
+            </a:r>
+            <a:r>
+              <a:rPr lang="pt-PT" sz="1800" dirty="0">
+                <a:solidFill>
+                  <a:srgbClr val="003E6C"/>
+                </a:solidFill>
+                <a:latin typeface="Humnst777 BT" pitchFamily="34" charset="0"/>
+              </a:rPr>
+              <a:t>()</a:t>
+            </a:r>
+          </a:p>
+        </p:txBody>
+      </p:sp>
+      <p:sp>
+        <p:nvSpPr>
+          <p:cNvPr id="3080" name="Rectangle 38"/>
+          <p:cNvSpPr>
+            <a:spLocks noChangeArrowheads="1"/>
+          </p:cNvSpPr>
+          <p:nvPr/>
+        </p:nvSpPr>
+        <p:spPr bwMode="auto">
+          <a:xfrm>
+            <a:off x="4295776" y="404814"/>
+            <a:ext cx="6048375" cy="854075"/>
+          </a:xfrm>
+          <a:prstGeom prst="rect">
+            <a:avLst/>
+          </a:prstGeom>
+          <a:noFill/>
+          <a:ln w="9525">
+            <a:noFill/>
+            <a:miter lim="800000"/>
+            <a:headEnd/>
+            <a:tailEnd/>
+          </a:ln>
+        </p:spPr>
+        <p:txBody>
+          <a:bodyPr anchor="ctr"/>
+          <a:lstStyle/>
+          <a:p>
+            <a:pPr algn="r">
+              <a:spcBef>
+                <a:spcPct val="0"/>
+              </a:spcBef>
+            </a:pPr>
+            <a:r>
+              <a:rPr lang="pt-PT" sz="3800" dirty="0">
+                <a:solidFill>
+                  <a:schemeClr val="bg1">
+                    <a:lumMod val="50000"/>
+                  </a:schemeClr>
+                </a:solidFill>
+                <a:latin typeface="Humnst777 BT" pitchFamily="34" charset="0"/>
+              </a:rPr>
+              <a:t>Programa</a:t>
+            </a:r>
+          </a:p>
+        </p:txBody>
+      </p:sp>
+      <p:sp>
+        <p:nvSpPr>
+          <p:cNvPr id="2" name="Line 10">
+            <a:extLst>
+              <a:ext uri="{FF2B5EF4-FFF2-40B4-BE49-F238E27FC236}">
+                <a16:creationId xmlns:a16="http://schemas.microsoft.com/office/drawing/2014/main" id="{4CD33B91-A899-201A-4E83-3EF6578869EC}"/>
+              </a:ext>
+            </a:extLst>
+          </p:cNvPr>
+          <p:cNvSpPr>
+            <a:spLocks noChangeShapeType="1"/>
+          </p:cNvSpPr>
+          <p:nvPr/>
+        </p:nvSpPr>
+        <p:spPr bwMode="auto">
+          <a:xfrm flipH="1">
+            <a:off x="2065214" y="1557338"/>
+            <a:ext cx="647700" cy="0"/>
+          </a:xfrm>
+          <a:prstGeom prst="line">
+            <a:avLst/>
+          </a:prstGeom>
+          <a:noFill/>
+          <a:ln w="9525">
+            <a:solidFill>
+              <a:schemeClr val="tx1"/>
+            </a:solidFill>
+            <a:round/>
+            <a:headEnd/>
+            <a:tailEnd/>
+          </a:ln>
+        </p:spPr>
+        <p:txBody>
+          <a:bodyPr/>
+          <a:lstStyle/>
+          <a:p>
+            <a:endParaRPr lang="en-US"/>
+          </a:p>
+        </p:txBody>
+      </p:sp>
+      <p:sp>
+        <p:nvSpPr>
+          <p:cNvPr id="3" name="Line 11">
+            <a:extLst>
+              <a:ext uri="{FF2B5EF4-FFF2-40B4-BE49-F238E27FC236}">
+                <a16:creationId xmlns:a16="http://schemas.microsoft.com/office/drawing/2014/main" id="{8F1E4C9B-F63F-19E5-CB9C-DBC853459CC5}"/>
+              </a:ext>
+            </a:extLst>
+          </p:cNvPr>
+          <p:cNvSpPr>
+            <a:spLocks noChangeShapeType="1"/>
+          </p:cNvSpPr>
+          <p:nvPr/>
+        </p:nvSpPr>
+        <p:spPr bwMode="auto">
+          <a:xfrm>
+            <a:off x="2712914" y="1557338"/>
+            <a:ext cx="372" cy="4500000"/>
+          </a:xfrm>
+          <a:prstGeom prst="line">
+            <a:avLst/>
+          </a:prstGeom>
+          <a:noFill/>
+          <a:ln w="9525">
+            <a:solidFill>
+              <a:schemeClr val="tx1"/>
+            </a:solidFill>
+            <a:round/>
+            <a:headEnd/>
+            <a:tailEnd/>
+          </a:ln>
+        </p:spPr>
+        <p:txBody>
+          <a:bodyPr/>
+          <a:lstStyle/>
+          <a:p>
+            <a:endParaRPr lang="en-US"/>
+          </a:p>
+        </p:txBody>
+      </p:sp>
+      <p:sp>
+        <p:nvSpPr>
+          <p:cNvPr id="7" name="Text Box 39">
+            <a:extLst>
+              <a:ext uri="{FF2B5EF4-FFF2-40B4-BE49-F238E27FC236}">
+                <a16:creationId xmlns:a16="http://schemas.microsoft.com/office/drawing/2014/main" id="{11E63F42-DEAC-47C1-9ADA-B513FA96B97B}"/>
+              </a:ext>
+            </a:extLst>
+          </p:cNvPr>
+          <p:cNvSpPr txBox="1">
+            <a:spLocks noChangeArrowheads="1"/>
+          </p:cNvSpPr>
+          <p:nvPr/>
+        </p:nvSpPr>
+        <p:spPr bwMode="auto">
+          <a:xfrm rot="5400000" flipV="1">
+            <a:off x="9299576" y="946151"/>
+            <a:ext cx="504825" cy="1006475"/>
+          </a:xfrm>
+          <a:prstGeom prst="rect">
+            <a:avLst/>
+          </a:prstGeom>
+          <a:noFill/>
+          <a:ln w="9525">
+            <a:noFill/>
+            <a:miter lim="800000"/>
+            <a:headEnd/>
+            <a:tailEnd/>
+          </a:ln>
+        </p:spPr>
+        <p:txBody>
+          <a:bodyPr>
+            <a:spAutoFit/>
+          </a:bodyPr>
+          <a:lstStyle/>
+          <a:p>
+            <a:r>
+              <a:rPr lang="pt-PT" dirty="0">
+                <a:solidFill>
+                  <a:srgbClr val="CC301F"/>
+                </a:solidFill>
+              </a:rPr>
+              <a:t>«</a:t>
+            </a:r>
+          </a:p>
+        </p:txBody>
+      </p:sp>
+    </p:spTree>
+    <p:extLst>
+      <p:ext uri="{BB962C8B-B14F-4D97-AF65-F5344CB8AC3E}">
+        <p14:creationId xmlns:p14="http://schemas.microsoft.com/office/powerpoint/2010/main" val="1807718054"/>
+      </p:ext>
+    </p:extLst>
+  </p:cSld>
+  <p:clrMapOvr>
+    <a:masterClrMapping/>
+  </p:clrMapOvr>
+</p:sld>
+</file>
+
+<file path=ppt/slides/slide40.xml><?xml version="1.0" encoding="utf-8"?>
 <p:sld xmlns:a="http://schemas.openxmlformats.org/drawingml/2006/main" xmlns:r="http://schemas.openxmlformats.org/officeDocument/2006/relationships" xmlns:p="http://schemas.openxmlformats.org/presentationml/2006/main">
   <p:cSld>
     <p:spTree>
@@ -39318,7 +43676,7 @@
 </p:sld>
 </file>
 
-<file path=ppt/slides/slide37.xml><?xml version="1.0" encoding="utf-8"?>
+<file path=ppt/slides/slide41.xml><?xml version="1.0" encoding="utf-8"?>
 <p:sld xmlns:a="http://schemas.openxmlformats.org/drawingml/2006/main" xmlns:r="http://schemas.openxmlformats.org/officeDocument/2006/relationships" xmlns:p="http://schemas.openxmlformats.org/presentationml/2006/main">
   <p:cSld>
     <p:spTree>
@@ -40792,7 +45150,7 @@
 </p:sld>
 </file>
 
-<file path=ppt/slides/slide38.xml><?xml version="1.0" encoding="utf-8"?>
+<file path=ppt/slides/slide42.xml><?xml version="1.0" encoding="utf-8"?>
 <p:sld xmlns:a="http://schemas.openxmlformats.org/drawingml/2006/main" xmlns:r="http://schemas.openxmlformats.org/officeDocument/2006/relationships" xmlns:p="http://schemas.openxmlformats.org/presentationml/2006/main">
   <p:cSld>
     <p:spTree>
@@ -40984,7 +45342,7 @@
 </p:sld>
 </file>
 
-<file path=ppt/slides/slide39.xml><?xml version="1.0" encoding="utf-8"?>
+<file path=ppt/slides/slide43.xml><?xml version="1.0" encoding="utf-8"?>
 <p:sld xmlns:a="http://schemas.openxmlformats.org/drawingml/2006/main" xmlns:r="http://schemas.openxmlformats.org/officeDocument/2006/relationships" xmlns:p="http://schemas.openxmlformats.org/presentationml/2006/main">
   <p:cSld>
     <p:spTree>
@@ -41328,587 +45686,7 @@
 </p:sld>
 </file>
 
-<file path=ppt/slides/slide4.xml><?xml version="1.0" encoding="utf-8"?>
-<p:sld xmlns:a="http://schemas.openxmlformats.org/drawingml/2006/main" xmlns:r="http://schemas.openxmlformats.org/officeDocument/2006/relationships" xmlns:p="http://schemas.openxmlformats.org/presentationml/2006/main">
-  <p:cSld>
-    <p:spTree>
-      <p:nvGrpSpPr>
-        <p:cNvPr id="1" name=""/>
-        <p:cNvGrpSpPr/>
-        <p:nvPr/>
-      </p:nvGrpSpPr>
-      <p:grpSpPr>
-        <a:xfrm>
-          <a:off x="0" y="0"/>
-          <a:ext cx="0" cy="0"/>
-          <a:chOff x="0" y="0"/>
-          <a:chExt cx="0" cy="0"/>
-        </a:xfrm>
-      </p:grpSpPr>
-      <p:sp>
-        <p:nvSpPr>
-          <p:cNvPr id="3077" name="Text Box 16"/>
-          <p:cNvSpPr txBox="1">
-            <a:spLocks noChangeArrowheads="1"/>
-          </p:cNvSpPr>
-          <p:nvPr/>
-        </p:nvSpPr>
-        <p:spPr bwMode="auto">
-          <a:xfrm>
-            <a:off x="2711625" y="1557338"/>
-            <a:ext cx="4968875" cy="4616648"/>
-          </a:xfrm>
-          <a:prstGeom prst="rect">
-            <a:avLst/>
-          </a:prstGeom>
-          <a:noFill/>
-          <a:ln w="9525">
-            <a:noFill/>
-            <a:miter lim="800000"/>
-            <a:headEnd/>
-            <a:tailEnd/>
-          </a:ln>
-        </p:spPr>
-        <p:txBody>
-          <a:bodyPr>
-            <a:spAutoFit/>
-          </a:bodyPr>
-          <a:lstStyle/>
-          <a:p>
-            <a:pPr>
-              <a:spcBef>
-                <a:spcPts val="600"/>
-              </a:spcBef>
-              <a:buClr>
-                <a:srgbClr val="CC0000"/>
-              </a:buClr>
-              <a:buFont typeface="Wingdings" pitchFamily="2" charset="2"/>
-              <a:buChar char="§"/>
-            </a:pPr>
-            <a:r>
-              <a:rPr lang="pt-PT" sz="1800" b="1" dirty="0">
-                <a:solidFill>
-                  <a:schemeClr val="accent2"/>
-                </a:solidFill>
-                <a:latin typeface="Humnst777 BT" pitchFamily="34" charset="0"/>
-              </a:rPr>
-              <a:t>  </a:t>
-            </a:r>
-            <a:r>
-              <a:rPr lang="pt-PT" sz="1800" b="1" dirty="0">
-                <a:solidFill>
-                  <a:srgbClr val="003E6C"/>
-                </a:solidFill>
-                <a:latin typeface="Humnst777 BT" pitchFamily="34" charset="0"/>
-              </a:rPr>
-              <a:t>Transformação dos dados</a:t>
-            </a:r>
-          </a:p>
-          <a:p>
-            <a:pPr lvl="1">
-              <a:spcBef>
-                <a:spcPts val="600"/>
-              </a:spcBef>
-              <a:buClr>
-                <a:srgbClr val="CC0000"/>
-              </a:buClr>
-              <a:buFont typeface="Wingdings" pitchFamily="2" charset="2"/>
-              <a:buChar char="§"/>
-            </a:pPr>
-            <a:r>
-              <a:rPr lang="pt-PT" sz="1800" b="1" dirty="0">
-                <a:solidFill>
-                  <a:srgbClr val="003E6C"/>
-                </a:solidFill>
-                <a:latin typeface="Humnst777 BT" pitchFamily="34" charset="0"/>
-              </a:rPr>
-              <a:t> </a:t>
-            </a:r>
-            <a:r>
-              <a:rPr lang="pt-PT" sz="1800" dirty="0">
-                <a:solidFill>
-                  <a:srgbClr val="003E6C"/>
-                </a:solidFill>
-                <a:latin typeface="Humnst777 BT" pitchFamily="34" charset="0"/>
-              </a:rPr>
-              <a:t>Vetores numéricos</a:t>
-            </a:r>
-          </a:p>
-          <a:p>
-            <a:pPr lvl="1">
-              <a:spcBef>
-                <a:spcPts val="600"/>
-              </a:spcBef>
-              <a:buClr>
-                <a:srgbClr val="CC0000"/>
-              </a:buClr>
-              <a:buFont typeface="Wingdings" pitchFamily="2" charset="2"/>
-              <a:buChar char="§"/>
-            </a:pPr>
-            <a:r>
-              <a:rPr lang="pt-PT" sz="1800" dirty="0">
-                <a:solidFill>
-                  <a:srgbClr val="003E6C"/>
-                </a:solidFill>
-                <a:latin typeface="Humnst777 BT" pitchFamily="34" charset="0"/>
-              </a:rPr>
-              <a:t> Fatores</a:t>
-            </a:r>
-          </a:p>
-          <a:p>
-            <a:pPr lvl="1">
-              <a:spcBef>
-                <a:spcPts val="600"/>
-              </a:spcBef>
-              <a:buClr>
-                <a:srgbClr val="CC0000"/>
-              </a:buClr>
-              <a:buFont typeface="Wingdings" pitchFamily="2" charset="2"/>
-              <a:buChar char="§"/>
-            </a:pPr>
-            <a:r>
-              <a:rPr lang="pt-PT" sz="1800" dirty="0">
-                <a:solidFill>
-                  <a:srgbClr val="003E6C"/>
-                </a:solidFill>
-                <a:latin typeface="Humnst777 BT" pitchFamily="34" charset="0"/>
-              </a:rPr>
-              <a:t> Vetores lógicos</a:t>
-            </a:r>
-          </a:p>
-          <a:p>
-            <a:pPr>
-              <a:spcBef>
-                <a:spcPts val="600"/>
-              </a:spcBef>
-              <a:buClr>
-                <a:srgbClr val="CC0000"/>
-              </a:buClr>
-              <a:buFont typeface="Wingdings" pitchFamily="2" charset="2"/>
-              <a:buChar char="§"/>
-            </a:pPr>
-            <a:r>
-              <a:rPr lang="pt-PT" sz="1800" b="1" dirty="0">
-                <a:solidFill>
-                  <a:srgbClr val="003E6C"/>
-                </a:solidFill>
-                <a:latin typeface="Humnst777 BT" pitchFamily="34" charset="0"/>
-              </a:rPr>
-              <a:t>  Exploração dos dados</a:t>
-            </a:r>
-          </a:p>
-          <a:p>
-            <a:pPr lvl="1">
-              <a:spcBef>
-                <a:spcPts val="600"/>
-              </a:spcBef>
-              <a:buClr>
-                <a:srgbClr val="CC0000"/>
-              </a:buClr>
-              <a:buFont typeface="Wingdings" pitchFamily="2" charset="2"/>
-              <a:buChar char="§"/>
-            </a:pPr>
-            <a:r>
-              <a:rPr lang="pt-PT" sz="1800" b="1" dirty="0">
-                <a:solidFill>
-                  <a:srgbClr val="003E6C"/>
-                </a:solidFill>
-                <a:latin typeface="Humnst777 BT" pitchFamily="34" charset="0"/>
-              </a:rPr>
-              <a:t> </a:t>
-            </a:r>
-            <a:r>
-              <a:rPr lang="pt-PT" sz="1800" dirty="0">
-                <a:solidFill>
-                  <a:srgbClr val="003E6C"/>
-                </a:solidFill>
-                <a:latin typeface="Humnst777 BT" pitchFamily="34" charset="0"/>
-              </a:rPr>
-              <a:t>Variação</a:t>
-            </a:r>
-          </a:p>
-          <a:p>
-            <a:pPr lvl="1">
-              <a:spcBef>
-                <a:spcPts val="600"/>
-              </a:spcBef>
-              <a:buClr>
-                <a:srgbClr val="CC0000"/>
-              </a:buClr>
-              <a:buFont typeface="Wingdings" pitchFamily="2" charset="2"/>
-              <a:buChar char="§"/>
-            </a:pPr>
-            <a:r>
-              <a:rPr lang="pt-PT" sz="1800" dirty="0">
-                <a:solidFill>
-                  <a:srgbClr val="003E6C"/>
-                </a:solidFill>
-                <a:latin typeface="Humnst777 BT" pitchFamily="34" charset="0"/>
-              </a:rPr>
-              <a:t> Valores em falta</a:t>
-            </a:r>
-          </a:p>
-          <a:p>
-            <a:pPr lvl="1">
-              <a:spcBef>
-                <a:spcPts val="600"/>
-              </a:spcBef>
-              <a:buClr>
-                <a:srgbClr val="CC0000"/>
-              </a:buClr>
-              <a:buFont typeface="Wingdings" pitchFamily="2" charset="2"/>
-              <a:buChar char="§"/>
-            </a:pPr>
-            <a:r>
-              <a:rPr lang="pt-PT" sz="1800" dirty="0">
-                <a:solidFill>
-                  <a:srgbClr val="003E6C"/>
-                </a:solidFill>
-                <a:latin typeface="Humnst777 BT" pitchFamily="34" charset="0"/>
-              </a:rPr>
-              <a:t> Covariação</a:t>
-            </a:r>
-          </a:p>
-          <a:p>
-            <a:pPr lvl="1">
-              <a:spcBef>
-                <a:spcPts val="600"/>
-              </a:spcBef>
-              <a:buClr>
-                <a:srgbClr val="CC0000"/>
-              </a:buClr>
-              <a:buFont typeface="Wingdings" pitchFamily="2" charset="2"/>
-              <a:buChar char="§"/>
-            </a:pPr>
-            <a:r>
-              <a:rPr lang="pt-PT" sz="1800" dirty="0">
-                <a:solidFill>
-                  <a:srgbClr val="003E6C"/>
-                </a:solidFill>
-                <a:latin typeface="Humnst777 BT" pitchFamily="34" charset="0"/>
-              </a:rPr>
-              <a:t> Padrões e Modelos</a:t>
-            </a:r>
-          </a:p>
-          <a:p>
-            <a:pPr>
-              <a:spcBef>
-                <a:spcPts val="600"/>
-              </a:spcBef>
-              <a:buClr>
-                <a:srgbClr val="CC0000"/>
-              </a:buClr>
-              <a:buFont typeface="Wingdings" pitchFamily="2" charset="2"/>
-              <a:buChar char="§"/>
-            </a:pPr>
-            <a:r>
-              <a:rPr lang="pt-PT" sz="1800" b="1" dirty="0">
-                <a:solidFill>
-                  <a:srgbClr val="003E6C"/>
-                </a:solidFill>
-                <a:latin typeface="Humnst777 BT" pitchFamily="34" charset="0"/>
-              </a:rPr>
-              <a:t>  Modelação</a:t>
-            </a:r>
-          </a:p>
-          <a:p>
-            <a:pPr lvl="1">
-              <a:spcBef>
-                <a:spcPts val="600"/>
-              </a:spcBef>
-              <a:buClr>
-                <a:srgbClr val="CC0000"/>
-              </a:buClr>
-              <a:buFont typeface="Wingdings" pitchFamily="2" charset="2"/>
-              <a:buChar char="§"/>
-            </a:pPr>
-            <a:r>
-              <a:rPr lang="pt-PT" sz="1800" b="1" dirty="0">
-                <a:solidFill>
-                  <a:srgbClr val="003E6C"/>
-                </a:solidFill>
-                <a:latin typeface="Humnst777 BT" pitchFamily="34" charset="0"/>
-              </a:rPr>
-              <a:t> </a:t>
-            </a:r>
-            <a:r>
-              <a:rPr lang="pt-PT" sz="1800" dirty="0">
-                <a:solidFill>
-                  <a:srgbClr val="003E6C"/>
-                </a:solidFill>
-                <a:latin typeface="Humnst777 BT" pitchFamily="34" charset="0"/>
-              </a:rPr>
-              <a:t>Construir modelo simples</a:t>
-            </a:r>
-          </a:p>
-          <a:p>
-            <a:pPr lvl="1">
-              <a:spcBef>
-                <a:spcPts val="600"/>
-              </a:spcBef>
-              <a:buClr>
-                <a:srgbClr val="CC0000"/>
-              </a:buClr>
-              <a:buFont typeface="Wingdings" pitchFamily="2" charset="2"/>
-              <a:buChar char="§"/>
-            </a:pPr>
-            <a:r>
-              <a:rPr lang="pt-PT" sz="1800" dirty="0">
-                <a:solidFill>
-                  <a:srgbClr val="003E6C"/>
-                </a:solidFill>
-                <a:latin typeface="Humnst777 BT" pitchFamily="34" charset="0"/>
-              </a:rPr>
-              <a:t> Construir modelo com </a:t>
-            </a:r>
-            <a:r>
-              <a:rPr lang="pt-PT" sz="1800" dirty="0" err="1">
-                <a:solidFill>
-                  <a:srgbClr val="003E6C"/>
-                </a:solidFill>
-                <a:latin typeface="Humnst777 BT" pitchFamily="34" charset="0"/>
-              </a:rPr>
-              <a:t>workflow</a:t>
-            </a:r>
-            <a:r>
-              <a:rPr lang="pt-PT" sz="1800" dirty="0">
-                <a:solidFill>
-                  <a:srgbClr val="003E6C"/>
-                </a:solidFill>
-                <a:latin typeface="Humnst777 BT" pitchFamily="34" charset="0"/>
-              </a:rPr>
-              <a:t>()</a:t>
-            </a:r>
-          </a:p>
-          <a:p>
-            <a:pPr lvl="1">
-              <a:spcBef>
-                <a:spcPts val="600"/>
-              </a:spcBef>
-              <a:buClr>
-                <a:srgbClr val="CC0000"/>
-              </a:buClr>
-              <a:buFont typeface="Wingdings" pitchFamily="2" charset="2"/>
-              <a:buChar char="§"/>
-            </a:pPr>
-            <a:r>
-              <a:rPr lang="pt-PT" sz="1800" dirty="0">
-                <a:solidFill>
-                  <a:srgbClr val="003E6C"/>
-                </a:solidFill>
-                <a:latin typeface="Humnst777 BT" pitchFamily="34" charset="0"/>
-              </a:rPr>
-              <a:t> Construir vários modelos com </a:t>
-            </a:r>
-            <a:r>
-              <a:rPr lang="pt-PT" sz="1800" dirty="0" err="1">
-                <a:solidFill>
-                  <a:srgbClr val="003E6C"/>
-                </a:solidFill>
-                <a:latin typeface="Humnst777 BT" pitchFamily="34" charset="0"/>
-              </a:rPr>
-              <a:t>workflow</a:t>
-            </a:r>
-            <a:r>
-              <a:rPr lang="pt-PT" sz="1800" dirty="0">
-                <a:solidFill>
-                  <a:srgbClr val="003E6C"/>
-                </a:solidFill>
-                <a:latin typeface="Humnst777 BT" pitchFamily="34" charset="0"/>
-              </a:rPr>
-              <a:t>()</a:t>
-            </a:r>
-          </a:p>
-        </p:txBody>
-      </p:sp>
-      <p:sp>
-        <p:nvSpPr>
-          <p:cNvPr id="3080" name="Rectangle 38"/>
-          <p:cNvSpPr>
-            <a:spLocks noChangeArrowheads="1"/>
-          </p:cNvSpPr>
-          <p:nvPr/>
-        </p:nvSpPr>
-        <p:spPr bwMode="auto">
-          <a:xfrm>
-            <a:off x="4295776" y="404814"/>
-            <a:ext cx="6048375" cy="854075"/>
-          </a:xfrm>
-          <a:prstGeom prst="rect">
-            <a:avLst/>
-          </a:prstGeom>
-          <a:noFill/>
-          <a:ln w="9525">
-            <a:noFill/>
-            <a:miter lim="800000"/>
-            <a:headEnd/>
-            <a:tailEnd/>
-          </a:ln>
-        </p:spPr>
-        <p:txBody>
-          <a:bodyPr anchor="ctr"/>
-          <a:lstStyle/>
-          <a:p>
-            <a:pPr algn="r">
-              <a:spcBef>
-                <a:spcPct val="0"/>
-              </a:spcBef>
-            </a:pPr>
-            <a:r>
-              <a:rPr lang="pt-PT" sz="3800" dirty="0">
-                <a:solidFill>
-                  <a:schemeClr val="bg1">
-                    <a:lumMod val="50000"/>
-                  </a:schemeClr>
-                </a:solidFill>
-                <a:latin typeface="Humnst777 BT" pitchFamily="34" charset="0"/>
-              </a:rPr>
-              <a:t>Programa</a:t>
-            </a:r>
-          </a:p>
-        </p:txBody>
-      </p:sp>
-      <p:sp>
-        <p:nvSpPr>
-          <p:cNvPr id="2" name="Line 10">
-            <a:extLst>
-              <a:ext uri="{FF2B5EF4-FFF2-40B4-BE49-F238E27FC236}">
-                <a16:creationId xmlns:a16="http://schemas.microsoft.com/office/drawing/2014/main" id="{4CD33B91-A899-201A-4E83-3EF6578869EC}"/>
-              </a:ext>
-            </a:extLst>
-          </p:cNvPr>
-          <p:cNvSpPr>
-            <a:spLocks noChangeShapeType="1"/>
-          </p:cNvSpPr>
-          <p:nvPr/>
-        </p:nvSpPr>
-        <p:spPr bwMode="auto">
-          <a:xfrm flipH="1">
-            <a:off x="2065214" y="1557338"/>
-            <a:ext cx="647700" cy="0"/>
-          </a:xfrm>
-          <a:prstGeom prst="line">
-            <a:avLst/>
-          </a:prstGeom>
-          <a:noFill/>
-          <a:ln w="9525">
-            <a:solidFill>
-              <a:schemeClr val="tx1"/>
-            </a:solidFill>
-            <a:round/>
-            <a:headEnd/>
-            <a:tailEnd/>
-          </a:ln>
-        </p:spPr>
-        <p:txBody>
-          <a:bodyPr/>
-          <a:lstStyle/>
-          <a:p>
-            <a:endParaRPr lang="en-US"/>
-          </a:p>
-        </p:txBody>
-      </p:sp>
-      <p:sp>
-        <p:nvSpPr>
-          <p:cNvPr id="3" name="Line 11">
-            <a:extLst>
-              <a:ext uri="{FF2B5EF4-FFF2-40B4-BE49-F238E27FC236}">
-                <a16:creationId xmlns:a16="http://schemas.microsoft.com/office/drawing/2014/main" id="{8F1E4C9B-F63F-19E5-CB9C-DBC853459CC5}"/>
-              </a:ext>
-            </a:extLst>
-          </p:cNvPr>
-          <p:cNvSpPr>
-            <a:spLocks noChangeShapeType="1"/>
-          </p:cNvSpPr>
-          <p:nvPr/>
-        </p:nvSpPr>
-        <p:spPr bwMode="auto">
-          <a:xfrm>
-            <a:off x="2712914" y="1557338"/>
-            <a:ext cx="372" cy="4500000"/>
-          </a:xfrm>
-          <a:prstGeom prst="line">
-            <a:avLst/>
-          </a:prstGeom>
-          <a:noFill/>
-          <a:ln w="9525">
-            <a:solidFill>
-              <a:schemeClr val="tx1"/>
-            </a:solidFill>
-            <a:round/>
-            <a:headEnd/>
-            <a:tailEnd/>
-          </a:ln>
-        </p:spPr>
-        <p:txBody>
-          <a:bodyPr/>
-          <a:lstStyle/>
-          <a:p>
-            <a:endParaRPr lang="en-US"/>
-          </a:p>
-        </p:txBody>
-      </p:sp>
-      <p:sp>
-        <p:nvSpPr>
-          <p:cNvPr id="7" name="Text Box 39">
-            <a:extLst>
-              <a:ext uri="{FF2B5EF4-FFF2-40B4-BE49-F238E27FC236}">
-                <a16:creationId xmlns:a16="http://schemas.microsoft.com/office/drawing/2014/main" id="{11E63F42-DEAC-47C1-9ADA-B513FA96B97B}"/>
-              </a:ext>
-            </a:extLst>
-          </p:cNvPr>
-          <p:cNvSpPr txBox="1">
-            <a:spLocks noChangeArrowheads="1"/>
-          </p:cNvSpPr>
-          <p:nvPr/>
-        </p:nvSpPr>
-        <p:spPr bwMode="auto">
-          <a:xfrm rot="5400000" flipV="1">
-            <a:off x="9299576" y="946151"/>
-            <a:ext cx="504825" cy="1006475"/>
-          </a:xfrm>
-          <a:prstGeom prst="rect">
-            <a:avLst/>
-          </a:prstGeom>
-          <a:noFill/>
-          <a:ln w="9525">
-            <a:noFill/>
-            <a:miter lim="800000"/>
-            <a:headEnd/>
-            <a:tailEnd/>
-          </a:ln>
-        </p:spPr>
-        <p:txBody>
-          <a:bodyPr>
-            <a:spAutoFit/>
-          </a:bodyPr>
-          <a:lstStyle/>
-          <a:p>
-            <a:r>
-              <a:rPr lang="pt-PT" dirty="0">
-                <a:solidFill>
-                  <a:srgbClr val="CC301F"/>
-                </a:solidFill>
-              </a:rPr>
-              <a:t>«</a:t>
-            </a:r>
-          </a:p>
-        </p:txBody>
-      </p:sp>
-    </p:spTree>
-    <p:extLst>
-      <p:ext uri="{BB962C8B-B14F-4D97-AF65-F5344CB8AC3E}">
-        <p14:creationId xmlns:p14="http://schemas.microsoft.com/office/powerpoint/2010/main" val="1807718054"/>
-      </p:ext>
-    </p:extLst>
-  </p:cSld>
-  <p:clrMapOvr>
-    <a:masterClrMapping/>
-  </p:clrMapOvr>
-</p:sld>
-</file>
-
-<file path=ppt/slides/slide40.xml><?xml version="1.0" encoding="utf-8"?>
+<file path=ppt/slides/slide44.xml><?xml version="1.0" encoding="utf-8"?>
 <p:sld xmlns:a="http://schemas.openxmlformats.org/drawingml/2006/main" xmlns:r="http://schemas.openxmlformats.org/officeDocument/2006/relationships" xmlns:p="http://schemas.openxmlformats.org/presentationml/2006/main">
   <p:cSld>
     <p:spTree>
@@ -42203,7 +45981,7 @@
 </p:sld>
 </file>
 
-<file path=ppt/slides/slide41.xml><?xml version="1.0" encoding="utf-8"?>
+<file path=ppt/slides/slide45.xml><?xml version="1.0" encoding="utf-8"?>
 <p:sld xmlns:a="http://schemas.openxmlformats.org/drawingml/2006/main" xmlns:r="http://schemas.openxmlformats.org/officeDocument/2006/relationships" xmlns:p="http://schemas.openxmlformats.org/presentationml/2006/main">
   <p:cSld>
     <p:spTree>
@@ -42981,7 +46759,7 @@
 </p:sld>
 </file>
 
-<file path=ppt/slides/slide42.xml><?xml version="1.0" encoding="utf-8"?>
+<file path=ppt/slides/slide46.xml><?xml version="1.0" encoding="utf-8"?>
 <p:sld xmlns:a="http://schemas.openxmlformats.org/drawingml/2006/main" xmlns:r="http://schemas.openxmlformats.org/officeDocument/2006/relationships" xmlns:p="http://schemas.openxmlformats.org/presentationml/2006/main">
   <p:cSld>
     <p:spTree>
@@ -43276,7 +47054,7 @@
 </p:sld>
 </file>
 
-<file path=ppt/slides/slide43.xml><?xml version="1.0" encoding="utf-8"?>
+<file path=ppt/slides/slide47.xml><?xml version="1.0" encoding="utf-8"?>
 <p:sld xmlns:a="http://schemas.openxmlformats.org/drawingml/2006/main" xmlns:r="http://schemas.openxmlformats.org/officeDocument/2006/relationships" xmlns:p="http://schemas.openxmlformats.org/presentationml/2006/main">
   <p:cSld>
     <p:spTree>
@@ -43806,7 +47584,7 @@
 </p:sld>
 </file>
 
-<file path=ppt/slides/slide44.xml><?xml version="1.0" encoding="utf-8"?>
+<file path=ppt/slides/slide48.xml><?xml version="1.0" encoding="utf-8"?>
 <p:sld xmlns:a="http://schemas.openxmlformats.org/drawingml/2006/main" xmlns:r="http://schemas.openxmlformats.org/officeDocument/2006/relationships" xmlns:p="http://schemas.openxmlformats.org/presentationml/2006/main">
   <p:cSld>
     <p:spTree>

--- a/docs/DSR-II2026_JL_slides.pptx
+++ b/docs/DSR-II2026_JL_slides.pptx
@@ -189,7 +189,7 @@
   <p:extLst>
     <p:ext uri="{EFAFB233-063F-42B5-8137-9DF3F51BA10A}">
       <p15:sldGuideLst xmlns:p15="http://schemas.microsoft.com/office/powerpoint/2012/main">
-        <p15:guide id="1" orient="horz" pos="1344" userDrawn="1">
+        <p15:guide id="1" orient="horz" pos="3929" userDrawn="1">
           <p15:clr>
             <a:srgbClr val="A4A3A4"/>
           </p15:clr>
@@ -3249,7 +3249,7 @@
           <a:p>
             <a:fld id="{C764DE79-268F-4C1A-8933-263129D2AF90}" type="datetimeFigureOut">
               <a:rPr lang="en-US" dirty="0"/>
-              <a:t>3/12/2026</a:t>
+              <a:t>3/17/2026</a:t>
             </a:fld>
             <a:endParaRPr lang="en-US" dirty="0"/>
           </a:p>
@@ -3526,7 +3526,7 @@
           <a:p>
             <a:fld id="{C764DE79-268F-4C1A-8933-263129D2AF90}" type="datetimeFigureOut">
               <a:rPr lang="en-US" dirty="0"/>
-              <a:t>3/12/2026</a:t>
+              <a:t>3/17/2026</a:t>
             </a:fld>
             <a:endParaRPr lang="en-US" dirty="0"/>
           </a:p>
@@ -3783,7 +3783,7 @@
           <a:p>
             <a:fld id="{C764DE79-268F-4C1A-8933-263129D2AF90}" type="datetimeFigureOut">
               <a:rPr lang="en-US" dirty="0"/>
-              <a:t>3/12/2026</a:t>
+              <a:t>3/17/2026</a:t>
             </a:fld>
             <a:endParaRPr lang="en-US" dirty="0"/>
           </a:p>
@@ -3953,7 +3953,7 @@
           <a:p>
             <a:fld id="{C764DE79-268F-4C1A-8933-263129D2AF90}" type="datetimeFigureOut">
               <a:rPr lang="en-US" dirty="0"/>
-              <a:t>3/12/2026</a:t>
+              <a:t>3/17/2026</a:t>
             </a:fld>
             <a:endParaRPr lang="en-US" dirty="0"/>
           </a:p>
@@ -4133,7 +4133,7 @@
           <a:p>
             <a:fld id="{C764DE79-268F-4C1A-8933-263129D2AF90}" type="datetimeFigureOut">
               <a:rPr lang="en-US" dirty="0"/>
-              <a:t>3/12/2026</a:t>
+              <a:t>3/17/2026</a:t>
             </a:fld>
             <a:endParaRPr lang="en-US" dirty="0"/>
           </a:p>
@@ -4589,7 +4589,7 @@
           <a:p>
             <a:fld id="{C764DE79-268F-4C1A-8933-263129D2AF90}" type="datetimeFigureOut">
               <a:rPr lang="en-US" dirty="0"/>
-              <a:t>3/12/2026</a:t>
+              <a:t>3/17/2026</a:t>
             </a:fld>
             <a:endParaRPr lang="en-US" dirty="0"/>
           </a:p>
@@ -4759,7 +4759,7 @@
           <a:p>
             <a:fld id="{C764DE79-268F-4C1A-8933-263129D2AF90}" type="datetimeFigureOut">
               <a:rPr lang="en-US" dirty="0"/>
-              <a:t>3/12/2026</a:t>
+              <a:t>3/17/2026</a:t>
             </a:fld>
             <a:endParaRPr lang="en-US" dirty="0"/>
           </a:p>
@@ -5005,7 +5005,7 @@
           <a:p>
             <a:fld id="{C764DE79-268F-4C1A-8933-263129D2AF90}" type="datetimeFigureOut">
               <a:rPr lang="en-US" dirty="0"/>
-              <a:t>3/12/2026</a:t>
+              <a:t>3/17/2026</a:t>
             </a:fld>
             <a:endParaRPr lang="en-US" dirty="0"/>
           </a:p>
@@ -5237,7 +5237,7 @@
           <a:p>
             <a:fld id="{C764DE79-268F-4C1A-8933-263129D2AF90}" type="datetimeFigureOut">
               <a:rPr lang="en-US" dirty="0"/>
-              <a:t>3/12/2026</a:t>
+              <a:t>3/17/2026</a:t>
             </a:fld>
             <a:endParaRPr lang="en-US" dirty="0"/>
           </a:p>
@@ -5604,7 +5604,7 @@
           <a:p>
             <a:fld id="{C764DE79-268F-4C1A-8933-263129D2AF90}" type="datetimeFigureOut">
               <a:rPr lang="en-US" dirty="0"/>
-              <a:t>3/12/2026</a:t>
+              <a:t>3/17/2026</a:t>
             </a:fld>
             <a:endParaRPr lang="en-US" dirty="0"/>
           </a:p>
@@ -5722,7 +5722,7 @@
           <a:p>
             <a:fld id="{C764DE79-268F-4C1A-8933-263129D2AF90}" type="datetimeFigureOut">
               <a:rPr lang="en-US" dirty="0"/>
-              <a:t>3/12/2026</a:t>
+              <a:t>3/17/2026</a:t>
             </a:fld>
             <a:endParaRPr lang="en-US" dirty="0"/>
           </a:p>
@@ -7065,7 +7065,7 @@
           <a:p>
             <a:fld id="{C764DE79-268F-4C1A-8933-263129D2AF90}" type="datetimeFigureOut">
               <a:rPr lang="en-US" dirty="0"/>
-              <a:t>3/12/2026</a:t>
+              <a:t>3/17/2026</a:t>
             </a:fld>
             <a:endParaRPr lang="en-US" dirty="0"/>
           </a:p>
@@ -18602,7 +18602,7 @@
                 <a:latin typeface="Courier New" pitchFamily="49" charset="0"/>
                 <a:cs typeface="Courier New" pitchFamily="49" charset="0"/>
               </a:rPr>
-              <a:t>) |&gt; </a:t>
+              <a:t>) </a:t>
             </a:r>
           </a:p>
           <a:p>
@@ -18619,17 +18619,7 @@
                 <a:latin typeface="Courier New" pitchFamily="49" charset="0"/>
                 <a:cs typeface="Courier New" pitchFamily="49" charset="0"/>
               </a:rPr>
-              <a:t>  </a:t>
-            </a:r>
-            <a:r>
-              <a:rPr lang="pt-PT" sz="1200" b="1" dirty="0" err="1">
-                <a:solidFill>
-                  <a:schemeClr val="tx1"/>
-                </a:solidFill>
-                <a:latin typeface="Courier New" pitchFamily="49" charset="0"/>
-                <a:cs typeface="Courier New" pitchFamily="49" charset="0"/>
-              </a:rPr>
-              <a:t>mutate</a:t>
+              <a:t>res_lm2 </a:t>
             </a:r>
             <a:r>
               <a:rPr lang="pt-PT" sz="1200" dirty="0">
@@ -18639,6 +18629,26 @@
                 <a:latin typeface="Courier New" pitchFamily="49" charset="0"/>
                 <a:cs typeface="Courier New" pitchFamily="49" charset="0"/>
               </a:rPr>
+              <a:t>&lt;-</a:t>
+            </a:r>
+            <a:r>
+              <a:rPr lang="pt-PT" sz="1200" b="1" dirty="0">
+                <a:solidFill>
+                  <a:schemeClr val="tx1"/>
+                </a:solidFill>
+                <a:latin typeface="Courier New" pitchFamily="49" charset="0"/>
+                <a:cs typeface="Courier New" pitchFamily="49" charset="0"/>
+              </a:rPr>
+              <a:t> lm</a:t>
+            </a:r>
+            <a:r>
+              <a:rPr lang="pt-PT" sz="1200" dirty="0">
+                <a:solidFill>
+                  <a:schemeClr val="tx1"/>
+                </a:solidFill>
+                <a:latin typeface="Courier New" pitchFamily="49" charset="0"/>
+                <a:cs typeface="Courier New" pitchFamily="49" charset="0"/>
+              </a:rPr>
               <a:t>(</a:t>
             </a:r>
             <a:r>
@@ -18649,7 +18659,7 @@
                 <a:latin typeface="Courier New" pitchFamily="49" charset="0"/>
                 <a:cs typeface="Courier New" pitchFamily="49" charset="0"/>
               </a:rPr>
-              <a:t>x2</a:t>
+              <a:t>y </a:t>
             </a:r>
             <a:r>
               <a:rPr lang="pt-PT" sz="1200" dirty="0">
@@ -18659,17 +18669,17 @@
                 <a:latin typeface="Courier New" pitchFamily="49" charset="0"/>
                 <a:cs typeface="Courier New" pitchFamily="49" charset="0"/>
               </a:rPr>
-              <a:t> = </a:t>
-            </a:r>
-            <a:r>
-              <a:rPr lang="pt-PT" sz="1200" b="1" dirty="0" err="1">
-                <a:solidFill>
-                  <a:schemeClr val="tx1"/>
-                </a:solidFill>
-                <a:latin typeface="Courier New" pitchFamily="49" charset="0"/>
-                <a:cs typeface="Courier New" pitchFamily="49" charset="0"/>
-              </a:rPr>
-              <a:t>factor</a:t>
+              <a:t>~</a:t>
+            </a:r>
+            <a:r>
+              <a:rPr lang="pt-PT" sz="1200" b="1" dirty="0">
+                <a:solidFill>
+                  <a:schemeClr val="tx1"/>
+                </a:solidFill>
+                <a:latin typeface="Courier New" pitchFamily="49" charset="0"/>
+                <a:cs typeface="Courier New" pitchFamily="49" charset="0"/>
+              </a:rPr>
+              <a:t> x1 </a:t>
             </a:r>
             <a:r>
               <a:rPr lang="pt-PT" sz="1200" dirty="0">
@@ -18679,7 +18689,7 @@
                 <a:latin typeface="Courier New" pitchFamily="49" charset="0"/>
                 <a:cs typeface="Courier New" pitchFamily="49" charset="0"/>
               </a:rPr>
-              <a:t>(</a:t>
+              <a:t>+</a:t>
             </a:r>
             <a:r>
               <a:rPr lang="pt-PT" sz="1200" b="1" dirty="0">
@@ -18689,7 +18699,7 @@
                 <a:latin typeface="Courier New" pitchFamily="49" charset="0"/>
                 <a:cs typeface="Courier New" pitchFamily="49" charset="0"/>
               </a:rPr>
-              <a:t>x2</a:t>
+              <a:t> x2</a:t>
             </a:r>
             <a:r>
               <a:rPr lang="pt-PT" sz="1200" dirty="0">
@@ -18699,7 +18709,47 @@
                 <a:latin typeface="Courier New" pitchFamily="49" charset="0"/>
                 <a:cs typeface="Courier New" pitchFamily="49" charset="0"/>
               </a:rPr>
-              <a:t>))</a:t>
+              <a:t>,</a:t>
+            </a:r>
+            <a:r>
+              <a:rPr lang="pt-PT" sz="1200" b="1" dirty="0">
+                <a:solidFill>
+                  <a:schemeClr val="tx1"/>
+                </a:solidFill>
+                <a:latin typeface="Courier New" pitchFamily="49" charset="0"/>
+                <a:cs typeface="Courier New" pitchFamily="49" charset="0"/>
+              </a:rPr>
+              <a:t> data</a:t>
+            </a:r>
+            <a:r>
+              <a:rPr lang="pt-PT" sz="1200" dirty="0">
+                <a:solidFill>
+                  <a:schemeClr val="tx1"/>
+                </a:solidFill>
+                <a:latin typeface="Courier New" pitchFamily="49" charset="0"/>
+                <a:cs typeface="Courier New" pitchFamily="49" charset="0"/>
+              </a:rPr>
+              <a:t>=</a:t>
+            </a:r>
+            <a:r>
+              <a:rPr lang="pt-PT" sz="1200" b="1" dirty="0">
+                <a:solidFill>
+                  <a:schemeClr val="tx1"/>
+                </a:solidFill>
+                <a:latin typeface="Courier New" pitchFamily="49" charset="0"/>
+                <a:cs typeface="Courier New" pitchFamily="49" charset="0"/>
+              </a:rPr>
+              <a:t>tb_lm2</a:t>
+            </a:r>
+            <a:r>
+              <a:rPr lang="pt-PT" sz="1200" dirty="0">
+                <a:solidFill>
+                  <a:schemeClr val="tx1"/>
+                </a:solidFill>
+                <a:latin typeface="Courier New" pitchFamily="49" charset="0"/>
+                <a:cs typeface="Courier New" pitchFamily="49" charset="0"/>
+              </a:rPr>
+              <a:t>)</a:t>
             </a:r>
           </a:p>
           <a:p>
@@ -18716,7 +18766,7 @@
                 <a:latin typeface="Courier New" pitchFamily="49" charset="0"/>
                 <a:cs typeface="Courier New" pitchFamily="49" charset="0"/>
               </a:rPr>
-              <a:t>res_lm2 </a:t>
+              <a:t>b</a:t>
             </a:r>
             <a:r>
               <a:rPr lang="pt-PT" sz="1200" dirty="0">
@@ -18726,7 +18776,7 @@
                 <a:latin typeface="Courier New" pitchFamily="49" charset="0"/>
                 <a:cs typeface="Courier New" pitchFamily="49" charset="0"/>
               </a:rPr>
-              <a:t>&lt;-</a:t>
+              <a:t> &lt;- </a:t>
             </a:r>
             <a:r>
               <a:rPr lang="pt-PT" sz="1200" b="1" dirty="0">
@@ -18736,7 +18786,7 @@
                 <a:latin typeface="Courier New" pitchFamily="49" charset="0"/>
                 <a:cs typeface="Courier New" pitchFamily="49" charset="0"/>
               </a:rPr>
-              <a:t> lm</a:t>
+              <a:t>res_lm2</a:t>
             </a:r>
             <a:r>
               <a:rPr lang="pt-PT" sz="1200" dirty="0">
@@ -18746,7 +18796,7 @@
                 <a:latin typeface="Courier New" pitchFamily="49" charset="0"/>
                 <a:cs typeface="Courier New" pitchFamily="49" charset="0"/>
               </a:rPr>
-              <a:t>(</a:t>
+              <a:t>$</a:t>
             </a:r>
             <a:r>
               <a:rPr lang="pt-PT" sz="1200" b="1" dirty="0">
@@ -18756,97 +18806,7 @@
                 <a:latin typeface="Courier New" pitchFamily="49" charset="0"/>
                 <a:cs typeface="Courier New" pitchFamily="49" charset="0"/>
               </a:rPr>
-              <a:t>y </a:t>
-            </a:r>
-            <a:r>
-              <a:rPr lang="pt-PT" sz="1200" dirty="0">
-                <a:solidFill>
-                  <a:schemeClr val="tx1"/>
-                </a:solidFill>
-                <a:latin typeface="Courier New" pitchFamily="49" charset="0"/>
-                <a:cs typeface="Courier New" pitchFamily="49" charset="0"/>
-              </a:rPr>
-              <a:t>~</a:t>
-            </a:r>
-            <a:r>
-              <a:rPr lang="pt-PT" sz="1200" b="1" dirty="0">
-                <a:solidFill>
-                  <a:schemeClr val="tx1"/>
-                </a:solidFill>
-                <a:latin typeface="Courier New" pitchFamily="49" charset="0"/>
-                <a:cs typeface="Courier New" pitchFamily="49" charset="0"/>
-              </a:rPr>
-              <a:t> x1 </a:t>
-            </a:r>
-            <a:r>
-              <a:rPr lang="pt-PT" sz="1200" dirty="0">
-                <a:solidFill>
-                  <a:schemeClr val="tx1"/>
-                </a:solidFill>
-                <a:latin typeface="Courier New" pitchFamily="49" charset="0"/>
-                <a:cs typeface="Courier New" pitchFamily="49" charset="0"/>
-              </a:rPr>
-              <a:t>+</a:t>
-            </a:r>
-            <a:r>
-              <a:rPr lang="pt-PT" sz="1200" b="1" dirty="0">
-                <a:solidFill>
-                  <a:schemeClr val="tx1"/>
-                </a:solidFill>
-                <a:latin typeface="Courier New" pitchFamily="49" charset="0"/>
-                <a:cs typeface="Courier New" pitchFamily="49" charset="0"/>
-              </a:rPr>
-              <a:t> x2</a:t>
-            </a:r>
-            <a:r>
-              <a:rPr lang="pt-PT" sz="1200" dirty="0">
-                <a:solidFill>
-                  <a:schemeClr val="tx1"/>
-                </a:solidFill>
-                <a:latin typeface="Courier New" pitchFamily="49" charset="0"/>
-                <a:cs typeface="Courier New" pitchFamily="49" charset="0"/>
-              </a:rPr>
-              <a:t>,</a:t>
-            </a:r>
-            <a:r>
-              <a:rPr lang="pt-PT" sz="1200" b="1" dirty="0">
-                <a:solidFill>
-                  <a:schemeClr val="tx1"/>
-                </a:solidFill>
-                <a:latin typeface="Courier New" pitchFamily="49" charset="0"/>
-                <a:cs typeface="Courier New" pitchFamily="49" charset="0"/>
-              </a:rPr>
-              <a:t> data</a:t>
-            </a:r>
-            <a:r>
-              <a:rPr lang="pt-PT" sz="1200" dirty="0">
-                <a:solidFill>
-                  <a:schemeClr val="tx1"/>
-                </a:solidFill>
-                <a:latin typeface="Courier New" pitchFamily="49" charset="0"/>
-                <a:cs typeface="Courier New" pitchFamily="49" charset="0"/>
-              </a:rPr>
-              <a:t>=</a:t>
-            </a:r>
-            <a:r>
-              <a:rPr lang="pt-PT" sz="1200" b="1" dirty="0">
-                <a:solidFill>
-                  <a:schemeClr val="tx1"/>
-                </a:solidFill>
-                <a:latin typeface="Courier New" pitchFamily="49" charset="0"/>
-                <a:cs typeface="Courier New" pitchFamily="49" charset="0"/>
-              </a:rPr>
-              <a:t>tb_lm2</a:t>
-            </a:r>
-            <a:r>
-              <a:rPr lang="pt-PT" sz="1200" dirty="0">
-                <a:solidFill>
-                  <a:schemeClr val="tx1"/>
-                </a:solidFill>
-                <a:latin typeface="Courier New" pitchFamily="49" charset="0"/>
-                <a:cs typeface="Courier New" pitchFamily="49" charset="0"/>
-              </a:rPr>
-              <a:t>)</a:t>
+              <a:t>coef</a:t>
             </a:r>
           </a:p>
           <a:p>
@@ -18863,7 +18823,7 @@
                 <a:latin typeface="Courier New" pitchFamily="49" charset="0"/>
                 <a:cs typeface="Courier New" pitchFamily="49" charset="0"/>
               </a:rPr>
-              <a:t>b</a:t>
+              <a:t>tb_lm2 </a:t>
             </a:r>
             <a:r>
               <a:rPr lang="pt-PT" sz="1200" dirty="0">
@@ -18873,37 +18833,7 @@
                 <a:latin typeface="Courier New" pitchFamily="49" charset="0"/>
                 <a:cs typeface="Courier New" pitchFamily="49" charset="0"/>
               </a:rPr>
-              <a:t> &lt;- </a:t>
-            </a:r>
-            <a:r>
-              <a:rPr lang="pt-PT" sz="1200" b="1" dirty="0">
-                <a:solidFill>
-                  <a:schemeClr val="tx1"/>
-                </a:solidFill>
-                <a:latin typeface="Courier New" pitchFamily="49" charset="0"/>
-                <a:cs typeface="Courier New" pitchFamily="49" charset="0"/>
-              </a:rPr>
-              <a:t>res_lm2</a:t>
-            </a:r>
-            <a:r>
-              <a:rPr lang="pt-PT" sz="1200" dirty="0">
-                <a:solidFill>
-                  <a:schemeClr val="tx1"/>
-                </a:solidFill>
-                <a:latin typeface="Courier New" pitchFamily="49" charset="0"/>
-                <a:cs typeface="Courier New" pitchFamily="49" charset="0"/>
-              </a:rPr>
-              <a:t>$</a:t>
-            </a:r>
-            <a:r>
-              <a:rPr lang="pt-PT" sz="1200" b="1" dirty="0">
-                <a:solidFill>
-                  <a:schemeClr val="tx1"/>
-                </a:solidFill>
-                <a:latin typeface="Courier New" pitchFamily="49" charset="0"/>
-                <a:cs typeface="Courier New" pitchFamily="49" charset="0"/>
-              </a:rPr>
-              <a:t>coef</a:t>
+              <a:t>|&gt;</a:t>
             </a:r>
           </a:p>
           <a:p>
@@ -18920,7 +18850,17 @@
                 <a:latin typeface="Courier New" pitchFamily="49" charset="0"/>
                 <a:cs typeface="Courier New" pitchFamily="49" charset="0"/>
               </a:rPr>
-              <a:t>tb_lm2 </a:t>
+              <a:t>  </a:t>
+            </a:r>
+            <a:r>
+              <a:rPr lang="pt-PT" sz="1200" b="1" dirty="0" err="1">
+                <a:solidFill>
+                  <a:schemeClr val="tx1"/>
+                </a:solidFill>
+                <a:latin typeface="Courier New" pitchFamily="49" charset="0"/>
+                <a:cs typeface="Courier New" pitchFamily="49" charset="0"/>
+              </a:rPr>
+              <a:t>mutate</a:t>
             </a:r>
             <a:r>
               <a:rPr lang="pt-PT" sz="1200" dirty="0">
@@ -18930,7 +18870,7 @@
                 <a:latin typeface="Courier New" pitchFamily="49" charset="0"/>
                 <a:cs typeface="Courier New" pitchFamily="49" charset="0"/>
               </a:rPr>
-              <a:t>|&gt;</a:t>
+              <a:t>(</a:t>
             </a:r>
           </a:p>
           <a:p>
@@ -18947,7 +18887,17 @@
                 <a:latin typeface="Courier New" pitchFamily="49" charset="0"/>
                 <a:cs typeface="Courier New" pitchFamily="49" charset="0"/>
               </a:rPr>
-              <a:t>  </a:t>
+              <a:t>    x2</a:t>
+            </a:r>
+            <a:r>
+              <a:rPr lang="pt-PT" sz="1200" dirty="0">
+                <a:solidFill>
+                  <a:schemeClr val="tx1"/>
+                </a:solidFill>
+                <a:latin typeface="Courier New" pitchFamily="49" charset="0"/>
+                <a:cs typeface="Courier New" pitchFamily="49" charset="0"/>
+              </a:rPr>
+              <a:t> = </a:t>
             </a:r>
             <a:r>
               <a:rPr lang="pt-PT" sz="1200" b="1" dirty="0" err="1">
@@ -18957,7 +18907,7 @@
                 <a:latin typeface="Courier New" pitchFamily="49" charset="0"/>
                 <a:cs typeface="Courier New" pitchFamily="49" charset="0"/>
               </a:rPr>
-              <a:t>mutate</a:t>
+              <a:t>factor</a:t>
             </a:r>
             <a:r>
               <a:rPr lang="pt-PT" sz="1200" dirty="0">
@@ -18968,6 +18918,26 @@
                 <a:cs typeface="Courier New" pitchFamily="49" charset="0"/>
               </a:rPr>
               <a:t>(</a:t>
+            </a:r>
+            <a:r>
+              <a:rPr lang="pt-PT" sz="1200" b="1" dirty="0">
+                <a:solidFill>
+                  <a:schemeClr val="tx1"/>
+                </a:solidFill>
+                <a:latin typeface="Courier New" pitchFamily="49" charset="0"/>
+                <a:cs typeface="Courier New" pitchFamily="49" charset="0"/>
+              </a:rPr>
+              <a:t>x2</a:t>
+            </a:r>
+            <a:r>
+              <a:rPr lang="pt-PT" sz="1200" dirty="0">
+                <a:solidFill>
+                  <a:schemeClr val="tx1"/>
+                </a:solidFill>
+                <a:latin typeface="Courier New" pitchFamily="49" charset="0"/>
+                <a:cs typeface="Courier New" pitchFamily="49" charset="0"/>
+              </a:rPr>
+              <a:t>), </a:t>
             </a:r>
             <a:r>
               <a:rPr lang="pt-PT" sz="1200" b="1" dirty="0" err="1">
@@ -20078,7 +20048,7 @@
               <a:t>red</a:t>
             </a:r>
             <a:r>
-              <a:rPr lang="pt-PT" sz="1200" b="1" dirty="0">
+              <a:rPr lang="pt-PT" sz="1200" b="1">
                 <a:solidFill>
                   <a:srgbClr val="00B050"/>
                 </a:solidFill>
@@ -20088,7 +20058,7 @@
               <a:t>"</a:t>
             </a:r>
             <a:r>
-              <a:rPr lang="pt-PT" sz="1200" dirty="0">
+              <a:rPr lang="pt-PT" sz="1200">
                 <a:solidFill>
                   <a:schemeClr val="tx1"/>
                 </a:solidFill>
@@ -20096,16 +20066,6 @@
                 <a:cs typeface="Courier New" pitchFamily="49" charset="0"/>
               </a:rPr>
               <a:t>)</a:t>
-            </a:r>
-            <a:r>
-              <a:rPr lang="pt-PT" sz="1200" b="1" dirty="0">
-                <a:solidFill>
-                  <a:schemeClr val="tx1"/>
-                </a:solidFill>
-                <a:latin typeface="Courier New" pitchFamily="49" charset="0"/>
-                <a:cs typeface="Courier New" pitchFamily="49" charset="0"/>
-              </a:rPr>
-              <a:t>  </a:t>
             </a:r>
             <a:endParaRPr lang="pt-PT" sz="1200" dirty="0">
               <a:solidFill>
@@ -22982,10 +22942,10 @@
       </p:grpSpPr>
       <p:pic>
         <p:nvPicPr>
-          <p:cNvPr id="13" name="Picture 12">
+          <p:cNvPr id="3" name="Picture 2">
             <a:extLst>
               <a:ext uri="{FF2B5EF4-FFF2-40B4-BE49-F238E27FC236}">
-                <a16:creationId xmlns:a16="http://schemas.microsoft.com/office/drawing/2014/main" id="{36825C06-9EB8-87AB-7058-26DD7742714D}"/>
+                <a16:creationId xmlns:a16="http://schemas.microsoft.com/office/drawing/2014/main" id="{F44D4D51-0623-C1C3-C092-6851F07A8F06}"/>
               </a:ext>
             </a:extLst>
           </p:cNvPr>
@@ -23008,7 +22968,7 @@
         </p:blipFill>
         <p:spPr>
           <a:xfrm>
-            <a:off x="3025637" y="2141306"/>
+            <a:off x="3025637" y="2122903"/>
             <a:ext cx="6186309" cy="4064926"/>
           </a:xfrm>
           <a:prstGeom prst="rect">
@@ -36928,8 +36888,8 @@
           </a:prstGeom>
         </p:spPr>
       </p:pic>
-      <mc:AlternateContent xmlns:mc="http://schemas.openxmlformats.org/markup-compatibility/2006">
-        <mc:Choice xmlns:a14="http://schemas.microsoft.com/office/drawing/2010/main" Requires="a14">
+      <mc:AlternateContent xmlns:mc="http://schemas.openxmlformats.org/markup-compatibility/2006" xmlns:a14="http://schemas.microsoft.com/office/drawing/2010/main">
+        <mc:Choice Requires="a14">
           <p:sp>
             <p:nvSpPr>
               <p:cNvPr id="5" name="Text Box 13">
@@ -37440,7 +37400,7 @@
             </p:txBody>
           </p:sp>
         </mc:Choice>
-        <mc:Fallback>
+        <mc:Fallback xmlns="">
           <p:sp>
             <p:nvSpPr>
               <p:cNvPr id="5" name="Text Box 13">
@@ -37777,8 +37737,44 @@
           <a:chExt cx="0" cy="0"/>
         </a:xfrm>
       </p:grpSpPr>
-      <mc:AlternateContent xmlns:mc="http://schemas.openxmlformats.org/markup-compatibility/2006">
-        <mc:Choice xmlns:a14="http://schemas.microsoft.com/office/drawing/2010/main" Requires="a14">
+      <p:pic>
+        <p:nvPicPr>
+          <p:cNvPr id="4" name="Picture 3">
+            <a:extLst>
+              <a:ext uri="{FF2B5EF4-FFF2-40B4-BE49-F238E27FC236}">
+                <a16:creationId xmlns:a16="http://schemas.microsoft.com/office/drawing/2014/main" id="{EFB20E2D-1E1F-CFDE-D356-A0A3B25C1DD0}"/>
+              </a:ext>
+            </a:extLst>
+          </p:cNvPr>
+          <p:cNvPicPr>
+            <a:picLocks noChangeAspect="1"/>
+          </p:cNvPicPr>
+          <p:nvPr/>
+        </p:nvPicPr>
+        <p:blipFill>
+          <a:blip r:embed="rId3">
+            <a:extLst>
+              <a:ext uri="{28A0092B-C50C-407E-A947-70E740481C1C}">
+                <a14:useLocalDpi xmlns:a14="http://schemas.microsoft.com/office/drawing/2010/main" val="0"/>
+              </a:ext>
+            </a:extLst>
+          </a:blip>
+          <a:stretch>
+            <a:fillRect/>
+          </a:stretch>
+        </p:blipFill>
+        <p:spPr>
+          <a:xfrm>
+            <a:off x="6045088" y="3635735"/>
+            <a:ext cx="3959238" cy="2601553"/>
+          </a:xfrm>
+          <a:prstGeom prst="rect">
+            <a:avLst/>
+          </a:prstGeom>
+        </p:spPr>
+      </p:pic>
+      <mc:AlternateContent xmlns:mc="http://schemas.openxmlformats.org/markup-compatibility/2006" xmlns:a14="http://schemas.microsoft.com/office/drawing/2010/main">
+        <mc:Choice Requires="a14">
           <p:sp>
             <p:nvSpPr>
               <p:cNvPr id="5" name="Text Box 13">
@@ -38210,7 +38206,7 @@
             </p:txBody>
           </p:sp>
         </mc:Choice>
-        <mc:Fallback>
+        <mc:Fallback xmlns="">
           <p:sp>
             <p:nvSpPr>
               <p:cNvPr id="5" name="Text Box 13">
@@ -38234,7 +38230,7 @@
                 <a:avLst/>
               </a:prstGeom>
               <a:blipFill>
-                <a:blip r:embed="rId3"/>
+                <a:blip r:embed="rId4"/>
                 <a:stretch>
                   <a:fillRect l="-769" b="-1788"/>
                 </a:stretch>
@@ -38261,42 +38257,6 @@
           </p:sp>
         </mc:Fallback>
       </mc:AlternateContent>
-      <p:pic>
-        <p:nvPicPr>
-          <p:cNvPr id="6" name="Picture 5">
-            <a:extLst>
-              <a:ext uri="{FF2B5EF4-FFF2-40B4-BE49-F238E27FC236}">
-                <a16:creationId xmlns:a16="http://schemas.microsoft.com/office/drawing/2014/main" id="{FB3AE1A7-6723-5381-1882-0131FBE6F594}"/>
-              </a:ext>
-            </a:extLst>
-          </p:cNvPr>
-          <p:cNvPicPr>
-            <a:picLocks noChangeAspect="1"/>
-          </p:cNvPicPr>
-          <p:nvPr/>
-        </p:nvPicPr>
-        <p:blipFill>
-          <a:blip r:embed="rId4">
-            <a:extLst>
-              <a:ext uri="{28A0092B-C50C-407E-A947-70E740481C1C}">
-                <a14:useLocalDpi xmlns:a14="http://schemas.microsoft.com/office/drawing/2010/main" val="0"/>
-              </a:ext>
-            </a:extLst>
-          </a:blip>
-          <a:stretch>
-            <a:fillRect/>
-          </a:stretch>
-        </p:blipFill>
-        <p:spPr>
-          <a:xfrm>
-            <a:off x="6006896" y="3612708"/>
-            <a:ext cx="3977536" cy="2613576"/>
-          </a:xfrm>
-          <a:prstGeom prst="rect">
-            <a:avLst/>
-          </a:prstGeom>
-        </p:spPr>
-      </p:pic>
       <p:sp>
         <p:nvSpPr>
           <p:cNvPr id="17413" name="Text Box 39">
@@ -39135,8 +39095,8 @@
           <a:chExt cx="0" cy="0"/>
         </a:xfrm>
       </p:grpSpPr>
-      <mc:AlternateContent xmlns:mc="http://schemas.openxmlformats.org/markup-compatibility/2006">
-        <mc:Choice xmlns:a14="http://schemas.microsoft.com/office/drawing/2010/main" Requires="a14">
+      <mc:AlternateContent xmlns:mc="http://schemas.openxmlformats.org/markup-compatibility/2006" xmlns:a14="http://schemas.microsoft.com/office/drawing/2010/main">
+        <mc:Choice Requires="a14">
           <p:sp>
             <p:nvSpPr>
               <p:cNvPr id="2" name="Text Box 13">
@@ -39568,7 +39528,7 @@
             </p:txBody>
           </p:sp>
         </mc:Choice>
-        <mc:Fallback>
+        <mc:Fallback xmlns="">
           <p:sp>
             <p:nvSpPr>
               <p:cNvPr id="2" name="Text Box 13">

--- a/docs/DSR-II2026_JL_slides.pptx
+++ b/docs/DSR-II2026_JL_slides.pptx
@@ -3249,7 +3249,7 @@
           <a:p>
             <a:fld id="{C764DE79-268F-4C1A-8933-263129D2AF90}" type="datetimeFigureOut">
               <a:rPr lang="en-US" dirty="0"/>
-              <a:t>3/17/2026</a:t>
+              <a:t>3/18/2026</a:t>
             </a:fld>
             <a:endParaRPr lang="en-US" dirty="0"/>
           </a:p>
@@ -3526,7 +3526,7 @@
           <a:p>
             <a:fld id="{C764DE79-268F-4C1A-8933-263129D2AF90}" type="datetimeFigureOut">
               <a:rPr lang="en-US" dirty="0"/>
-              <a:t>3/17/2026</a:t>
+              <a:t>3/18/2026</a:t>
             </a:fld>
             <a:endParaRPr lang="en-US" dirty="0"/>
           </a:p>
@@ -3783,7 +3783,7 @@
           <a:p>
             <a:fld id="{C764DE79-268F-4C1A-8933-263129D2AF90}" type="datetimeFigureOut">
               <a:rPr lang="en-US" dirty="0"/>
-              <a:t>3/17/2026</a:t>
+              <a:t>3/18/2026</a:t>
             </a:fld>
             <a:endParaRPr lang="en-US" dirty="0"/>
           </a:p>
@@ -3953,7 +3953,7 @@
           <a:p>
             <a:fld id="{C764DE79-268F-4C1A-8933-263129D2AF90}" type="datetimeFigureOut">
               <a:rPr lang="en-US" dirty="0"/>
-              <a:t>3/17/2026</a:t>
+              <a:t>3/18/2026</a:t>
             </a:fld>
             <a:endParaRPr lang="en-US" dirty="0"/>
           </a:p>
@@ -4133,7 +4133,7 @@
           <a:p>
             <a:fld id="{C764DE79-268F-4C1A-8933-263129D2AF90}" type="datetimeFigureOut">
               <a:rPr lang="en-US" dirty="0"/>
-              <a:t>3/17/2026</a:t>
+              <a:t>3/18/2026</a:t>
             </a:fld>
             <a:endParaRPr lang="en-US" dirty="0"/>
           </a:p>
@@ -4589,7 +4589,7 @@
           <a:p>
             <a:fld id="{C764DE79-268F-4C1A-8933-263129D2AF90}" type="datetimeFigureOut">
               <a:rPr lang="en-US" dirty="0"/>
-              <a:t>3/17/2026</a:t>
+              <a:t>3/18/2026</a:t>
             </a:fld>
             <a:endParaRPr lang="en-US" dirty="0"/>
           </a:p>
@@ -4759,7 +4759,7 @@
           <a:p>
             <a:fld id="{C764DE79-268F-4C1A-8933-263129D2AF90}" type="datetimeFigureOut">
               <a:rPr lang="en-US" dirty="0"/>
-              <a:t>3/17/2026</a:t>
+              <a:t>3/18/2026</a:t>
             </a:fld>
             <a:endParaRPr lang="en-US" dirty="0"/>
           </a:p>
@@ -5005,7 +5005,7 @@
           <a:p>
             <a:fld id="{C764DE79-268F-4C1A-8933-263129D2AF90}" type="datetimeFigureOut">
               <a:rPr lang="en-US" dirty="0"/>
-              <a:t>3/17/2026</a:t>
+              <a:t>3/18/2026</a:t>
             </a:fld>
             <a:endParaRPr lang="en-US" dirty="0"/>
           </a:p>
@@ -5237,7 +5237,7 @@
           <a:p>
             <a:fld id="{C764DE79-268F-4C1A-8933-263129D2AF90}" type="datetimeFigureOut">
               <a:rPr lang="en-US" dirty="0"/>
-              <a:t>3/17/2026</a:t>
+              <a:t>3/18/2026</a:t>
             </a:fld>
             <a:endParaRPr lang="en-US" dirty="0"/>
           </a:p>
@@ -5604,7 +5604,7 @@
           <a:p>
             <a:fld id="{C764DE79-268F-4C1A-8933-263129D2AF90}" type="datetimeFigureOut">
               <a:rPr lang="en-US" dirty="0"/>
-              <a:t>3/17/2026</a:t>
+              <a:t>3/18/2026</a:t>
             </a:fld>
             <a:endParaRPr lang="en-US" dirty="0"/>
           </a:p>
@@ -5722,7 +5722,7 @@
           <a:p>
             <a:fld id="{C764DE79-268F-4C1A-8933-263129D2AF90}" type="datetimeFigureOut">
               <a:rPr lang="en-US" dirty="0"/>
-              <a:t>3/17/2026</a:t>
+              <a:t>3/18/2026</a:t>
             </a:fld>
             <a:endParaRPr lang="en-US" dirty="0"/>
           </a:p>
@@ -7065,7 +7065,7 @@
           <a:p>
             <a:fld id="{C764DE79-268F-4C1A-8933-263129D2AF90}" type="datetimeFigureOut">
               <a:rPr lang="en-US" dirty="0"/>
-              <a:t>3/17/2026</a:t>
+              <a:t>3/18/2026</a:t>
             </a:fld>
             <a:endParaRPr lang="en-US" dirty="0"/>
           </a:p>
@@ -8770,7 +8770,7 @@
         <p:spPr bwMode="auto">
           <a:xfrm>
             <a:off x="2711625" y="1557339"/>
-            <a:ext cx="4968875" cy="3752309"/>
+            <a:ext cx="4968875" cy="4062651"/>
           </a:xfrm>
           <a:prstGeom prst="rect">
             <a:avLst/>
@@ -8815,7 +8815,28 @@
                 </a:solidFill>
                 <a:latin typeface="Humnst777 BT" pitchFamily="34" charset="0"/>
               </a:rPr>
-              <a:t>Variação</a:t>
+              <a:t>Estatísticas descritivas</a:t>
+            </a:r>
+          </a:p>
+          <a:p>
+            <a:pPr>
+              <a:spcBef>
+                <a:spcPts val="500"/>
+              </a:spcBef>
+              <a:buClr>
+                <a:srgbClr val="CC0000"/>
+              </a:buClr>
+              <a:buFont typeface="Wingdings" pitchFamily="2" charset="2"/>
+              <a:buChar char="§"/>
+            </a:pPr>
+            <a:r>
+              <a:rPr lang="pt-PT" sz="1600" b="1" dirty="0">
+                <a:solidFill>
+                  <a:srgbClr val="003E6C"/>
+                </a:solidFill>
+                <a:latin typeface="Humnst777 BT" pitchFamily="34" charset="0"/>
+              </a:rPr>
+              <a:t> Variação</a:t>
             </a:r>
           </a:p>
           <a:p>
@@ -9173,7 +9194,7 @@
         <p:spPr bwMode="auto">
           <a:xfrm>
             <a:off x="2712914" y="1557338"/>
-            <a:ext cx="372" cy="3780000"/>
+            <a:ext cx="372" cy="3960000"/>
           </a:xfrm>
           <a:prstGeom prst="line">
             <a:avLst/>
@@ -9213,7 +9234,7 @@
         <p:spPr bwMode="auto">
           <a:xfrm>
             <a:off x="7248128" y="1557339"/>
-            <a:ext cx="2606414" cy="3765133"/>
+            <a:ext cx="2606414" cy="4075475"/>
           </a:xfrm>
           <a:prstGeom prst="rect">
             <a:avLst/>
@@ -9291,6 +9312,22 @@
                 <a:srgbClr val="CC0000"/>
               </a:buClr>
             </a:pPr>
+            <a:endParaRPr lang="pt-PT" sz="1600" dirty="0">
+              <a:solidFill>
+                <a:srgbClr val="003E6C"/>
+              </a:solidFill>
+              <a:latin typeface="Humnst777 BT" pitchFamily="34" charset="0"/>
+            </a:endParaRPr>
+          </a:p>
+          <a:p>
+            <a:pPr algn="r">
+              <a:spcBef>
+                <a:spcPts val="500"/>
+              </a:spcBef>
+              <a:buClr>
+                <a:srgbClr val="CC0000"/>
+              </a:buClr>
+            </a:pPr>
             <a:r>
               <a:rPr lang="pt-PT" sz="1600" dirty="0">
                 <a:solidFill>
@@ -9365,7 +9402,26 @@
                 </a:solidFill>
                 <a:latin typeface="Humnst777 BT" pitchFamily="34" charset="0"/>
               </a:rPr>
-              <a:t>14:00 - 16:00</a:t>
+              <a:t>14:00 - 15:00</a:t>
+            </a:r>
+          </a:p>
+          <a:p>
+            <a:pPr algn="r">
+              <a:spcBef>
+                <a:spcPts val="500"/>
+              </a:spcBef>
+              <a:buClr>
+                <a:srgbClr val="CC0000"/>
+              </a:buClr>
+            </a:pPr>
+            <a:r>
+              <a:rPr lang="pt-PT" sz="1600" dirty="0">
+                <a:solidFill>
+                  <a:srgbClr val="003E6C"/>
+                </a:solidFill>
+                <a:latin typeface="Humnst777 BT" pitchFamily="34" charset="0"/>
+              </a:rPr>
+              <a:t>15:15 - 16:00</a:t>
             </a:r>
           </a:p>
           <a:p>
@@ -9403,22 +9459,6 @@
           <a:p>
             <a:pPr algn="r">
               <a:spcBef>
-                <a:spcPts val="500"/>
-              </a:spcBef>
-              <a:buClr>
-                <a:srgbClr val="CC0000"/>
-              </a:buClr>
-            </a:pPr>
-            <a:endParaRPr lang="pt-PT" sz="1600" dirty="0">
-              <a:solidFill>
-                <a:srgbClr val="003E6C"/>
-              </a:solidFill>
-              <a:latin typeface="Humnst777 BT" pitchFamily="34" charset="0"/>
-            </a:endParaRPr>
-          </a:p>
-          <a:p>
-            <a:pPr algn="r">
-              <a:spcBef>
                 <a:spcPts val="600"/>
               </a:spcBef>
               <a:buClr>
@@ -9432,7 +9472,7 @@
                 </a:solidFill>
                 <a:latin typeface="Humnst777 BT" pitchFamily="34" charset="0"/>
               </a:rPr>
-              <a:t>16:15 - 17:00</a:t>
+              <a:t>16:00 - 17:00</a:t>
             </a:r>
           </a:p>
         </p:txBody>
@@ -9493,13 +9533,15 @@
               </a:ext>
             </a:extLst>
           </p:cNvPr>
-          <p:cNvCxnSpPr/>
+          <p:cNvCxnSpPr>
+            <a:cxnSpLocks/>
+          </p:cNvCxnSpPr>
           <p:nvPr/>
         </p:nvCxnSpPr>
         <p:spPr bwMode="auto">
           <a:xfrm>
-            <a:off x="3863752" y="1720850"/>
-            <a:ext cx="4608512" cy="0"/>
+            <a:off x="4943872" y="1720850"/>
+            <a:ext cx="3528000" cy="0"/>
           </a:xfrm>
           <a:prstGeom prst="line">
             <a:avLst/>
@@ -9531,7 +9573,7 @@
         </p:nvCxnSpPr>
         <p:spPr bwMode="auto">
           <a:xfrm>
-            <a:off x="4511824" y="2636912"/>
+            <a:off x="4511824" y="2941326"/>
             <a:ext cx="3960440" cy="0"/>
           </a:xfrm>
           <a:prstGeom prst="line">
@@ -9564,7 +9606,7 @@
         </p:nvCxnSpPr>
         <p:spPr bwMode="auto">
           <a:xfrm>
-            <a:off x="4007768" y="3861048"/>
+            <a:off x="4007768" y="4165462"/>
             <a:ext cx="4464496" cy="0"/>
           </a:xfrm>
           <a:prstGeom prst="line">
@@ -9597,7 +9639,7 @@
         </p:nvCxnSpPr>
         <p:spPr bwMode="auto">
           <a:xfrm>
-            <a:off x="4727848" y="5104234"/>
+            <a:off x="4727848" y="5408648"/>
             <a:ext cx="3744416" cy="0"/>
           </a:xfrm>
           <a:prstGeom prst="line">
@@ -44681,7 +44723,7 @@
         <p:spPr bwMode="auto">
           <a:xfrm>
             <a:off x="2711625" y="1557339"/>
-            <a:ext cx="4968875" cy="4683333"/>
+            <a:ext cx="4968875" cy="4372992"/>
           </a:xfrm>
           <a:prstGeom prst="rect">
             <a:avLst/>
@@ -44790,27 +44832,6 @@
                 <a:latin typeface="Humnst777 BT" pitchFamily="34" charset="0"/>
               </a:rPr>
               <a:t> Transformações genéricas (c/ exercícios)</a:t>
-            </a:r>
-          </a:p>
-          <a:p>
-            <a:pPr lvl="1">
-              <a:spcBef>
-                <a:spcPts val="500"/>
-              </a:spcBef>
-              <a:buClr>
-                <a:srgbClr val="CC0000"/>
-              </a:buClr>
-              <a:buFont typeface="Wingdings" pitchFamily="2" charset="2"/>
-              <a:buChar char="§"/>
-            </a:pPr>
-            <a:r>
-              <a:rPr lang="pt-PT" sz="1600" dirty="0">
-                <a:solidFill>
-                  <a:srgbClr val="003E6C"/>
-                </a:solidFill>
-                <a:latin typeface="Humnst777 BT" pitchFamily="34" charset="0"/>
-              </a:rPr>
-              <a:t> Estatísticas descritivas (c/ exercícios)</a:t>
             </a:r>
           </a:p>
           <a:p>
@@ -45154,9 +45175,9 @@
           <p:nvPr/>
         </p:nvSpPr>
         <p:spPr bwMode="auto">
-          <a:xfrm>
-            <a:off x="2712914" y="1557338"/>
-            <a:ext cx="372" cy="4500000"/>
+          <a:xfrm flipH="1">
+            <a:off x="2711624" y="1557339"/>
+            <a:ext cx="1289" cy="4320000"/>
           </a:xfrm>
           <a:prstGeom prst="line">
             <a:avLst/>
@@ -45196,7 +45217,7 @@
         <p:spPr bwMode="auto">
           <a:xfrm>
             <a:off x="7248128" y="1557339"/>
-            <a:ext cx="2606414" cy="4683333"/>
+            <a:ext cx="2606414" cy="4372992"/>
           </a:xfrm>
           <a:prstGeom prst="rect">
             <a:avLst/>
@@ -45251,22 +45272,6 @@
               </a:rPr>
               <a:t>11:15 - 12:30</a:t>
             </a:r>
-          </a:p>
-          <a:p>
-            <a:pPr algn="r">
-              <a:spcBef>
-                <a:spcPts val="500"/>
-              </a:spcBef>
-              <a:buClr>
-                <a:srgbClr val="CC0000"/>
-              </a:buClr>
-            </a:pPr>
-            <a:endParaRPr lang="pt-PT" sz="1600" dirty="0">
-              <a:solidFill>
-                <a:srgbClr val="003E6C"/>
-              </a:solidFill>
-              <a:latin typeface="Humnst777 BT" pitchFamily="34" charset="0"/>
-            </a:endParaRPr>
           </a:p>
           <a:p>
             <a:pPr algn="r">
@@ -45564,7 +45569,7 @@
         </p:nvCxnSpPr>
         <p:spPr bwMode="auto">
           <a:xfrm>
-            <a:off x="3719736" y="3265934"/>
+            <a:off x="3719736" y="2953518"/>
             <a:ext cx="4752528" cy="0"/>
           </a:xfrm>
           <a:prstGeom prst="line">
@@ -45597,7 +45602,7 @@
         </p:nvCxnSpPr>
         <p:spPr bwMode="auto">
           <a:xfrm>
-            <a:off x="4439816" y="4797152"/>
+            <a:off x="4439816" y="4484736"/>
             <a:ext cx="4032448" cy="0"/>
           </a:xfrm>
           <a:prstGeom prst="line">
